--- a/artifacts/greenplum-theory.pptx
+++ b/artifacts/greenplum-theory.pptx
@@ -2,43 +2,44 @@
 <file path=ppt/presentation.xml><?xml version="1.0" encoding="utf-8"?>
 <p:presentation xmlns:p="http://schemas.openxmlformats.org/presentationml/2006/main">
   <p:sldMasterIdLst>
-    <p:sldMasterId xmlns:r="http://schemas.openxmlformats.org/officeDocument/2006/relationships" id="2147483648" r:id="Rbbc35ee48d8c471a"/>
+    <p:sldMasterId xmlns:r="http://schemas.openxmlformats.org/officeDocument/2006/relationships" id="2147483648" r:id="R894706097da14464"/>
   </p:sldMasterIdLst>
   <p:notesMasterIdLst>
-    <p:notesMasterId xmlns:r="http://schemas.openxmlformats.org/officeDocument/2006/relationships" r:id="Rd6b5f905e11e48ac"/>
+    <p:notesMasterId xmlns:r="http://schemas.openxmlformats.org/officeDocument/2006/relationships" r:id="R86e794d731bc4a68"/>
   </p:notesMasterIdLst>
   <p:sldIdLst>
-    <p:sldId xmlns:r="http://schemas.openxmlformats.org/officeDocument/2006/relationships" id="256" r:id="R02669bdfbaba462c"/>
-    <p:sldId xmlns:r="http://schemas.openxmlformats.org/officeDocument/2006/relationships" id="257" r:id="R7442140e82cd44d0"/>
-    <p:sldId xmlns:r="http://schemas.openxmlformats.org/officeDocument/2006/relationships" id="258" r:id="R801628e4b2f043da"/>
-    <p:sldId xmlns:r="http://schemas.openxmlformats.org/officeDocument/2006/relationships" id="259" r:id="Rd256bb0dad2445ed"/>
-    <p:sldId xmlns:r="http://schemas.openxmlformats.org/officeDocument/2006/relationships" id="260" r:id="Rf045eb2b39fd4c63"/>
-    <p:sldId xmlns:r="http://schemas.openxmlformats.org/officeDocument/2006/relationships" id="261" r:id="R7b97aa1409004519"/>
-    <p:sldId xmlns:r="http://schemas.openxmlformats.org/officeDocument/2006/relationships" id="262" r:id="Ra21f116435ae4d05"/>
-    <p:sldId xmlns:r="http://schemas.openxmlformats.org/officeDocument/2006/relationships" id="263" r:id="R9be8c346b44a4d1d"/>
-    <p:sldId xmlns:r="http://schemas.openxmlformats.org/officeDocument/2006/relationships" id="264" r:id="Rdc33aae42d8d40e3"/>
-    <p:sldId xmlns:r="http://schemas.openxmlformats.org/officeDocument/2006/relationships" id="265" r:id="R928437adf52c49d1"/>
-    <p:sldId xmlns:r="http://schemas.openxmlformats.org/officeDocument/2006/relationships" id="266" r:id="R30a14b06caef4053"/>
-    <p:sldId xmlns:r="http://schemas.openxmlformats.org/officeDocument/2006/relationships" id="267" r:id="R9e11dc7aad9b4fe2"/>
-    <p:sldId xmlns:r="http://schemas.openxmlformats.org/officeDocument/2006/relationships" id="268" r:id="R94588c6682ad4b46"/>
-    <p:sldId xmlns:r="http://schemas.openxmlformats.org/officeDocument/2006/relationships" id="269" r:id="Rf9259d34b6fe4fc0"/>
-    <p:sldId xmlns:r="http://schemas.openxmlformats.org/officeDocument/2006/relationships" id="270" r:id="R084da90c99474ee4"/>
-    <p:sldId xmlns:r="http://schemas.openxmlformats.org/officeDocument/2006/relationships" id="271" r:id="Radc50f8781d84ba9"/>
-    <p:sldId xmlns:r="http://schemas.openxmlformats.org/officeDocument/2006/relationships" id="272" r:id="R3d3209545d474246"/>
-    <p:sldId xmlns:r="http://schemas.openxmlformats.org/officeDocument/2006/relationships" id="273" r:id="R68c8840e1f384b3e"/>
-    <p:sldId xmlns:r="http://schemas.openxmlformats.org/officeDocument/2006/relationships" id="274" r:id="Rff5a7f4c89a546fb"/>
-    <p:sldId xmlns:r="http://schemas.openxmlformats.org/officeDocument/2006/relationships" id="275" r:id="R753bc64eb5b54e6a"/>
-    <p:sldId xmlns:r="http://schemas.openxmlformats.org/officeDocument/2006/relationships" id="276" r:id="R76f7106aae21420f"/>
-    <p:sldId xmlns:r="http://schemas.openxmlformats.org/officeDocument/2006/relationships" id="277" r:id="R2e39696a0f66468a"/>
-    <p:sldId xmlns:r="http://schemas.openxmlformats.org/officeDocument/2006/relationships" id="278" r:id="Rf1b633c537d2441e"/>
-    <p:sldId xmlns:r="http://schemas.openxmlformats.org/officeDocument/2006/relationships" id="279" r:id="Rfc5502aeb4ab4d72"/>
-    <p:sldId xmlns:r="http://schemas.openxmlformats.org/officeDocument/2006/relationships" id="280" r:id="Re8435dc10759493e"/>
-    <p:sldId xmlns:r="http://schemas.openxmlformats.org/officeDocument/2006/relationships" id="281" r:id="R550ec101c7a0402e"/>
-    <p:sldId xmlns:r="http://schemas.openxmlformats.org/officeDocument/2006/relationships" id="282" r:id="R26b5ea73a64a4d04"/>
-    <p:sldId xmlns:r="http://schemas.openxmlformats.org/officeDocument/2006/relationships" id="283" r:id="R461ad1ca24b24f59"/>
-    <p:sldId xmlns:r="http://schemas.openxmlformats.org/officeDocument/2006/relationships" id="284" r:id="R0434244b03a04a0d"/>
-    <p:sldId xmlns:r="http://schemas.openxmlformats.org/officeDocument/2006/relationships" id="285" r:id="Rc0d0d1e180ec4e1a"/>
-    <p:sldId xmlns:r="http://schemas.openxmlformats.org/officeDocument/2006/relationships" id="286" r:id="R8404945eab9f470c"/>
+    <p:sldId xmlns:r="http://schemas.openxmlformats.org/officeDocument/2006/relationships" id="256" r:id="R3fccad1eee8f4d1d"/>
+    <p:sldId xmlns:r="http://schemas.openxmlformats.org/officeDocument/2006/relationships" id="257" r:id="R1a6dfdbab680415f"/>
+    <p:sldId xmlns:r="http://schemas.openxmlformats.org/officeDocument/2006/relationships" id="258" r:id="R95761cfa19fb4a12"/>
+    <p:sldId xmlns:r="http://schemas.openxmlformats.org/officeDocument/2006/relationships" id="259" r:id="Ra59f6b39d3c0469c"/>
+    <p:sldId xmlns:r="http://schemas.openxmlformats.org/officeDocument/2006/relationships" id="260" r:id="Rcecdf44ed1104dd2"/>
+    <p:sldId xmlns:r="http://schemas.openxmlformats.org/officeDocument/2006/relationships" id="261" r:id="Re4ac91fd5a404e51"/>
+    <p:sldId xmlns:r="http://schemas.openxmlformats.org/officeDocument/2006/relationships" id="262" r:id="R85bc0d1369ec48e9"/>
+    <p:sldId xmlns:r="http://schemas.openxmlformats.org/officeDocument/2006/relationships" id="263" r:id="Rda973fc5647b4a7e"/>
+    <p:sldId xmlns:r="http://schemas.openxmlformats.org/officeDocument/2006/relationships" id="264" r:id="R17d32037b8ca4911"/>
+    <p:sldId xmlns:r="http://schemas.openxmlformats.org/officeDocument/2006/relationships" id="265" r:id="R343376bacf584972"/>
+    <p:sldId xmlns:r="http://schemas.openxmlformats.org/officeDocument/2006/relationships" id="266" r:id="Ra7f7935cbdca4234"/>
+    <p:sldId xmlns:r="http://schemas.openxmlformats.org/officeDocument/2006/relationships" id="267" r:id="Rc3c1cdf582844641"/>
+    <p:sldId xmlns:r="http://schemas.openxmlformats.org/officeDocument/2006/relationships" id="268" r:id="Rfd00735aac6b48a1"/>
+    <p:sldId xmlns:r="http://schemas.openxmlformats.org/officeDocument/2006/relationships" id="269" r:id="R35df784347c148cb"/>
+    <p:sldId xmlns:r="http://schemas.openxmlformats.org/officeDocument/2006/relationships" id="270" r:id="R6ddfa7d2efb34ad5"/>
+    <p:sldId xmlns:r="http://schemas.openxmlformats.org/officeDocument/2006/relationships" id="271" r:id="Rb2d045586e4d4c1a"/>
+    <p:sldId xmlns:r="http://schemas.openxmlformats.org/officeDocument/2006/relationships" id="272" r:id="R3fb7124c95254693"/>
+    <p:sldId xmlns:r="http://schemas.openxmlformats.org/officeDocument/2006/relationships" id="273" r:id="Rf546b17d1e804d1f"/>
+    <p:sldId xmlns:r="http://schemas.openxmlformats.org/officeDocument/2006/relationships" id="274" r:id="R585f5c5154934af8"/>
+    <p:sldId xmlns:r="http://schemas.openxmlformats.org/officeDocument/2006/relationships" id="275" r:id="Ra71d23796c8c44ed"/>
+    <p:sldId xmlns:r="http://schemas.openxmlformats.org/officeDocument/2006/relationships" id="276" r:id="R402f39e3f1ad44a3"/>
+    <p:sldId xmlns:r="http://schemas.openxmlformats.org/officeDocument/2006/relationships" id="277" r:id="R601ece3850194fcc"/>
+    <p:sldId xmlns:r="http://schemas.openxmlformats.org/officeDocument/2006/relationships" id="278" r:id="R4d9fc1c64ee24450"/>
+    <p:sldId xmlns:r="http://schemas.openxmlformats.org/officeDocument/2006/relationships" id="279" r:id="Ra8b433d0b1964e77"/>
+    <p:sldId xmlns:r="http://schemas.openxmlformats.org/officeDocument/2006/relationships" id="280" r:id="R10447802a26d4b13"/>
+    <p:sldId xmlns:r="http://schemas.openxmlformats.org/officeDocument/2006/relationships" id="281" r:id="R4158b1fdcfb44c80"/>
+    <p:sldId xmlns:r="http://schemas.openxmlformats.org/officeDocument/2006/relationships" id="282" r:id="R44cdee406ac546df"/>
+    <p:sldId xmlns:r="http://schemas.openxmlformats.org/officeDocument/2006/relationships" id="283" r:id="Re6c0a81c416e4a85"/>
+    <p:sldId xmlns:r="http://schemas.openxmlformats.org/officeDocument/2006/relationships" id="284" r:id="R65450c6c024a4ddd"/>
+    <p:sldId xmlns:r="http://schemas.openxmlformats.org/officeDocument/2006/relationships" id="285" r:id="R866c2397e5d54a62"/>
+    <p:sldId xmlns:r="http://schemas.openxmlformats.org/officeDocument/2006/relationships" id="286" r:id="R9626adbae1bf4aae"/>
+    <p:sldId xmlns:r="http://schemas.openxmlformats.org/officeDocument/2006/relationships" id="287" r:id="Rdf1003e0e0ce45fe"/>
   </p:sldIdLst>
   <p:sldSz cx="12192000" cy="6858000"/>
   <p:notesSz cx="6858000" cy="9144000"/>
@@ -2131,6 +2132,72 @@
 </p:notes>
 </file>
 
+<file path=ppt/notesSlides/notesSlide32.xml><?xml version="1.0" encoding="utf-8"?>
+<p:notes xmlns:p="http://schemas.openxmlformats.org/presentationml/2006/main">
+  <p:cSld>
+    <p:spTree>
+      <p:nvGrpSpPr>
+        <p:cNvPr id="1" name=""/>
+        <p:cNvGrpSpPr/>
+        <p:nvPr/>
+      </p:nvGrpSpPr>
+      <p:grpSpPr>
+        <a:xfrm xmlns:a="http://schemas.openxmlformats.org/drawingml/2006/main"/>
+      </p:grpSpPr>
+      <p:sp>
+        <p:nvSpPr>
+          <p:cNvPr id="2" name="Slide Image Placeholder 1"/>
+          <p:cNvSpPr>
+            <a:spLocks xmlns:a="http://schemas.openxmlformats.org/drawingml/2006/main" noGrp="1"/>
+          </p:cNvSpPr>
+          <p:nvPr>
+            <p:ph type="sldImg" idx="0"/>
+          </p:nvPr>
+        </p:nvSpPr>
+        <p:spPr/>
+      </p:sp>
+      <p:sp>
+        <p:nvSpPr>
+          <p:cNvPr id="3" name="Notes Placeholder 2"/>
+          <p:cNvSpPr>
+            <a:spLocks xmlns:a="http://schemas.openxmlformats.org/drawingml/2006/main" noGrp="1"/>
+          </p:cNvSpPr>
+          <p:nvPr>
+            <p:ph type="body" idx="1"/>
+          </p:nvPr>
+        </p:nvSpPr>
+        <p:spPr/>
+        <p:txBody>
+          <a:bodyPr xmlns:a="http://schemas.openxmlformats.org/drawingml/2006/main"/>
+          <a:lstStyle xmlns:a="http://schemas.openxmlformats.org/drawingml/2006/main"/>
+          <a:p xmlns:a="http://schemas.openxmlformats.org/drawingml/2006/main"/>
+        </p:txBody>
+      </p:sp>
+      <p:sp>
+        <p:nvSpPr>
+          <p:cNvPr id="4" name="Slide Number Placeholder 3"/>
+          <p:cNvSpPr>
+            <a:spLocks xmlns:a="http://schemas.openxmlformats.org/drawingml/2006/main" noGrp="1"/>
+          </p:cNvSpPr>
+          <p:nvPr>
+            <p:ph type="sldNum" idx="5"/>
+          </p:nvPr>
+        </p:nvSpPr>
+        <p:spPr/>
+        <p:txBody>
+          <a:bodyPr xmlns:a="http://schemas.openxmlformats.org/drawingml/2006/main"/>
+          <a:lstStyle xmlns:a="http://schemas.openxmlformats.org/drawingml/2006/main"/>
+          <a:p xmlns:a="http://schemas.openxmlformats.org/drawingml/2006/main"/>
+        </p:txBody>
+      </p:sp>
+    </p:spTree>
+  </p:cSld>
+  <p:clrMapOvr>
+    <a:masterClrMapping xmlns:a="http://schemas.openxmlformats.org/drawingml/2006/main"/>
+  </p:clrMapOvr>
+</p:notes>
+</file>
+
 <file path=ppt/notesSlides/notesSlide4.xml><?xml version="1.0" encoding="utf-8"?>
 <p:notes xmlns:p="http://schemas.openxmlformats.org/presentationml/2006/main">
   <p:cSld>
@@ -2565,7 +2632,7 @@
   </p:cSld>
   <p:clrMap bg1="lt1" tx1="dk1" bg2="lt2" tx2="dk2" accent1="accent1" accent2="accent2" accent3="accent3" accent4="accent4" accent5="accent5" accent6="accent6" hlink="hlink" folHlink="folHlink"/>
   <p:sldLayoutIdLst>
-    <p:sldLayoutId xmlns:r="http://schemas.openxmlformats.org/officeDocument/2006/relationships" id="2147483649" r:id="R0ad5df04e59d4d36"/>
+    <p:sldLayoutId xmlns:r="http://schemas.openxmlformats.org/officeDocument/2006/relationships" id="2147483649" r:id="Rf4b4edf0760c4817"/>
   </p:sldLayoutIdLst>
   <p:txStyles>
     <p:titleStyle>
@@ -3063,7 +3130,7 @@
           <p:cNvPr id="1" name="">
             <a:extLst xmlns:a="http://schemas.openxmlformats.org/drawingml/2006/main">
               <a:ext uri="{FF2B5EF4-FFF2-40B4-BE49-F238E27FC236}">
-                <a16:creationId xmlns:a16="http://schemas.microsoft.com/office/drawing/2014/main" id="{4D5342B4-ECCD-4A3A-B73D-B7C7356747E0}"/>
+                <a16:creationId xmlns:a16="http://schemas.microsoft.com/office/drawing/2014/main" id="{B002DCDA-C5E5-48A3-ACB3-3BECF565F74C}"/>
               </a:ext>
             </a:extLst>
           </p:cNvPr>
@@ -3098,7 +3165,7 @@
           <p:cNvPr id="2" name="">
             <a:extLst xmlns:a="http://schemas.openxmlformats.org/drawingml/2006/main">
               <a:ext uri="{FF2B5EF4-FFF2-40B4-BE49-F238E27FC236}">
-                <a16:creationId xmlns:a16="http://schemas.microsoft.com/office/drawing/2014/main" id="{887057E2-ADEA-4329-97A3-AB72B99EB901}"/>
+                <a16:creationId xmlns:a16="http://schemas.microsoft.com/office/drawing/2014/main" id="{44156F37-1B63-4B8C-BB1C-B417CA331FCC}"/>
               </a:ext>
             </a:extLst>
           </p:cNvPr>
@@ -3133,7 +3200,7 @@
           <p:cNvPr id="3" name="">
             <a:extLst xmlns:a="http://schemas.openxmlformats.org/drawingml/2006/main">
               <a:ext uri="{FF2B5EF4-FFF2-40B4-BE49-F238E27FC236}">
-                <a16:creationId xmlns:a16="http://schemas.microsoft.com/office/drawing/2014/main" id="{74FACB71-96D0-4743-BEE0-F1BE2F5C08B0}"/>
+                <a16:creationId xmlns:a16="http://schemas.microsoft.com/office/drawing/2014/main" id="{001A9F4C-2553-417E-8F67-5A427CCC502A}"/>
               </a:ext>
             </a:extLst>
           </p:cNvPr>
@@ -3168,7 +3235,7 @@
           <p:cNvPr id="4" name="">
             <a:extLst xmlns:a="http://schemas.openxmlformats.org/drawingml/2006/main">
               <a:ext uri="{FF2B5EF4-FFF2-40B4-BE49-F238E27FC236}">
-                <a16:creationId xmlns:a16="http://schemas.microsoft.com/office/drawing/2014/main" id="{74E37435-964C-41C1-95F3-75784C671344}"/>
+                <a16:creationId xmlns:a16="http://schemas.microsoft.com/office/drawing/2014/main" id="{B2DFD621-B9CE-4C48-BBA5-16A880B5F9CB}"/>
               </a:ext>
             </a:extLst>
           </p:cNvPr>
@@ -3232,7 +3299,7 @@
           <p:cNvPr id="5" name="">
             <a:extLst xmlns:a="http://schemas.openxmlformats.org/drawingml/2006/main">
               <a:ext uri="{FF2B5EF4-FFF2-40B4-BE49-F238E27FC236}">
-                <a16:creationId xmlns:a16="http://schemas.microsoft.com/office/drawing/2014/main" id="{DC2ADC86-7B79-4F1F-AA70-A762B90651FA}"/>
+                <a16:creationId xmlns:a16="http://schemas.microsoft.com/office/drawing/2014/main" id="{E97454B5-CE37-4D14-8700-5BCC78BCA4E5}"/>
               </a:ext>
             </a:extLst>
           </p:cNvPr>
@@ -3296,7 +3363,7 @@
           <p:cNvPr id="6" name="">
             <a:extLst xmlns:a="http://schemas.openxmlformats.org/drawingml/2006/main">
               <a:ext uri="{FF2B5EF4-FFF2-40B4-BE49-F238E27FC236}">
-                <a16:creationId xmlns:a16="http://schemas.microsoft.com/office/drawing/2014/main" id="{CADCC3C0-C429-4CC3-8ADD-83F780D6B6AB}"/>
+                <a16:creationId xmlns:a16="http://schemas.microsoft.com/office/drawing/2014/main" id="{89927258-8F42-4F6E-91B7-E907DFCCB8B6}"/>
               </a:ext>
             </a:extLst>
           </p:cNvPr>
@@ -3360,7 +3427,7 @@
           <p:cNvPr id="7" name="">
             <a:extLst xmlns:a="http://schemas.openxmlformats.org/drawingml/2006/main">
               <a:ext uri="{FF2B5EF4-FFF2-40B4-BE49-F238E27FC236}">
-                <a16:creationId xmlns:a16="http://schemas.microsoft.com/office/drawing/2014/main" id="{709F6C7F-34E9-46E8-82F2-71080B89621B}"/>
+                <a16:creationId xmlns:a16="http://schemas.microsoft.com/office/drawing/2014/main" id="{C89CDA36-B51E-4804-9250-5844C5633CC7}"/>
               </a:ext>
             </a:extLst>
           </p:cNvPr>
@@ -3424,7 +3491,7 @@
           <p:cNvPr id="8" name="">
             <a:extLst xmlns:a="http://schemas.openxmlformats.org/drawingml/2006/main">
               <a:ext uri="{FF2B5EF4-FFF2-40B4-BE49-F238E27FC236}">
-                <a16:creationId xmlns:a16="http://schemas.microsoft.com/office/drawing/2014/main" id="{4465DD6D-C353-4DBC-AF34-6CE75C8A9F33}"/>
+                <a16:creationId xmlns:a16="http://schemas.microsoft.com/office/drawing/2014/main" id="{0B1BAC2B-570F-44B7-9902-908FE2AC90BD}"/>
               </a:ext>
             </a:extLst>
           </p:cNvPr>
@@ -3457,7 +3524,7 @@
           <p:cNvPr id="9" name="">
             <a:extLst xmlns:a="http://schemas.openxmlformats.org/drawingml/2006/main">
               <a:ext uri="{FF2B5EF4-FFF2-40B4-BE49-F238E27FC236}">
-                <a16:creationId xmlns:a16="http://schemas.microsoft.com/office/drawing/2014/main" id="{1F45ABFD-BACE-4578-BF86-0D46E464D9FB}"/>
+                <a16:creationId xmlns:a16="http://schemas.microsoft.com/office/drawing/2014/main" id="{9D030DA7-1319-45D4-B68C-262551DFD65B}"/>
               </a:ext>
             </a:extLst>
           </p:cNvPr>
@@ -3492,7 +3559,7 @@
           <p:cNvPr id="10" name="">
             <a:extLst xmlns:a="http://schemas.openxmlformats.org/drawingml/2006/main">
               <a:ext uri="{FF2B5EF4-FFF2-40B4-BE49-F238E27FC236}">
-                <a16:creationId xmlns:a16="http://schemas.microsoft.com/office/drawing/2014/main" id="{48635743-E9C0-4AC8-B448-461D06F54BE7}"/>
+                <a16:creationId xmlns:a16="http://schemas.microsoft.com/office/drawing/2014/main" id="{3516C29D-F4F7-42CC-BC12-2456299CE49E}"/>
               </a:ext>
             </a:extLst>
           </p:cNvPr>
@@ -3556,7 +3623,7 @@
           <p:cNvPr id="11" name="">
             <a:extLst xmlns:a="http://schemas.openxmlformats.org/drawingml/2006/main">
               <a:ext uri="{FF2B5EF4-FFF2-40B4-BE49-F238E27FC236}">
-                <a16:creationId xmlns:a16="http://schemas.microsoft.com/office/drawing/2014/main" id="{7BC137B5-B036-4245-8E7A-88F0D8C6FA4A}"/>
+                <a16:creationId xmlns:a16="http://schemas.microsoft.com/office/drawing/2014/main" id="{8B0F3B4D-7932-4183-932E-C2F30D9711E4}"/>
               </a:ext>
             </a:extLst>
           </p:cNvPr>
@@ -3620,7 +3687,7 @@
           <p:cNvPr id="12" name="">
             <a:extLst xmlns:a="http://schemas.openxmlformats.org/drawingml/2006/main">
               <a:ext uri="{FF2B5EF4-FFF2-40B4-BE49-F238E27FC236}">
-                <a16:creationId xmlns:a16="http://schemas.microsoft.com/office/drawing/2014/main" id="{D1D60A58-F4A5-4D6F-8877-BB9D5C37EF0D}"/>
+                <a16:creationId xmlns:a16="http://schemas.microsoft.com/office/drawing/2014/main" id="{FF1E5551-B3FD-4C14-A10C-1A6F9E8D4C5F}"/>
               </a:ext>
             </a:extLst>
           </p:cNvPr>
@@ -3653,7 +3720,7 @@
           <p:cNvPr id="13" name="">
             <a:extLst xmlns:a="http://schemas.openxmlformats.org/drawingml/2006/main">
               <a:ext uri="{FF2B5EF4-FFF2-40B4-BE49-F238E27FC236}">
-                <a16:creationId xmlns:a16="http://schemas.microsoft.com/office/drawing/2014/main" id="{29DA0FB2-972A-42BF-A067-97B2BF4E841C}"/>
+                <a16:creationId xmlns:a16="http://schemas.microsoft.com/office/drawing/2014/main" id="{8B8866F8-BE9C-4AF5-B98D-7FEBBC7CACA1}"/>
               </a:ext>
             </a:extLst>
           </p:cNvPr>
@@ -3688,7 +3755,7 @@
           <p:cNvPr id="14" name="">
             <a:extLst xmlns:a="http://schemas.openxmlformats.org/drawingml/2006/main">
               <a:ext uri="{FF2B5EF4-FFF2-40B4-BE49-F238E27FC236}">
-                <a16:creationId xmlns:a16="http://schemas.microsoft.com/office/drawing/2014/main" id="{86626039-01B4-4EA5-9765-33C4D2B5EEB2}"/>
+                <a16:creationId xmlns:a16="http://schemas.microsoft.com/office/drawing/2014/main" id="{A9E7E983-8FB7-4CE7-B6FC-04B37871D19B}"/>
               </a:ext>
             </a:extLst>
           </p:cNvPr>
@@ -3752,7 +3819,7 @@
           <p:cNvPr id="15" name="">
             <a:extLst xmlns:a="http://schemas.openxmlformats.org/drawingml/2006/main">
               <a:ext uri="{FF2B5EF4-FFF2-40B4-BE49-F238E27FC236}">
-                <a16:creationId xmlns:a16="http://schemas.microsoft.com/office/drawing/2014/main" id="{392D51A8-BEEE-42F6-AF31-8C32FAC5DD17}"/>
+                <a16:creationId xmlns:a16="http://schemas.microsoft.com/office/drawing/2014/main" id="{AA8ECF6C-3AFB-4191-AF89-353ED7829BE0}"/>
               </a:ext>
             </a:extLst>
           </p:cNvPr>
@@ -3816,7 +3883,7 @@
           <p:cNvPr id="16" name="">
             <a:extLst xmlns:a="http://schemas.openxmlformats.org/drawingml/2006/main">
               <a:ext uri="{FF2B5EF4-FFF2-40B4-BE49-F238E27FC236}">
-                <a16:creationId xmlns:a16="http://schemas.microsoft.com/office/drawing/2014/main" id="{4297FE8D-7576-42B4-B5CD-F615C2B3C674}"/>
+                <a16:creationId xmlns:a16="http://schemas.microsoft.com/office/drawing/2014/main" id="{427A683A-98D6-4573-B160-2D208A7808C0}"/>
               </a:ext>
             </a:extLst>
           </p:cNvPr>
@@ -3849,7 +3916,7 @@
           <p:cNvPr id="17" name="">
             <a:extLst xmlns:a="http://schemas.openxmlformats.org/drawingml/2006/main">
               <a:ext uri="{FF2B5EF4-FFF2-40B4-BE49-F238E27FC236}">
-                <a16:creationId xmlns:a16="http://schemas.microsoft.com/office/drawing/2014/main" id="{1522782A-075C-4859-ACA8-F002F9756E64}"/>
+                <a16:creationId xmlns:a16="http://schemas.microsoft.com/office/drawing/2014/main" id="{FEB29CF7-30EE-46AC-8720-9CD18EE1C3AD}"/>
               </a:ext>
             </a:extLst>
           </p:cNvPr>
@@ -3884,7 +3951,7 @@
           <p:cNvPr id="18" name="">
             <a:extLst xmlns:a="http://schemas.openxmlformats.org/drawingml/2006/main">
               <a:ext uri="{FF2B5EF4-FFF2-40B4-BE49-F238E27FC236}">
-                <a16:creationId xmlns:a16="http://schemas.microsoft.com/office/drawing/2014/main" id="{A1D545A5-30F0-4AD6-B2B1-491C688596F2}"/>
+                <a16:creationId xmlns:a16="http://schemas.microsoft.com/office/drawing/2014/main" id="{BDC83FB5-C4B8-47DC-9CB0-33F3E622FC1B}"/>
               </a:ext>
             </a:extLst>
           </p:cNvPr>
@@ -3948,7 +4015,7 @@
           <p:cNvPr id="19" name="">
             <a:extLst xmlns:a="http://schemas.openxmlformats.org/drawingml/2006/main">
               <a:ext uri="{FF2B5EF4-FFF2-40B4-BE49-F238E27FC236}">
-                <a16:creationId xmlns:a16="http://schemas.microsoft.com/office/drawing/2014/main" id="{D5FF6993-F64F-4FEF-8F75-E35C041D7BED}"/>
+                <a16:creationId xmlns:a16="http://schemas.microsoft.com/office/drawing/2014/main" id="{6996BEEA-012A-4CDD-9FD5-DBC0972B0EFC}"/>
               </a:ext>
             </a:extLst>
           </p:cNvPr>
@@ -4010,7 +4077,7 @@
     </p:spTree>
     <p:extLst>
       <p:ext uri="{BB962C8B-B14F-4D97-AF65-F5344CB8AC3E}">
-        <p14:creationId xmlns:p14="http://schemas.microsoft.com/office/powerpoint/2010/main" val="802317534"/>
+        <p14:creationId xmlns:p14="http://schemas.microsoft.com/office/powerpoint/2010/main" val="1402790181"/>
       </p:ext>
     </p:extLst>
   </p:cSld>
@@ -4034,7 +4101,7 @@
           <p:cNvPr id="1" name="">
             <a:extLst xmlns:a="http://schemas.openxmlformats.org/drawingml/2006/main">
               <a:ext uri="{FF2B5EF4-FFF2-40B4-BE49-F238E27FC236}">
-                <a16:creationId xmlns:a16="http://schemas.microsoft.com/office/drawing/2014/main" id="{96FC796B-D6FD-4265-86F0-017679D52081}"/>
+                <a16:creationId xmlns:a16="http://schemas.microsoft.com/office/drawing/2014/main" id="{A0675A54-0774-4C36-8592-AE75D5F1FF29}"/>
               </a:ext>
             </a:extLst>
           </p:cNvPr>
@@ -4069,7 +4136,7 @@
           <p:cNvPr id="2" name="">
             <a:extLst xmlns:a="http://schemas.openxmlformats.org/drawingml/2006/main">
               <a:ext uri="{FF2B5EF4-FFF2-40B4-BE49-F238E27FC236}">
-                <a16:creationId xmlns:a16="http://schemas.microsoft.com/office/drawing/2014/main" id="{99250F05-24C6-4342-AA87-FA21AD26D758}"/>
+                <a16:creationId xmlns:a16="http://schemas.microsoft.com/office/drawing/2014/main" id="{07C713C5-1D7D-4F89-AD41-91BA5788B1C4}"/>
               </a:ext>
             </a:extLst>
           </p:cNvPr>
@@ -4104,7 +4171,7 @@
           <p:cNvPr id="3" name="">
             <a:extLst xmlns:a="http://schemas.openxmlformats.org/drawingml/2006/main">
               <a:ext uri="{FF2B5EF4-FFF2-40B4-BE49-F238E27FC236}">
-                <a16:creationId xmlns:a16="http://schemas.microsoft.com/office/drawing/2014/main" id="{5758E9D5-AD8B-478A-8232-BFA642FFF661}"/>
+                <a16:creationId xmlns:a16="http://schemas.microsoft.com/office/drawing/2014/main" id="{00319588-764C-48BC-AD19-148B4ADB51DF}"/>
               </a:ext>
             </a:extLst>
           </p:cNvPr>
@@ -4139,7 +4206,7 @@
           <p:cNvPr id="4" name="">
             <a:extLst xmlns:a="http://schemas.openxmlformats.org/drawingml/2006/main">
               <a:ext uri="{FF2B5EF4-FFF2-40B4-BE49-F238E27FC236}">
-                <a16:creationId xmlns:a16="http://schemas.microsoft.com/office/drawing/2014/main" id="{CC4C1548-69DA-402F-A146-3375262C54B7}"/>
+                <a16:creationId xmlns:a16="http://schemas.microsoft.com/office/drawing/2014/main" id="{C14DEA3A-B003-41A4-AF36-13D6389689F4}"/>
               </a:ext>
             </a:extLst>
           </p:cNvPr>
@@ -4203,7 +4270,7 @@
           <p:cNvPr id="5" name="">
             <a:extLst xmlns:a="http://schemas.openxmlformats.org/drawingml/2006/main">
               <a:ext uri="{FF2B5EF4-FFF2-40B4-BE49-F238E27FC236}">
-                <a16:creationId xmlns:a16="http://schemas.microsoft.com/office/drawing/2014/main" id="{087731DB-D443-49E1-BCDE-74973856804C}"/>
+                <a16:creationId xmlns:a16="http://schemas.microsoft.com/office/drawing/2014/main" id="{7BDB45D4-FB7E-4B9A-87E6-3C7CCA0812F9}"/>
               </a:ext>
             </a:extLst>
           </p:cNvPr>
@@ -4267,7 +4334,7 @@
           <p:cNvPr id="6" name="">
             <a:extLst xmlns:a="http://schemas.openxmlformats.org/drawingml/2006/main">
               <a:ext uri="{FF2B5EF4-FFF2-40B4-BE49-F238E27FC236}">
-                <a16:creationId xmlns:a16="http://schemas.microsoft.com/office/drawing/2014/main" id="{2B576478-0925-4184-80E1-37CB9F3C2AAE}"/>
+                <a16:creationId xmlns:a16="http://schemas.microsoft.com/office/drawing/2014/main" id="{DF48E726-A779-442A-8A12-8EFE935C9271}"/>
               </a:ext>
             </a:extLst>
           </p:cNvPr>
@@ -4331,7 +4398,7 @@
           <p:cNvPr id="7" name="">
             <a:extLst xmlns:a="http://schemas.openxmlformats.org/drawingml/2006/main">
               <a:ext uri="{FF2B5EF4-FFF2-40B4-BE49-F238E27FC236}">
-                <a16:creationId xmlns:a16="http://schemas.microsoft.com/office/drawing/2014/main" id="{BA8E1263-BE49-47B2-A360-01B14DD68A69}"/>
+                <a16:creationId xmlns:a16="http://schemas.microsoft.com/office/drawing/2014/main" id="{55B33721-E3F6-4F41-B048-11DDDBEA7CFA}"/>
               </a:ext>
             </a:extLst>
           </p:cNvPr>
@@ -4395,7 +4462,7 @@
           <p:cNvPr id="8" name="">
             <a:extLst xmlns:a="http://schemas.openxmlformats.org/drawingml/2006/main">
               <a:ext uri="{FF2B5EF4-FFF2-40B4-BE49-F238E27FC236}">
-                <a16:creationId xmlns:a16="http://schemas.microsoft.com/office/drawing/2014/main" id="{7D623955-EFEF-436D-A569-7B57CCFC2D6F}"/>
+                <a16:creationId xmlns:a16="http://schemas.microsoft.com/office/drawing/2014/main" id="{B901C12D-CF25-4788-9935-5D2A97A1727A}"/>
               </a:ext>
             </a:extLst>
           </p:cNvPr>
@@ -4428,7 +4495,7 @@
           <p:cNvPr id="9" name="">
             <a:extLst xmlns:a="http://schemas.openxmlformats.org/drawingml/2006/main">
               <a:ext uri="{FF2B5EF4-FFF2-40B4-BE49-F238E27FC236}">
-                <a16:creationId xmlns:a16="http://schemas.microsoft.com/office/drawing/2014/main" id="{E1D82DFE-FF3A-48F6-8302-8A3D7E48B964}"/>
+                <a16:creationId xmlns:a16="http://schemas.microsoft.com/office/drawing/2014/main" id="{A627B4C6-93A7-4152-A08D-8DD407E309DA}"/>
               </a:ext>
             </a:extLst>
           </p:cNvPr>
@@ -4463,7 +4530,7 @@
           <p:cNvPr id="10" name="">
             <a:extLst xmlns:a="http://schemas.openxmlformats.org/drawingml/2006/main">
               <a:ext uri="{FF2B5EF4-FFF2-40B4-BE49-F238E27FC236}">
-                <a16:creationId xmlns:a16="http://schemas.microsoft.com/office/drawing/2014/main" id="{AEF76D5B-033E-46CD-83ED-85EE3FDA7FF6}"/>
+                <a16:creationId xmlns:a16="http://schemas.microsoft.com/office/drawing/2014/main" id="{D7CDF911-82E3-4795-9B2E-D35E803CBED4}"/>
               </a:ext>
             </a:extLst>
           </p:cNvPr>
@@ -4527,7 +4594,7 @@
           <p:cNvPr id="11" name="">
             <a:extLst xmlns:a="http://schemas.openxmlformats.org/drawingml/2006/main">
               <a:ext uri="{FF2B5EF4-FFF2-40B4-BE49-F238E27FC236}">
-                <a16:creationId xmlns:a16="http://schemas.microsoft.com/office/drawing/2014/main" id="{614048AD-8B83-4515-8B21-8C858F9E7990}"/>
+                <a16:creationId xmlns:a16="http://schemas.microsoft.com/office/drawing/2014/main" id="{14D7C3A9-B79D-49D4-90F1-3F8EEFE0A2D7}"/>
               </a:ext>
             </a:extLst>
           </p:cNvPr>
@@ -4591,7 +4658,7 @@
           <p:cNvPr id="12" name="">
             <a:extLst xmlns:a="http://schemas.openxmlformats.org/drawingml/2006/main">
               <a:ext uri="{FF2B5EF4-FFF2-40B4-BE49-F238E27FC236}">
-                <a16:creationId xmlns:a16="http://schemas.microsoft.com/office/drawing/2014/main" id="{B8F35584-F5F7-4987-9FF6-EFCF9E7558D7}"/>
+                <a16:creationId xmlns:a16="http://schemas.microsoft.com/office/drawing/2014/main" id="{58FCF3D0-B15C-4A55-858E-F92F5DB6C62F}"/>
               </a:ext>
             </a:extLst>
           </p:cNvPr>
@@ -4624,7 +4691,7 @@
           <p:cNvPr id="13" name="">
             <a:extLst xmlns:a="http://schemas.openxmlformats.org/drawingml/2006/main">
               <a:ext uri="{FF2B5EF4-FFF2-40B4-BE49-F238E27FC236}">
-                <a16:creationId xmlns:a16="http://schemas.microsoft.com/office/drawing/2014/main" id="{F1651B0D-608A-4E36-AD4F-68CD5C5353E9}"/>
+                <a16:creationId xmlns:a16="http://schemas.microsoft.com/office/drawing/2014/main" id="{B5E0E5AC-4E26-4931-8290-449195B72C0A}"/>
               </a:ext>
             </a:extLst>
           </p:cNvPr>
@@ -4659,7 +4726,7 @@
           <p:cNvPr id="14" name="">
             <a:extLst xmlns:a="http://schemas.openxmlformats.org/drawingml/2006/main">
               <a:ext uri="{FF2B5EF4-FFF2-40B4-BE49-F238E27FC236}">
-                <a16:creationId xmlns:a16="http://schemas.microsoft.com/office/drawing/2014/main" id="{372ED67E-1C05-4A6D-A67F-9D4D81B87683}"/>
+                <a16:creationId xmlns:a16="http://schemas.microsoft.com/office/drawing/2014/main" id="{466E9138-CD24-415F-8908-4194499809BF}"/>
               </a:ext>
             </a:extLst>
           </p:cNvPr>
@@ -4723,7 +4790,7 @@
           <p:cNvPr id="15" name="">
             <a:extLst xmlns:a="http://schemas.openxmlformats.org/drawingml/2006/main">
               <a:ext uri="{FF2B5EF4-FFF2-40B4-BE49-F238E27FC236}">
-                <a16:creationId xmlns:a16="http://schemas.microsoft.com/office/drawing/2014/main" id="{DFC3167D-CFF6-4FE5-A453-3D1E74860212}"/>
+                <a16:creationId xmlns:a16="http://schemas.microsoft.com/office/drawing/2014/main" id="{47CD6D94-AD38-4ABC-B840-1F9D1AC42CAB}"/>
               </a:ext>
             </a:extLst>
           </p:cNvPr>
@@ -4787,7 +4854,7 @@
           <p:cNvPr id="16" name="">
             <a:extLst xmlns:a="http://schemas.openxmlformats.org/drawingml/2006/main">
               <a:ext uri="{FF2B5EF4-FFF2-40B4-BE49-F238E27FC236}">
-                <a16:creationId xmlns:a16="http://schemas.microsoft.com/office/drawing/2014/main" id="{6C0E840D-F176-4054-B7F9-3AC5F6156FC6}"/>
+                <a16:creationId xmlns:a16="http://schemas.microsoft.com/office/drawing/2014/main" id="{E88D1EA3-9D24-4C6E-AC6F-89E3BDDC4766}"/>
               </a:ext>
             </a:extLst>
           </p:cNvPr>
@@ -4820,7 +4887,7 @@
           <p:cNvPr id="17" name="">
             <a:extLst xmlns:a="http://schemas.openxmlformats.org/drawingml/2006/main">
               <a:ext uri="{FF2B5EF4-FFF2-40B4-BE49-F238E27FC236}">
-                <a16:creationId xmlns:a16="http://schemas.microsoft.com/office/drawing/2014/main" id="{CC7FE09D-779B-453E-AA2A-CD5522B936FC}"/>
+                <a16:creationId xmlns:a16="http://schemas.microsoft.com/office/drawing/2014/main" id="{BD496EA7-ED01-43BD-B5D2-0F81F4CE12AA}"/>
               </a:ext>
             </a:extLst>
           </p:cNvPr>
@@ -4855,7 +4922,7 @@
           <p:cNvPr id="18" name="">
             <a:extLst xmlns:a="http://schemas.openxmlformats.org/drawingml/2006/main">
               <a:ext uri="{FF2B5EF4-FFF2-40B4-BE49-F238E27FC236}">
-                <a16:creationId xmlns:a16="http://schemas.microsoft.com/office/drawing/2014/main" id="{94F01307-DA79-4B0B-BE13-7FD9D7018DCC}"/>
+                <a16:creationId xmlns:a16="http://schemas.microsoft.com/office/drawing/2014/main" id="{555F4480-8D60-4377-816B-A79CA50066B0}"/>
               </a:ext>
             </a:extLst>
           </p:cNvPr>
@@ -4919,7 +4986,7 @@
           <p:cNvPr id="19" name="">
             <a:extLst xmlns:a="http://schemas.openxmlformats.org/drawingml/2006/main">
               <a:ext uri="{FF2B5EF4-FFF2-40B4-BE49-F238E27FC236}">
-                <a16:creationId xmlns:a16="http://schemas.microsoft.com/office/drawing/2014/main" id="{1DE96F81-66BB-42D6-BD7F-0F5C0D52785B}"/>
+                <a16:creationId xmlns:a16="http://schemas.microsoft.com/office/drawing/2014/main" id="{934D6EB8-30F4-4C9A-87D3-9EB5D349C6D2}"/>
               </a:ext>
             </a:extLst>
           </p:cNvPr>
@@ -4981,7 +5048,7 @@
     </p:spTree>
     <p:extLst>
       <p:ext uri="{BB962C8B-B14F-4D97-AF65-F5344CB8AC3E}">
-        <p14:creationId xmlns:p14="http://schemas.microsoft.com/office/powerpoint/2010/main" val="1309899130"/>
+        <p14:creationId xmlns:p14="http://schemas.microsoft.com/office/powerpoint/2010/main" val="2103309037"/>
       </p:ext>
     </p:extLst>
   </p:cSld>
@@ -5005,7 +5072,7 @@
           <p:cNvPr id="1" name="">
             <a:extLst xmlns:a="http://schemas.openxmlformats.org/drawingml/2006/main">
               <a:ext uri="{FF2B5EF4-FFF2-40B4-BE49-F238E27FC236}">
-                <a16:creationId xmlns:a16="http://schemas.microsoft.com/office/drawing/2014/main" id="{6B677B4D-5383-4BB2-886A-FA9B8E1FDED7}"/>
+                <a16:creationId xmlns:a16="http://schemas.microsoft.com/office/drawing/2014/main" id="{6FE051C1-2D15-473B-A974-7E703958B896}"/>
               </a:ext>
             </a:extLst>
           </p:cNvPr>
@@ -5040,7 +5107,7 @@
           <p:cNvPr id="2" name="">
             <a:extLst xmlns:a="http://schemas.openxmlformats.org/drawingml/2006/main">
               <a:ext uri="{FF2B5EF4-FFF2-40B4-BE49-F238E27FC236}">
-                <a16:creationId xmlns:a16="http://schemas.microsoft.com/office/drawing/2014/main" id="{97DABB6B-6062-474D-8B4B-F0B83DC31BFC}"/>
+                <a16:creationId xmlns:a16="http://schemas.microsoft.com/office/drawing/2014/main" id="{370EE968-F86E-457B-B969-8BEA938C81F9}"/>
               </a:ext>
             </a:extLst>
           </p:cNvPr>
@@ -5075,7 +5142,7 @@
           <p:cNvPr id="3" name="">
             <a:extLst xmlns:a="http://schemas.openxmlformats.org/drawingml/2006/main">
               <a:ext uri="{FF2B5EF4-FFF2-40B4-BE49-F238E27FC236}">
-                <a16:creationId xmlns:a16="http://schemas.microsoft.com/office/drawing/2014/main" id="{DEAE723F-EFD0-4E82-9449-FE13D063F6DC}"/>
+                <a16:creationId xmlns:a16="http://schemas.microsoft.com/office/drawing/2014/main" id="{751DA9E2-9E89-4AF7-8B38-787CE91DB12D}"/>
               </a:ext>
             </a:extLst>
           </p:cNvPr>
@@ -5110,7 +5177,7 @@
           <p:cNvPr id="4" name="">
             <a:extLst xmlns:a="http://schemas.openxmlformats.org/drawingml/2006/main">
               <a:ext uri="{FF2B5EF4-FFF2-40B4-BE49-F238E27FC236}">
-                <a16:creationId xmlns:a16="http://schemas.microsoft.com/office/drawing/2014/main" id="{CEAF537A-176C-4ED9-B96D-EFD9E94CE5F4}"/>
+                <a16:creationId xmlns:a16="http://schemas.microsoft.com/office/drawing/2014/main" id="{7A411B4D-F353-40AD-B29C-23560378D69E}"/>
               </a:ext>
             </a:extLst>
           </p:cNvPr>
@@ -5174,7 +5241,7 @@
           <p:cNvPr id="5" name="">
             <a:extLst xmlns:a="http://schemas.openxmlformats.org/drawingml/2006/main">
               <a:ext uri="{FF2B5EF4-FFF2-40B4-BE49-F238E27FC236}">
-                <a16:creationId xmlns:a16="http://schemas.microsoft.com/office/drawing/2014/main" id="{43B79833-D309-4E09-A24E-0CD413D0EC7F}"/>
+                <a16:creationId xmlns:a16="http://schemas.microsoft.com/office/drawing/2014/main" id="{17F948A4-8E6D-433B-B65A-C2FB929B19E7}"/>
               </a:ext>
             </a:extLst>
           </p:cNvPr>
@@ -5238,7 +5305,7 @@
           <p:cNvPr id="6" name="">
             <a:extLst xmlns:a="http://schemas.openxmlformats.org/drawingml/2006/main">
               <a:ext uri="{FF2B5EF4-FFF2-40B4-BE49-F238E27FC236}">
-                <a16:creationId xmlns:a16="http://schemas.microsoft.com/office/drawing/2014/main" id="{ABF34E64-7115-4045-9ED7-328AD618A559}"/>
+                <a16:creationId xmlns:a16="http://schemas.microsoft.com/office/drawing/2014/main" id="{6CE13E52-1F89-4813-9484-0CE8BA6A0FE4}"/>
               </a:ext>
             </a:extLst>
           </p:cNvPr>
@@ -5302,7 +5369,7 @@
           <p:cNvPr id="7" name="">
             <a:extLst xmlns:a="http://schemas.openxmlformats.org/drawingml/2006/main">
               <a:ext uri="{FF2B5EF4-FFF2-40B4-BE49-F238E27FC236}">
-                <a16:creationId xmlns:a16="http://schemas.microsoft.com/office/drawing/2014/main" id="{27820C31-73E2-4C62-A737-34146CEE3938}"/>
+                <a16:creationId xmlns:a16="http://schemas.microsoft.com/office/drawing/2014/main" id="{C5CA2A3C-30EF-4C92-95B9-12D559852523}"/>
               </a:ext>
             </a:extLst>
           </p:cNvPr>
@@ -5366,7 +5433,7 @@
           <p:cNvPr id="8" name="">
             <a:extLst xmlns:a="http://schemas.openxmlformats.org/drawingml/2006/main">
               <a:ext uri="{FF2B5EF4-FFF2-40B4-BE49-F238E27FC236}">
-                <a16:creationId xmlns:a16="http://schemas.microsoft.com/office/drawing/2014/main" id="{730B0CCA-F5D8-467A-ADCF-2046B533977E}"/>
+                <a16:creationId xmlns:a16="http://schemas.microsoft.com/office/drawing/2014/main" id="{B95C2680-5DB0-4095-BCA2-16E75448AD95}"/>
               </a:ext>
             </a:extLst>
           </p:cNvPr>
@@ -5399,7 +5466,7 @@
           <p:cNvPr id="9" name="">
             <a:extLst xmlns:a="http://schemas.openxmlformats.org/drawingml/2006/main">
               <a:ext uri="{FF2B5EF4-FFF2-40B4-BE49-F238E27FC236}">
-                <a16:creationId xmlns:a16="http://schemas.microsoft.com/office/drawing/2014/main" id="{FDD4B45F-6D71-4BAE-A63E-843796FE33A3}"/>
+                <a16:creationId xmlns:a16="http://schemas.microsoft.com/office/drawing/2014/main" id="{03890BE9-1820-4523-99D0-6E265F7CB935}"/>
               </a:ext>
             </a:extLst>
           </p:cNvPr>
@@ -5434,7 +5501,7 @@
           <p:cNvPr id="10" name="">
             <a:extLst xmlns:a="http://schemas.openxmlformats.org/drawingml/2006/main">
               <a:ext uri="{FF2B5EF4-FFF2-40B4-BE49-F238E27FC236}">
-                <a16:creationId xmlns:a16="http://schemas.microsoft.com/office/drawing/2014/main" id="{A021C41A-79D6-4229-9BA5-3FFBB6744BDC}"/>
+                <a16:creationId xmlns:a16="http://schemas.microsoft.com/office/drawing/2014/main" id="{A482FFC1-E325-4905-A7BD-D452FF845E79}"/>
               </a:ext>
             </a:extLst>
           </p:cNvPr>
@@ -5498,7 +5565,7 @@
           <p:cNvPr id="11" name="">
             <a:extLst xmlns:a="http://schemas.openxmlformats.org/drawingml/2006/main">
               <a:ext uri="{FF2B5EF4-FFF2-40B4-BE49-F238E27FC236}">
-                <a16:creationId xmlns:a16="http://schemas.microsoft.com/office/drawing/2014/main" id="{6CF98226-C6C4-44E8-B832-35F49A707F2F}"/>
+                <a16:creationId xmlns:a16="http://schemas.microsoft.com/office/drawing/2014/main" id="{735E5536-E5F6-4484-A1CB-7D84257FC442}"/>
               </a:ext>
             </a:extLst>
           </p:cNvPr>
@@ -5608,7 +5675,7 @@
           <p:cNvPr id="12" name="">
             <a:extLst xmlns:a="http://schemas.openxmlformats.org/drawingml/2006/main">
               <a:ext uri="{FF2B5EF4-FFF2-40B4-BE49-F238E27FC236}">
-                <a16:creationId xmlns:a16="http://schemas.microsoft.com/office/drawing/2014/main" id="{B1774BEB-3B36-4DD4-B52C-155679F6A0EE}"/>
+                <a16:creationId xmlns:a16="http://schemas.microsoft.com/office/drawing/2014/main" id="{C303ACE8-2565-483E-8554-C9179917DFB5}"/>
               </a:ext>
             </a:extLst>
           </p:cNvPr>
@@ -5641,7 +5708,7 @@
           <p:cNvPr id="13" name="">
             <a:extLst xmlns:a="http://schemas.openxmlformats.org/drawingml/2006/main">
               <a:ext uri="{FF2B5EF4-FFF2-40B4-BE49-F238E27FC236}">
-                <a16:creationId xmlns:a16="http://schemas.microsoft.com/office/drawing/2014/main" id="{2CF2AEC4-19BA-4F65-92F7-EDDF9EEAA5BF}"/>
+                <a16:creationId xmlns:a16="http://schemas.microsoft.com/office/drawing/2014/main" id="{C842D205-1967-4743-BC60-59817BBC798C}"/>
               </a:ext>
             </a:extLst>
           </p:cNvPr>
@@ -5676,7 +5743,7 @@
           <p:cNvPr id="14" name="">
             <a:extLst xmlns:a="http://schemas.openxmlformats.org/drawingml/2006/main">
               <a:ext uri="{FF2B5EF4-FFF2-40B4-BE49-F238E27FC236}">
-                <a16:creationId xmlns:a16="http://schemas.microsoft.com/office/drawing/2014/main" id="{D88D9C0E-8453-44E4-82F0-2ADBF776F2E8}"/>
+                <a16:creationId xmlns:a16="http://schemas.microsoft.com/office/drawing/2014/main" id="{C370C46C-9DA2-42D7-AB5D-20B264ECDFE4}"/>
               </a:ext>
             </a:extLst>
           </p:cNvPr>
@@ -5740,7 +5807,7 @@
           <p:cNvPr id="15" name="">
             <a:extLst xmlns:a="http://schemas.openxmlformats.org/drawingml/2006/main">
               <a:ext uri="{FF2B5EF4-FFF2-40B4-BE49-F238E27FC236}">
-                <a16:creationId xmlns:a16="http://schemas.microsoft.com/office/drawing/2014/main" id="{DE5A95A4-7C3F-409A-A115-2110F0634EE5}"/>
+                <a16:creationId xmlns:a16="http://schemas.microsoft.com/office/drawing/2014/main" id="{FA323AD0-FDB2-44B0-AF2B-1EC53899E0CC}"/>
               </a:ext>
             </a:extLst>
           </p:cNvPr>
@@ -5850,7 +5917,7 @@
           <p:cNvPr id="16" name="">
             <a:extLst xmlns:a="http://schemas.openxmlformats.org/drawingml/2006/main">
               <a:ext uri="{FF2B5EF4-FFF2-40B4-BE49-F238E27FC236}">
-                <a16:creationId xmlns:a16="http://schemas.microsoft.com/office/drawing/2014/main" id="{267EECEF-6022-4069-A224-1DDA60E4A80A}"/>
+                <a16:creationId xmlns:a16="http://schemas.microsoft.com/office/drawing/2014/main" id="{2BBAABF3-2F10-49D7-966E-02A38F0E0C94}"/>
               </a:ext>
             </a:extLst>
           </p:cNvPr>
@@ -5883,7 +5950,7 @@
           <p:cNvPr id="17" name="">
             <a:extLst xmlns:a="http://schemas.openxmlformats.org/drawingml/2006/main">
               <a:ext uri="{FF2B5EF4-FFF2-40B4-BE49-F238E27FC236}">
-                <a16:creationId xmlns:a16="http://schemas.microsoft.com/office/drawing/2014/main" id="{DDF47972-11F8-41E1-93C0-E243675EFC6F}"/>
+                <a16:creationId xmlns:a16="http://schemas.microsoft.com/office/drawing/2014/main" id="{41E539B1-2E74-4648-A284-DCAE185B1EF3}"/>
               </a:ext>
             </a:extLst>
           </p:cNvPr>
@@ -5918,7 +5985,7 @@
           <p:cNvPr id="18" name="">
             <a:extLst xmlns:a="http://schemas.openxmlformats.org/drawingml/2006/main">
               <a:ext uri="{FF2B5EF4-FFF2-40B4-BE49-F238E27FC236}">
-                <a16:creationId xmlns:a16="http://schemas.microsoft.com/office/drawing/2014/main" id="{23B5677D-0AE2-470E-A275-784AFFAE7AD8}"/>
+                <a16:creationId xmlns:a16="http://schemas.microsoft.com/office/drawing/2014/main" id="{98A005B1-54A8-4FC4-A2FE-9AC46EF8E7C9}"/>
               </a:ext>
             </a:extLst>
           </p:cNvPr>
@@ -5982,7 +6049,7 @@
           <p:cNvPr id="19" name="">
             <a:extLst xmlns:a="http://schemas.openxmlformats.org/drawingml/2006/main">
               <a:ext uri="{FF2B5EF4-FFF2-40B4-BE49-F238E27FC236}">
-                <a16:creationId xmlns:a16="http://schemas.microsoft.com/office/drawing/2014/main" id="{9D51FE48-0430-4185-B34D-11E0AFAB8028}"/>
+                <a16:creationId xmlns:a16="http://schemas.microsoft.com/office/drawing/2014/main" id="{2E03C08D-CD33-46C8-87C5-22446F59B1A0}"/>
               </a:ext>
             </a:extLst>
           </p:cNvPr>
@@ -6046,7 +6113,7 @@
           <p:cNvPr id="20" name="">
             <a:extLst xmlns:a="http://schemas.openxmlformats.org/drawingml/2006/main">
               <a:ext uri="{FF2B5EF4-FFF2-40B4-BE49-F238E27FC236}">
-                <a16:creationId xmlns:a16="http://schemas.microsoft.com/office/drawing/2014/main" id="{41D51B82-28A7-4892-80F5-512D9825F99B}"/>
+                <a16:creationId xmlns:a16="http://schemas.microsoft.com/office/drawing/2014/main" id="{24EE537F-2D34-46D4-8394-0CB4441D792E}"/>
               </a:ext>
             </a:extLst>
           </p:cNvPr>
@@ -6079,7 +6146,7 @@
           <p:cNvPr id="21" name="">
             <a:extLst xmlns:a="http://schemas.openxmlformats.org/drawingml/2006/main">
               <a:ext uri="{FF2B5EF4-FFF2-40B4-BE49-F238E27FC236}">
-                <a16:creationId xmlns:a16="http://schemas.microsoft.com/office/drawing/2014/main" id="{72BE8E06-B79D-4174-B8EC-9BC0238CB70A}"/>
+                <a16:creationId xmlns:a16="http://schemas.microsoft.com/office/drawing/2014/main" id="{64B69275-7021-4510-B1A5-C86B7EFC7A87}"/>
               </a:ext>
             </a:extLst>
           </p:cNvPr>
@@ -6143,7 +6210,7 @@
           <p:cNvPr id="22" name="">
             <a:extLst xmlns:a="http://schemas.openxmlformats.org/drawingml/2006/main">
               <a:ext uri="{FF2B5EF4-FFF2-40B4-BE49-F238E27FC236}">
-                <a16:creationId xmlns:a16="http://schemas.microsoft.com/office/drawing/2014/main" id="{102643A4-D61B-479E-ABB8-8440D1817F36}"/>
+                <a16:creationId xmlns:a16="http://schemas.microsoft.com/office/drawing/2014/main" id="{08703769-08A7-4CA5-AD8E-64BDB73C1A93}"/>
               </a:ext>
             </a:extLst>
           </p:cNvPr>
@@ -6302,7 +6369,7 @@
     </p:spTree>
     <p:extLst>
       <p:ext uri="{BB962C8B-B14F-4D97-AF65-F5344CB8AC3E}">
-        <p14:creationId xmlns:p14="http://schemas.microsoft.com/office/powerpoint/2010/main" val="317985510"/>
+        <p14:creationId xmlns:p14="http://schemas.microsoft.com/office/powerpoint/2010/main" val="298436150"/>
       </p:ext>
     </p:extLst>
   </p:cSld>
@@ -6326,7 +6393,7 @@
           <p:cNvPr id="1" name="">
             <a:extLst xmlns:a="http://schemas.openxmlformats.org/drawingml/2006/main">
               <a:ext uri="{FF2B5EF4-FFF2-40B4-BE49-F238E27FC236}">
-                <a16:creationId xmlns:a16="http://schemas.microsoft.com/office/drawing/2014/main" id="{15257C47-9F76-427C-8CDD-0712A0294148}"/>
+                <a16:creationId xmlns:a16="http://schemas.microsoft.com/office/drawing/2014/main" id="{252B3ACC-55B0-4993-BAE1-416AFD2A5876}"/>
               </a:ext>
             </a:extLst>
           </p:cNvPr>
@@ -6361,7 +6428,7 @@
           <p:cNvPr id="2" name="">
             <a:extLst xmlns:a="http://schemas.openxmlformats.org/drawingml/2006/main">
               <a:ext uri="{FF2B5EF4-FFF2-40B4-BE49-F238E27FC236}">
-                <a16:creationId xmlns:a16="http://schemas.microsoft.com/office/drawing/2014/main" id="{C4469A04-DD10-4B8B-87E7-473E61047A4B}"/>
+                <a16:creationId xmlns:a16="http://schemas.microsoft.com/office/drawing/2014/main" id="{3BB29C68-D5AB-4121-90B6-7D9612B1D3D4}"/>
               </a:ext>
             </a:extLst>
           </p:cNvPr>
@@ -6396,7 +6463,7 @@
           <p:cNvPr id="3" name="">
             <a:extLst xmlns:a="http://schemas.openxmlformats.org/drawingml/2006/main">
               <a:ext uri="{FF2B5EF4-FFF2-40B4-BE49-F238E27FC236}">
-                <a16:creationId xmlns:a16="http://schemas.microsoft.com/office/drawing/2014/main" id="{FE6B08DC-92D8-4F6E-A395-CF08C43BFC05}"/>
+                <a16:creationId xmlns:a16="http://schemas.microsoft.com/office/drawing/2014/main" id="{84E2F449-58CE-4515-9B3C-6A566905483F}"/>
               </a:ext>
             </a:extLst>
           </p:cNvPr>
@@ -6431,7 +6498,7 @@
           <p:cNvPr id="4" name="">
             <a:extLst xmlns:a="http://schemas.openxmlformats.org/drawingml/2006/main">
               <a:ext uri="{FF2B5EF4-FFF2-40B4-BE49-F238E27FC236}">
-                <a16:creationId xmlns:a16="http://schemas.microsoft.com/office/drawing/2014/main" id="{AF8C87E9-B7D4-4F2C-A0C5-3057303F2862}"/>
+                <a16:creationId xmlns:a16="http://schemas.microsoft.com/office/drawing/2014/main" id="{F358A23E-B8A8-460E-A9D8-3B8016C612CE}"/>
               </a:ext>
             </a:extLst>
           </p:cNvPr>
@@ -6495,7 +6562,7 @@
           <p:cNvPr id="5" name="">
             <a:extLst xmlns:a="http://schemas.openxmlformats.org/drawingml/2006/main">
               <a:ext uri="{FF2B5EF4-FFF2-40B4-BE49-F238E27FC236}">
-                <a16:creationId xmlns:a16="http://schemas.microsoft.com/office/drawing/2014/main" id="{E8A18F65-7397-4857-BFBD-F4FE89F40657}"/>
+                <a16:creationId xmlns:a16="http://schemas.microsoft.com/office/drawing/2014/main" id="{CC15D8A9-EBA1-48F9-BB6E-968CBD6FA5E3}"/>
               </a:ext>
             </a:extLst>
           </p:cNvPr>
@@ -6559,7 +6626,7 @@
           <p:cNvPr id="6" name="">
             <a:extLst xmlns:a="http://schemas.openxmlformats.org/drawingml/2006/main">
               <a:ext uri="{FF2B5EF4-FFF2-40B4-BE49-F238E27FC236}">
-                <a16:creationId xmlns:a16="http://schemas.microsoft.com/office/drawing/2014/main" id="{1E12E584-EDD2-42BC-9A0C-FC1843E7DDB5}"/>
+                <a16:creationId xmlns:a16="http://schemas.microsoft.com/office/drawing/2014/main" id="{A4EA5A8E-5638-4658-862F-C5EFF1DD8897}"/>
               </a:ext>
             </a:extLst>
           </p:cNvPr>
@@ -6623,7 +6690,7 @@
           <p:cNvPr id="7" name="">
             <a:extLst xmlns:a="http://schemas.openxmlformats.org/drawingml/2006/main">
               <a:ext uri="{FF2B5EF4-FFF2-40B4-BE49-F238E27FC236}">
-                <a16:creationId xmlns:a16="http://schemas.microsoft.com/office/drawing/2014/main" id="{CABEA41F-01ED-4052-9F51-662A80F68AA3}"/>
+                <a16:creationId xmlns:a16="http://schemas.microsoft.com/office/drawing/2014/main" id="{B63657DF-EF15-4C58-A2BC-4A769CFA4FC5}"/>
               </a:ext>
             </a:extLst>
           </p:cNvPr>
@@ -6687,7 +6754,7 @@
           <p:cNvPr id="8" name="">
             <a:extLst xmlns:a="http://schemas.openxmlformats.org/drawingml/2006/main">
               <a:ext uri="{FF2B5EF4-FFF2-40B4-BE49-F238E27FC236}">
-                <a16:creationId xmlns:a16="http://schemas.microsoft.com/office/drawing/2014/main" id="{90E33687-9A46-4290-8C6C-0FBEA79190C1}"/>
+                <a16:creationId xmlns:a16="http://schemas.microsoft.com/office/drawing/2014/main" id="{DEC2F06D-BE3D-44AB-82A8-078594E60419}"/>
               </a:ext>
             </a:extLst>
           </p:cNvPr>
@@ -6720,7 +6787,7 @@
           <p:cNvPr id="9" name="">
             <a:extLst xmlns:a="http://schemas.openxmlformats.org/drawingml/2006/main">
               <a:ext uri="{FF2B5EF4-FFF2-40B4-BE49-F238E27FC236}">
-                <a16:creationId xmlns:a16="http://schemas.microsoft.com/office/drawing/2014/main" id="{E5F92F2A-97D7-4BEB-BE7D-C41E69E95869}"/>
+                <a16:creationId xmlns:a16="http://schemas.microsoft.com/office/drawing/2014/main" id="{868641FF-85D8-4066-A749-E546DE988516}"/>
               </a:ext>
             </a:extLst>
           </p:cNvPr>
@@ -6755,7 +6822,7 @@
           <p:cNvPr id="10" name="">
             <a:extLst xmlns:a="http://schemas.openxmlformats.org/drawingml/2006/main">
               <a:ext uri="{FF2B5EF4-FFF2-40B4-BE49-F238E27FC236}">
-                <a16:creationId xmlns:a16="http://schemas.microsoft.com/office/drawing/2014/main" id="{E4DAAA82-A831-4828-AB82-FB352E6970F1}"/>
+                <a16:creationId xmlns:a16="http://schemas.microsoft.com/office/drawing/2014/main" id="{30AEDA2D-AFBF-4B1E-913F-05FBDF1B5F98}"/>
               </a:ext>
             </a:extLst>
           </p:cNvPr>
@@ -6819,7 +6886,7 @@
           <p:cNvPr id="11" name="">
             <a:extLst xmlns:a="http://schemas.openxmlformats.org/drawingml/2006/main">
               <a:ext uri="{FF2B5EF4-FFF2-40B4-BE49-F238E27FC236}">
-                <a16:creationId xmlns:a16="http://schemas.microsoft.com/office/drawing/2014/main" id="{409A55B3-8577-41C0-B490-B513DBBF2541}"/>
+                <a16:creationId xmlns:a16="http://schemas.microsoft.com/office/drawing/2014/main" id="{544E91DD-3AC0-4D64-8745-9FAB5FA55A86}"/>
               </a:ext>
             </a:extLst>
           </p:cNvPr>
@@ -6883,7 +6950,7 @@
           <p:cNvPr id="12" name="">
             <a:extLst xmlns:a="http://schemas.openxmlformats.org/drawingml/2006/main">
               <a:ext uri="{FF2B5EF4-FFF2-40B4-BE49-F238E27FC236}">
-                <a16:creationId xmlns:a16="http://schemas.microsoft.com/office/drawing/2014/main" id="{BA92B17C-3812-4603-8DA7-B54712B1CA4F}"/>
+                <a16:creationId xmlns:a16="http://schemas.microsoft.com/office/drawing/2014/main" id="{6075D7D0-5CC1-4033-B4E0-099A828B85B3}"/>
               </a:ext>
             </a:extLst>
           </p:cNvPr>
@@ -6916,7 +6983,7 @@
           <p:cNvPr id="13" name="">
             <a:extLst xmlns:a="http://schemas.openxmlformats.org/drawingml/2006/main">
               <a:ext uri="{FF2B5EF4-FFF2-40B4-BE49-F238E27FC236}">
-                <a16:creationId xmlns:a16="http://schemas.microsoft.com/office/drawing/2014/main" id="{35359C5D-AEF8-43ED-B8EF-F8AEF90E0B01}"/>
+                <a16:creationId xmlns:a16="http://schemas.microsoft.com/office/drawing/2014/main" id="{02DE48A6-0C76-42E0-8F6A-997D2D4EBC6F}"/>
               </a:ext>
             </a:extLst>
           </p:cNvPr>
@@ -6951,7 +7018,7 @@
           <p:cNvPr id="14" name="">
             <a:extLst xmlns:a="http://schemas.openxmlformats.org/drawingml/2006/main">
               <a:ext uri="{FF2B5EF4-FFF2-40B4-BE49-F238E27FC236}">
-                <a16:creationId xmlns:a16="http://schemas.microsoft.com/office/drawing/2014/main" id="{C1DDE713-E009-46CD-B2FB-06CB71EE2C46}"/>
+                <a16:creationId xmlns:a16="http://schemas.microsoft.com/office/drawing/2014/main" id="{5BB50D87-2478-4179-A216-8E3F5DBF746B}"/>
               </a:ext>
             </a:extLst>
           </p:cNvPr>
@@ -7015,7 +7082,7 @@
           <p:cNvPr id="15" name="">
             <a:extLst xmlns:a="http://schemas.openxmlformats.org/drawingml/2006/main">
               <a:ext uri="{FF2B5EF4-FFF2-40B4-BE49-F238E27FC236}">
-                <a16:creationId xmlns:a16="http://schemas.microsoft.com/office/drawing/2014/main" id="{B6237E4A-9E42-4395-A47E-0BCA1B3ED802}"/>
+                <a16:creationId xmlns:a16="http://schemas.microsoft.com/office/drawing/2014/main" id="{B41B6278-B422-4462-B9F4-B7AF5CFC35B7}"/>
               </a:ext>
             </a:extLst>
           </p:cNvPr>
@@ -7079,7 +7146,7 @@
           <p:cNvPr id="16" name="">
             <a:extLst xmlns:a="http://schemas.openxmlformats.org/drawingml/2006/main">
               <a:ext uri="{FF2B5EF4-FFF2-40B4-BE49-F238E27FC236}">
-                <a16:creationId xmlns:a16="http://schemas.microsoft.com/office/drawing/2014/main" id="{3B9AAAE5-D259-47BE-987F-08D8BF6B9A8F}"/>
+                <a16:creationId xmlns:a16="http://schemas.microsoft.com/office/drawing/2014/main" id="{15752375-8D7B-43EE-B7D7-3B521BC6C5FD}"/>
               </a:ext>
             </a:extLst>
           </p:cNvPr>
@@ -7112,7 +7179,7 @@
           <p:cNvPr id="17" name="">
             <a:extLst xmlns:a="http://schemas.openxmlformats.org/drawingml/2006/main">
               <a:ext uri="{FF2B5EF4-FFF2-40B4-BE49-F238E27FC236}">
-                <a16:creationId xmlns:a16="http://schemas.microsoft.com/office/drawing/2014/main" id="{4689298E-23A4-40AA-9C24-9DD0C3D56380}"/>
+                <a16:creationId xmlns:a16="http://schemas.microsoft.com/office/drawing/2014/main" id="{015700CD-EFDC-494E-8ADF-8CD3F6AD0CAB}"/>
               </a:ext>
             </a:extLst>
           </p:cNvPr>
@@ -7176,7 +7243,7 @@
           <p:cNvPr id="18" name="">
             <a:extLst xmlns:a="http://schemas.openxmlformats.org/drawingml/2006/main">
               <a:ext uri="{FF2B5EF4-FFF2-40B4-BE49-F238E27FC236}">
-                <a16:creationId xmlns:a16="http://schemas.microsoft.com/office/drawing/2014/main" id="{36DABCA2-B269-45EB-8023-84004C63610C}"/>
+                <a16:creationId xmlns:a16="http://schemas.microsoft.com/office/drawing/2014/main" id="{5C09E328-04AB-41EE-80DC-CEB9BF45292C}"/>
               </a:ext>
             </a:extLst>
           </p:cNvPr>
@@ -7335,7 +7402,7 @@
     </p:spTree>
     <p:extLst>
       <p:ext uri="{BB962C8B-B14F-4D97-AF65-F5344CB8AC3E}">
-        <p14:creationId xmlns:p14="http://schemas.microsoft.com/office/powerpoint/2010/main" val="788434659"/>
+        <p14:creationId xmlns:p14="http://schemas.microsoft.com/office/powerpoint/2010/main" val="1011538337"/>
       </p:ext>
     </p:extLst>
   </p:cSld>
@@ -7359,7 +7426,7 @@
           <p:cNvPr id="1" name="">
             <a:extLst xmlns:a="http://schemas.openxmlformats.org/drawingml/2006/main">
               <a:ext uri="{FF2B5EF4-FFF2-40B4-BE49-F238E27FC236}">
-                <a16:creationId xmlns:a16="http://schemas.microsoft.com/office/drawing/2014/main" id="{17A0F90E-D347-45E7-9E5B-DC26CEF5CFD3}"/>
+                <a16:creationId xmlns:a16="http://schemas.microsoft.com/office/drawing/2014/main" id="{8DD1EACC-6A8D-4632-A9BE-FF4CB388F8E5}"/>
               </a:ext>
             </a:extLst>
           </p:cNvPr>
@@ -7394,7 +7461,7 @@
           <p:cNvPr id="2" name="">
             <a:extLst xmlns:a="http://schemas.openxmlformats.org/drawingml/2006/main">
               <a:ext uri="{FF2B5EF4-FFF2-40B4-BE49-F238E27FC236}">
-                <a16:creationId xmlns:a16="http://schemas.microsoft.com/office/drawing/2014/main" id="{42567650-E5C1-49B4-ADED-D56F17CB69DB}"/>
+                <a16:creationId xmlns:a16="http://schemas.microsoft.com/office/drawing/2014/main" id="{2D59B86A-FA1E-4607-BB7A-A695E3EE4FC4}"/>
               </a:ext>
             </a:extLst>
           </p:cNvPr>
@@ -7429,7 +7496,7 @@
           <p:cNvPr id="3" name="">
             <a:extLst xmlns:a="http://schemas.openxmlformats.org/drawingml/2006/main">
               <a:ext uri="{FF2B5EF4-FFF2-40B4-BE49-F238E27FC236}">
-                <a16:creationId xmlns:a16="http://schemas.microsoft.com/office/drawing/2014/main" id="{7A70F8CF-5787-402C-85DD-D9AC2EA2DB65}"/>
+                <a16:creationId xmlns:a16="http://schemas.microsoft.com/office/drawing/2014/main" id="{1ECD351F-2227-4E20-B75C-4569273BBB00}"/>
               </a:ext>
             </a:extLst>
           </p:cNvPr>
@@ -7464,7 +7531,7 @@
           <p:cNvPr id="4" name="">
             <a:extLst xmlns:a="http://schemas.openxmlformats.org/drawingml/2006/main">
               <a:ext uri="{FF2B5EF4-FFF2-40B4-BE49-F238E27FC236}">
-                <a16:creationId xmlns:a16="http://schemas.microsoft.com/office/drawing/2014/main" id="{EDA6F757-DC77-4487-AD54-803D1308014C}"/>
+                <a16:creationId xmlns:a16="http://schemas.microsoft.com/office/drawing/2014/main" id="{2D30AA5A-FEC6-4DCB-A679-EFACB5009826}"/>
               </a:ext>
             </a:extLst>
           </p:cNvPr>
@@ -7528,7 +7595,7 @@
           <p:cNvPr id="5" name="">
             <a:extLst xmlns:a="http://schemas.openxmlformats.org/drawingml/2006/main">
               <a:ext uri="{FF2B5EF4-FFF2-40B4-BE49-F238E27FC236}">
-                <a16:creationId xmlns:a16="http://schemas.microsoft.com/office/drawing/2014/main" id="{4C24E7C3-0326-4DD3-9BE7-DE6F28FF2C41}"/>
+                <a16:creationId xmlns:a16="http://schemas.microsoft.com/office/drawing/2014/main" id="{2B7D6949-B0C2-43C4-B637-CC9FBF8B9531}"/>
               </a:ext>
             </a:extLst>
           </p:cNvPr>
@@ -7592,7 +7659,7 @@
           <p:cNvPr id="6" name="">
             <a:extLst xmlns:a="http://schemas.openxmlformats.org/drawingml/2006/main">
               <a:ext uri="{FF2B5EF4-FFF2-40B4-BE49-F238E27FC236}">
-                <a16:creationId xmlns:a16="http://schemas.microsoft.com/office/drawing/2014/main" id="{16082116-6FA4-43AD-8E1F-B8F4DFAD8757}"/>
+                <a16:creationId xmlns:a16="http://schemas.microsoft.com/office/drawing/2014/main" id="{0B7CFA7F-E8D8-4A71-BEC3-0B6FFE7AF95E}"/>
               </a:ext>
             </a:extLst>
           </p:cNvPr>
@@ -7656,7 +7723,7 @@
           <p:cNvPr id="7" name="">
             <a:extLst xmlns:a="http://schemas.openxmlformats.org/drawingml/2006/main">
               <a:ext uri="{FF2B5EF4-FFF2-40B4-BE49-F238E27FC236}">
-                <a16:creationId xmlns:a16="http://schemas.microsoft.com/office/drawing/2014/main" id="{B7B9B788-C9A7-45AF-A634-B1182AE66682}"/>
+                <a16:creationId xmlns:a16="http://schemas.microsoft.com/office/drawing/2014/main" id="{EF07F12D-8054-4881-9E8D-5EE5C9DF1880}"/>
               </a:ext>
             </a:extLst>
           </p:cNvPr>
@@ -7720,7 +7787,7 @@
           <p:cNvPr id="8" name="">
             <a:extLst xmlns:a="http://schemas.openxmlformats.org/drawingml/2006/main">
               <a:ext uri="{FF2B5EF4-FFF2-40B4-BE49-F238E27FC236}">
-                <a16:creationId xmlns:a16="http://schemas.microsoft.com/office/drawing/2014/main" id="{DACD318F-B48E-46C2-AFB0-862EDCAD3552}"/>
+                <a16:creationId xmlns:a16="http://schemas.microsoft.com/office/drawing/2014/main" id="{7D8971FA-8760-427D-B368-5A037F6E9DE6}"/>
               </a:ext>
             </a:extLst>
           </p:cNvPr>
@@ -7753,7 +7820,7 @@
           <p:cNvPr id="9" name="">
             <a:extLst xmlns:a="http://schemas.openxmlformats.org/drawingml/2006/main">
               <a:ext uri="{FF2B5EF4-FFF2-40B4-BE49-F238E27FC236}">
-                <a16:creationId xmlns:a16="http://schemas.microsoft.com/office/drawing/2014/main" id="{EEB80037-021F-4942-A9C4-66D5B7C033F5}"/>
+                <a16:creationId xmlns:a16="http://schemas.microsoft.com/office/drawing/2014/main" id="{0AD03BA0-98D4-4032-8532-175F3029DE88}"/>
               </a:ext>
             </a:extLst>
           </p:cNvPr>
@@ -7788,7 +7855,7 @@
           <p:cNvPr id="10" name="">
             <a:extLst xmlns:a="http://schemas.openxmlformats.org/drawingml/2006/main">
               <a:ext uri="{FF2B5EF4-FFF2-40B4-BE49-F238E27FC236}">
-                <a16:creationId xmlns:a16="http://schemas.microsoft.com/office/drawing/2014/main" id="{170D519D-922E-4D49-8FA2-35735BD84B7A}"/>
+                <a16:creationId xmlns:a16="http://schemas.microsoft.com/office/drawing/2014/main" id="{6DE18D5C-93A6-4BC2-BB57-EBB74895A63B}"/>
               </a:ext>
             </a:extLst>
           </p:cNvPr>
@@ -7852,7 +7919,7 @@
           <p:cNvPr id="11" name="">
             <a:extLst xmlns:a="http://schemas.openxmlformats.org/drawingml/2006/main">
               <a:ext uri="{FF2B5EF4-FFF2-40B4-BE49-F238E27FC236}">
-                <a16:creationId xmlns:a16="http://schemas.microsoft.com/office/drawing/2014/main" id="{F812D7CB-81EC-490F-BAF8-6B893A294EC0}"/>
+                <a16:creationId xmlns:a16="http://schemas.microsoft.com/office/drawing/2014/main" id="{F423302D-B08F-4DBF-880C-38EFDCA0A474}"/>
               </a:ext>
             </a:extLst>
           </p:cNvPr>
@@ -7916,7 +7983,7 @@
           <p:cNvPr id="12" name="">
             <a:extLst xmlns:a="http://schemas.openxmlformats.org/drawingml/2006/main">
               <a:ext uri="{FF2B5EF4-FFF2-40B4-BE49-F238E27FC236}">
-                <a16:creationId xmlns:a16="http://schemas.microsoft.com/office/drawing/2014/main" id="{D560463D-0108-41E9-9888-3A2069ACF501}"/>
+                <a16:creationId xmlns:a16="http://schemas.microsoft.com/office/drawing/2014/main" id="{E5A8A6E9-E460-4256-AAD7-72590AB2C9EF}"/>
               </a:ext>
             </a:extLst>
           </p:cNvPr>
@@ -7949,7 +8016,7 @@
           <p:cNvPr id="13" name="">
             <a:extLst xmlns:a="http://schemas.openxmlformats.org/drawingml/2006/main">
               <a:ext uri="{FF2B5EF4-FFF2-40B4-BE49-F238E27FC236}">
-                <a16:creationId xmlns:a16="http://schemas.microsoft.com/office/drawing/2014/main" id="{044C9746-AC91-4DEB-B69C-03A376494E91}"/>
+                <a16:creationId xmlns:a16="http://schemas.microsoft.com/office/drawing/2014/main" id="{6EFB7593-1473-4764-8F2D-B6F7DD04AC52}"/>
               </a:ext>
             </a:extLst>
           </p:cNvPr>
@@ -7984,7 +8051,7 @@
           <p:cNvPr id="14" name="">
             <a:extLst xmlns:a="http://schemas.openxmlformats.org/drawingml/2006/main">
               <a:ext uri="{FF2B5EF4-FFF2-40B4-BE49-F238E27FC236}">
-                <a16:creationId xmlns:a16="http://schemas.microsoft.com/office/drawing/2014/main" id="{E35DFAE2-C675-4228-B4EB-9B893E0CFA58}"/>
+                <a16:creationId xmlns:a16="http://schemas.microsoft.com/office/drawing/2014/main" id="{261AA79B-5328-4958-BE9D-7CF73563BA8F}"/>
               </a:ext>
             </a:extLst>
           </p:cNvPr>
@@ -8048,7 +8115,7 @@
           <p:cNvPr id="15" name="">
             <a:extLst xmlns:a="http://schemas.openxmlformats.org/drawingml/2006/main">
               <a:ext uri="{FF2B5EF4-FFF2-40B4-BE49-F238E27FC236}">
-                <a16:creationId xmlns:a16="http://schemas.microsoft.com/office/drawing/2014/main" id="{CE7964D0-66A7-4E22-BB6F-61DE13DC43C3}"/>
+                <a16:creationId xmlns:a16="http://schemas.microsoft.com/office/drawing/2014/main" id="{7EE7AEFA-1F7B-4D24-9582-064272DBC314}"/>
               </a:ext>
             </a:extLst>
           </p:cNvPr>
@@ -8112,7 +8179,7 @@
           <p:cNvPr id="16" name="">
             <a:extLst xmlns:a="http://schemas.openxmlformats.org/drawingml/2006/main">
               <a:ext uri="{FF2B5EF4-FFF2-40B4-BE49-F238E27FC236}">
-                <a16:creationId xmlns:a16="http://schemas.microsoft.com/office/drawing/2014/main" id="{3CD9CFAD-1D53-445B-ACCC-B96146DA0297}"/>
+                <a16:creationId xmlns:a16="http://schemas.microsoft.com/office/drawing/2014/main" id="{1176CE1E-7DA8-4A46-A51C-FD360DEEFB97}"/>
               </a:ext>
             </a:extLst>
           </p:cNvPr>
@@ -8145,7 +8212,7 @@
           <p:cNvPr id="17" name="">
             <a:extLst xmlns:a="http://schemas.openxmlformats.org/drawingml/2006/main">
               <a:ext uri="{FF2B5EF4-FFF2-40B4-BE49-F238E27FC236}">
-                <a16:creationId xmlns:a16="http://schemas.microsoft.com/office/drawing/2014/main" id="{2B8EF74F-9D37-485D-9773-6C321953DA74}"/>
+                <a16:creationId xmlns:a16="http://schemas.microsoft.com/office/drawing/2014/main" id="{B86406AD-9D2D-4BC4-ADBF-BF51613A6ED5}"/>
               </a:ext>
             </a:extLst>
           </p:cNvPr>
@@ -8180,7 +8247,7 @@
           <p:cNvPr id="18" name="">
             <a:extLst xmlns:a="http://schemas.openxmlformats.org/drawingml/2006/main">
               <a:ext uri="{FF2B5EF4-FFF2-40B4-BE49-F238E27FC236}">
-                <a16:creationId xmlns:a16="http://schemas.microsoft.com/office/drawing/2014/main" id="{D30FFA9C-E1D1-4EC4-ABCA-66E93E17D1F1}"/>
+                <a16:creationId xmlns:a16="http://schemas.microsoft.com/office/drawing/2014/main" id="{70A3DA1A-818A-4CA6-AE6F-E1F3F63E99A5}"/>
               </a:ext>
             </a:extLst>
           </p:cNvPr>
@@ -8244,7 +8311,7 @@
           <p:cNvPr id="19" name="">
             <a:extLst xmlns:a="http://schemas.openxmlformats.org/drawingml/2006/main">
               <a:ext uri="{FF2B5EF4-FFF2-40B4-BE49-F238E27FC236}">
-                <a16:creationId xmlns:a16="http://schemas.microsoft.com/office/drawing/2014/main" id="{1BA7B173-3232-46A1-8AD4-2ACCB3635DFB}"/>
+                <a16:creationId xmlns:a16="http://schemas.microsoft.com/office/drawing/2014/main" id="{2588DBC6-2684-42EE-B183-97DDE3A67D45}"/>
               </a:ext>
             </a:extLst>
           </p:cNvPr>
@@ -8308,7 +8375,7 @@
           <p:cNvPr id="20" name="">
             <a:extLst xmlns:a="http://schemas.openxmlformats.org/drawingml/2006/main">
               <a:ext uri="{FF2B5EF4-FFF2-40B4-BE49-F238E27FC236}">
-                <a16:creationId xmlns:a16="http://schemas.microsoft.com/office/drawing/2014/main" id="{1CB697AD-C3E6-4988-BAB4-F735CC032F14}"/>
+                <a16:creationId xmlns:a16="http://schemas.microsoft.com/office/drawing/2014/main" id="{D2AAA9A1-91C3-4FBF-8CA2-D8EE4D435DB5}"/>
               </a:ext>
             </a:extLst>
           </p:cNvPr>
@@ -8341,7 +8408,7 @@
           <p:cNvPr id="21" name="">
             <a:extLst xmlns:a="http://schemas.openxmlformats.org/drawingml/2006/main">
               <a:ext uri="{FF2B5EF4-FFF2-40B4-BE49-F238E27FC236}">
-                <a16:creationId xmlns:a16="http://schemas.microsoft.com/office/drawing/2014/main" id="{0DA70CAD-6CA1-40E5-939C-97CB332D5EB3}"/>
+                <a16:creationId xmlns:a16="http://schemas.microsoft.com/office/drawing/2014/main" id="{F741282D-0F66-4D42-B34D-581E2C32A4B8}"/>
               </a:ext>
             </a:extLst>
           </p:cNvPr>
@@ -8405,7 +8472,7 @@
           <p:cNvPr id="22" name="">
             <a:extLst xmlns:a="http://schemas.openxmlformats.org/drawingml/2006/main">
               <a:ext uri="{FF2B5EF4-FFF2-40B4-BE49-F238E27FC236}">
-                <a16:creationId xmlns:a16="http://schemas.microsoft.com/office/drawing/2014/main" id="{E3EC09D4-4498-4D4D-B708-E54205360AF9}"/>
+                <a16:creationId xmlns:a16="http://schemas.microsoft.com/office/drawing/2014/main" id="{A585D319-8643-4F4B-9E2E-C34A493F322D}"/>
               </a:ext>
             </a:extLst>
           </p:cNvPr>
@@ -8541,7 +8608,7 @@
     </p:spTree>
     <p:extLst>
       <p:ext uri="{BB962C8B-B14F-4D97-AF65-F5344CB8AC3E}">
-        <p14:creationId xmlns:p14="http://schemas.microsoft.com/office/powerpoint/2010/main" val="468214351"/>
+        <p14:creationId xmlns:p14="http://schemas.microsoft.com/office/powerpoint/2010/main" val="886865714"/>
       </p:ext>
     </p:extLst>
   </p:cSld>
@@ -8565,7 +8632,7 @@
           <p:cNvPr id="1" name="">
             <a:extLst xmlns:a="http://schemas.openxmlformats.org/drawingml/2006/main">
               <a:ext uri="{FF2B5EF4-FFF2-40B4-BE49-F238E27FC236}">
-                <a16:creationId xmlns:a16="http://schemas.microsoft.com/office/drawing/2014/main" id="{92A7DC8F-42F0-4AC7-AEBC-6C6BDEA70DE4}"/>
+                <a16:creationId xmlns:a16="http://schemas.microsoft.com/office/drawing/2014/main" id="{19EBD920-81C1-4B21-9CC4-E18D75B1B7D6}"/>
               </a:ext>
             </a:extLst>
           </p:cNvPr>
@@ -8600,7 +8667,7 @@
           <p:cNvPr id="2" name="">
             <a:extLst xmlns:a="http://schemas.openxmlformats.org/drawingml/2006/main">
               <a:ext uri="{FF2B5EF4-FFF2-40B4-BE49-F238E27FC236}">
-                <a16:creationId xmlns:a16="http://schemas.microsoft.com/office/drawing/2014/main" id="{785C726A-654B-43BC-B7BE-73223E0D7442}"/>
+                <a16:creationId xmlns:a16="http://schemas.microsoft.com/office/drawing/2014/main" id="{ED97288C-E8E1-4549-9D6E-7FE3CA2E9AD7}"/>
               </a:ext>
             </a:extLst>
           </p:cNvPr>
@@ -8635,7 +8702,7 @@
           <p:cNvPr id="3" name="">
             <a:extLst xmlns:a="http://schemas.openxmlformats.org/drawingml/2006/main">
               <a:ext uri="{FF2B5EF4-FFF2-40B4-BE49-F238E27FC236}">
-                <a16:creationId xmlns:a16="http://schemas.microsoft.com/office/drawing/2014/main" id="{3B48B475-1F82-4573-BD80-CFFD3E5D016D}"/>
+                <a16:creationId xmlns:a16="http://schemas.microsoft.com/office/drawing/2014/main" id="{73385721-1B59-4EF5-B8FF-B0DF9E23264A}"/>
               </a:ext>
             </a:extLst>
           </p:cNvPr>
@@ -8670,7 +8737,7 @@
           <p:cNvPr id="4" name="">
             <a:extLst xmlns:a="http://schemas.openxmlformats.org/drawingml/2006/main">
               <a:ext uri="{FF2B5EF4-FFF2-40B4-BE49-F238E27FC236}">
-                <a16:creationId xmlns:a16="http://schemas.microsoft.com/office/drawing/2014/main" id="{540D7CB0-F5B7-41D3-BE60-62E536F74A90}"/>
+                <a16:creationId xmlns:a16="http://schemas.microsoft.com/office/drawing/2014/main" id="{FDF3E853-4CD9-4676-A5E8-71676871A932}"/>
               </a:ext>
             </a:extLst>
           </p:cNvPr>
@@ -8734,7 +8801,7 @@
           <p:cNvPr id="5" name="">
             <a:extLst xmlns:a="http://schemas.openxmlformats.org/drawingml/2006/main">
               <a:ext uri="{FF2B5EF4-FFF2-40B4-BE49-F238E27FC236}">
-                <a16:creationId xmlns:a16="http://schemas.microsoft.com/office/drawing/2014/main" id="{B8FB662A-75E1-49BE-97AD-2FD7A27B2F4D}"/>
+                <a16:creationId xmlns:a16="http://schemas.microsoft.com/office/drawing/2014/main" id="{12DCBF0C-DD15-43EC-9600-FEDF92D46A89}"/>
               </a:ext>
             </a:extLst>
           </p:cNvPr>
@@ -8798,7 +8865,7 @@
           <p:cNvPr id="6" name="">
             <a:extLst xmlns:a="http://schemas.openxmlformats.org/drawingml/2006/main">
               <a:ext uri="{FF2B5EF4-FFF2-40B4-BE49-F238E27FC236}">
-                <a16:creationId xmlns:a16="http://schemas.microsoft.com/office/drawing/2014/main" id="{153D045F-53FC-4ED6-8B44-64C95AF13302}"/>
+                <a16:creationId xmlns:a16="http://schemas.microsoft.com/office/drawing/2014/main" id="{009351AF-4E52-408E-8499-122D64CAA961}"/>
               </a:ext>
             </a:extLst>
           </p:cNvPr>
@@ -8862,7 +8929,7 @@
           <p:cNvPr id="7" name="">
             <a:extLst xmlns:a="http://schemas.openxmlformats.org/drawingml/2006/main">
               <a:ext uri="{FF2B5EF4-FFF2-40B4-BE49-F238E27FC236}">
-                <a16:creationId xmlns:a16="http://schemas.microsoft.com/office/drawing/2014/main" id="{8D312E7F-DED3-4E08-8E3D-AC42029A720D}"/>
+                <a16:creationId xmlns:a16="http://schemas.microsoft.com/office/drawing/2014/main" id="{FD96FEC4-DB94-4E43-A775-02E87A9DAF35}"/>
               </a:ext>
             </a:extLst>
           </p:cNvPr>
@@ -8926,7 +8993,7 @@
           <p:cNvPr id="8" name="">
             <a:extLst xmlns:a="http://schemas.openxmlformats.org/drawingml/2006/main">
               <a:ext uri="{FF2B5EF4-FFF2-40B4-BE49-F238E27FC236}">
-                <a16:creationId xmlns:a16="http://schemas.microsoft.com/office/drawing/2014/main" id="{68D8EA7F-28F0-408F-A4FF-CEE78AE0342F}"/>
+                <a16:creationId xmlns:a16="http://schemas.microsoft.com/office/drawing/2014/main" id="{38503CEC-2AEA-48F7-92D0-64E3049A371E}"/>
               </a:ext>
             </a:extLst>
           </p:cNvPr>
@@ -8959,7 +9026,7 @@
           <p:cNvPr id="9" name="">
             <a:extLst xmlns:a="http://schemas.openxmlformats.org/drawingml/2006/main">
               <a:ext uri="{FF2B5EF4-FFF2-40B4-BE49-F238E27FC236}">
-                <a16:creationId xmlns:a16="http://schemas.microsoft.com/office/drawing/2014/main" id="{8951704C-70B2-43AF-A2D3-32F049EB9793}"/>
+                <a16:creationId xmlns:a16="http://schemas.microsoft.com/office/drawing/2014/main" id="{F8283EEF-824B-47AA-9262-D1C34197373D}"/>
               </a:ext>
             </a:extLst>
           </p:cNvPr>
@@ -8994,7 +9061,7 @@
           <p:cNvPr id="10" name="">
             <a:extLst xmlns:a="http://schemas.openxmlformats.org/drawingml/2006/main">
               <a:ext uri="{FF2B5EF4-FFF2-40B4-BE49-F238E27FC236}">
-                <a16:creationId xmlns:a16="http://schemas.microsoft.com/office/drawing/2014/main" id="{84CF53D6-45D8-473A-A401-C45B68369244}"/>
+                <a16:creationId xmlns:a16="http://schemas.microsoft.com/office/drawing/2014/main" id="{5619A1BC-A98A-4DBE-B9C8-B18B702BCF4C}"/>
               </a:ext>
             </a:extLst>
           </p:cNvPr>
@@ -9058,7 +9125,7 @@
           <p:cNvPr id="11" name="">
             <a:extLst xmlns:a="http://schemas.openxmlformats.org/drawingml/2006/main">
               <a:ext uri="{FF2B5EF4-FFF2-40B4-BE49-F238E27FC236}">
-                <a16:creationId xmlns:a16="http://schemas.microsoft.com/office/drawing/2014/main" id="{F6FAAC6C-D8F4-4478-9D8F-0529D72FE2A4}"/>
+                <a16:creationId xmlns:a16="http://schemas.microsoft.com/office/drawing/2014/main" id="{216E7CF2-91B7-483C-9876-BEB221FC875F}"/>
               </a:ext>
             </a:extLst>
           </p:cNvPr>
@@ -9122,7 +9189,7 @@
           <p:cNvPr id="12" name="">
             <a:extLst xmlns:a="http://schemas.openxmlformats.org/drawingml/2006/main">
               <a:ext uri="{FF2B5EF4-FFF2-40B4-BE49-F238E27FC236}">
-                <a16:creationId xmlns:a16="http://schemas.microsoft.com/office/drawing/2014/main" id="{C0BC808F-A5B7-499F-83E8-2D53818EEC0D}"/>
+                <a16:creationId xmlns:a16="http://schemas.microsoft.com/office/drawing/2014/main" id="{F52BC828-010B-4DAE-BAEE-7F523ECE73EA}"/>
               </a:ext>
             </a:extLst>
           </p:cNvPr>
@@ -9155,7 +9222,7 @@
           <p:cNvPr id="13" name="">
             <a:extLst xmlns:a="http://schemas.openxmlformats.org/drawingml/2006/main">
               <a:ext uri="{FF2B5EF4-FFF2-40B4-BE49-F238E27FC236}">
-                <a16:creationId xmlns:a16="http://schemas.microsoft.com/office/drawing/2014/main" id="{C2F4F96D-62EE-4691-93BD-555AD44EB1E7}"/>
+                <a16:creationId xmlns:a16="http://schemas.microsoft.com/office/drawing/2014/main" id="{7D97B6FB-15CF-442B-91A0-58673F5C8017}"/>
               </a:ext>
             </a:extLst>
           </p:cNvPr>
@@ -9190,7 +9257,7 @@
           <p:cNvPr id="14" name="">
             <a:extLst xmlns:a="http://schemas.openxmlformats.org/drawingml/2006/main">
               <a:ext uri="{FF2B5EF4-FFF2-40B4-BE49-F238E27FC236}">
-                <a16:creationId xmlns:a16="http://schemas.microsoft.com/office/drawing/2014/main" id="{4C1269F8-E774-4AF8-9CD5-3707BA641274}"/>
+                <a16:creationId xmlns:a16="http://schemas.microsoft.com/office/drawing/2014/main" id="{40FB9F1C-59A0-486D-BFED-83051DC0C498}"/>
               </a:ext>
             </a:extLst>
           </p:cNvPr>
@@ -9254,7 +9321,7 @@
           <p:cNvPr id="15" name="">
             <a:extLst xmlns:a="http://schemas.openxmlformats.org/drawingml/2006/main">
               <a:ext uri="{FF2B5EF4-FFF2-40B4-BE49-F238E27FC236}">
-                <a16:creationId xmlns:a16="http://schemas.microsoft.com/office/drawing/2014/main" id="{A0622F8E-7A0F-4B39-9281-CCA77BABA73C}"/>
+                <a16:creationId xmlns:a16="http://schemas.microsoft.com/office/drawing/2014/main" id="{DBCC420A-8FEA-4EC5-B626-5ED4DB56C141}"/>
               </a:ext>
             </a:extLst>
           </p:cNvPr>
@@ -9318,7 +9385,7 @@
           <p:cNvPr id="16" name="">
             <a:extLst xmlns:a="http://schemas.openxmlformats.org/drawingml/2006/main">
               <a:ext uri="{FF2B5EF4-FFF2-40B4-BE49-F238E27FC236}">
-                <a16:creationId xmlns:a16="http://schemas.microsoft.com/office/drawing/2014/main" id="{7F4D4080-6C0A-4A0C-95DF-8077759778D3}"/>
+                <a16:creationId xmlns:a16="http://schemas.microsoft.com/office/drawing/2014/main" id="{7F134902-AC68-405D-B62E-294A8F874872}"/>
               </a:ext>
             </a:extLst>
           </p:cNvPr>
@@ -9351,7 +9418,7 @@
           <p:cNvPr id="17" name="">
             <a:extLst xmlns:a="http://schemas.openxmlformats.org/drawingml/2006/main">
               <a:ext uri="{FF2B5EF4-FFF2-40B4-BE49-F238E27FC236}">
-                <a16:creationId xmlns:a16="http://schemas.microsoft.com/office/drawing/2014/main" id="{88FD2866-400F-42E8-B306-8851416EEC52}"/>
+                <a16:creationId xmlns:a16="http://schemas.microsoft.com/office/drawing/2014/main" id="{2BEE6783-024E-4BD9-925B-F23B6D2B8C6C}"/>
               </a:ext>
             </a:extLst>
           </p:cNvPr>
@@ -9386,7 +9453,7 @@
           <p:cNvPr id="18" name="">
             <a:extLst xmlns:a="http://schemas.openxmlformats.org/drawingml/2006/main">
               <a:ext uri="{FF2B5EF4-FFF2-40B4-BE49-F238E27FC236}">
-                <a16:creationId xmlns:a16="http://schemas.microsoft.com/office/drawing/2014/main" id="{33CCD8C0-0FED-49F4-8508-92207620DD1D}"/>
+                <a16:creationId xmlns:a16="http://schemas.microsoft.com/office/drawing/2014/main" id="{02EC69B0-D4D4-4D33-A836-7340B2710E28}"/>
               </a:ext>
             </a:extLst>
           </p:cNvPr>
@@ -9450,7 +9517,7 @@
           <p:cNvPr id="19" name="">
             <a:extLst xmlns:a="http://schemas.openxmlformats.org/drawingml/2006/main">
               <a:ext uri="{FF2B5EF4-FFF2-40B4-BE49-F238E27FC236}">
-                <a16:creationId xmlns:a16="http://schemas.microsoft.com/office/drawing/2014/main" id="{2EB6DB83-519A-4F54-BA69-D80E9B3E4B73}"/>
+                <a16:creationId xmlns:a16="http://schemas.microsoft.com/office/drawing/2014/main" id="{9E7C9750-9B66-4FF9-AD74-30C72F72CC6A}"/>
               </a:ext>
             </a:extLst>
           </p:cNvPr>
@@ -9512,7 +9579,7 @@
     </p:spTree>
     <p:extLst>
       <p:ext uri="{BB962C8B-B14F-4D97-AF65-F5344CB8AC3E}">
-        <p14:creationId xmlns:p14="http://schemas.microsoft.com/office/powerpoint/2010/main" val="1786968254"/>
+        <p14:creationId xmlns:p14="http://schemas.microsoft.com/office/powerpoint/2010/main" val="332985654"/>
       </p:ext>
     </p:extLst>
   </p:cSld>
@@ -9536,7 +9603,7 @@
           <p:cNvPr id="1" name="">
             <a:extLst xmlns:a="http://schemas.openxmlformats.org/drawingml/2006/main">
               <a:ext uri="{FF2B5EF4-FFF2-40B4-BE49-F238E27FC236}">
-                <a16:creationId xmlns:a16="http://schemas.microsoft.com/office/drawing/2014/main" id="{B683DEEE-0709-40ED-BBD4-68A77248C614}"/>
+                <a16:creationId xmlns:a16="http://schemas.microsoft.com/office/drawing/2014/main" id="{397F1114-BFD1-41A1-B212-C66DF76D4CBA}"/>
               </a:ext>
             </a:extLst>
           </p:cNvPr>
@@ -9571,7 +9638,7 @@
           <p:cNvPr id="2" name="">
             <a:extLst xmlns:a="http://schemas.openxmlformats.org/drawingml/2006/main">
               <a:ext uri="{FF2B5EF4-FFF2-40B4-BE49-F238E27FC236}">
-                <a16:creationId xmlns:a16="http://schemas.microsoft.com/office/drawing/2014/main" id="{6C0C6472-73F7-4417-BF08-6845605D47DD}"/>
+                <a16:creationId xmlns:a16="http://schemas.microsoft.com/office/drawing/2014/main" id="{D2F9E515-6102-4EC0-B885-63E83D4DAFD2}"/>
               </a:ext>
             </a:extLst>
           </p:cNvPr>
@@ -9606,7 +9673,7 @@
           <p:cNvPr id="3" name="">
             <a:extLst xmlns:a="http://schemas.openxmlformats.org/drawingml/2006/main">
               <a:ext uri="{FF2B5EF4-FFF2-40B4-BE49-F238E27FC236}">
-                <a16:creationId xmlns:a16="http://schemas.microsoft.com/office/drawing/2014/main" id="{33CE3C4E-C6B2-4681-8A61-D247A4119F01}"/>
+                <a16:creationId xmlns:a16="http://schemas.microsoft.com/office/drawing/2014/main" id="{9D104CF6-B30B-41C7-89E6-0B9EB8151A52}"/>
               </a:ext>
             </a:extLst>
           </p:cNvPr>
@@ -9641,7 +9708,7 @@
           <p:cNvPr id="4" name="">
             <a:extLst xmlns:a="http://schemas.openxmlformats.org/drawingml/2006/main">
               <a:ext uri="{FF2B5EF4-FFF2-40B4-BE49-F238E27FC236}">
-                <a16:creationId xmlns:a16="http://schemas.microsoft.com/office/drawing/2014/main" id="{CB373667-F18B-44B0-B4B5-2F9A46BA309D}"/>
+                <a16:creationId xmlns:a16="http://schemas.microsoft.com/office/drawing/2014/main" id="{CEDFD3C6-F00D-4CAE-B029-DFE0A96E0F13}"/>
               </a:ext>
             </a:extLst>
           </p:cNvPr>
@@ -9705,7 +9772,7 @@
           <p:cNvPr id="5" name="">
             <a:extLst xmlns:a="http://schemas.openxmlformats.org/drawingml/2006/main">
               <a:ext uri="{FF2B5EF4-FFF2-40B4-BE49-F238E27FC236}">
-                <a16:creationId xmlns:a16="http://schemas.microsoft.com/office/drawing/2014/main" id="{0756AE68-016C-4BD6-9317-01B7BC77AAD3}"/>
+                <a16:creationId xmlns:a16="http://schemas.microsoft.com/office/drawing/2014/main" id="{F6C91663-D470-4DBD-B50B-671E9A76DE72}"/>
               </a:ext>
             </a:extLst>
           </p:cNvPr>
@@ -9769,7 +9836,7 @@
           <p:cNvPr id="6" name="">
             <a:extLst xmlns:a="http://schemas.openxmlformats.org/drawingml/2006/main">
               <a:ext uri="{FF2B5EF4-FFF2-40B4-BE49-F238E27FC236}">
-                <a16:creationId xmlns:a16="http://schemas.microsoft.com/office/drawing/2014/main" id="{E2FB1000-DBCC-47B1-A965-2DD3D9CF8F34}"/>
+                <a16:creationId xmlns:a16="http://schemas.microsoft.com/office/drawing/2014/main" id="{08B7A23B-A0E3-463A-8C97-A7B3E854FD55}"/>
               </a:ext>
             </a:extLst>
           </p:cNvPr>
@@ -9833,7 +9900,7 @@
           <p:cNvPr id="7" name="">
             <a:extLst xmlns:a="http://schemas.openxmlformats.org/drawingml/2006/main">
               <a:ext uri="{FF2B5EF4-FFF2-40B4-BE49-F238E27FC236}">
-                <a16:creationId xmlns:a16="http://schemas.microsoft.com/office/drawing/2014/main" id="{4795823A-D88A-4574-9574-C1AB5EC97224}"/>
+                <a16:creationId xmlns:a16="http://schemas.microsoft.com/office/drawing/2014/main" id="{2EA2DD29-5509-4C8C-80F5-03F3FE1E8843}"/>
               </a:ext>
             </a:extLst>
           </p:cNvPr>
@@ -9897,7 +9964,7 @@
           <p:cNvPr id="8" name="">
             <a:extLst xmlns:a="http://schemas.openxmlformats.org/drawingml/2006/main">
               <a:ext uri="{FF2B5EF4-FFF2-40B4-BE49-F238E27FC236}">
-                <a16:creationId xmlns:a16="http://schemas.microsoft.com/office/drawing/2014/main" id="{D7806E3E-4D71-4000-A33E-82D10C2378F0}"/>
+                <a16:creationId xmlns:a16="http://schemas.microsoft.com/office/drawing/2014/main" id="{7C5038CC-CFAE-4CCF-B571-C0DC099049DD}"/>
               </a:ext>
             </a:extLst>
           </p:cNvPr>
@@ -9930,7 +9997,7 @@
           <p:cNvPr id="9" name="">
             <a:extLst xmlns:a="http://schemas.openxmlformats.org/drawingml/2006/main">
               <a:ext uri="{FF2B5EF4-FFF2-40B4-BE49-F238E27FC236}">
-                <a16:creationId xmlns:a16="http://schemas.microsoft.com/office/drawing/2014/main" id="{DF0A398A-35CD-4EE8-B49D-496D1B976306}"/>
+                <a16:creationId xmlns:a16="http://schemas.microsoft.com/office/drawing/2014/main" id="{B0EBA2E7-7EFD-4B10-95B9-1FFCAA802D90}"/>
               </a:ext>
             </a:extLst>
           </p:cNvPr>
@@ -9965,7 +10032,7 @@
           <p:cNvPr id="10" name="">
             <a:extLst xmlns:a="http://schemas.openxmlformats.org/drawingml/2006/main">
               <a:ext uri="{FF2B5EF4-FFF2-40B4-BE49-F238E27FC236}">
-                <a16:creationId xmlns:a16="http://schemas.microsoft.com/office/drawing/2014/main" id="{90AE6AB6-F1EB-4851-AF30-91C575E6F9F1}"/>
+                <a16:creationId xmlns:a16="http://schemas.microsoft.com/office/drawing/2014/main" id="{D2767A04-13C5-4048-9B97-4ACAA1298AFB}"/>
               </a:ext>
             </a:extLst>
           </p:cNvPr>
@@ -10029,7 +10096,7 @@
           <p:cNvPr id="11" name="">
             <a:extLst xmlns:a="http://schemas.openxmlformats.org/drawingml/2006/main">
               <a:ext uri="{FF2B5EF4-FFF2-40B4-BE49-F238E27FC236}">
-                <a16:creationId xmlns:a16="http://schemas.microsoft.com/office/drawing/2014/main" id="{A90157A6-3B0B-45AE-96DF-4DAE6E0317F0}"/>
+                <a16:creationId xmlns:a16="http://schemas.microsoft.com/office/drawing/2014/main" id="{8952135F-3AB3-4F12-A08B-61A536C303BD}"/>
               </a:ext>
             </a:extLst>
           </p:cNvPr>
@@ -10093,7 +10160,7 @@
           <p:cNvPr id="12" name="">
             <a:extLst xmlns:a="http://schemas.openxmlformats.org/drawingml/2006/main">
               <a:ext uri="{FF2B5EF4-FFF2-40B4-BE49-F238E27FC236}">
-                <a16:creationId xmlns:a16="http://schemas.microsoft.com/office/drawing/2014/main" id="{10C2DF4A-0FED-4E80-AA1D-958A15822278}"/>
+                <a16:creationId xmlns:a16="http://schemas.microsoft.com/office/drawing/2014/main" id="{7999B09A-F95D-4FB4-B753-FEDAF09F3942}"/>
               </a:ext>
             </a:extLst>
           </p:cNvPr>
@@ -10126,7 +10193,7 @@
           <p:cNvPr id="13" name="">
             <a:extLst xmlns:a="http://schemas.openxmlformats.org/drawingml/2006/main">
               <a:ext uri="{FF2B5EF4-FFF2-40B4-BE49-F238E27FC236}">
-                <a16:creationId xmlns:a16="http://schemas.microsoft.com/office/drawing/2014/main" id="{6BC0813F-22C6-4FED-AC86-D4F8A6E0F2D8}"/>
+                <a16:creationId xmlns:a16="http://schemas.microsoft.com/office/drawing/2014/main" id="{FBEBD762-129F-470E-89BB-6CEA88F579F2}"/>
               </a:ext>
             </a:extLst>
           </p:cNvPr>
@@ -10161,7 +10228,7 @@
           <p:cNvPr id="14" name="">
             <a:extLst xmlns:a="http://schemas.openxmlformats.org/drawingml/2006/main">
               <a:ext uri="{FF2B5EF4-FFF2-40B4-BE49-F238E27FC236}">
-                <a16:creationId xmlns:a16="http://schemas.microsoft.com/office/drawing/2014/main" id="{308E0DC8-D1C1-40D8-B89B-E40326291309}"/>
+                <a16:creationId xmlns:a16="http://schemas.microsoft.com/office/drawing/2014/main" id="{2F8EC0DD-D739-4CC1-87B8-ED0712E8405E}"/>
               </a:ext>
             </a:extLst>
           </p:cNvPr>
@@ -10225,7 +10292,7 @@
           <p:cNvPr id="15" name="">
             <a:extLst xmlns:a="http://schemas.openxmlformats.org/drawingml/2006/main">
               <a:ext uri="{FF2B5EF4-FFF2-40B4-BE49-F238E27FC236}">
-                <a16:creationId xmlns:a16="http://schemas.microsoft.com/office/drawing/2014/main" id="{08E50173-44DA-4F0D-86F7-CB11A1D1C055}"/>
+                <a16:creationId xmlns:a16="http://schemas.microsoft.com/office/drawing/2014/main" id="{AF57D2C9-61EF-4042-9D95-1553584CFB1C}"/>
               </a:ext>
             </a:extLst>
           </p:cNvPr>
@@ -10289,7 +10356,7 @@
           <p:cNvPr id="16" name="">
             <a:extLst xmlns:a="http://schemas.openxmlformats.org/drawingml/2006/main">
               <a:ext uri="{FF2B5EF4-FFF2-40B4-BE49-F238E27FC236}">
-                <a16:creationId xmlns:a16="http://schemas.microsoft.com/office/drawing/2014/main" id="{9F51FFB3-009C-44DA-9AED-113E4C12AC40}"/>
+                <a16:creationId xmlns:a16="http://schemas.microsoft.com/office/drawing/2014/main" id="{B10E16AD-CD73-44D0-B201-19EE72C8FDE5}"/>
               </a:ext>
             </a:extLst>
           </p:cNvPr>
@@ -10322,7 +10389,7 @@
           <p:cNvPr id="17" name="">
             <a:extLst xmlns:a="http://schemas.openxmlformats.org/drawingml/2006/main">
               <a:ext uri="{FF2B5EF4-FFF2-40B4-BE49-F238E27FC236}">
-                <a16:creationId xmlns:a16="http://schemas.microsoft.com/office/drawing/2014/main" id="{E5EA5DB8-6473-4996-9EB5-6CF0726AB0C6}"/>
+                <a16:creationId xmlns:a16="http://schemas.microsoft.com/office/drawing/2014/main" id="{060AA3D8-F954-4E37-B826-C26777F2727D}"/>
               </a:ext>
             </a:extLst>
           </p:cNvPr>
@@ -10357,7 +10424,7 @@
           <p:cNvPr id="18" name="">
             <a:extLst xmlns:a="http://schemas.openxmlformats.org/drawingml/2006/main">
               <a:ext uri="{FF2B5EF4-FFF2-40B4-BE49-F238E27FC236}">
-                <a16:creationId xmlns:a16="http://schemas.microsoft.com/office/drawing/2014/main" id="{DD91BD3C-0404-48B7-8108-2ABDB3CA7401}"/>
+                <a16:creationId xmlns:a16="http://schemas.microsoft.com/office/drawing/2014/main" id="{CEAB0038-D5A4-4DAC-A584-39E2AB47BC41}"/>
               </a:ext>
             </a:extLst>
           </p:cNvPr>
@@ -10421,7 +10488,7 @@
           <p:cNvPr id="19" name="">
             <a:extLst xmlns:a="http://schemas.openxmlformats.org/drawingml/2006/main">
               <a:ext uri="{FF2B5EF4-FFF2-40B4-BE49-F238E27FC236}">
-                <a16:creationId xmlns:a16="http://schemas.microsoft.com/office/drawing/2014/main" id="{3E552856-9D69-4C64-8375-B31FB1704683}"/>
+                <a16:creationId xmlns:a16="http://schemas.microsoft.com/office/drawing/2014/main" id="{7A81EA2B-C5E0-4552-A968-0B1683A212BB}"/>
               </a:ext>
             </a:extLst>
           </p:cNvPr>
@@ -10485,7 +10552,7 @@
           <p:cNvPr id="20" name="">
             <a:extLst xmlns:a="http://schemas.openxmlformats.org/drawingml/2006/main">
               <a:ext uri="{FF2B5EF4-FFF2-40B4-BE49-F238E27FC236}">
-                <a16:creationId xmlns:a16="http://schemas.microsoft.com/office/drawing/2014/main" id="{8C8E24AA-49F5-4810-90CE-C159893E6A75}"/>
+                <a16:creationId xmlns:a16="http://schemas.microsoft.com/office/drawing/2014/main" id="{2BE75606-2A5E-4D96-BD7B-9A9C24CB4F36}"/>
               </a:ext>
             </a:extLst>
           </p:cNvPr>
@@ -10518,7 +10585,7 @@
           <p:cNvPr id="21" name="">
             <a:extLst xmlns:a="http://schemas.openxmlformats.org/drawingml/2006/main">
               <a:ext uri="{FF2B5EF4-FFF2-40B4-BE49-F238E27FC236}">
-                <a16:creationId xmlns:a16="http://schemas.microsoft.com/office/drawing/2014/main" id="{7ED2A035-4D79-464C-8BF7-A01FD4F10AFC}"/>
+                <a16:creationId xmlns:a16="http://schemas.microsoft.com/office/drawing/2014/main" id="{015F2F79-91C9-4C89-9B1C-AF25FFC63EC6}"/>
               </a:ext>
             </a:extLst>
           </p:cNvPr>
@@ -10582,7 +10649,7 @@
           <p:cNvPr id="22" name="">
             <a:extLst xmlns:a="http://schemas.openxmlformats.org/drawingml/2006/main">
               <a:ext uri="{FF2B5EF4-FFF2-40B4-BE49-F238E27FC236}">
-                <a16:creationId xmlns:a16="http://schemas.microsoft.com/office/drawing/2014/main" id="{80BB6CA3-9BDB-4BEF-AAFC-D6CA2C7F693F}"/>
+                <a16:creationId xmlns:a16="http://schemas.microsoft.com/office/drawing/2014/main" id="{D49D66EC-EB88-4403-9282-7BEB9689C68E}"/>
               </a:ext>
             </a:extLst>
           </p:cNvPr>
@@ -10713,7 +10780,7 @@
     </p:spTree>
     <p:extLst>
       <p:ext uri="{BB962C8B-B14F-4D97-AF65-F5344CB8AC3E}">
-        <p14:creationId xmlns:p14="http://schemas.microsoft.com/office/powerpoint/2010/main" val="1541375060"/>
+        <p14:creationId xmlns:p14="http://schemas.microsoft.com/office/powerpoint/2010/main" val="576275978"/>
       </p:ext>
     </p:extLst>
   </p:cSld>
@@ -10737,7 +10804,7 @@
           <p:cNvPr id="1" name="">
             <a:extLst xmlns:a="http://schemas.openxmlformats.org/drawingml/2006/main">
               <a:ext uri="{FF2B5EF4-FFF2-40B4-BE49-F238E27FC236}">
-                <a16:creationId xmlns:a16="http://schemas.microsoft.com/office/drawing/2014/main" id="{20C82D91-62FC-4BED-A988-6FAC67C0124D}"/>
+                <a16:creationId xmlns:a16="http://schemas.microsoft.com/office/drawing/2014/main" id="{8796CE46-0581-45CE-AF22-375259B18595}"/>
               </a:ext>
             </a:extLst>
           </p:cNvPr>
@@ -10772,7 +10839,7 @@
           <p:cNvPr id="2" name="">
             <a:extLst xmlns:a="http://schemas.openxmlformats.org/drawingml/2006/main">
               <a:ext uri="{FF2B5EF4-FFF2-40B4-BE49-F238E27FC236}">
-                <a16:creationId xmlns:a16="http://schemas.microsoft.com/office/drawing/2014/main" id="{4BAA2D24-F0F7-46B7-BB6D-D343FF48CA57}"/>
+                <a16:creationId xmlns:a16="http://schemas.microsoft.com/office/drawing/2014/main" id="{5F7EA2F3-FD50-4FEA-8B9B-E84A823977CA}"/>
               </a:ext>
             </a:extLst>
           </p:cNvPr>
@@ -10807,7 +10874,7 @@
           <p:cNvPr id="3" name="">
             <a:extLst xmlns:a="http://schemas.openxmlformats.org/drawingml/2006/main">
               <a:ext uri="{FF2B5EF4-FFF2-40B4-BE49-F238E27FC236}">
-                <a16:creationId xmlns:a16="http://schemas.microsoft.com/office/drawing/2014/main" id="{333C15C9-EB90-44DC-8EA6-57EE9339484B}"/>
+                <a16:creationId xmlns:a16="http://schemas.microsoft.com/office/drawing/2014/main" id="{DE495E79-5364-4632-B6BE-56DB52059596}"/>
               </a:ext>
             </a:extLst>
           </p:cNvPr>
@@ -10842,7 +10909,7 @@
           <p:cNvPr id="4" name="">
             <a:extLst xmlns:a="http://schemas.openxmlformats.org/drawingml/2006/main">
               <a:ext uri="{FF2B5EF4-FFF2-40B4-BE49-F238E27FC236}">
-                <a16:creationId xmlns:a16="http://schemas.microsoft.com/office/drawing/2014/main" id="{C8477C07-9624-46E5-98AF-AD83DB81AFAB}"/>
+                <a16:creationId xmlns:a16="http://schemas.microsoft.com/office/drawing/2014/main" id="{209A3FC8-0100-40B1-A6B5-5C6E35BBBD32}"/>
               </a:ext>
             </a:extLst>
           </p:cNvPr>
@@ -10906,7 +10973,7 @@
           <p:cNvPr id="5" name="">
             <a:extLst xmlns:a="http://schemas.openxmlformats.org/drawingml/2006/main">
               <a:ext uri="{FF2B5EF4-FFF2-40B4-BE49-F238E27FC236}">
-                <a16:creationId xmlns:a16="http://schemas.microsoft.com/office/drawing/2014/main" id="{A9258310-5A3F-44ED-95FD-E5A8CED2691E}"/>
+                <a16:creationId xmlns:a16="http://schemas.microsoft.com/office/drawing/2014/main" id="{81939423-CA89-4D7B-994F-8DF9C4346461}"/>
               </a:ext>
             </a:extLst>
           </p:cNvPr>
@@ -10970,7 +11037,7 @@
           <p:cNvPr id="6" name="">
             <a:extLst xmlns:a="http://schemas.openxmlformats.org/drawingml/2006/main">
               <a:ext uri="{FF2B5EF4-FFF2-40B4-BE49-F238E27FC236}">
-                <a16:creationId xmlns:a16="http://schemas.microsoft.com/office/drawing/2014/main" id="{DAA77F10-E68C-45D3-B57D-57D835629652}"/>
+                <a16:creationId xmlns:a16="http://schemas.microsoft.com/office/drawing/2014/main" id="{48E132E8-1E79-4454-A981-7FB2916763DD}"/>
               </a:ext>
             </a:extLst>
           </p:cNvPr>
@@ -11034,7 +11101,7 @@
           <p:cNvPr id="7" name="">
             <a:extLst xmlns:a="http://schemas.openxmlformats.org/drawingml/2006/main">
               <a:ext uri="{FF2B5EF4-FFF2-40B4-BE49-F238E27FC236}">
-                <a16:creationId xmlns:a16="http://schemas.microsoft.com/office/drawing/2014/main" id="{2EA094F0-85FC-40C2-9CCE-886060891C50}"/>
+                <a16:creationId xmlns:a16="http://schemas.microsoft.com/office/drawing/2014/main" id="{EC1DBBD2-0AE7-495C-BF01-18407E493E80}"/>
               </a:ext>
             </a:extLst>
           </p:cNvPr>
@@ -11098,7 +11165,7 @@
           <p:cNvPr id="8" name="">
             <a:extLst xmlns:a="http://schemas.openxmlformats.org/drawingml/2006/main">
               <a:ext uri="{FF2B5EF4-FFF2-40B4-BE49-F238E27FC236}">
-                <a16:creationId xmlns:a16="http://schemas.microsoft.com/office/drawing/2014/main" id="{478702BF-311E-43A5-BFC3-D567CD711567}"/>
+                <a16:creationId xmlns:a16="http://schemas.microsoft.com/office/drawing/2014/main" id="{682A635D-6793-4B14-9986-DF6AC6FB926E}"/>
               </a:ext>
             </a:extLst>
           </p:cNvPr>
@@ -11131,7 +11198,7 @@
           <p:cNvPr id="9" name="">
             <a:extLst xmlns:a="http://schemas.openxmlformats.org/drawingml/2006/main">
               <a:ext uri="{FF2B5EF4-FFF2-40B4-BE49-F238E27FC236}">
-                <a16:creationId xmlns:a16="http://schemas.microsoft.com/office/drawing/2014/main" id="{1CFF18EC-9F52-4819-86AB-F37AC94617D0}"/>
+                <a16:creationId xmlns:a16="http://schemas.microsoft.com/office/drawing/2014/main" id="{751F121E-3F81-4316-B2D5-006E7B52D1FA}"/>
               </a:ext>
             </a:extLst>
           </p:cNvPr>
@@ -11166,7 +11233,7 @@
           <p:cNvPr id="10" name="">
             <a:extLst xmlns:a="http://schemas.openxmlformats.org/drawingml/2006/main">
               <a:ext uri="{FF2B5EF4-FFF2-40B4-BE49-F238E27FC236}">
-                <a16:creationId xmlns:a16="http://schemas.microsoft.com/office/drawing/2014/main" id="{DC1FDF87-27F6-4350-A50D-C7CA62BF33ED}"/>
+                <a16:creationId xmlns:a16="http://schemas.microsoft.com/office/drawing/2014/main" id="{20DDC99B-BE0D-49AE-B1C7-B054E725B12D}"/>
               </a:ext>
             </a:extLst>
           </p:cNvPr>
@@ -11230,7 +11297,7 @@
           <p:cNvPr id="11" name="">
             <a:extLst xmlns:a="http://schemas.openxmlformats.org/drawingml/2006/main">
               <a:ext uri="{FF2B5EF4-FFF2-40B4-BE49-F238E27FC236}">
-                <a16:creationId xmlns:a16="http://schemas.microsoft.com/office/drawing/2014/main" id="{E4B7EB6E-A47E-4AA0-9362-713B084DD140}"/>
+                <a16:creationId xmlns:a16="http://schemas.microsoft.com/office/drawing/2014/main" id="{ABE873EA-D781-40EB-B6FD-8BFE3DC0137F}"/>
               </a:ext>
             </a:extLst>
           </p:cNvPr>
@@ -11294,7 +11361,7 @@
           <p:cNvPr id="12" name="">
             <a:extLst xmlns:a="http://schemas.openxmlformats.org/drawingml/2006/main">
               <a:ext uri="{FF2B5EF4-FFF2-40B4-BE49-F238E27FC236}">
-                <a16:creationId xmlns:a16="http://schemas.microsoft.com/office/drawing/2014/main" id="{44462F46-4E8A-43F3-8C16-6927AEFF5446}"/>
+                <a16:creationId xmlns:a16="http://schemas.microsoft.com/office/drawing/2014/main" id="{F6C4B449-1F7D-4243-806B-5D6751EB3A24}"/>
               </a:ext>
             </a:extLst>
           </p:cNvPr>
@@ -11327,7 +11394,7 @@
           <p:cNvPr id="13" name="">
             <a:extLst xmlns:a="http://schemas.openxmlformats.org/drawingml/2006/main">
               <a:ext uri="{FF2B5EF4-FFF2-40B4-BE49-F238E27FC236}">
-                <a16:creationId xmlns:a16="http://schemas.microsoft.com/office/drawing/2014/main" id="{A0DEDCDD-7E0C-4892-ADD4-59340BA5A790}"/>
+                <a16:creationId xmlns:a16="http://schemas.microsoft.com/office/drawing/2014/main" id="{A91D10E0-CD1C-4B80-A6EF-3D7BB93F6DF3}"/>
               </a:ext>
             </a:extLst>
           </p:cNvPr>
@@ -11362,7 +11429,7 @@
           <p:cNvPr id="14" name="">
             <a:extLst xmlns:a="http://schemas.openxmlformats.org/drawingml/2006/main">
               <a:ext uri="{FF2B5EF4-FFF2-40B4-BE49-F238E27FC236}">
-                <a16:creationId xmlns:a16="http://schemas.microsoft.com/office/drawing/2014/main" id="{E396FAD7-4321-4748-8EAD-87E5CADF0C6B}"/>
+                <a16:creationId xmlns:a16="http://schemas.microsoft.com/office/drawing/2014/main" id="{C3212061-4F50-481E-8AAD-713DEFD830D4}"/>
               </a:ext>
             </a:extLst>
           </p:cNvPr>
@@ -11426,7 +11493,7 @@
           <p:cNvPr id="15" name="">
             <a:extLst xmlns:a="http://schemas.openxmlformats.org/drawingml/2006/main">
               <a:ext uri="{FF2B5EF4-FFF2-40B4-BE49-F238E27FC236}">
-                <a16:creationId xmlns:a16="http://schemas.microsoft.com/office/drawing/2014/main" id="{9766E500-91C8-4D5E-9CAB-4BC0334052C8}"/>
+                <a16:creationId xmlns:a16="http://schemas.microsoft.com/office/drawing/2014/main" id="{C01C17B1-2E6C-4DA7-AA2E-57B42A2B25E9}"/>
               </a:ext>
             </a:extLst>
           </p:cNvPr>
@@ -11490,7 +11557,7 @@
           <p:cNvPr id="16" name="">
             <a:extLst xmlns:a="http://schemas.openxmlformats.org/drawingml/2006/main">
               <a:ext uri="{FF2B5EF4-FFF2-40B4-BE49-F238E27FC236}">
-                <a16:creationId xmlns:a16="http://schemas.microsoft.com/office/drawing/2014/main" id="{8CF73A6D-34C5-422C-B09F-22199051691E}"/>
+                <a16:creationId xmlns:a16="http://schemas.microsoft.com/office/drawing/2014/main" id="{8F313793-9EE6-4941-8B9D-2F478D1E26C5}"/>
               </a:ext>
             </a:extLst>
           </p:cNvPr>
@@ -11523,7 +11590,7 @@
           <p:cNvPr id="17" name="">
             <a:extLst xmlns:a="http://schemas.openxmlformats.org/drawingml/2006/main">
               <a:ext uri="{FF2B5EF4-FFF2-40B4-BE49-F238E27FC236}">
-                <a16:creationId xmlns:a16="http://schemas.microsoft.com/office/drawing/2014/main" id="{E87D0F13-1AF4-4163-891C-931DC85E63DF}"/>
+                <a16:creationId xmlns:a16="http://schemas.microsoft.com/office/drawing/2014/main" id="{F7468CD1-B1F7-42DF-A30E-ABB29A4ADE5D}"/>
               </a:ext>
             </a:extLst>
           </p:cNvPr>
@@ -11558,7 +11625,7 @@
           <p:cNvPr id="18" name="">
             <a:extLst xmlns:a="http://schemas.openxmlformats.org/drawingml/2006/main">
               <a:ext uri="{FF2B5EF4-FFF2-40B4-BE49-F238E27FC236}">
-                <a16:creationId xmlns:a16="http://schemas.microsoft.com/office/drawing/2014/main" id="{E656C477-5415-4133-8EBE-D61240134684}"/>
+                <a16:creationId xmlns:a16="http://schemas.microsoft.com/office/drawing/2014/main" id="{3CD4285E-736B-4A92-A5C8-1ED12FC9215E}"/>
               </a:ext>
             </a:extLst>
           </p:cNvPr>
@@ -11622,7 +11689,7 @@
           <p:cNvPr id="19" name="">
             <a:extLst xmlns:a="http://schemas.openxmlformats.org/drawingml/2006/main">
               <a:ext uri="{FF2B5EF4-FFF2-40B4-BE49-F238E27FC236}">
-                <a16:creationId xmlns:a16="http://schemas.microsoft.com/office/drawing/2014/main" id="{BF163931-9E32-4C7E-8F37-08A8661EFE67}"/>
+                <a16:creationId xmlns:a16="http://schemas.microsoft.com/office/drawing/2014/main" id="{647346F3-4806-4820-9715-6DD52066360B}"/>
               </a:ext>
             </a:extLst>
           </p:cNvPr>
@@ -11684,7 +11751,7 @@
     </p:spTree>
     <p:extLst>
       <p:ext uri="{BB962C8B-B14F-4D97-AF65-F5344CB8AC3E}">
-        <p14:creationId xmlns:p14="http://schemas.microsoft.com/office/powerpoint/2010/main" val="1798046349"/>
+        <p14:creationId xmlns:p14="http://schemas.microsoft.com/office/powerpoint/2010/main" val="1397976338"/>
       </p:ext>
     </p:extLst>
   </p:cSld>
@@ -11708,7 +11775,7 @@
           <p:cNvPr id="1" name="">
             <a:extLst xmlns:a="http://schemas.openxmlformats.org/drawingml/2006/main">
               <a:ext uri="{FF2B5EF4-FFF2-40B4-BE49-F238E27FC236}">
-                <a16:creationId xmlns:a16="http://schemas.microsoft.com/office/drawing/2014/main" id="{E0894F53-A8B7-44E2-AC94-B343FD7578E5}"/>
+                <a16:creationId xmlns:a16="http://schemas.microsoft.com/office/drawing/2014/main" id="{19A83839-7C12-4D98-A7C5-AFA81170F239}"/>
               </a:ext>
             </a:extLst>
           </p:cNvPr>
@@ -11743,7 +11810,7 @@
           <p:cNvPr id="2" name="">
             <a:extLst xmlns:a="http://schemas.openxmlformats.org/drawingml/2006/main">
               <a:ext uri="{FF2B5EF4-FFF2-40B4-BE49-F238E27FC236}">
-                <a16:creationId xmlns:a16="http://schemas.microsoft.com/office/drawing/2014/main" id="{3C758BB1-AE45-4422-91E8-FEF815029B01}"/>
+                <a16:creationId xmlns:a16="http://schemas.microsoft.com/office/drawing/2014/main" id="{74646F29-F54B-4F10-B363-289BDFE41CBD}"/>
               </a:ext>
             </a:extLst>
           </p:cNvPr>
@@ -11778,7 +11845,7 @@
           <p:cNvPr id="3" name="">
             <a:extLst xmlns:a="http://schemas.openxmlformats.org/drawingml/2006/main">
               <a:ext uri="{FF2B5EF4-FFF2-40B4-BE49-F238E27FC236}">
-                <a16:creationId xmlns:a16="http://schemas.microsoft.com/office/drawing/2014/main" id="{D6746D45-0870-4B9E-BF06-FE81AAA21D7A}"/>
+                <a16:creationId xmlns:a16="http://schemas.microsoft.com/office/drawing/2014/main" id="{C13ADB4B-2A53-49CB-ADEC-03C47BD4DE9E}"/>
               </a:ext>
             </a:extLst>
           </p:cNvPr>
@@ -11813,7 +11880,7 @@
           <p:cNvPr id="4" name="">
             <a:extLst xmlns:a="http://schemas.openxmlformats.org/drawingml/2006/main">
               <a:ext uri="{FF2B5EF4-FFF2-40B4-BE49-F238E27FC236}">
-                <a16:creationId xmlns:a16="http://schemas.microsoft.com/office/drawing/2014/main" id="{3B5CAD4C-A903-47FB-8A30-98C5DB758E00}"/>
+                <a16:creationId xmlns:a16="http://schemas.microsoft.com/office/drawing/2014/main" id="{7C6498F9-1C75-401F-A3C5-31392ED1D26D}"/>
               </a:ext>
             </a:extLst>
           </p:cNvPr>
@@ -11877,7 +11944,7 @@
           <p:cNvPr id="5" name="">
             <a:extLst xmlns:a="http://schemas.openxmlformats.org/drawingml/2006/main">
               <a:ext uri="{FF2B5EF4-FFF2-40B4-BE49-F238E27FC236}">
-                <a16:creationId xmlns:a16="http://schemas.microsoft.com/office/drawing/2014/main" id="{D940BD38-B674-41A0-BBC1-A7B32258A525}"/>
+                <a16:creationId xmlns:a16="http://schemas.microsoft.com/office/drawing/2014/main" id="{28572DFA-88DA-422A-942B-1F99DB2F55FA}"/>
               </a:ext>
             </a:extLst>
           </p:cNvPr>
@@ -11931,7 +11998,7 @@
                 <a:ea typeface="Aptos Display"/>
                 <a:cs typeface="Aptos Display"/>
               </a:rPr>
-              <a:t>Partitioning intro: pruning/retention != distribution</a:t>
+              <a:t>Partitioning strategies: RANGE / LIST / HASH</a:t>
             </a:r>
           </a:p>
         </p:txBody>
@@ -11941,7 +12008,7 @@
           <p:cNvPr id="6" name="">
             <a:extLst xmlns:a="http://schemas.openxmlformats.org/drawingml/2006/main">
               <a:ext uri="{FF2B5EF4-FFF2-40B4-BE49-F238E27FC236}">
-                <a16:creationId xmlns:a16="http://schemas.microsoft.com/office/drawing/2014/main" id="{A02E49C9-30CE-40EC-A08D-3CA0F2142DCB}"/>
+                <a16:creationId xmlns:a16="http://schemas.microsoft.com/office/drawing/2014/main" id="{A39AE950-371A-4D67-B2FE-14641BC80C22}"/>
               </a:ext>
             </a:extLst>
           </p:cNvPr>
@@ -11995,7 +12062,7 @@
                 <a:ea typeface="Aptos"/>
                 <a:cs typeface="Aptos"/>
               </a:rPr>
-              <a:t>Partitioning режет таблицу внутри logical table; distribution размещает строки по сегментам.</a:t>
+              <a:t>Partitioning режет logical table для pruning/retention; distribution размещает строки по сегментам.</a:t>
             </a:r>
           </a:p>
         </p:txBody>
@@ -12005,7 +12072,7 @@
           <p:cNvPr id="7" name="">
             <a:extLst xmlns:a="http://schemas.openxmlformats.org/drawingml/2006/main">
               <a:ext uri="{FF2B5EF4-FFF2-40B4-BE49-F238E27FC236}">
-                <a16:creationId xmlns:a16="http://schemas.microsoft.com/office/drawing/2014/main" id="{65CABDC5-21E9-4754-9AD2-357D26EF369F}"/>
+                <a16:creationId xmlns:a16="http://schemas.microsoft.com/office/drawing/2014/main" id="{8ACA0114-1319-4BF4-B1F2-BFA47829B37A}"/>
               </a:ext>
             </a:extLst>
           </p:cNvPr>
@@ -12069,7 +12136,7 @@
           <p:cNvPr id="8" name="">
             <a:extLst xmlns:a="http://schemas.openxmlformats.org/drawingml/2006/main">
               <a:ext uri="{FF2B5EF4-FFF2-40B4-BE49-F238E27FC236}">
-                <a16:creationId xmlns:a16="http://schemas.microsoft.com/office/drawing/2014/main" id="{C89909D3-1671-4111-AAEE-23B21240A16E}"/>
+                <a16:creationId xmlns:a16="http://schemas.microsoft.com/office/drawing/2014/main" id="{A5684C68-4494-4BE6-A9C5-E2382097E9EE}"/>
               </a:ext>
             </a:extLst>
           </p:cNvPr>
@@ -12081,7 +12148,7 @@
         <p:spPr>
           <a:xfrm xmlns:a="http://schemas.openxmlformats.org/drawingml/2006/main">
             <a:off x="571500" y="2333625"/>
-            <a:ext cx="4953000" cy="1257300"/>
+            <a:ext cx="3333750" cy="1257300"/>
           </a:xfrm>
           <a:prstGeom xmlns:a="http://schemas.openxmlformats.org/drawingml/2006/main" prst="rect">
             <a:avLst/>
@@ -12102,7 +12169,7 @@
           <p:cNvPr id="9" name="">
             <a:extLst xmlns:a="http://schemas.openxmlformats.org/drawingml/2006/main">
               <a:ext uri="{FF2B5EF4-FFF2-40B4-BE49-F238E27FC236}">
-                <a16:creationId xmlns:a16="http://schemas.microsoft.com/office/drawing/2014/main" id="{9C5E10FD-78A1-4F9A-8E5F-D3FCD7069CCB}"/>
+                <a16:creationId xmlns:a16="http://schemas.microsoft.com/office/drawing/2014/main" id="{F12D1322-3E3E-4ECA-9BD9-AE1B10AD4EDD}"/>
               </a:ext>
             </a:extLst>
           </p:cNvPr>
@@ -12137,7 +12204,7 @@
           <p:cNvPr id="10" name="">
             <a:extLst xmlns:a="http://schemas.openxmlformats.org/drawingml/2006/main">
               <a:ext uri="{FF2B5EF4-FFF2-40B4-BE49-F238E27FC236}">
-                <a16:creationId xmlns:a16="http://schemas.microsoft.com/office/drawing/2014/main" id="{16191091-2D6C-424E-AB49-1607C2DD3CA8}"/>
+                <a16:creationId xmlns:a16="http://schemas.microsoft.com/office/drawing/2014/main" id="{178BF394-66EA-4C57-B153-B316403D3A32}"/>
               </a:ext>
             </a:extLst>
           </p:cNvPr>
@@ -12149,7 +12216,7 @@
         <p:spPr>
           <a:xfrm xmlns:a="http://schemas.openxmlformats.org/drawingml/2006/main">
             <a:off x="781050" y="2676525"/>
-            <a:ext cx="4572000" cy="514350"/>
+            <a:ext cx="2952750" cy="514350"/>
           </a:xfrm>
           <a:prstGeom xmlns:a="http://schemas.openxmlformats.org/drawingml/2006/main" prst="rect">
             <a:avLst/>
@@ -12191,7 +12258,7 @@
                 <a:ea typeface="Aptos"/>
                 <a:cs typeface="Aptos"/>
               </a:rPr>
-              <a:t>Pruning</a:t>
+              <a:t>PARTITION BY RANGE</a:t>
             </a:r>
           </a:p>
         </p:txBody>
@@ -12201,7 +12268,7 @@
           <p:cNvPr id="11" name="">
             <a:extLst xmlns:a="http://schemas.openxmlformats.org/drawingml/2006/main">
               <a:ext uri="{FF2B5EF4-FFF2-40B4-BE49-F238E27FC236}">
-                <a16:creationId xmlns:a16="http://schemas.microsoft.com/office/drawing/2014/main" id="{DF227BE7-CB6C-40F4-9796-9C338A999B49}"/>
+                <a16:creationId xmlns:a16="http://schemas.microsoft.com/office/drawing/2014/main" id="{7333E019-E622-48EF-83D1-BAB73142C65E}"/>
               </a:ext>
             </a:extLst>
           </p:cNvPr>
@@ -12213,7 +12280,7 @@
         <p:spPr>
           <a:xfrm xmlns:a="http://schemas.openxmlformats.org/drawingml/2006/main">
             <a:off x="781050" y="3209925"/>
-            <a:ext cx="4552950" cy="381000"/>
+            <a:ext cx="2933700" cy="381000"/>
           </a:xfrm>
           <a:prstGeom xmlns:a="http://schemas.openxmlformats.org/drawingml/2006/main" prst="rect">
             <a:avLst/>
@@ -12255,7 +12322,7 @@
                 <a:ea typeface="Aptos"/>
                 <a:cs typeface="Aptos"/>
               </a:rPr>
-              <a:t>Фильтр по sale_date может читать только нужные partitions.</a:t>
+              <a:t>Даты/числа: pruning, retention, monthly/daily windows.</a:t>
             </a:r>
           </a:p>
         </p:txBody>
@@ -12265,19 +12332,19 @@
           <p:cNvPr id="12" name="">
             <a:extLst xmlns:a="http://schemas.openxmlformats.org/drawingml/2006/main">
               <a:ext uri="{FF2B5EF4-FFF2-40B4-BE49-F238E27FC236}">
-                <a16:creationId xmlns:a16="http://schemas.microsoft.com/office/drawing/2014/main" id="{9ABB7861-F8FB-42E7-BCB2-BA9029A2A0DE}"/>
-              </a:ext>
-            </a:extLst>
-          </p:cNvPr>
-          <p:cNvSpPr>
-            <a:spLocks xmlns:a="http://schemas.openxmlformats.org/drawingml/2006/main" noGrp="1"/>
-          </p:cNvSpPr>
-          <p:nvPr/>
-        </p:nvSpPr>
-        <p:spPr>
-          <a:xfrm xmlns:a="http://schemas.openxmlformats.org/drawingml/2006/main">
-            <a:off x="6191250" y="2333625"/>
-            <a:ext cx="4953000" cy="1257300"/>
+                <a16:creationId xmlns:a16="http://schemas.microsoft.com/office/drawing/2014/main" id="{12DE31E7-4B37-46D3-9389-9DD059E83156}"/>
+              </a:ext>
+            </a:extLst>
+          </p:cNvPr>
+          <p:cNvSpPr>
+            <a:spLocks xmlns:a="http://schemas.openxmlformats.org/drawingml/2006/main" noGrp="1"/>
+          </p:cNvSpPr>
+          <p:nvPr/>
+        </p:nvSpPr>
+        <p:spPr>
+          <a:xfrm xmlns:a="http://schemas.openxmlformats.org/drawingml/2006/main">
+            <a:off x="4429125" y="2333625"/>
+            <a:ext cx="3333750" cy="1257300"/>
           </a:xfrm>
           <a:prstGeom xmlns:a="http://schemas.openxmlformats.org/drawingml/2006/main" prst="rect">
             <a:avLst/>
@@ -12298,18 +12365,18 @@
           <p:cNvPr id="13" name="">
             <a:extLst xmlns:a="http://schemas.openxmlformats.org/drawingml/2006/main">
               <a:ext uri="{FF2B5EF4-FFF2-40B4-BE49-F238E27FC236}">
-                <a16:creationId xmlns:a16="http://schemas.microsoft.com/office/drawing/2014/main" id="{A9033E21-1F99-438D-8DB2-B2F6B01B96E0}"/>
-              </a:ext>
-            </a:extLst>
-          </p:cNvPr>
-          <p:cNvSpPr>
-            <a:spLocks xmlns:a="http://schemas.openxmlformats.org/drawingml/2006/main" noGrp="1"/>
-          </p:cNvSpPr>
-          <p:nvPr/>
-        </p:nvSpPr>
-        <p:spPr>
-          <a:xfrm xmlns:a="http://schemas.openxmlformats.org/drawingml/2006/main">
-            <a:off x="6362700" y="2505075"/>
+                <a16:creationId xmlns:a16="http://schemas.microsoft.com/office/drawing/2014/main" id="{597E36DB-414A-41F5-83DF-7DBEBB018744}"/>
+              </a:ext>
+            </a:extLst>
+          </p:cNvPr>
+          <p:cNvSpPr>
+            <a:spLocks xmlns:a="http://schemas.openxmlformats.org/drawingml/2006/main" noGrp="1"/>
+          </p:cNvSpPr>
+          <p:nvPr/>
+        </p:nvSpPr>
+        <p:spPr>
+          <a:xfrm xmlns:a="http://schemas.openxmlformats.org/drawingml/2006/main">
+            <a:off x="4600575" y="2505075"/>
             <a:ext cx="400050" cy="38100"/>
           </a:xfrm>
           <a:prstGeom xmlns:a="http://schemas.openxmlformats.org/drawingml/2006/main" prst="rect">
@@ -12333,19 +12400,19 @@
           <p:cNvPr id="14" name="">
             <a:extLst xmlns:a="http://schemas.openxmlformats.org/drawingml/2006/main">
               <a:ext uri="{FF2B5EF4-FFF2-40B4-BE49-F238E27FC236}">
-                <a16:creationId xmlns:a16="http://schemas.microsoft.com/office/drawing/2014/main" id="{1F782CD5-5DD0-4FF3-938A-DBF627E00B73}"/>
-              </a:ext>
-            </a:extLst>
-          </p:cNvPr>
-          <p:cNvSpPr>
-            <a:spLocks xmlns:a="http://schemas.openxmlformats.org/drawingml/2006/main" noGrp="1"/>
-          </p:cNvSpPr>
-          <p:nvPr/>
-        </p:nvSpPr>
-        <p:spPr>
-          <a:xfrm xmlns:a="http://schemas.openxmlformats.org/drawingml/2006/main">
-            <a:off x="6400800" y="2676525"/>
-            <a:ext cx="4572000" cy="514350"/>
+                <a16:creationId xmlns:a16="http://schemas.microsoft.com/office/drawing/2014/main" id="{20CDDBCE-ABB3-4416-8EF0-EC8167C23B98}"/>
+              </a:ext>
+            </a:extLst>
+          </p:cNvPr>
+          <p:cNvSpPr>
+            <a:spLocks xmlns:a="http://schemas.openxmlformats.org/drawingml/2006/main" noGrp="1"/>
+          </p:cNvSpPr>
+          <p:nvPr/>
+        </p:nvSpPr>
+        <p:spPr>
+          <a:xfrm xmlns:a="http://schemas.openxmlformats.org/drawingml/2006/main">
+            <a:off x="4638675" y="2676525"/>
+            <a:ext cx="2952750" cy="514350"/>
           </a:xfrm>
           <a:prstGeom xmlns:a="http://schemas.openxmlformats.org/drawingml/2006/main" prst="rect">
             <a:avLst/>
@@ -12387,7 +12454,7 @@
                 <a:ea typeface="Aptos"/>
                 <a:cs typeface="Aptos"/>
               </a:rPr>
-              <a:t>Retention</a:t>
+              <a:t>PARTITION BY LIST</a:t>
             </a:r>
           </a:p>
         </p:txBody>
@@ -12397,19 +12464,19 @@
           <p:cNvPr id="15" name="">
             <a:extLst xmlns:a="http://schemas.openxmlformats.org/drawingml/2006/main">
               <a:ext uri="{FF2B5EF4-FFF2-40B4-BE49-F238E27FC236}">
-                <a16:creationId xmlns:a16="http://schemas.microsoft.com/office/drawing/2014/main" id="{C9F53EF0-43C5-4448-85D9-84E46A18101C}"/>
-              </a:ext>
-            </a:extLst>
-          </p:cNvPr>
-          <p:cNvSpPr>
-            <a:spLocks xmlns:a="http://schemas.openxmlformats.org/drawingml/2006/main" noGrp="1"/>
-          </p:cNvSpPr>
-          <p:nvPr/>
-        </p:nvSpPr>
-        <p:spPr>
-          <a:xfrm xmlns:a="http://schemas.openxmlformats.org/drawingml/2006/main">
-            <a:off x="6400800" y="3209925"/>
-            <a:ext cx="4552950" cy="381000"/>
+                <a16:creationId xmlns:a16="http://schemas.microsoft.com/office/drawing/2014/main" id="{B14D3A3E-26B1-4D5E-BA5F-30ACC75655AB}"/>
+              </a:ext>
+            </a:extLst>
+          </p:cNvPr>
+          <p:cNvSpPr>
+            <a:spLocks xmlns:a="http://schemas.openxmlformats.org/drawingml/2006/main" noGrp="1"/>
+          </p:cNvSpPr>
+          <p:nvPr/>
+        </p:nvSpPr>
+        <p:spPr>
+          <a:xfrm xmlns:a="http://schemas.openxmlformats.org/drawingml/2006/main">
+            <a:off x="4638675" y="3209925"/>
+            <a:ext cx="2933700" cy="381000"/>
           </a:xfrm>
           <a:prstGeom xmlns:a="http://schemas.openxmlformats.org/drawingml/2006/main" prst="rect">
             <a:avLst/>
@@ -12451,7 +12518,7 @@
                 <a:ea typeface="Aptos"/>
                 <a:cs typeface="Aptos"/>
               </a:rPr>
-              <a:t>Старые partitions можно удалять/архивировать операционно.</a:t>
+              <a:t>Конечные категории: region, source_system, tenant_group.</a:t>
             </a:r>
           </a:p>
         </p:txBody>
@@ -12461,19 +12528,19 @@
           <p:cNvPr id="16" name="">
             <a:extLst xmlns:a="http://schemas.openxmlformats.org/drawingml/2006/main">
               <a:ext uri="{FF2B5EF4-FFF2-40B4-BE49-F238E27FC236}">
-                <a16:creationId xmlns:a16="http://schemas.microsoft.com/office/drawing/2014/main" id="{17657D14-0AB7-45BB-B469-C5DD1DB2CA87}"/>
-              </a:ext>
-            </a:extLst>
-          </p:cNvPr>
-          <p:cNvSpPr>
-            <a:spLocks xmlns:a="http://schemas.openxmlformats.org/drawingml/2006/main" noGrp="1"/>
-          </p:cNvSpPr>
-          <p:nvPr/>
-        </p:nvSpPr>
-        <p:spPr>
-          <a:xfrm xmlns:a="http://schemas.openxmlformats.org/drawingml/2006/main">
-            <a:off x="571500" y="3857625"/>
-            <a:ext cx="4953000" cy="1257300"/>
+                <a16:creationId xmlns:a16="http://schemas.microsoft.com/office/drawing/2014/main" id="{EBCDFEB2-3FAD-441D-9C9B-7418903D80C6}"/>
+              </a:ext>
+            </a:extLst>
+          </p:cNvPr>
+          <p:cNvSpPr>
+            <a:spLocks xmlns:a="http://schemas.openxmlformats.org/drawingml/2006/main" noGrp="1"/>
+          </p:cNvSpPr>
+          <p:nvPr/>
+        </p:nvSpPr>
+        <p:spPr>
+          <a:xfrm xmlns:a="http://schemas.openxmlformats.org/drawingml/2006/main">
+            <a:off x="8286750" y="2333625"/>
+            <a:ext cx="2857500" cy="1257300"/>
           </a:xfrm>
           <a:prstGeom xmlns:a="http://schemas.openxmlformats.org/drawingml/2006/main" prst="rect">
             <a:avLst/>
@@ -12494,25 +12561,25 @@
           <p:cNvPr id="17" name="">
             <a:extLst xmlns:a="http://schemas.openxmlformats.org/drawingml/2006/main">
               <a:ext uri="{FF2B5EF4-FFF2-40B4-BE49-F238E27FC236}">
-                <a16:creationId xmlns:a16="http://schemas.microsoft.com/office/drawing/2014/main" id="{95878B0E-3114-4958-8BFD-C9D66CDEC3E1}"/>
-              </a:ext>
-            </a:extLst>
-          </p:cNvPr>
-          <p:cNvSpPr>
-            <a:spLocks xmlns:a="http://schemas.openxmlformats.org/drawingml/2006/main" noGrp="1"/>
-          </p:cNvSpPr>
-          <p:nvPr/>
-        </p:nvSpPr>
-        <p:spPr>
-          <a:xfrm xmlns:a="http://schemas.openxmlformats.org/drawingml/2006/main">
-            <a:off x="742950" y="4029075"/>
+                <a16:creationId xmlns:a16="http://schemas.microsoft.com/office/drawing/2014/main" id="{5025D7D1-0747-4DCE-82C8-24AB05C6A594}"/>
+              </a:ext>
+            </a:extLst>
+          </p:cNvPr>
+          <p:cNvSpPr>
+            <a:spLocks xmlns:a="http://schemas.openxmlformats.org/drawingml/2006/main" noGrp="1"/>
+          </p:cNvSpPr>
+          <p:nvPr/>
+        </p:nvSpPr>
+        <p:spPr>
+          <a:xfrm xmlns:a="http://schemas.openxmlformats.org/drawingml/2006/main">
+            <a:off x="8458200" y="2505075"/>
             <a:ext cx="400050" cy="38100"/>
           </a:xfrm>
           <a:prstGeom xmlns:a="http://schemas.openxmlformats.org/drawingml/2006/main" prst="rect">
             <a:avLst/>
           </a:prstGeom>
           <a:solidFill xmlns:a="http://schemas.openxmlformats.org/drawingml/2006/main">
-            <a:srgbClr val="10A37F"/>
+            <a:srgbClr val="B7791F"/>
           </a:solidFill>
           <a:ln xmlns:a="http://schemas.openxmlformats.org/drawingml/2006/main" w="0">
             <a:solidFill>
@@ -12529,19 +12596,19 @@
           <p:cNvPr id="18" name="">
             <a:extLst xmlns:a="http://schemas.openxmlformats.org/drawingml/2006/main">
               <a:ext uri="{FF2B5EF4-FFF2-40B4-BE49-F238E27FC236}">
-                <a16:creationId xmlns:a16="http://schemas.microsoft.com/office/drawing/2014/main" id="{1F66DF4C-16C6-4A52-8601-40ED7734B32A}"/>
-              </a:ext>
-            </a:extLst>
-          </p:cNvPr>
-          <p:cNvSpPr>
-            <a:spLocks xmlns:a="http://schemas.openxmlformats.org/drawingml/2006/main" noGrp="1"/>
-          </p:cNvSpPr>
-          <p:nvPr/>
-        </p:nvSpPr>
-        <p:spPr>
-          <a:xfrm xmlns:a="http://schemas.openxmlformats.org/drawingml/2006/main">
-            <a:off x="781050" y="4200525"/>
-            <a:ext cx="4572000" cy="514350"/>
+                <a16:creationId xmlns:a16="http://schemas.microsoft.com/office/drawing/2014/main" id="{096FC16B-EFA0-41DA-B89A-7CD9FD908978}"/>
+              </a:ext>
+            </a:extLst>
+          </p:cNvPr>
+          <p:cNvSpPr>
+            <a:spLocks xmlns:a="http://schemas.openxmlformats.org/drawingml/2006/main" noGrp="1"/>
+          </p:cNvSpPr>
+          <p:nvPr/>
+        </p:nvSpPr>
+        <p:spPr>
+          <a:xfrm xmlns:a="http://schemas.openxmlformats.org/drawingml/2006/main">
+            <a:off x="8496300" y="2676525"/>
+            <a:ext cx="2476500" cy="514350"/>
           </a:xfrm>
           <a:prstGeom xmlns:a="http://schemas.openxmlformats.org/drawingml/2006/main" prst="rect">
             <a:avLst/>
@@ -12583,7 +12650,7 @@
                 <a:ea typeface="Aptos"/>
                 <a:cs typeface="Aptos"/>
               </a:rPr>
-              <a:t>Не distribution</a:t>
+              <a:t>PARTITION BY HASH</a:t>
             </a:r>
           </a:p>
         </p:txBody>
@@ -12593,19 +12660,19 @@
           <p:cNvPr id="19" name="">
             <a:extLst xmlns:a="http://schemas.openxmlformats.org/drawingml/2006/main">
               <a:ext uri="{FF2B5EF4-FFF2-40B4-BE49-F238E27FC236}">
-                <a16:creationId xmlns:a16="http://schemas.microsoft.com/office/drawing/2014/main" id="{4FD9BB6A-B35D-4724-9FCA-DE00C2B95E05}"/>
-              </a:ext>
-            </a:extLst>
-          </p:cNvPr>
-          <p:cNvSpPr>
-            <a:spLocks xmlns:a="http://schemas.openxmlformats.org/drawingml/2006/main" noGrp="1"/>
-          </p:cNvSpPr>
-          <p:nvPr/>
-        </p:nvSpPr>
-        <p:spPr>
-          <a:xfrm xmlns:a="http://schemas.openxmlformats.org/drawingml/2006/main">
-            <a:off x="781050" y="4733925"/>
-            <a:ext cx="4552950" cy="381000"/>
+                <a16:creationId xmlns:a16="http://schemas.microsoft.com/office/drawing/2014/main" id="{FECB2DB8-7155-46D8-9E89-EEB26468DDBA}"/>
+              </a:ext>
+            </a:extLst>
+          </p:cNvPr>
+          <p:cNvSpPr>
+            <a:spLocks xmlns:a="http://schemas.openxmlformats.org/drawingml/2006/main" noGrp="1"/>
+          </p:cNvSpPr>
+          <p:nvPr/>
+        </p:nvSpPr>
+        <p:spPr>
+          <a:xfrm xmlns:a="http://schemas.openxmlformats.org/drawingml/2006/main">
+            <a:off x="8496300" y="3209925"/>
+            <a:ext cx="2457450" cy="381000"/>
           </a:xfrm>
           <a:prstGeom xmlns:a="http://schemas.openxmlformats.org/drawingml/2006/main" prst="rect">
             <a:avLst/>
@@ -12647,7 +12714,7 @@
                 <a:ea typeface="Aptos"/>
                 <a:cs typeface="Aptos"/>
               </a:rPr>
-              <a:t>Partition key не обязан быть distribution key.</a:t>
+              <a:t>Bucketization, когда нет естественного range/list. Не заменяет distribution.</a:t>
             </a:r>
           </a:p>
         </p:txBody>
@@ -12657,19 +12724,19 @@
           <p:cNvPr id="20" name="">
             <a:extLst xmlns:a="http://schemas.openxmlformats.org/drawingml/2006/main">
               <a:ext uri="{FF2B5EF4-FFF2-40B4-BE49-F238E27FC236}">
-                <a16:creationId xmlns:a16="http://schemas.microsoft.com/office/drawing/2014/main" id="{05205219-1CA3-492C-AC0C-24DFDE8A2ADE}"/>
-              </a:ext>
-            </a:extLst>
-          </p:cNvPr>
-          <p:cNvSpPr>
-            <a:spLocks xmlns:a="http://schemas.openxmlformats.org/drawingml/2006/main" noGrp="1"/>
-          </p:cNvSpPr>
-          <p:nvPr/>
-        </p:nvSpPr>
-        <p:spPr>
-          <a:xfrm xmlns:a="http://schemas.openxmlformats.org/drawingml/2006/main">
-            <a:off x="571500" y="4953000"/>
-            <a:ext cx="10382250" cy="1238250"/>
+                <a16:creationId xmlns:a16="http://schemas.microsoft.com/office/drawing/2014/main" id="{69E3C5F8-AF24-4252-B4FE-24ED476241B6}"/>
+              </a:ext>
+            </a:extLst>
+          </p:cNvPr>
+          <p:cNvSpPr>
+            <a:spLocks xmlns:a="http://schemas.openxmlformats.org/drawingml/2006/main" noGrp="1"/>
+          </p:cNvSpPr>
+          <p:nvPr/>
+        </p:nvSpPr>
+        <p:spPr>
+          <a:xfrm xmlns:a="http://schemas.openxmlformats.org/drawingml/2006/main">
+            <a:off x="571500" y="3857625"/>
+            <a:ext cx="4953000" cy="1257300"/>
           </a:xfrm>
           <a:prstGeom xmlns:a="http://schemas.openxmlformats.org/drawingml/2006/main" prst="rect">
             <a:avLst/>
@@ -12690,19 +12757,54 @@
           <p:cNvPr id="21" name="">
             <a:extLst xmlns:a="http://schemas.openxmlformats.org/drawingml/2006/main">
               <a:ext uri="{FF2B5EF4-FFF2-40B4-BE49-F238E27FC236}">
-                <a16:creationId xmlns:a16="http://schemas.microsoft.com/office/drawing/2014/main" id="{87D69D3F-19FE-42F8-96D0-53D3F2FB0E86}"/>
-              </a:ext>
-            </a:extLst>
-          </p:cNvPr>
-          <p:cNvSpPr>
-            <a:spLocks xmlns:a="http://schemas.openxmlformats.org/drawingml/2006/main" noGrp="1"/>
-          </p:cNvSpPr>
-          <p:nvPr/>
-        </p:nvSpPr>
-        <p:spPr>
-          <a:xfrm xmlns:a="http://schemas.openxmlformats.org/drawingml/2006/main">
-            <a:off x="742950" y="5086350"/>
-            <a:ext cx="1143000" cy="190500"/>
+                <a16:creationId xmlns:a16="http://schemas.microsoft.com/office/drawing/2014/main" id="{B9782DF0-7125-4235-A9F2-EFE68AC4B951}"/>
+              </a:ext>
+            </a:extLst>
+          </p:cNvPr>
+          <p:cNvSpPr>
+            <a:spLocks xmlns:a="http://schemas.openxmlformats.org/drawingml/2006/main" noGrp="1"/>
+          </p:cNvSpPr>
+          <p:nvPr/>
+        </p:nvSpPr>
+        <p:spPr>
+          <a:xfrm xmlns:a="http://schemas.openxmlformats.org/drawingml/2006/main">
+            <a:off x="742950" y="4029075"/>
+            <a:ext cx="400050" cy="38100"/>
+          </a:xfrm>
+          <a:prstGeom xmlns:a="http://schemas.openxmlformats.org/drawingml/2006/main" prst="rect">
+            <a:avLst/>
+          </a:prstGeom>
+          <a:solidFill xmlns:a="http://schemas.openxmlformats.org/drawingml/2006/main">
+            <a:srgbClr val="10A37F"/>
+          </a:solidFill>
+          <a:ln xmlns:a="http://schemas.openxmlformats.org/drawingml/2006/main" w="0">
+            <a:solidFill>
+              <a:srgbClr val="000000">
+                <a:alpha val="0"/>
+              </a:srgbClr>
+            </a:solidFill>
+            <a:prstDash val="solid"/>
+          </a:ln>
+        </p:spPr>
+      </p:sp>
+      <p:sp>
+        <p:nvSpPr>
+          <p:cNvPr id="22" name="">
+            <a:extLst xmlns:a="http://schemas.openxmlformats.org/drawingml/2006/main">
+              <a:ext uri="{FF2B5EF4-FFF2-40B4-BE49-F238E27FC236}">
+                <a16:creationId xmlns:a16="http://schemas.microsoft.com/office/drawing/2014/main" id="{A8DE6B1D-0846-4C85-870B-EDE3F1E8455E}"/>
+              </a:ext>
+            </a:extLst>
+          </p:cNvPr>
+          <p:cNvSpPr>
+            <a:spLocks xmlns:a="http://schemas.openxmlformats.org/drawingml/2006/main" noGrp="1"/>
+          </p:cNvSpPr>
+          <p:nvPr/>
+        </p:nvSpPr>
+        <p:spPr>
+          <a:xfrm xmlns:a="http://schemas.openxmlformats.org/drawingml/2006/main">
+            <a:off x="781050" y="4200525"/>
+            <a:ext cx="4572000" cy="514350"/>
           </a:xfrm>
           <a:prstGeom xmlns:a="http://schemas.openxmlformats.org/drawingml/2006/main" prst="rect">
             <a:avLst/>
@@ -12726,9 +12828,9 @@
           <a:lstStyle xmlns:a="http://schemas.openxmlformats.org/drawingml/2006/main"/>
           <a:p xmlns:a="http://schemas.openxmlformats.org/drawingml/2006/main">
             <a:pPr algn="l">
-              <a:defRPr sz="900" b="1">
-                <a:solidFill>
-                  <a:srgbClr val="10A37F"/>
+              <a:defRPr sz="1500" b="1">
+                <a:solidFill>
+                  <a:srgbClr val="202123"/>
                 </a:solidFill>
                 <a:latin typeface="Aptos"/>
                 <a:ea typeface="Aptos"/>
@@ -12736,6 +12838,363 @@
               </a:defRPr>
             </a:pPr>
             <a:r>
+              <a:rPr sz="1500" b="1">
+                <a:solidFill>
+                  <a:srgbClr val="202123"/>
+                </a:solidFill>
+                <a:latin typeface="Aptos"/>
+                <a:ea typeface="Aptos"/>
+                <a:cs typeface="Aptos"/>
+              </a:rPr>
+              <a:t>DEFAULT partition</a:t>
+            </a:r>
+          </a:p>
+        </p:txBody>
+      </p:sp>
+      <p:sp>
+        <p:nvSpPr>
+          <p:cNvPr id="23" name="">
+            <a:extLst xmlns:a="http://schemas.openxmlformats.org/drawingml/2006/main">
+              <a:ext uri="{FF2B5EF4-FFF2-40B4-BE49-F238E27FC236}">
+                <a16:creationId xmlns:a16="http://schemas.microsoft.com/office/drawing/2014/main" id="{3E8FF85A-FCC5-41FB-B8B9-095E59EC00C4}"/>
+              </a:ext>
+            </a:extLst>
+          </p:cNvPr>
+          <p:cNvSpPr>
+            <a:spLocks xmlns:a="http://schemas.openxmlformats.org/drawingml/2006/main" noGrp="1"/>
+          </p:cNvSpPr>
+          <p:nvPr/>
+        </p:nvSpPr>
+        <p:spPr>
+          <a:xfrm xmlns:a="http://schemas.openxmlformats.org/drawingml/2006/main">
+            <a:off x="781050" y="4733925"/>
+            <a:ext cx="4552950" cy="381000"/>
+          </a:xfrm>
+          <a:prstGeom xmlns:a="http://schemas.openxmlformats.org/drawingml/2006/main" prst="rect">
+            <a:avLst/>
+          </a:prstGeom>
+          <a:solidFill xmlns:a="http://schemas.openxmlformats.org/drawingml/2006/main">
+            <a:srgbClr val="000000">
+              <a:alpha val="0"/>
+            </a:srgbClr>
+          </a:solidFill>
+          <a:ln xmlns:a="http://schemas.openxmlformats.org/drawingml/2006/main" w="0">
+            <a:solidFill>
+              <a:srgbClr val="000000">
+                <a:alpha val="0"/>
+              </a:srgbClr>
+            </a:solidFill>
+            <a:prstDash val="solid"/>
+          </a:ln>
+        </p:spPr>
+        <p:txBody>
+          <a:bodyPr xmlns:a="http://schemas.openxmlformats.org/drawingml/2006/main" lIns="0" tIns="0" rIns="0" bIns="0" anchor="t"/>
+          <a:lstStyle xmlns:a="http://schemas.openxmlformats.org/drawingml/2006/main"/>
+          <a:p xmlns:a="http://schemas.openxmlformats.org/drawingml/2006/main">
+            <a:pPr algn="l">
+              <a:defRPr sz="1125" b="0">
+                <a:solidFill>
+                  <a:srgbClr val="6E6E68"/>
+                </a:solidFill>
+                <a:latin typeface="Aptos"/>
+                <a:ea typeface="Aptos"/>
+                <a:cs typeface="Aptos"/>
+              </a:defRPr>
+            </a:pPr>
+            <a:r>
+              <a:rPr sz="1125" b="0">
+                <a:solidFill>
+                  <a:srgbClr val="6E6E68"/>
+                </a:solidFill>
+                <a:latin typeface="Aptos"/>
+                <a:ea typeface="Aptos"/>
+                <a:cs typeface="Aptos"/>
+              </a:rPr>
+              <a:t>Safety net для unexpected values; без него out-of-range INSERT падает.</a:t>
+            </a:r>
+          </a:p>
+        </p:txBody>
+      </p:sp>
+      <p:sp>
+        <p:nvSpPr>
+          <p:cNvPr id="24" name="">
+            <a:extLst xmlns:a="http://schemas.openxmlformats.org/drawingml/2006/main">
+              <a:ext uri="{FF2B5EF4-FFF2-40B4-BE49-F238E27FC236}">
+                <a16:creationId xmlns:a16="http://schemas.microsoft.com/office/drawing/2014/main" id="{BD94385D-9AA4-4697-863B-BF4B5886F9F5}"/>
+              </a:ext>
+            </a:extLst>
+          </p:cNvPr>
+          <p:cNvSpPr>
+            <a:spLocks xmlns:a="http://schemas.openxmlformats.org/drawingml/2006/main" noGrp="1"/>
+          </p:cNvSpPr>
+          <p:nvPr/>
+        </p:nvSpPr>
+        <p:spPr>
+          <a:xfrm xmlns:a="http://schemas.openxmlformats.org/drawingml/2006/main">
+            <a:off x="6191250" y="3857625"/>
+            <a:ext cx="4953000" cy="1257300"/>
+          </a:xfrm>
+          <a:prstGeom xmlns:a="http://schemas.openxmlformats.org/drawingml/2006/main" prst="rect">
+            <a:avLst/>
+          </a:prstGeom>
+          <a:solidFill xmlns:a="http://schemas.openxmlformats.org/drawingml/2006/main">
+            <a:srgbClr val="FFFFFF"/>
+          </a:solidFill>
+          <a:ln xmlns:a="http://schemas.openxmlformats.org/drawingml/2006/main" w="9525">
+            <a:solidFill>
+              <a:srgbClr val="D8D7D0"/>
+            </a:solidFill>
+            <a:prstDash val="solid"/>
+          </a:ln>
+        </p:spPr>
+      </p:sp>
+      <p:sp>
+        <p:nvSpPr>
+          <p:cNvPr id="25" name="">
+            <a:extLst xmlns:a="http://schemas.openxmlformats.org/drawingml/2006/main">
+              <a:ext uri="{FF2B5EF4-FFF2-40B4-BE49-F238E27FC236}">
+                <a16:creationId xmlns:a16="http://schemas.microsoft.com/office/drawing/2014/main" id="{013F9F14-253E-443E-BE87-4A652B7F9EDC}"/>
+              </a:ext>
+            </a:extLst>
+          </p:cNvPr>
+          <p:cNvSpPr>
+            <a:spLocks xmlns:a="http://schemas.openxmlformats.org/drawingml/2006/main" noGrp="1"/>
+          </p:cNvSpPr>
+          <p:nvPr/>
+        </p:nvSpPr>
+        <p:spPr>
+          <a:xfrm xmlns:a="http://schemas.openxmlformats.org/drawingml/2006/main">
+            <a:off x="6362700" y="4029075"/>
+            <a:ext cx="400050" cy="38100"/>
+          </a:xfrm>
+          <a:prstGeom xmlns:a="http://schemas.openxmlformats.org/drawingml/2006/main" prst="rect">
+            <a:avLst/>
+          </a:prstGeom>
+          <a:solidFill xmlns:a="http://schemas.openxmlformats.org/drawingml/2006/main">
+            <a:srgbClr val="2F6FED"/>
+          </a:solidFill>
+          <a:ln xmlns:a="http://schemas.openxmlformats.org/drawingml/2006/main" w="0">
+            <a:solidFill>
+              <a:srgbClr val="000000">
+                <a:alpha val="0"/>
+              </a:srgbClr>
+            </a:solidFill>
+            <a:prstDash val="solid"/>
+          </a:ln>
+        </p:spPr>
+      </p:sp>
+      <p:sp>
+        <p:nvSpPr>
+          <p:cNvPr id="26" name="">
+            <a:extLst xmlns:a="http://schemas.openxmlformats.org/drawingml/2006/main">
+              <a:ext uri="{FF2B5EF4-FFF2-40B4-BE49-F238E27FC236}">
+                <a16:creationId xmlns:a16="http://schemas.microsoft.com/office/drawing/2014/main" id="{7B01919E-4E5F-4642-89A4-9114249271C0}"/>
+              </a:ext>
+            </a:extLst>
+          </p:cNvPr>
+          <p:cNvSpPr>
+            <a:spLocks xmlns:a="http://schemas.openxmlformats.org/drawingml/2006/main" noGrp="1"/>
+          </p:cNvSpPr>
+          <p:nvPr/>
+        </p:nvSpPr>
+        <p:spPr>
+          <a:xfrm xmlns:a="http://schemas.openxmlformats.org/drawingml/2006/main">
+            <a:off x="6400800" y="4200525"/>
+            <a:ext cx="4572000" cy="514350"/>
+          </a:xfrm>
+          <a:prstGeom xmlns:a="http://schemas.openxmlformats.org/drawingml/2006/main" prst="rect">
+            <a:avLst/>
+          </a:prstGeom>
+          <a:solidFill xmlns:a="http://schemas.openxmlformats.org/drawingml/2006/main">
+            <a:srgbClr val="000000">
+              <a:alpha val="0"/>
+            </a:srgbClr>
+          </a:solidFill>
+          <a:ln xmlns:a="http://schemas.openxmlformats.org/drawingml/2006/main" w="0">
+            <a:solidFill>
+              <a:srgbClr val="000000">
+                <a:alpha val="0"/>
+              </a:srgbClr>
+            </a:solidFill>
+            <a:prstDash val="solid"/>
+          </a:ln>
+        </p:spPr>
+        <p:txBody>
+          <a:bodyPr xmlns:a="http://schemas.openxmlformats.org/drawingml/2006/main" lIns="0" tIns="0" rIns="0" bIns="0" anchor="t"/>
+          <a:lstStyle xmlns:a="http://schemas.openxmlformats.org/drawingml/2006/main"/>
+          <a:p xmlns:a="http://schemas.openxmlformats.org/drawingml/2006/main">
+            <a:pPr algn="l">
+              <a:defRPr sz="1500" b="1">
+                <a:solidFill>
+                  <a:srgbClr val="202123"/>
+                </a:solidFill>
+                <a:latin typeface="Aptos"/>
+                <a:ea typeface="Aptos"/>
+                <a:cs typeface="Aptos"/>
+              </a:defRPr>
+            </a:pPr>
+            <a:r>
+              <a:rPr sz="1500" b="1">
+                <a:solidFill>
+                  <a:srgbClr val="202123"/>
+                </a:solidFill>
+                <a:latin typeface="Aptos"/>
+                <a:ea typeface="Aptos"/>
+                <a:cs typeface="Aptos"/>
+              </a:rPr>
+              <a:t>Не distribution</a:t>
+            </a:r>
+          </a:p>
+        </p:txBody>
+      </p:sp>
+      <p:sp>
+        <p:nvSpPr>
+          <p:cNvPr id="27" name="">
+            <a:extLst xmlns:a="http://schemas.openxmlformats.org/drawingml/2006/main">
+              <a:ext uri="{FF2B5EF4-FFF2-40B4-BE49-F238E27FC236}">
+                <a16:creationId xmlns:a16="http://schemas.microsoft.com/office/drawing/2014/main" id="{2B51F83D-3E64-4673-A760-13EF98ADAFBE}"/>
+              </a:ext>
+            </a:extLst>
+          </p:cNvPr>
+          <p:cNvSpPr>
+            <a:spLocks xmlns:a="http://schemas.openxmlformats.org/drawingml/2006/main" noGrp="1"/>
+          </p:cNvSpPr>
+          <p:nvPr/>
+        </p:nvSpPr>
+        <p:spPr>
+          <a:xfrm xmlns:a="http://schemas.openxmlformats.org/drawingml/2006/main">
+            <a:off x="6400800" y="4733925"/>
+            <a:ext cx="4552950" cy="381000"/>
+          </a:xfrm>
+          <a:prstGeom xmlns:a="http://schemas.openxmlformats.org/drawingml/2006/main" prst="rect">
+            <a:avLst/>
+          </a:prstGeom>
+          <a:solidFill xmlns:a="http://schemas.openxmlformats.org/drawingml/2006/main">
+            <a:srgbClr val="000000">
+              <a:alpha val="0"/>
+            </a:srgbClr>
+          </a:solidFill>
+          <a:ln xmlns:a="http://schemas.openxmlformats.org/drawingml/2006/main" w="0">
+            <a:solidFill>
+              <a:srgbClr val="000000">
+                <a:alpha val="0"/>
+              </a:srgbClr>
+            </a:solidFill>
+            <a:prstDash val="solid"/>
+          </a:ln>
+        </p:spPr>
+        <p:txBody>
+          <a:bodyPr xmlns:a="http://schemas.openxmlformats.org/drawingml/2006/main" lIns="0" tIns="0" rIns="0" bIns="0" anchor="t"/>
+          <a:lstStyle xmlns:a="http://schemas.openxmlformats.org/drawingml/2006/main"/>
+          <a:p xmlns:a="http://schemas.openxmlformats.org/drawingml/2006/main">
+            <a:pPr algn="l">
+              <a:defRPr sz="1125" b="0">
+                <a:solidFill>
+                  <a:srgbClr val="6E6E68"/>
+                </a:solidFill>
+                <a:latin typeface="Aptos"/>
+                <a:ea typeface="Aptos"/>
+                <a:cs typeface="Aptos"/>
+              </a:defRPr>
+            </a:pPr>
+            <a:r>
+              <a:rPr sz="1125" b="0">
+                <a:solidFill>
+                  <a:srgbClr val="6E6E68"/>
+                </a:solidFill>
+                <a:latin typeface="Aptos"/>
+                <a:ea typeface="Aptos"/>
+                <a:cs typeface="Aptos"/>
+              </a:rPr>
+              <a:t>Partition key не обязан быть distribution key; leaf partitions тоже распределены по segments.</a:t>
+            </a:r>
+          </a:p>
+        </p:txBody>
+      </p:sp>
+      <p:sp>
+        <p:nvSpPr>
+          <p:cNvPr id="28" name="">
+            <a:extLst xmlns:a="http://schemas.openxmlformats.org/drawingml/2006/main">
+              <a:ext uri="{FF2B5EF4-FFF2-40B4-BE49-F238E27FC236}">
+                <a16:creationId xmlns:a16="http://schemas.microsoft.com/office/drawing/2014/main" id="{D04F9590-1568-4E02-B69C-56D33F8E4965}"/>
+              </a:ext>
+            </a:extLst>
+          </p:cNvPr>
+          <p:cNvSpPr>
+            <a:spLocks xmlns:a="http://schemas.openxmlformats.org/drawingml/2006/main" noGrp="1"/>
+          </p:cNvSpPr>
+          <p:nvPr/>
+        </p:nvSpPr>
+        <p:spPr>
+          <a:xfrm xmlns:a="http://schemas.openxmlformats.org/drawingml/2006/main">
+            <a:off x="571500" y="5334000"/>
+            <a:ext cx="10382250" cy="819150"/>
+          </a:xfrm>
+          <a:prstGeom xmlns:a="http://schemas.openxmlformats.org/drawingml/2006/main" prst="rect">
+            <a:avLst/>
+          </a:prstGeom>
+          <a:solidFill xmlns:a="http://schemas.openxmlformats.org/drawingml/2006/main">
+            <a:srgbClr val="FFFFFF"/>
+          </a:solidFill>
+          <a:ln xmlns:a="http://schemas.openxmlformats.org/drawingml/2006/main" w="9525">
+            <a:solidFill>
+              <a:srgbClr val="D8D7D0"/>
+            </a:solidFill>
+            <a:prstDash val="solid"/>
+          </a:ln>
+        </p:spPr>
+      </p:sp>
+      <p:sp>
+        <p:nvSpPr>
+          <p:cNvPr id="29" name="">
+            <a:extLst xmlns:a="http://schemas.openxmlformats.org/drawingml/2006/main">
+              <a:ext uri="{FF2B5EF4-FFF2-40B4-BE49-F238E27FC236}">
+                <a16:creationId xmlns:a16="http://schemas.microsoft.com/office/drawing/2014/main" id="{8CEDC4D2-03D8-4D35-81AE-5EB26FEBBAF9}"/>
+              </a:ext>
+            </a:extLst>
+          </p:cNvPr>
+          <p:cNvSpPr>
+            <a:spLocks xmlns:a="http://schemas.openxmlformats.org/drawingml/2006/main" noGrp="1"/>
+          </p:cNvSpPr>
+          <p:nvPr/>
+        </p:nvSpPr>
+        <p:spPr>
+          <a:xfrm xmlns:a="http://schemas.openxmlformats.org/drawingml/2006/main">
+            <a:off x="742950" y="5467350"/>
+            <a:ext cx="1143000" cy="190500"/>
+          </a:xfrm>
+          <a:prstGeom xmlns:a="http://schemas.openxmlformats.org/drawingml/2006/main" prst="rect">
+            <a:avLst/>
+          </a:prstGeom>
+          <a:solidFill xmlns:a="http://schemas.openxmlformats.org/drawingml/2006/main">
+            <a:srgbClr val="000000">
+              <a:alpha val="0"/>
+            </a:srgbClr>
+          </a:solidFill>
+          <a:ln xmlns:a="http://schemas.openxmlformats.org/drawingml/2006/main" w="0">
+            <a:solidFill>
+              <a:srgbClr val="000000">
+                <a:alpha val="0"/>
+              </a:srgbClr>
+            </a:solidFill>
+            <a:prstDash val="solid"/>
+          </a:ln>
+        </p:spPr>
+        <p:txBody>
+          <a:bodyPr xmlns:a="http://schemas.openxmlformats.org/drawingml/2006/main" lIns="0" tIns="0" rIns="0" bIns="0" anchor="t"/>
+          <a:lstStyle xmlns:a="http://schemas.openxmlformats.org/drawingml/2006/main"/>
+          <a:p xmlns:a="http://schemas.openxmlformats.org/drawingml/2006/main">
+            <a:pPr algn="l">
+              <a:defRPr sz="900" b="1">
+                <a:solidFill>
+                  <a:srgbClr val="10A37F"/>
+                </a:solidFill>
+                <a:latin typeface="Aptos"/>
+                <a:ea typeface="Aptos"/>
+                <a:cs typeface="Aptos"/>
+              </a:defRPr>
+            </a:pPr>
+            <a:r>
               <a:rPr sz="900" b="1">
                 <a:solidFill>
                   <a:srgbClr val="10A37F"/>
@@ -12744,29 +13203,29 @@
                 <a:ea typeface="Aptos"/>
                 <a:cs typeface="Aptos"/>
               </a:rPr>
-              <a:t>SQL / CLI</a:t>
-            </a:r>
-          </a:p>
-        </p:txBody>
-      </p:sp>
-      <p:sp>
-        <p:nvSpPr>
-          <p:cNvPr id="22" name="">
-            <a:extLst xmlns:a="http://schemas.openxmlformats.org/drawingml/2006/main">
-              <a:ext uri="{FF2B5EF4-FFF2-40B4-BE49-F238E27FC236}">
-                <a16:creationId xmlns:a16="http://schemas.microsoft.com/office/drawing/2014/main" id="{DE70449D-849E-4FB0-AE80-B057335A94EC}"/>
-              </a:ext>
-            </a:extLst>
-          </p:cNvPr>
-          <p:cNvSpPr>
-            <a:spLocks xmlns:a="http://schemas.openxmlformats.org/drawingml/2006/main" noGrp="1"/>
-          </p:cNvSpPr>
-          <p:nvPr/>
-        </p:nvSpPr>
-        <p:spPr>
-          <a:xfrm xmlns:a="http://schemas.openxmlformats.org/drawingml/2006/main">
-            <a:off x="742950" y="5353050"/>
-            <a:ext cx="10039350" cy="742950"/>
+              <a:t>SQL</a:t>
+            </a:r>
+          </a:p>
+        </p:txBody>
+      </p:sp>
+      <p:sp>
+        <p:nvSpPr>
+          <p:cNvPr id="30" name="">
+            <a:extLst xmlns:a="http://schemas.openxmlformats.org/drawingml/2006/main">
+              <a:ext uri="{FF2B5EF4-FFF2-40B4-BE49-F238E27FC236}">
+                <a16:creationId xmlns:a16="http://schemas.microsoft.com/office/drawing/2014/main" id="{9E8BBFE8-58D3-4767-9B29-D4AF9BB7DCB5}"/>
+              </a:ext>
+            </a:extLst>
+          </p:cNvPr>
+          <p:cNvSpPr>
+            <a:spLocks xmlns:a="http://schemas.openxmlformats.org/drawingml/2006/main" noGrp="1"/>
+          </p:cNvSpPr>
+          <p:nvPr/>
+        </p:nvSpPr>
+        <p:spPr>
+          <a:xfrm xmlns:a="http://schemas.openxmlformats.org/drawingml/2006/main">
+            <a:off x="742950" y="5734050"/>
+            <a:ext cx="10039350" cy="323850"/>
           </a:xfrm>
           <a:prstGeom xmlns:a="http://schemas.openxmlformats.org/drawingml/2006/main" prst="rect">
             <a:avLst/>
@@ -12808,7 +13267,7 @@
                 <a:ea typeface="Aptos Mono"/>
                 <a:cs typeface="Aptos Mono"/>
               </a:rPr>
-              <a:t>CREATE TABLE lesson01.fact_sales_partition_good (...)</a:t>
+              <a:t>DISTRIBUTED BY (customer_id) -- placement</a:t>
             </a:r>
           </a:p>
           <a:p xmlns:a="http://schemas.openxmlformats.org/drawingml/2006/main">
@@ -12831,7 +13290,7 @@
                 <a:ea typeface="Aptos Mono"/>
                 <a:cs typeface="Aptos Mono"/>
               </a:rPr>
-              <a:t>DISTRIBUTED BY (customer_id)</a:t>
+              <a:t>PARTITION BY RANGE (sale_date) -- pruning/retention</a:t>
             </a:r>
           </a:p>
           <a:p xmlns:a="http://schemas.openxmlformats.org/drawingml/2006/main">
@@ -12854,30 +13313,7 @@
                 <a:ea typeface="Aptos Mono"/>
                 <a:cs typeface="Aptos Mono"/>
               </a:rPr>
-              <a:t>PARTITION BY RANGE (sale_date)</a:t>
-            </a:r>
-          </a:p>
-          <a:p xmlns:a="http://schemas.openxmlformats.org/drawingml/2006/main">
-            <a:pPr algn="l">
-              <a:defRPr sz="1050" b="0">
-                <a:solidFill>
-                  <a:srgbClr val="202123"/>
-                </a:solidFill>
-                <a:latin typeface="Aptos Mono"/>
-                <a:ea typeface="Aptos Mono"/>
-                <a:cs typeface="Aptos Mono"/>
-              </a:defRPr>
-            </a:pPr>
-            <a:r>
-              <a:rPr sz="1050" b="0">
-                <a:solidFill>
-                  <a:srgbClr val="202123"/>
-                </a:solidFill>
-                <a:latin typeface="Aptos Mono"/>
-                <a:ea typeface="Aptos Mono"/>
-                <a:cs typeface="Aptos Mono"/>
-              </a:rPr>
-              <a:t>(START (DATE '2026-01-01') END (DATE '2026-04-01') EVERY (INTERVAL '1 month'));</a:t>
+              <a:t>-- no default partitioning: DEFAULT partition нужно объявить явно</a:t>
             </a:r>
           </a:p>
         </p:txBody>
@@ -12885,7 +13321,7 @@
     </p:spTree>
     <p:extLst>
       <p:ext uri="{BB962C8B-B14F-4D97-AF65-F5344CB8AC3E}">
-        <p14:creationId xmlns:p14="http://schemas.microsoft.com/office/powerpoint/2010/main" val="847497990"/>
+        <p14:creationId xmlns:p14="http://schemas.microsoft.com/office/powerpoint/2010/main" val="579446463"/>
       </p:ext>
     </p:extLst>
   </p:cSld>
@@ -12909,7 +13345,7 @@
           <p:cNvPr id="1" name="">
             <a:extLst xmlns:a="http://schemas.openxmlformats.org/drawingml/2006/main">
               <a:ext uri="{FF2B5EF4-FFF2-40B4-BE49-F238E27FC236}">
-                <a16:creationId xmlns:a16="http://schemas.microsoft.com/office/drawing/2014/main" id="{B32BB737-5577-4B49-A193-EBE7015E547B}"/>
+                <a16:creationId xmlns:a16="http://schemas.microsoft.com/office/drawing/2014/main" id="{EBFF0FF8-1955-48C2-BF76-18B8B7906459}"/>
               </a:ext>
             </a:extLst>
           </p:cNvPr>
@@ -12944,7 +13380,7 @@
           <p:cNvPr id="2" name="">
             <a:extLst xmlns:a="http://schemas.openxmlformats.org/drawingml/2006/main">
               <a:ext uri="{FF2B5EF4-FFF2-40B4-BE49-F238E27FC236}">
-                <a16:creationId xmlns:a16="http://schemas.microsoft.com/office/drawing/2014/main" id="{10791650-A08D-44CB-B92F-24C99D573BC1}"/>
+                <a16:creationId xmlns:a16="http://schemas.microsoft.com/office/drawing/2014/main" id="{0675D188-A3DF-4293-80CD-6ED2DA87F9EA}"/>
               </a:ext>
             </a:extLst>
           </p:cNvPr>
@@ -12979,7 +13415,7 @@
           <p:cNvPr id="3" name="">
             <a:extLst xmlns:a="http://schemas.openxmlformats.org/drawingml/2006/main">
               <a:ext uri="{FF2B5EF4-FFF2-40B4-BE49-F238E27FC236}">
-                <a16:creationId xmlns:a16="http://schemas.microsoft.com/office/drawing/2014/main" id="{91EDB10A-6707-4FDE-BBA2-8553654390A3}"/>
+                <a16:creationId xmlns:a16="http://schemas.microsoft.com/office/drawing/2014/main" id="{67CB68BF-4D17-41FC-8774-A8F13A431A4F}"/>
               </a:ext>
             </a:extLst>
           </p:cNvPr>
@@ -13014,7 +13450,7 @@
           <p:cNvPr id="4" name="">
             <a:extLst xmlns:a="http://schemas.openxmlformats.org/drawingml/2006/main">
               <a:ext uri="{FF2B5EF4-FFF2-40B4-BE49-F238E27FC236}">
-                <a16:creationId xmlns:a16="http://schemas.microsoft.com/office/drawing/2014/main" id="{B1ED2722-9B20-4C34-97FA-C35140839427}"/>
+                <a16:creationId xmlns:a16="http://schemas.microsoft.com/office/drawing/2014/main" id="{4E33AE08-9545-4584-A734-8C1CAD7ACA72}"/>
               </a:ext>
             </a:extLst>
           </p:cNvPr>
@@ -13078,7 +13514,7 @@
           <p:cNvPr id="5" name="">
             <a:extLst xmlns:a="http://schemas.openxmlformats.org/drawingml/2006/main">
               <a:ext uri="{FF2B5EF4-FFF2-40B4-BE49-F238E27FC236}">
-                <a16:creationId xmlns:a16="http://schemas.microsoft.com/office/drawing/2014/main" id="{2EDB493B-3975-4A24-BDF5-418E677A3E11}"/>
+                <a16:creationId xmlns:a16="http://schemas.microsoft.com/office/drawing/2014/main" id="{A27AE658-912E-4CD0-98C1-97CA49CE784A}"/>
               </a:ext>
             </a:extLst>
           </p:cNvPr>
@@ -13142,7 +13578,7 @@
           <p:cNvPr id="6" name="">
             <a:extLst xmlns:a="http://schemas.openxmlformats.org/drawingml/2006/main">
               <a:ext uri="{FF2B5EF4-FFF2-40B4-BE49-F238E27FC236}">
-                <a16:creationId xmlns:a16="http://schemas.microsoft.com/office/drawing/2014/main" id="{4F46FB0B-9653-4245-9CB7-539194F27FDA}"/>
+                <a16:creationId xmlns:a16="http://schemas.microsoft.com/office/drawing/2014/main" id="{D8061B40-07A0-41FB-BFED-A37CE3C79D68}"/>
               </a:ext>
             </a:extLst>
           </p:cNvPr>
@@ -13206,7 +13642,7 @@
           <p:cNvPr id="7" name="">
             <a:extLst xmlns:a="http://schemas.openxmlformats.org/drawingml/2006/main">
               <a:ext uri="{FF2B5EF4-FFF2-40B4-BE49-F238E27FC236}">
-                <a16:creationId xmlns:a16="http://schemas.microsoft.com/office/drawing/2014/main" id="{70FB9560-9CF6-455D-BE74-91DC957DFB7E}"/>
+                <a16:creationId xmlns:a16="http://schemas.microsoft.com/office/drawing/2014/main" id="{B341BE93-F3E4-48C7-9CBD-74A91B5B6374}"/>
               </a:ext>
             </a:extLst>
           </p:cNvPr>
@@ -13270,7 +13706,7 @@
           <p:cNvPr id="8" name="">
             <a:extLst xmlns:a="http://schemas.openxmlformats.org/drawingml/2006/main">
               <a:ext uri="{FF2B5EF4-FFF2-40B4-BE49-F238E27FC236}">
-                <a16:creationId xmlns:a16="http://schemas.microsoft.com/office/drawing/2014/main" id="{A389C547-B952-4356-B9F7-F1F306C43FFC}"/>
+                <a16:creationId xmlns:a16="http://schemas.microsoft.com/office/drawing/2014/main" id="{FB85999E-568B-4B8F-8285-71224B4ADBE5}"/>
               </a:ext>
             </a:extLst>
           </p:cNvPr>
@@ -13303,7 +13739,7 @@
           <p:cNvPr id="9" name="">
             <a:extLst xmlns:a="http://schemas.openxmlformats.org/drawingml/2006/main">
               <a:ext uri="{FF2B5EF4-FFF2-40B4-BE49-F238E27FC236}">
-                <a16:creationId xmlns:a16="http://schemas.microsoft.com/office/drawing/2014/main" id="{EF8E5889-69B7-4D46-8F10-C55E3BDFA3A6}"/>
+                <a16:creationId xmlns:a16="http://schemas.microsoft.com/office/drawing/2014/main" id="{B3AFD487-D231-41A8-B491-E51213A2F7AD}"/>
               </a:ext>
             </a:extLst>
           </p:cNvPr>
@@ -13338,7 +13774,7 @@
           <p:cNvPr id="10" name="">
             <a:extLst xmlns:a="http://schemas.openxmlformats.org/drawingml/2006/main">
               <a:ext uri="{FF2B5EF4-FFF2-40B4-BE49-F238E27FC236}">
-                <a16:creationId xmlns:a16="http://schemas.microsoft.com/office/drawing/2014/main" id="{6013B013-CDDB-4719-91ED-250CE03ADA64}"/>
+                <a16:creationId xmlns:a16="http://schemas.microsoft.com/office/drawing/2014/main" id="{17FC3DC9-4890-4FC1-972D-A0BD90FF76A9}"/>
               </a:ext>
             </a:extLst>
           </p:cNvPr>
@@ -13402,7 +13838,7 @@
           <p:cNvPr id="11" name="">
             <a:extLst xmlns:a="http://schemas.openxmlformats.org/drawingml/2006/main">
               <a:ext uri="{FF2B5EF4-FFF2-40B4-BE49-F238E27FC236}">
-                <a16:creationId xmlns:a16="http://schemas.microsoft.com/office/drawing/2014/main" id="{3471F323-DE8F-495E-9ECA-C8D7DC3059BD}"/>
+                <a16:creationId xmlns:a16="http://schemas.microsoft.com/office/drawing/2014/main" id="{748B5823-7300-482B-B096-EBD7DD6BD335}"/>
               </a:ext>
             </a:extLst>
           </p:cNvPr>
@@ -13466,7 +13902,7 @@
           <p:cNvPr id="12" name="">
             <a:extLst xmlns:a="http://schemas.openxmlformats.org/drawingml/2006/main">
               <a:ext uri="{FF2B5EF4-FFF2-40B4-BE49-F238E27FC236}">
-                <a16:creationId xmlns:a16="http://schemas.microsoft.com/office/drawing/2014/main" id="{895C1382-AE50-4354-A987-E92BAB80E533}"/>
+                <a16:creationId xmlns:a16="http://schemas.microsoft.com/office/drawing/2014/main" id="{465FBD1F-5268-4F0A-9A34-CAE22E176022}"/>
               </a:ext>
             </a:extLst>
           </p:cNvPr>
@@ -13499,7 +13935,7 @@
           <p:cNvPr id="13" name="">
             <a:extLst xmlns:a="http://schemas.openxmlformats.org/drawingml/2006/main">
               <a:ext uri="{FF2B5EF4-FFF2-40B4-BE49-F238E27FC236}">
-                <a16:creationId xmlns:a16="http://schemas.microsoft.com/office/drawing/2014/main" id="{844BBB5A-3917-4EAD-9692-07C2A6CF50D6}"/>
+                <a16:creationId xmlns:a16="http://schemas.microsoft.com/office/drawing/2014/main" id="{6E0ADEB8-3C11-4595-9C1D-0D60D1EF3B5E}"/>
               </a:ext>
             </a:extLst>
           </p:cNvPr>
@@ -13534,7 +13970,7 @@
           <p:cNvPr id="14" name="">
             <a:extLst xmlns:a="http://schemas.openxmlformats.org/drawingml/2006/main">
               <a:ext uri="{FF2B5EF4-FFF2-40B4-BE49-F238E27FC236}">
-                <a16:creationId xmlns:a16="http://schemas.microsoft.com/office/drawing/2014/main" id="{1B2D0A71-14A0-4634-86A0-640D5BD7E1EE}"/>
+                <a16:creationId xmlns:a16="http://schemas.microsoft.com/office/drawing/2014/main" id="{859C9159-5932-48F9-A43F-84A0B77EA91D}"/>
               </a:ext>
             </a:extLst>
           </p:cNvPr>
@@ -13598,7 +14034,7 @@
           <p:cNvPr id="15" name="">
             <a:extLst xmlns:a="http://schemas.openxmlformats.org/drawingml/2006/main">
               <a:ext uri="{FF2B5EF4-FFF2-40B4-BE49-F238E27FC236}">
-                <a16:creationId xmlns:a16="http://schemas.microsoft.com/office/drawing/2014/main" id="{F31471C9-952B-444D-8F54-11824C078BA0}"/>
+                <a16:creationId xmlns:a16="http://schemas.microsoft.com/office/drawing/2014/main" id="{9C3A9694-475F-4C60-A1E3-7A53924FBB6E}"/>
               </a:ext>
             </a:extLst>
           </p:cNvPr>
@@ -13662,7 +14098,7 @@
           <p:cNvPr id="16" name="">
             <a:extLst xmlns:a="http://schemas.openxmlformats.org/drawingml/2006/main">
               <a:ext uri="{FF2B5EF4-FFF2-40B4-BE49-F238E27FC236}">
-                <a16:creationId xmlns:a16="http://schemas.microsoft.com/office/drawing/2014/main" id="{F64ABCCE-859F-495A-BEA3-346EC95B3C7D}"/>
+                <a16:creationId xmlns:a16="http://schemas.microsoft.com/office/drawing/2014/main" id="{4D68336D-52E7-4388-9687-D8CCBCF6131F}"/>
               </a:ext>
             </a:extLst>
           </p:cNvPr>
@@ -13695,7 +14131,7 @@
           <p:cNvPr id="17" name="">
             <a:extLst xmlns:a="http://schemas.openxmlformats.org/drawingml/2006/main">
               <a:ext uri="{FF2B5EF4-FFF2-40B4-BE49-F238E27FC236}">
-                <a16:creationId xmlns:a16="http://schemas.microsoft.com/office/drawing/2014/main" id="{A3BD44A1-20C1-4799-925A-CA2ECA224710}"/>
+                <a16:creationId xmlns:a16="http://schemas.microsoft.com/office/drawing/2014/main" id="{0E5D116A-9B26-45B8-ADA9-E0B4D808B67A}"/>
               </a:ext>
             </a:extLst>
           </p:cNvPr>
@@ -13730,7 +14166,7 @@
           <p:cNvPr id="18" name="">
             <a:extLst xmlns:a="http://schemas.openxmlformats.org/drawingml/2006/main">
               <a:ext uri="{FF2B5EF4-FFF2-40B4-BE49-F238E27FC236}">
-                <a16:creationId xmlns:a16="http://schemas.microsoft.com/office/drawing/2014/main" id="{27F895ED-DE9A-4630-956F-0C7527627549}"/>
+                <a16:creationId xmlns:a16="http://schemas.microsoft.com/office/drawing/2014/main" id="{89709B5C-8AF4-491B-8966-8A9C0764ABD0}"/>
               </a:ext>
             </a:extLst>
           </p:cNvPr>
@@ -13794,7 +14230,7 @@
           <p:cNvPr id="19" name="">
             <a:extLst xmlns:a="http://schemas.openxmlformats.org/drawingml/2006/main">
               <a:ext uri="{FF2B5EF4-FFF2-40B4-BE49-F238E27FC236}">
-                <a16:creationId xmlns:a16="http://schemas.microsoft.com/office/drawing/2014/main" id="{20237C6E-E2B6-40ED-B61C-9132E9469045}"/>
+                <a16:creationId xmlns:a16="http://schemas.microsoft.com/office/drawing/2014/main" id="{A94B911A-DB22-46E2-B6AF-B4493FFE62E9}"/>
               </a:ext>
             </a:extLst>
           </p:cNvPr>
@@ -13856,7 +14292,7 @@
     </p:spTree>
     <p:extLst>
       <p:ext uri="{BB962C8B-B14F-4D97-AF65-F5344CB8AC3E}">
-        <p14:creationId xmlns:p14="http://schemas.microsoft.com/office/powerpoint/2010/main" val="22599089"/>
+        <p14:creationId xmlns:p14="http://schemas.microsoft.com/office/powerpoint/2010/main" val="633917351"/>
       </p:ext>
     </p:extLst>
   </p:cSld>
@@ -13880,7 +14316,7 @@
           <p:cNvPr id="1" name="">
             <a:extLst xmlns:a="http://schemas.openxmlformats.org/drawingml/2006/main">
               <a:ext uri="{FF2B5EF4-FFF2-40B4-BE49-F238E27FC236}">
-                <a16:creationId xmlns:a16="http://schemas.microsoft.com/office/drawing/2014/main" id="{0BAA87D7-F7ED-429E-A71D-C69BDDC9A792}"/>
+                <a16:creationId xmlns:a16="http://schemas.microsoft.com/office/drawing/2014/main" id="{79494ACC-9AAF-4F12-A9C5-93A44255D8D5}"/>
               </a:ext>
             </a:extLst>
           </p:cNvPr>
@@ -13915,7 +14351,7 @@
           <p:cNvPr id="2" name="">
             <a:extLst xmlns:a="http://schemas.openxmlformats.org/drawingml/2006/main">
               <a:ext uri="{FF2B5EF4-FFF2-40B4-BE49-F238E27FC236}">
-                <a16:creationId xmlns:a16="http://schemas.microsoft.com/office/drawing/2014/main" id="{12C90DAB-CF19-493C-998E-A5AD6A7073CA}"/>
+                <a16:creationId xmlns:a16="http://schemas.microsoft.com/office/drawing/2014/main" id="{7637647F-172B-4A98-BB71-06B51F896293}"/>
               </a:ext>
             </a:extLst>
           </p:cNvPr>
@@ -13950,7 +14386,7 @@
           <p:cNvPr id="3" name="">
             <a:extLst xmlns:a="http://schemas.openxmlformats.org/drawingml/2006/main">
               <a:ext uri="{FF2B5EF4-FFF2-40B4-BE49-F238E27FC236}">
-                <a16:creationId xmlns:a16="http://schemas.microsoft.com/office/drawing/2014/main" id="{40732D05-983C-44FB-BE23-1C8AD503509C}"/>
+                <a16:creationId xmlns:a16="http://schemas.microsoft.com/office/drawing/2014/main" id="{5D4183D4-7CAA-4BB4-929A-B3D440A2A929}"/>
               </a:ext>
             </a:extLst>
           </p:cNvPr>
@@ -13985,7 +14421,7 @@
           <p:cNvPr id="4" name="">
             <a:extLst xmlns:a="http://schemas.openxmlformats.org/drawingml/2006/main">
               <a:ext uri="{FF2B5EF4-FFF2-40B4-BE49-F238E27FC236}">
-                <a16:creationId xmlns:a16="http://schemas.microsoft.com/office/drawing/2014/main" id="{D3A24BDC-09CB-4430-8B8D-E011D0E45122}"/>
+                <a16:creationId xmlns:a16="http://schemas.microsoft.com/office/drawing/2014/main" id="{96E02AA7-DA59-4E2C-96F1-4EF9553A49D1}"/>
               </a:ext>
             </a:extLst>
           </p:cNvPr>
@@ -14049,7 +14485,7 @@
           <p:cNvPr id="5" name="">
             <a:extLst xmlns:a="http://schemas.openxmlformats.org/drawingml/2006/main">
               <a:ext uri="{FF2B5EF4-FFF2-40B4-BE49-F238E27FC236}">
-                <a16:creationId xmlns:a16="http://schemas.microsoft.com/office/drawing/2014/main" id="{8AB6630A-159C-45ED-B942-CD9E4B35CFAD}"/>
+                <a16:creationId xmlns:a16="http://schemas.microsoft.com/office/drawing/2014/main" id="{963E96C2-F8EC-4C11-91F2-672F54FBECC4}"/>
               </a:ext>
             </a:extLst>
           </p:cNvPr>
@@ -14113,7 +14549,7 @@
           <p:cNvPr id="6" name="">
             <a:extLst xmlns:a="http://schemas.openxmlformats.org/drawingml/2006/main">
               <a:ext uri="{FF2B5EF4-FFF2-40B4-BE49-F238E27FC236}">
-                <a16:creationId xmlns:a16="http://schemas.microsoft.com/office/drawing/2014/main" id="{FF6B620E-90B0-43F5-9032-8EA509F6391C}"/>
+                <a16:creationId xmlns:a16="http://schemas.microsoft.com/office/drawing/2014/main" id="{3FDD22BC-FC35-49B8-9A2E-BA299FE85CE0}"/>
               </a:ext>
             </a:extLst>
           </p:cNvPr>
@@ -14177,7 +14613,7 @@
           <p:cNvPr id="7" name="">
             <a:extLst xmlns:a="http://schemas.openxmlformats.org/drawingml/2006/main">
               <a:ext uri="{FF2B5EF4-FFF2-40B4-BE49-F238E27FC236}">
-                <a16:creationId xmlns:a16="http://schemas.microsoft.com/office/drawing/2014/main" id="{06486E1B-89A2-43A0-97CC-91AEF6C0C3A6}"/>
+                <a16:creationId xmlns:a16="http://schemas.microsoft.com/office/drawing/2014/main" id="{1C935785-E362-4BC0-88AB-5E4D901B090F}"/>
               </a:ext>
             </a:extLst>
           </p:cNvPr>
@@ -14241,7 +14677,7 @@
           <p:cNvPr id="8" name="">
             <a:extLst xmlns:a="http://schemas.openxmlformats.org/drawingml/2006/main">
               <a:ext uri="{FF2B5EF4-FFF2-40B4-BE49-F238E27FC236}">
-                <a16:creationId xmlns:a16="http://schemas.microsoft.com/office/drawing/2014/main" id="{9E51751A-F2FA-4CE1-9515-FA4FABE8C20D}"/>
+                <a16:creationId xmlns:a16="http://schemas.microsoft.com/office/drawing/2014/main" id="{7831A2C3-00BE-45EE-89E1-5374F81F81CE}"/>
               </a:ext>
             </a:extLst>
           </p:cNvPr>
@@ -14274,7 +14710,7 @@
           <p:cNvPr id="9" name="">
             <a:extLst xmlns:a="http://schemas.openxmlformats.org/drawingml/2006/main">
               <a:ext uri="{FF2B5EF4-FFF2-40B4-BE49-F238E27FC236}">
-                <a16:creationId xmlns:a16="http://schemas.microsoft.com/office/drawing/2014/main" id="{0C275F12-855A-4D14-9C5C-B4EDAA371868}"/>
+                <a16:creationId xmlns:a16="http://schemas.microsoft.com/office/drawing/2014/main" id="{88B5DAC2-1DB3-477F-922C-581B021B0428}"/>
               </a:ext>
             </a:extLst>
           </p:cNvPr>
@@ -14309,7 +14745,7 @@
           <p:cNvPr id="10" name="">
             <a:extLst xmlns:a="http://schemas.openxmlformats.org/drawingml/2006/main">
               <a:ext uri="{FF2B5EF4-FFF2-40B4-BE49-F238E27FC236}">
-                <a16:creationId xmlns:a16="http://schemas.microsoft.com/office/drawing/2014/main" id="{7AB8B2A8-7F41-417E-8D31-AA361B2F40A5}"/>
+                <a16:creationId xmlns:a16="http://schemas.microsoft.com/office/drawing/2014/main" id="{0971ADFB-8319-4D92-B60B-7A451E6CBF7A}"/>
               </a:ext>
             </a:extLst>
           </p:cNvPr>
@@ -14373,7 +14809,7 @@
           <p:cNvPr id="11" name="">
             <a:extLst xmlns:a="http://schemas.openxmlformats.org/drawingml/2006/main">
               <a:ext uri="{FF2B5EF4-FFF2-40B4-BE49-F238E27FC236}">
-                <a16:creationId xmlns:a16="http://schemas.microsoft.com/office/drawing/2014/main" id="{D8620CE2-614D-46D1-927E-F000C96CE434}"/>
+                <a16:creationId xmlns:a16="http://schemas.microsoft.com/office/drawing/2014/main" id="{B49FD69C-6552-460E-B7A9-4198A633DD96}"/>
               </a:ext>
             </a:extLst>
           </p:cNvPr>
@@ -14437,7 +14873,7 @@
           <p:cNvPr id="12" name="">
             <a:extLst xmlns:a="http://schemas.openxmlformats.org/drawingml/2006/main">
               <a:ext uri="{FF2B5EF4-FFF2-40B4-BE49-F238E27FC236}">
-                <a16:creationId xmlns:a16="http://schemas.microsoft.com/office/drawing/2014/main" id="{EF7DD2D5-0F3E-46AA-92A8-109DF98BBF15}"/>
+                <a16:creationId xmlns:a16="http://schemas.microsoft.com/office/drawing/2014/main" id="{CB564B96-8CF1-4048-B017-ED8A59D9EB6D}"/>
               </a:ext>
             </a:extLst>
           </p:cNvPr>
@@ -14470,7 +14906,7 @@
           <p:cNvPr id="13" name="">
             <a:extLst xmlns:a="http://schemas.openxmlformats.org/drawingml/2006/main">
               <a:ext uri="{FF2B5EF4-FFF2-40B4-BE49-F238E27FC236}">
-                <a16:creationId xmlns:a16="http://schemas.microsoft.com/office/drawing/2014/main" id="{698CD9B7-D4AC-4AE5-B48E-A74024DB0321}"/>
+                <a16:creationId xmlns:a16="http://schemas.microsoft.com/office/drawing/2014/main" id="{4DCC3190-7718-49BA-884B-3EA0538B84CB}"/>
               </a:ext>
             </a:extLst>
           </p:cNvPr>
@@ -14505,7 +14941,7 @@
           <p:cNvPr id="14" name="">
             <a:extLst xmlns:a="http://schemas.openxmlformats.org/drawingml/2006/main">
               <a:ext uri="{FF2B5EF4-FFF2-40B4-BE49-F238E27FC236}">
-                <a16:creationId xmlns:a16="http://schemas.microsoft.com/office/drawing/2014/main" id="{D5EFC72E-E016-46E4-8005-D6864EA60AA3}"/>
+                <a16:creationId xmlns:a16="http://schemas.microsoft.com/office/drawing/2014/main" id="{61F105D2-9CDC-4081-8E64-E4C880FF698C}"/>
               </a:ext>
             </a:extLst>
           </p:cNvPr>
@@ -14569,7 +15005,7 @@
           <p:cNvPr id="15" name="">
             <a:extLst xmlns:a="http://schemas.openxmlformats.org/drawingml/2006/main">
               <a:ext uri="{FF2B5EF4-FFF2-40B4-BE49-F238E27FC236}">
-                <a16:creationId xmlns:a16="http://schemas.microsoft.com/office/drawing/2014/main" id="{8FA2E2F3-0163-4902-832B-DE2D960139F6}"/>
+                <a16:creationId xmlns:a16="http://schemas.microsoft.com/office/drawing/2014/main" id="{32B70C62-4CCE-41F0-B878-2AAD8F283383}"/>
               </a:ext>
             </a:extLst>
           </p:cNvPr>
@@ -14633,7 +15069,7 @@
           <p:cNvPr id="16" name="">
             <a:extLst xmlns:a="http://schemas.openxmlformats.org/drawingml/2006/main">
               <a:ext uri="{FF2B5EF4-FFF2-40B4-BE49-F238E27FC236}">
-                <a16:creationId xmlns:a16="http://schemas.microsoft.com/office/drawing/2014/main" id="{5919AC2A-A6EB-45EE-BDD7-8B980A9BE7CF}"/>
+                <a16:creationId xmlns:a16="http://schemas.microsoft.com/office/drawing/2014/main" id="{8F26E25F-5BF5-4DA0-8B54-1E01AB0D83E5}"/>
               </a:ext>
             </a:extLst>
           </p:cNvPr>
@@ -14666,7 +15102,7 @@
           <p:cNvPr id="17" name="">
             <a:extLst xmlns:a="http://schemas.openxmlformats.org/drawingml/2006/main">
               <a:ext uri="{FF2B5EF4-FFF2-40B4-BE49-F238E27FC236}">
-                <a16:creationId xmlns:a16="http://schemas.microsoft.com/office/drawing/2014/main" id="{7022E7F0-CEFC-410A-B5A2-8436223E7866}"/>
+                <a16:creationId xmlns:a16="http://schemas.microsoft.com/office/drawing/2014/main" id="{EA98D190-2ADF-49A1-AD2A-622B48374BDA}"/>
               </a:ext>
             </a:extLst>
           </p:cNvPr>
@@ -14701,7 +15137,7 @@
           <p:cNvPr id="18" name="">
             <a:extLst xmlns:a="http://schemas.openxmlformats.org/drawingml/2006/main">
               <a:ext uri="{FF2B5EF4-FFF2-40B4-BE49-F238E27FC236}">
-                <a16:creationId xmlns:a16="http://schemas.microsoft.com/office/drawing/2014/main" id="{279EF5E4-FFF7-41FB-A572-DA5E3242DB90}"/>
+                <a16:creationId xmlns:a16="http://schemas.microsoft.com/office/drawing/2014/main" id="{4C2FBC96-AEEB-4F00-8C77-664838F16B65}"/>
               </a:ext>
             </a:extLst>
           </p:cNvPr>
@@ -14765,7 +15201,7 @@
           <p:cNvPr id="19" name="">
             <a:extLst xmlns:a="http://schemas.openxmlformats.org/drawingml/2006/main">
               <a:ext uri="{FF2B5EF4-FFF2-40B4-BE49-F238E27FC236}">
-                <a16:creationId xmlns:a16="http://schemas.microsoft.com/office/drawing/2014/main" id="{24C73A85-7A6B-4AD9-96B5-9B1713565946}"/>
+                <a16:creationId xmlns:a16="http://schemas.microsoft.com/office/drawing/2014/main" id="{85A92459-27EA-4A5F-AF96-3DDF1A9AF921}"/>
               </a:ext>
             </a:extLst>
           </p:cNvPr>
@@ -14827,7 +15263,7 @@
     </p:spTree>
     <p:extLst>
       <p:ext uri="{BB962C8B-B14F-4D97-AF65-F5344CB8AC3E}">
-        <p14:creationId xmlns:p14="http://schemas.microsoft.com/office/powerpoint/2010/main" val="1366993604"/>
+        <p14:creationId xmlns:p14="http://schemas.microsoft.com/office/powerpoint/2010/main" val="18474764"/>
       </p:ext>
     </p:extLst>
   </p:cSld>
@@ -14851,7 +15287,7 @@
           <p:cNvPr id="1" name="">
             <a:extLst xmlns:a="http://schemas.openxmlformats.org/drawingml/2006/main">
               <a:ext uri="{FF2B5EF4-FFF2-40B4-BE49-F238E27FC236}">
-                <a16:creationId xmlns:a16="http://schemas.microsoft.com/office/drawing/2014/main" id="{1A05E81B-8F82-4EDE-A731-0CD13BFD0AE4}"/>
+                <a16:creationId xmlns:a16="http://schemas.microsoft.com/office/drawing/2014/main" id="{7C2FC53E-A9DC-4194-9C44-0989635E88F2}"/>
               </a:ext>
             </a:extLst>
           </p:cNvPr>
@@ -14886,7 +15322,7 @@
           <p:cNvPr id="2" name="">
             <a:extLst xmlns:a="http://schemas.openxmlformats.org/drawingml/2006/main">
               <a:ext uri="{FF2B5EF4-FFF2-40B4-BE49-F238E27FC236}">
-                <a16:creationId xmlns:a16="http://schemas.microsoft.com/office/drawing/2014/main" id="{615F454E-F397-4257-968A-8F96CABAAFB5}"/>
+                <a16:creationId xmlns:a16="http://schemas.microsoft.com/office/drawing/2014/main" id="{6528FB10-9B83-4339-AA7D-E4E9A9089A55}"/>
               </a:ext>
             </a:extLst>
           </p:cNvPr>
@@ -14921,7 +15357,7 @@
           <p:cNvPr id="3" name="">
             <a:extLst xmlns:a="http://schemas.openxmlformats.org/drawingml/2006/main">
               <a:ext uri="{FF2B5EF4-FFF2-40B4-BE49-F238E27FC236}">
-                <a16:creationId xmlns:a16="http://schemas.microsoft.com/office/drawing/2014/main" id="{AC9590D7-21E6-4051-8C10-B9F5F6E186F6}"/>
+                <a16:creationId xmlns:a16="http://schemas.microsoft.com/office/drawing/2014/main" id="{108BB03E-C045-4666-8160-AF1983B1B82A}"/>
               </a:ext>
             </a:extLst>
           </p:cNvPr>
@@ -14956,7 +15392,7 @@
           <p:cNvPr id="4" name="">
             <a:extLst xmlns:a="http://schemas.openxmlformats.org/drawingml/2006/main">
               <a:ext uri="{FF2B5EF4-FFF2-40B4-BE49-F238E27FC236}">
-                <a16:creationId xmlns:a16="http://schemas.microsoft.com/office/drawing/2014/main" id="{5D9104F2-E71A-47FF-ADBE-C9209A7382E5}"/>
+                <a16:creationId xmlns:a16="http://schemas.microsoft.com/office/drawing/2014/main" id="{DD998C64-8131-440A-B0A9-DF5F31B22BBC}"/>
               </a:ext>
             </a:extLst>
           </p:cNvPr>
@@ -15020,7 +15456,7 @@
           <p:cNvPr id="5" name="">
             <a:extLst xmlns:a="http://schemas.openxmlformats.org/drawingml/2006/main">
               <a:ext uri="{FF2B5EF4-FFF2-40B4-BE49-F238E27FC236}">
-                <a16:creationId xmlns:a16="http://schemas.microsoft.com/office/drawing/2014/main" id="{3F1C76AD-CD91-448F-898A-EBEF14494DA8}"/>
+                <a16:creationId xmlns:a16="http://schemas.microsoft.com/office/drawing/2014/main" id="{5F04AAAA-DD08-46FF-884C-EBD53EF7A209}"/>
               </a:ext>
             </a:extLst>
           </p:cNvPr>
@@ -15084,7 +15520,7 @@
           <p:cNvPr id="6" name="">
             <a:extLst xmlns:a="http://schemas.openxmlformats.org/drawingml/2006/main">
               <a:ext uri="{FF2B5EF4-FFF2-40B4-BE49-F238E27FC236}">
-                <a16:creationId xmlns:a16="http://schemas.microsoft.com/office/drawing/2014/main" id="{D5CA3CF9-660C-46F6-91C3-DB86A5D64FC5}"/>
+                <a16:creationId xmlns:a16="http://schemas.microsoft.com/office/drawing/2014/main" id="{80CF1D3B-1061-4CB5-98BC-F9CCAE09C87C}"/>
               </a:ext>
             </a:extLst>
           </p:cNvPr>
@@ -15148,7 +15584,7 @@
           <p:cNvPr id="7" name="">
             <a:extLst xmlns:a="http://schemas.openxmlformats.org/drawingml/2006/main">
               <a:ext uri="{FF2B5EF4-FFF2-40B4-BE49-F238E27FC236}">
-                <a16:creationId xmlns:a16="http://schemas.microsoft.com/office/drawing/2014/main" id="{6A0057EE-D44B-4FEE-9866-667649EFAB79}"/>
+                <a16:creationId xmlns:a16="http://schemas.microsoft.com/office/drawing/2014/main" id="{5B920F96-DFAB-4B8E-93F4-C91855699E05}"/>
               </a:ext>
             </a:extLst>
           </p:cNvPr>
@@ -15212,7 +15648,7 @@
           <p:cNvPr id="8" name="">
             <a:extLst xmlns:a="http://schemas.openxmlformats.org/drawingml/2006/main">
               <a:ext uri="{FF2B5EF4-FFF2-40B4-BE49-F238E27FC236}">
-                <a16:creationId xmlns:a16="http://schemas.microsoft.com/office/drawing/2014/main" id="{81664B2F-A9F1-48D5-A625-FF3DA9950BF4}"/>
+                <a16:creationId xmlns:a16="http://schemas.microsoft.com/office/drawing/2014/main" id="{9C6DE5CC-5C58-4EEE-99B3-A56711D6474F}"/>
               </a:ext>
             </a:extLst>
           </p:cNvPr>
@@ -15245,7 +15681,7 @@
           <p:cNvPr id="9" name="">
             <a:extLst xmlns:a="http://schemas.openxmlformats.org/drawingml/2006/main">
               <a:ext uri="{FF2B5EF4-FFF2-40B4-BE49-F238E27FC236}">
-                <a16:creationId xmlns:a16="http://schemas.microsoft.com/office/drawing/2014/main" id="{2E99C810-2546-4BC8-95EA-B3DD09AA1073}"/>
+                <a16:creationId xmlns:a16="http://schemas.microsoft.com/office/drawing/2014/main" id="{092C1CC4-0ED5-401E-BED1-0D1984C7E178}"/>
               </a:ext>
             </a:extLst>
           </p:cNvPr>
@@ -15280,7 +15716,7 @@
           <p:cNvPr id="10" name="">
             <a:extLst xmlns:a="http://schemas.openxmlformats.org/drawingml/2006/main">
               <a:ext uri="{FF2B5EF4-FFF2-40B4-BE49-F238E27FC236}">
-                <a16:creationId xmlns:a16="http://schemas.microsoft.com/office/drawing/2014/main" id="{4F5B0C5E-B69F-4A19-AC71-BB53BFFC31AE}"/>
+                <a16:creationId xmlns:a16="http://schemas.microsoft.com/office/drawing/2014/main" id="{F6DED4F2-5C90-4E84-81A4-E87AAEAED764}"/>
               </a:ext>
             </a:extLst>
           </p:cNvPr>
@@ -15344,7 +15780,7 @@
           <p:cNvPr id="11" name="">
             <a:extLst xmlns:a="http://schemas.openxmlformats.org/drawingml/2006/main">
               <a:ext uri="{FF2B5EF4-FFF2-40B4-BE49-F238E27FC236}">
-                <a16:creationId xmlns:a16="http://schemas.microsoft.com/office/drawing/2014/main" id="{C44417F5-7BDD-4B08-BE77-35411EEE648D}"/>
+                <a16:creationId xmlns:a16="http://schemas.microsoft.com/office/drawing/2014/main" id="{DD1975B6-8F53-4519-A754-25063481039F}"/>
               </a:ext>
             </a:extLst>
           </p:cNvPr>
@@ -15408,7 +15844,7 @@
           <p:cNvPr id="12" name="">
             <a:extLst xmlns:a="http://schemas.openxmlformats.org/drawingml/2006/main">
               <a:ext uri="{FF2B5EF4-FFF2-40B4-BE49-F238E27FC236}">
-                <a16:creationId xmlns:a16="http://schemas.microsoft.com/office/drawing/2014/main" id="{F9D09DD7-808D-4493-89C1-85FA615FCFEB}"/>
+                <a16:creationId xmlns:a16="http://schemas.microsoft.com/office/drawing/2014/main" id="{44103F05-7E7B-4B95-A96B-385E08877D75}"/>
               </a:ext>
             </a:extLst>
           </p:cNvPr>
@@ -15441,7 +15877,7 @@
           <p:cNvPr id="13" name="">
             <a:extLst xmlns:a="http://schemas.openxmlformats.org/drawingml/2006/main">
               <a:ext uri="{FF2B5EF4-FFF2-40B4-BE49-F238E27FC236}">
-                <a16:creationId xmlns:a16="http://schemas.microsoft.com/office/drawing/2014/main" id="{8E1D88F3-AAA7-4D14-BF40-109A3B6B6F81}"/>
+                <a16:creationId xmlns:a16="http://schemas.microsoft.com/office/drawing/2014/main" id="{63D2BFF4-C456-4009-9183-E08651E78B50}"/>
               </a:ext>
             </a:extLst>
           </p:cNvPr>
@@ -15476,7 +15912,7 @@
           <p:cNvPr id="14" name="">
             <a:extLst xmlns:a="http://schemas.openxmlformats.org/drawingml/2006/main">
               <a:ext uri="{FF2B5EF4-FFF2-40B4-BE49-F238E27FC236}">
-                <a16:creationId xmlns:a16="http://schemas.microsoft.com/office/drawing/2014/main" id="{031D7CF2-4520-416E-AAED-6DEC6DE69B16}"/>
+                <a16:creationId xmlns:a16="http://schemas.microsoft.com/office/drawing/2014/main" id="{F79C30D1-6B2F-45C3-99EE-83A95A7B2C1E}"/>
               </a:ext>
             </a:extLst>
           </p:cNvPr>
@@ -15540,7 +15976,7 @@
           <p:cNvPr id="15" name="">
             <a:extLst xmlns:a="http://schemas.openxmlformats.org/drawingml/2006/main">
               <a:ext uri="{FF2B5EF4-FFF2-40B4-BE49-F238E27FC236}">
-                <a16:creationId xmlns:a16="http://schemas.microsoft.com/office/drawing/2014/main" id="{93FFBF41-142A-4947-9579-7AD9B78927D3}"/>
+                <a16:creationId xmlns:a16="http://schemas.microsoft.com/office/drawing/2014/main" id="{01F5A451-8777-4BD3-910D-2C86578B8904}"/>
               </a:ext>
             </a:extLst>
           </p:cNvPr>
@@ -15604,7 +16040,7 @@
           <p:cNvPr id="16" name="">
             <a:extLst xmlns:a="http://schemas.openxmlformats.org/drawingml/2006/main">
               <a:ext uri="{FF2B5EF4-FFF2-40B4-BE49-F238E27FC236}">
-                <a16:creationId xmlns:a16="http://schemas.microsoft.com/office/drawing/2014/main" id="{517A7876-40C5-4E06-8787-0CC98E2CA308}"/>
+                <a16:creationId xmlns:a16="http://schemas.microsoft.com/office/drawing/2014/main" id="{AD2B97D0-E1F0-4BED-9A2E-1FA3002BBD0C}"/>
               </a:ext>
             </a:extLst>
           </p:cNvPr>
@@ -15637,7 +16073,7 @@
           <p:cNvPr id="17" name="">
             <a:extLst xmlns:a="http://schemas.openxmlformats.org/drawingml/2006/main">
               <a:ext uri="{FF2B5EF4-FFF2-40B4-BE49-F238E27FC236}">
-                <a16:creationId xmlns:a16="http://schemas.microsoft.com/office/drawing/2014/main" id="{C5E49176-093C-4A09-A23A-BC3EE6816267}"/>
+                <a16:creationId xmlns:a16="http://schemas.microsoft.com/office/drawing/2014/main" id="{AC0CABB8-DACF-438A-B159-DB18E44FDE23}"/>
               </a:ext>
             </a:extLst>
           </p:cNvPr>
@@ -15672,7 +16108,7 @@
           <p:cNvPr id="18" name="">
             <a:extLst xmlns:a="http://schemas.openxmlformats.org/drawingml/2006/main">
               <a:ext uri="{FF2B5EF4-FFF2-40B4-BE49-F238E27FC236}">
-                <a16:creationId xmlns:a16="http://schemas.microsoft.com/office/drawing/2014/main" id="{8700BD9F-3B2F-4F63-A8BD-63C9417D62A6}"/>
+                <a16:creationId xmlns:a16="http://schemas.microsoft.com/office/drawing/2014/main" id="{AD820F62-CC9E-4B65-B267-60DC22827A2C}"/>
               </a:ext>
             </a:extLst>
           </p:cNvPr>
@@ -15736,7 +16172,7 @@
           <p:cNvPr id="19" name="">
             <a:extLst xmlns:a="http://schemas.openxmlformats.org/drawingml/2006/main">
               <a:ext uri="{FF2B5EF4-FFF2-40B4-BE49-F238E27FC236}">
-                <a16:creationId xmlns:a16="http://schemas.microsoft.com/office/drawing/2014/main" id="{AB8C3484-FDA2-491E-A4E7-F9C3D670C167}"/>
+                <a16:creationId xmlns:a16="http://schemas.microsoft.com/office/drawing/2014/main" id="{3625F957-E710-47E2-90A2-FF82E6A0708E}"/>
               </a:ext>
             </a:extLst>
           </p:cNvPr>
@@ -15800,7 +16236,7 @@
           <p:cNvPr id="20" name="">
             <a:extLst xmlns:a="http://schemas.openxmlformats.org/drawingml/2006/main">
               <a:ext uri="{FF2B5EF4-FFF2-40B4-BE49-F238E27FC236}">
-                <a16:creationId xmlns:a16="http://schemas.microsoft.com/office/drawing/2014/main" id="{A5ED2208-66E3-4A56-936B-77E7128449D2}"/>
+                <a16:creationId xmlns:a16="http://schemas.microsoft.com/office/drawing/2014/main" id="{1869D9AC-682C-4DD7-A73A-81F63A4A4225}"/>
               </a:ext>
             </a:extLst>
           </p:cNvPr>
@@ -15833,7 +16269,7 @@
           <p:cNvPr id="21" name="">
             <a:extLst xmlns:a="http://schemas.openxmlformats.org/drawingml/2006/main">
               <a:ext uri="{FF2B5EF4-FFF2-40B4-BE49-F238E27FC236}">
-                <a16:creationId xmlns:a16="http://schemas.microsoft.com/office/drawing/2014/main" id="{A3C1A105-F0C4-44CB-8200-9F1DF7A1C87D}"/>
+                <a16:creationId xmlns:a16="http://schemas.microsoft.com/office/drawing/2014/main" id="{F872FF22-1A58-4A68-BC5D-1F53D66B5361}"/>
               </a:ext>
             </a:extLst>
           </p:cNvPr>
@@ -15868,7 +16304,7 @@
           <p:cNvPr id="22" name="">
             <a:extLst xmlns:a="http://schemas.openxmlformats.org/drawingml/2006/main">
               <a:ext uri="{FF2B5EF4-FFF2-40B4-BE49-F238E27FC236}">
-                <a16:creationId xmlns:a16="http://schemas.microsoft.com/office/drawing/2014/main" id="{15EEC82F-243E-44E1-9F40-F35B9645B6F5}"/>
+                <a16:creationId xmlns:a16="http://schemas.microsoft.com/office/drawing/2014/main" id="{98624EA9-8FA7-4CB3-B232-489CE99469EA}"/>
               </a:ext>
             </a:extLst>
           </p:cNvPr>
@@ -15932,7 +16368,7 @@
           <p:cNvPr id="23" name="">
             <a:extLst xmlns:a="http://schemas.openxmlformats.org/drawingml/2006/main">
               <a:ext uri="{FF2B5EF4-FFF2-40B4-BE49-F238E27FC236}">
-                <a16:creationId xmlns:a16="http://schemas.microsoft.com/office/drawing/2014/main" id="{5A71D102-31AC-49A1-86D0-ECFB67131192}"/>
+                <a16:creationId xmlns:a16="http://schemas.microsoft.com/office/drawing/2014/main" id="{B5EE6A7A-17C0-41BF-A73F-28226D17C9CC}"/>
               </a:ext>
             </a:extLst>
           </p:cNvPr>
@@ -15994,7 +16430,7 @@
     </p:spTree>
     <p:extLst>
       <p:ext uri="{BB962C8B-B14F-4D97-AF65-F5344CB8AC3E}">
-        <p14:creationId xmlns:p14="http://schemas.microsoft.com/office/powerpoint/2010/main" val="939867850"/>
+        <p14:creationId xmlns:p14="http://schemas.microsoft.com/office/powerpoint/2010/main" val="576701087"/>
       </p:ext>
     </p:extLst>
   </p:cSld>
@@ -16018,7 +16454,7 @@
           <p:cNvPr id="1" name="">
             <a:extLst xmlns:a="http://schemas.openxmlformats.org/drawingml/2006/main">
               <a:ext uri="{FF2B5EF4-FFF2-40B4-BE49-F238E27FC236}">
-                <a16:creationId xmlns:a16="http://schemas.microsoft.com/office/drawing/2014/main" id="{A57C982D-8B4D-4101-B7CD-138A5B8D437A}"/>
+                <a16:creationId xmlns:a16="http://schemas.microsoft.com/office/drawing/2014/main" id="{D6376023-DF1C-4893-ADC7-92092B1703B0}"/>
               </a:ext>
             </a:extLst>
           </p:cNvPr>
@@ -16053,7 +16489,7 @@
           <p:cNvPr id="2" name="">
             <a:extLst xmlns:a="http://schemas.openxmlformats.org/drawingml/2006/main">
               <a:ext uri="{FF2B5EF4-FFF2-40B4-BE49-F238E27FC236}">
-                <a16:creationId xmlns:a16="http://schemas.microsoft.com/office/drawing/2014/main" id="{04B0B4F0-4878-418F-A7D9-F3AAB9DDA0C4}"/>
+                <a16:creationId xmlns:a16="http://schemas.microsoft.com/office/drawing/2014/main" id="{03B82B04-860D-4657-8B71-F21D9BD04B2E}"/>
               </a:ext>
             </a:extLst>
           </p:cNvPr>
@@ -16088,7 +16524,7 @@
           <p:cNvPr id="3" name="">
             <a:extLst xmlns:a="http://schemas.openxmlformats.org/drawingml/2006/main">
               <a:ext uri="{FF2B5EF4-FFF2-40B4-BE49-F238E27FC236}">
-                <a16:creationId xmlns:a16="http://schemas.microsoft.com/office/drawing/2014/main" id="{015DBC6D-78D6-4865-8BBE-0951770A3032}"/>
+                <a16:creationId xmlns:a16="http://schemas.microsoft.com/office/drawing/2014/main" id="{DAB3159B-6B70-4DF7-A5F0-C6029A16AA3F}"/>
               </a:ext>
             </a:extLst>
           </p:cNvPr>
@@ -16123,7 +16559,7 @@
           <p:cNvPr id="4" name="">
             <a:extLst xmlns:a="http://schemas.openxmlformats.org/drawingml/2006/main">
               <a:ext uri="{FF2B5EF4-FFF2-40B4-BE49-F238E27FC236}">
-                <a16:creationId xmlns:a16="http://schemas.microsoft.com/office/drawing/2014/main" id="{8A0C5C45-7721-4E02-8576-E1313BF83F3A}"/>
+                <a16:creationId xmlns:a16="http://schemas.microsoft.com/office/drawing/2014/main" id="{43F699D9-2ECC-4AFF-837D-42AC6DEB2C7D}"/>
               </a:ext>
             </a:extLst>
           </p:cNvPr>
@@ -16187,7 +16623,7 @@
           <p:cNvPr id="5" name="">
             <a:extLst xmlns:a="http://schemas.openxmlformats.org/drawingml/2006/main">
               <a:ext uri="{FF2B5EF4-FFF2-40B4-BE49-F238E27FC236}">
-                <a16:creationId xmlns:a16="http://schemas.microsoft.com/office/drawing/2014/main" id="{4D844176-1BD9-4FF4-ADA2-DDF5A651A5CA}"/>
+                <a16:creationId xmlns:a16="http://schemas.microsoft.com/office/drawing/2014/main" id="{C94EFC53-0B04-4AAB-92A6-CE5F4F770C4E}"/>
               </a:ext>
             </a:extLst>
           </p:cNvPr>
@@ -16251,7 +16687,7 @@
           <p:cNvPr id="6" name="">
             <a:extLst xmlns:a="http://schemas.openxmlformats.org/drawingml/2006/main">
               <a:ext uri="{FF2B5EF4-FFF2-40B4-BE49-F238E27FC236}">
-                <a16:creationId xmlns:a16="http://schemas.microsoft.com/office/drawing/2014/main" id="{B63841C8-926B-4110-9EA3-ACC035265050}"/>
+                <a16:creationId xmlns:a16="http://schemas.microsoft.com/office/drawing/2014/main" id="{0DAC68B6-0BE5-421E-A861-58A990E68474}"/>
               </a:ext>
             </a:extLst>
           </p:cNvPr>
@@ -16315,7 +16751,7 @@
           <p:cNvPr id="7" name="">
             <a:extLst xmlns:a="http://schemas.openxmlformats.org/drawingml/2006/main">
               <a:ext uri="{FF2B5EF4-FFF2-40B4-BE49-F238E27FC236}">
-                <a16:creationId xmlns:a16="http://schemas.microsoft.com/office/drawing/2014/main" id="{7BBFB8ED-D3E9-4A4F-A9A3-588CA8A5C981}"/>
+                <a16:creationId xmlns:a16="http://schemas.microsoft.com/office/drawing/2014/main" id="{77A28AAC-C63C-4099-99FB-62D9A02631ED}"/>
               </a:ext>
             </a:extLst>
           </p:cNvPr>
@@ -16379,7 +16815,7 @@
           <p:cNvPr id="8" name="">
             <a:extLst xmlns:a="http://schemas.openxmlformats.org/drawingml/2006/main">
               <a:ext uri="{FF2B5EF4-FFF2-40B4-BE49-F238E27FC236}">
-                <a16:creationId xmlns:a16="http://schemas.microsoft.com/office/drawing/2014/main" id="{606213C4-95EB-4677-9515-E447971C9B55}"/>
+                <a16:creationId xmlns:a16="http://schemas.microsoft.com/office/drawing/2014/main" id="{C3C9874F-BF48-4911-9D66-6C9148B8D790}"/>
               </a:ext>
             </a:extLst>
           </p:cNvPr>
@@ -16412,7 +16848,7 @@
           <p:cNvPr id="9" name="">
             <a:extLst xmlns:a="http://schemas.openxmlformats.org/drawingml/2006/main">
               <a:ext uri="{FF2B5EF4-FFF2-40B4-BE49-F238E27FC236}">
-                <a16:creationId xmlns:a16="http://schemas.microsoft.com/office/drawing/2014/main" id="{8FEBC15E-8710-43E9-A1B7-292A2784F8AC}"/>
+                <a16:creationId xmlns:a16="http://schemas.microsoft.com/office/drawing/2014/main" id="{C6A881D8-784A-4EB9-BCFF-E468B5FB5D68}"/>
               </a:ext>
             </a:extLst>
           </p:cNvPr>
@@ -16447,7 +16883,7 @@
           <p:cNvPr id="10" name="">
             <a:extLst xmlns:a="http://schemas.openxmlformats.org/drawingml/2006/main">
               <a:ext uri="{FF2B5EF4-FFF2-40B4-BE49-F238E27FC236}">
-                <a16:creationId xmlns:a16="http://schemas.microsoft.com/office/drawing/2014/main" id="{A9B881EB-F7BB-4618-80A6-0FE9A53A2997}"/>
+                <a16:creationId xmlns:a16="http://schemas.microsoft.com/office/drawing/2014/main" id="{88C03549-A828-458D-B106-4753F0DA845D}"/>
               </a:ext>
             </a:extLst>
           </p:cNvPr>
@@ -16511,7 +16947,7 @@
           <p:cNvPr id="11" name="">
             <a:extLst xmlns:a="http://schemas.openxmlformats.org/drawingml/2006/main">
               <a:ext uri="{FF2B5EF4-FFF2-40B4-BE49-F238E27FC236}">
-                <a16:creationId xmlns:a16="http://schemas.microsoft.com/office/drawing/2014/main" id="{7C5E5DA9-EF02-4420-9B2E-3DD682318395}"/>
+                <a16:creationId xmlns:a16="http://schemas.microsoft.com/office/drawing/2014/main" id="{21929CDE-CEFA-455F-8A61-2F7F044027FA}"/>
               </a:ext>
             </a:extLst>
           </p:cNvPr>
@@ -16575,7 +17011,7 @@
           <p:cNvPr id="12" name="">
             <a:extLst xmlns:a="http://schemas.openxmlformats.org/drawingml/2006/main">
               <a:ext uri="{FF2B5EF4-FFF2-40B4-BE49-F238E27FC236}">
-                <a16:creationId xmlns:a16="http://schemas.microsoft.com/office/drawing/2014/main" id="{DB734486-8E2F-4F89-9563-A92CDB27D00E}"/>
+                <a16:creationId xmlns:a16="http://schemas.microsoft.com/office/drawing/2014/main" id="{81D45ACF-D702-40A8-A371-A1BC93586C65}"/>
               </a:ext>
             </a:extLst>
           </p:cNvPr>
@@ -16608,7 +17044,7 @@
           <p:cNvPr id="13" name="">
             <a:extLst xmlns:a="http://schemas.openxmlformats.org/drawingml/2006/main">
               <a:ext uri="{FF2B5EF4-FFF2-40B4-BE49-F238E27FC236}">
-                <a16:creationId xmlns:a16="http://schemas.microsoft.com/office/drawing/2014/main" id="{2E9CE53A-F929-42F6-8B0D-D9B598FF56EA}"/>
+                <a16:creationId xmlns:a16="http://schemas.microsoft.com/office/drawing/2014/main" id="{960A4D30-5EEC-4486-BABE-9F26B70AD22F}"/>
               </a:ext>
             </a:extLst>
           </p:cNvPr>
@@ -16643,7 +17079,7 @@
           <p:cNvPr id="14" name="">
             <a:extLst xmlns:a="http://schemas.openxmlformats.org/drawingml/2006/main">
               <a:ext uri="{FF2B5EF4-FFF2-40B4-BE49-F238E27FC236}">
-                <a16:creationId xmlns:a16="http://schemas.microsoft.com/office/drawing/2014/main" id="{B1583005-6881-4C29-9054-53BC0200E43C}"/>
+                <a16:creationId xmlns:a16="http://schemas.microsoft.com/office/drawing/2014/main" id="{AA31398D-1EF2-42DD-8672-CF8F1A3335DA}"/>
               </a:ext>
             </a:extLst>
           </p:cNvPr>
@@ -16707,7 +17143,7 @@
           <p:cNvPr id="15" name="">
             <a:extLst xmlns:a="http://schemas.openxmlformats.org/drawingml/2006/main">
               <a:ext uri="{FF2B5EF4-FFF2-40B4-BE49-F238E27FC236}">
-                <a16:creationId xmlns:a16="http://schemas.microsoft.com/office/drawing/2014/main" id="{8FA9DB08-6CDE-4233-87FF-DF41F5DC72A9}"/>
+                <a16:creationId xmlns:a16="http://schemas.microsoft.com/office/drawing/2014/main" id="{AA5B5C86-8ED7-460E-9A0E-CD7E273C32D9}"/>
               </a:ext>
             </a:extLst>
           </p:cNvPr>
@@ -16771,7 +17207,7 @@
           <p:cNvPr id="16" name="">
             <a:extLst xmlns:a="http://schemas.openxmlformats.org/drawingml/2006/main">
               <a:ext uri="{FF2B5EF4-FFF2-40B4-BE49-F238E27FC236}">
-                <a16:creationId xmlns:a16="http://schemas.microsoft.com/office/drawing/2014/main" id="{6A068C74-B14B-44FF-B69E-28F5E6F4336C}"/>
+                <a16:creationId xmlns:a16="http://schemas.microsoft.com/office/drawing/2014/main" id="{BF410FF9-4532-42CD-8EF8-FF477EE1ED75}"/>
               </a:ext>
             </a:extLst>
           </p:cNvPr>
@@ -16804,7 +17240,7 @@
           <p:cNvPr id="17" name="">
             <a:extLst xmlns:a="http://schemas.openxmlformats.org/drawingml/2006/main">
               <a:ext uri="{FF2B5EF4-FFF2-40B4-BE49-F238E27FC236}">
-                <a16:creationId xmlns:a16="http://schemas.microsoft.com/office/drawing/2014/main" id="{01821B61-0346-4D75-887E-3ACE7D4E2401}"/>
+                <a16:creationId xmlns:a16="http://schemas.microsoft.com/office/drawing/2014/main" id="{EEBCBE00-D66A-419D-9166-89B398179AD1}"/>
               </a:ext>
             </a:extLst>
           </p:cNvPr>
@@ -16839,7 +17275,7 @@
           <p:cNvPr id="18" name="">
             <a:extLst xmlns:a="http://schemas.openxmlformats.org/drawingml/2006/main">
               <a:ext uri="{FF2B5EF4-FFF2-40B4-BE49-F238E27FC236}">
-                <a16:creationId xmlns:a16="http://schemas.microsoft.com/office/drawing/2014/main" id="{CF9CA05C-E692-41DD-A2EC-09C1D1A9B9ED}"/>
+                <a16:creationId xmlns:a16="http://schemas.microsoft.com/office/drawing/2014/main" id="{8404E1B1-6F7D-4853-B026-BB560DBF1EA5}"/>
               </a:ext>
             </a:extLst>
           </p:cNvPr>
@@ -16903,7 +17339,7 @@
           <p:cNvPr id="19" name="">
             <a:extLst xmlns:a="http://schemas.openxmlformats.org/drawingml/2006/main">
               <a:ext uri="{FF2B5EF4-FFF2-40B4-BE49-F238E27FC236}">
-                <a16:creationId xmlns:a16="http://schemas.microsoft.com/office/drawing/2014/main" id="{05B20F77-2027-4CAA-BE3F-7A63ED796C0C}"/>
+                <a16:creationId xmlns:a16="http://schemas.microsoft.com/office/drawing/2014/main" id="{B417C555-004D-432F-A9BC-7D73E8438339}"/>
               </a:ext>
             </a:extLst>
           </p:cNvPr>
@@ -16965,7 +17401,7 @@
     </p:spTree>
     <p:extLst>
       <p:ext uri="{BB962C8B-B14F-4D97-AF65-F5344CB8AC3E}">
-        <p14:creationId xmlns:p14="http://schemas.microsoft.com/office/powerpoint/2010/main" val="1092731681"/>
+        <p14:creationId xmlns:p14="http://schemas.microsoft.com/office/powerpoint/2010/main" val="318538860"/>
       </p:ext>
     </p:extLst>
   </p:cSld>
@@ -16989,7 +17425,7 @@
           <p:cNvPr id="1" name="">
             <a:extLst xmlns:a="http://schemas.openxmlformats.org/drawingml/2006/main">
               <a:ext uri="{FF2B5EF4-FFF2-40B4-BE49-F238E27FC236}">
-                <a16:creationId xmlns:a16="http://schemas.microsoft.com/office/drawing/2014/main" id="{781915E2-BD10-4210-9F9F-9B7C154EC974}"/>
+                <a16:creationId xmlns:a16="http://schemas.microsoft.com/office/drawing/2014/main" id="{5F273AE8-E98B-403E-B121-42FA1375E34E}"/>
               </a:ext>
             </a:extLst>
           </p:cNvPr>
@@ -17024,7 +17460,7 @@
           <p:cNvPr id="2" name="">
             <a:extLst xmlns:a="http://schemas.openxmlformats.org/drawingml/2006/main">
               <a:ext uri="{FF2B5EF4-FFF2-40B4-BE49-F238E27FC236}">
-                <a16:creationId xmlns:a16="http://schemas.microsoft.com/office/drawing/2014/main" id="{D838BE7E-E75F-4132-B004-EACFBC0F1CC0}"/>
+                <a16:creationId xmlns:a16="http://schemas.microsoft.com/office/drawing/2014/main" id="{7717AF87-69C2-4C8D-A339-FB9726915F3A}"/>
               </a:ext>
             </a:extLst>
           </p:cNvPr>
@@ -17059,7 +17495,7 @@
           <p:cNvPr id="3" name="">
             <a:extLst xmlns:a="http://schemas.openxmlformats.org/drawingml/2006/main">
               <a:ext uri="{FF2B5EF4-FFF2-40B4-BE49-F238E27FC236}">
-                <a16:creationId xmlns:a16="http://schemas.microsoft.com/office/drawing/2014/main" id="{BBD1F438-ECAF-4421-AA2A-E07B951D9801}"/>
+                <a16:creationId xmlns:a16="http://schemas.microsoft.com/office/drawing/2014/main" id="{D75E5D80-FF52-492F-AD98-934B1E0F6B3B}"/>
               </a:ext>
             </a:extLst>
           </p:cNvPr>
@@ -17094,7 +17530,7 @@
           <p:cNvPr id="4" name="">
             <a:extLst xmlns:a="http://schemas.openxmlformats.org/drawingml/2006/main">
               <a:ext uri="{FF2B5EF4-FFF2-40B4-BE49-F238E27FC236}">
-                <a16:creationId xmlns:a16="http://schemas.microsoft.com/office/drawing/2014/main" id="{CFE100A2-A7B0-48BF-8DC1-60DD9FC34D8B}"/>
+                <a16:creationId xmlns:a16="http://schemas.microsoft.com/office/drawing/2014/main" id="{424A8329-6A75-4647-825C-669FEBAD830F}"/>
               </a:ext>
             </a:extLst>
           </p:cNvPr>
@@ -17158,7 +17594,7 @@
           <p:cNvPr id="5" name="">
             <a:extLst xmlns:a="http://schemas.openxmlformats.org/drawingml/2006/main">
               <a:ext uri="{FF2B5EF4-FFF2-40B4-BE49-F238E27FC236}">
-                <a16:creationId xmlns:a16="http://schemas.microsoft.com/office/drawing/2014/main" id="{7F98A8D8-9AA7-41B8-8DA3-D4B005BAC3D7}"/>
+                <a16:creationId xmlns:a16="http://schemas.microsoft.com/office/drawing/2014/main" id="{2B48FC36-47B7-41F1-A415-3A9BDDAA9DBD}"/>
               </a:ext>
             </a:extLst>
           </p:cNvPr>
@@ -17222,7 +17658,7 @@
           <p:cNvPr id="6" name="">
             <a:extLst xmlns:a="http://schemas.openxmlformats.org/drawingml/2006/main">
               <a:ext uri="{FF2B5EF4-FFF2-40B4-BE49-F238E27FC236}">
-                <a16:creationId xmlns:a16="http://schemas.microsoft.com/office/drawing/2014/main" id="{45C25683-C6D0-4F51-9479-A9C6DC790550}"/>
+                <a16:creationId xmlns:a16="http://schemas.microsoft.com/office/drawing/2014/main" id="{4990D753-D35F-49FB-896A-174539EFB91B}"/>
               </a:ext>
             </a:extLst>
           </p:cNvPr>
@@ -17286,7 +17722,7 @@
           <p:cNvPr id="7" name="">
             <a:extLst xmlns:a="http://schemas.openxmlformats.org/drawingml/2006/main">
               <a:ext uri="{FF2B5EF4-FFF2-40B4-BE49-F238E27FC236}">
-                <a16:creationId xmlns:a16="http://schemas.microsoft.com/office/drawing/2014/main" id="{2B6DE30E-DCEF-4A7D-AA9E-7D84E082C5F5}"/>
+                <a16:creationId xmlns:a16="http://schemas.microsoft.com/office/drawing/2014/main" id="{804CFCF9-1640-484F-A4C9-2DBB7C6E4AAD}"/>
               </a:ext>
             </a:extLst>
           </p:cNvPr>
@@ -17350,7 +17786,7 @@
           <p:cNvPr id="8" name="">
             <a:extLst xmlns:a="http://schemas.openxmlformats.org/drawingml/2006/main">
               <a:ext uri="{FF2B5EF4-FFF2-40B4-BE49-F238E27FC236}">
-                <a16:creationId xmlns:a16="http://schemas.microsoft.com/office/drawing/2014/main" id="{FF0B4DFE-6076-4F1C-A92F-C0D76A0337E3}"/>
+                <a16:creationId xmlns:a16="http://schemas.microsoft.com/office/drawing/2014/main" id="{3E5FF1F4-0D48-4DAD-A37A-D8BE3126B94F}"/>
               </a:ext>
             </a:extLst>
           </p:cNvPr>
@@ -17383,7 +17819,7 @@
           <p:cNvPr id="9" name="">
             <a:extLst xmlns:a="http://schemas.openxmlformats.org/drawingml/2006/main">
               <a:ext uri="{FF2B5EF4-FFF2-40B4-BE49-F238E27FC236}">
-                <a16:creationId xmlns:a16="http://schemas.microsoft.com/office/drawing/2014/main" id="{DD38346F-5A10-4DCA-AA01-E4C1496E1A49}"/>
+                <a16:creationId xmlns:a16="http://schemas.microsoft.com/office/drawing/2014/main" id="{86BD04CB-24A7-4E79-9988-F9E00BC70321}"/>
               </a:ext>
             </a:extLst>
           </p:cNvPr>
@@ -17418,7 +17854,7 @@
           <p:cNvPr id="10" name="">
             <a:extLst xmlns:a="http://schemas.openxmlformats.org/drawingml/2006/main">
               <a:ext uri="{FF2B5EF4-FFF2-40B4-BE49-F238E27FC236}">
-                <a16:creationId xmlns:a16="http://schemas.microsoft.com/office/drawing/2014/main" id="{3D96AECC-7C50-4CA3-B03E-E2837C3A1A77}"/>
+                <a16:creationId xmlns:a16="http://schemas.microsoft.com/office/drawing/2014/main" id="{405D200C-6138-43B1-9A9F-E6EDB771E7A5}"/>
               </a:ext>
             </a:extLst>
           </p:cNvPr>
@@ -17482,7 +17918,7 @@
           <p:cNvPr id="11" name="">
             <a:extLst xmlns:a="http://schemas.openxmlformats.org/drawingml/2006/main">
               <a:ext uri="{FF2B5EF4-FFF2-40B4-BE49-F238E27FC236}">
-                <a16:creationId xmlns:a16="http://schemas.microsoft.com/office/drawing/2014/main" id="{F75DC71C-7CF8-482B-8066-F46EBD750A6F}"/>
+                <a16:creationId xmlns:a16="http://schemas.microsoft.com/office/drawing/2014/main" id="{4F8F17F5-6BAD-41D9-ABB8-8B4D7E92943F}"/>
               </a:ext>
             </a:extLst>
           </p:cNvPr>
@@ -17546,7 +17982,7 @@
           <p:cNvPr id="12" name="">
             <a:extLst xmlns:a="http://schemas.openxmlformats.org/drawingml/2006/main">
               <a:ext uri="{FF2B5EF4-FFF2-40B4-BE49-F238E27FC236}">
-                <a16:creationId xmlns:a16="http://schemas.microsoft.com/office/drawing/2014/main" id="{043DF8C6-07F1-470B-87D5-D00833ACEC30}"/>
+                <a16:creationId xmlns:a16="http://schemas.microsoft.com/office/drawing/2014/main" id="{1E2CBC8F-B5BD-43EB-84BC-469A642F8563}"/>
               </a:ext>
             </a:extLst>
           </p:cNvPr>
@@ -17579,7 +18015,7 @@
           <p:cNvPr id="13" name="">
             <a:extLst xmlns:a="http://schemas.openxmlformats.org/drawingml/2006/main">
               <a:ext uri="{FF2B5EF4-FFF2-40B4-BE49-F238E27FC236}">
-                <a16:creationId xmlns:a16="http://schemas.microsoft.com/office/drawing/2014/main" id="{CCE799D0-0C44-40BF-B86F-804169312A5F}"/>
+                <a16:creationId xmlns:a16="http://schemas.microsoft.com/office/drawing/2014/main" id="{5F772756-E0D4-480B-ADDD-97F347701762}"/>
               </a:ext>
             </a:extLst>
           </p:cNvPr>
@@ -17614,7 +18050,7 @@
           <p:cNvPr id="14" name="">
             <a:extLst xmlns:a="http://schemas.openxmlformats.org/drawingml/2006/main">
               <a:ext uri="{FF2B5EF4-FFF2-40B4-BE49-F238E27FC236}">
-                <a16:creationId xmlns:a16="http://schemas.microsoft.com/office/drawing/2014/main" id="{D4A1C9A1-0133-413B-AB4B-F6DFF022DD82}"/>
+                <a16:creationId xmlns:a16="http://schemas.microsoft.com/office/drawing/2014/main" id="{F8939DF0-6E4F-4FD1-A295-0A0FE1CCD648}"/>
               </a:ext>
             </a:extLst>
           </p:cNvPr>
@@ -17678,7 +18114,7 @@
           <p:cNvPr id="15" name="">
             <a:extLst xmlns:a="http://schemas.openxmlformats.org/drawingml/2006/main">
               <a:ext uri="{FF2B5EF4-FFF2-40B4-BE49-F238E27FC236}">
-                <a16:creationId xmlns:a16="http://schemas.microsoft.com/office/drawing/2014/main" id="{C6F25777-19F7-47EF-96A0-075F6896FB0D}"/>
+                <a16:creationId xmlns:a16="http://schemas.microsoft.com/office/drawing/2014/main" id="{C4209B41-2BCB-45FF-BA78-729B5E285E27}"/>
               </a:ext>
             </a:extLst>
           </p:cNvPr>
@@ -17742,7 +18178,7 @@
           <p:cNvPr id="16" name="">
             <a:extLst xmlns:a="http://schemas.openxmlformats.org/drawingml/2006/main">
               <a:ext uri="{FF2B5EF4-FFF2-40B4-BE49-F238E27FC236}">
-                <a16:creationId xmlns:a16="http://schemas.microsoft.com/office/drawing/2014/main" id="{51D10481-3008-4595-9539-B8F63D0BF4B2}"/>
+                <a16:creationId xmlns:a16="http://schemas.microsoft.com/office/drawing/2014/main" id="{EB3D7E98-126E-400D-939B-405EF1A48735}"/>
               </a:ext>
             </a:extLst>
           </p:cNvPr>
@@ -17775,7 +18211,7 @@
           <p:cNvPr id="17" name="">
             <a:extLst xmlns:a="http://schemas.openxmlformats.org/drawingml/2006/main">
               <a:ext uri="{FF2B5EF4-FFF2-40B4-BE49-F238E27FC236}">
-                <a16:creationId xmlns:a16="http://schemas.microsoft.com/office/drawing/2014/main" id="{3A99FF84-3EE6-4874-863E-8C19EDAA07C8}"/>
+                <a16:creationId xmlns:a16="http://schemas.microsoft.com/office/drawing/2014/main" id="{3FFE6033-FC36-443E-AAD5-7022AA4DCC46}"/>
               </a:ext>
             </a:extLst>
           </p:cNvPr>
@@ -17810,7 +18246,7 @@
           <p:cNvPr id="18" name="">
             <a:extLst xmlns:a="http://schemas.openxmlformats.org/drawingml/2006/main">
               <a:ext uri="{FF2B5EF4-FFF2-40B4-BE49-F238E27FC236}">
-                <a16:creationId xmlns:a16="http://schemas.microsoft.com/office/drawing/2014/main" id="{76D88A04-0919-4A93-BE90-19D1A24510FE}"/>
+                <a16:creationId xmlns:a16="http://schemas.microsoft.com/office/drawing/2014/main" id="{572E0CBB-9FFA-4184-AA70-90C6C97F713B}"/>
               </a:ext>
             </a:extLst>
           </p:cNvPr>
@@ -17874,7 +18310,7 @@
           <p:cNvPr id="19" name="">
             <a:extLst xmlns:a="http://schemas.openxmlformats.org/drawingml/2006/main">
               <a:ext uri="{FF2B5EF4-FFF2-40B4-BE49-F238E27FC236}">
-                <a16:creationId xmlns:a16="http://schemas.microsoft.com/office/drawing/2014/main" id="{446485B9-B323-4187-8C5B-9A75F7C2EA30}"/>
+                <a16:creationId xmlns:a16="http://schemas.microsoft.com/office/drawing/2014/main" id="{D716D8F6-BAD9-436D-9DEF-5BA9CB165297}"/>
               </a:ext>
             </a:extLst>
           </p:cNvPr>
@@ -17936,7 +18372,7 @@
     </p:spTree>
     <p:extLst>
       <p:ext uri="{BB962C8B-B14F-4D97-AF65-F5344CB8AC3E}">
-        <p14:creationId xmlns:p14="http://schemas.microsoft.com/office/powerpoint/2010/main" val="2123151068"/>
+        <p14:creationId xmlns:p14="http://schemas.microsoft.com/office/powerpoint/2010/main" val="1962380493"/>
       </p:ext>
     </p:extLst>
   </p:cSld>
@@ -17960,7 +18396,7 @@
           <p:cNvPr id="1" name="">
             <a:extLst xmlns:a="http://schemas.openxmlformats.org/drawingml/2006/main">
               <a:ext uri="{FF2B5EF4-FFF2-40B4-BE49-F238E27FC236}">
-                <a16:creationId xmlns:a16="http://schemas.microsoft.com/office/drawing/2014/main" id="{D6E6F6F8-740D-46CF-B5EC-792EEFF2E994}"/>
+                <a16:creationId xmlns:a16="http://schemas.microsoft.com/office/drawing/2014/main" id="{6778C8E7-32CE-4098-B5A4-38F9B359556F}"/>
               </a:ext>
             </a:extLst>
           </p:cNvPr>
@@ -17995,7 +18431,7 @@
           <p:cNvPr id="2" name="">
             <a:extLst xmlns:a="http://schemas.openxmlformats.org/drawingml/2006/main">
               <a:ext uri="{FF2B5EF4-FFF2-40B4-BE49-F238E27FC236}">
-                <a16:creationId xmlns:a16="http://schemas.microsoft.com/office/drawing/2014/main" id="{0E02D45C-938E-49BD-AD86-3F5C4078EB24}"/>
+                <a16:creationId xmlns:a16="http://schemas.microsoft.com/office/drawing/2014/main" id="{0F42C972-ABDD-401A-A9A2-9920A8AF193D}"/>
               </a:ext>
             </a:extLst>
           </p:cNvPr>
@@ -18030,7 +18466,7 @@
           <p:cNvPr id="3" name="">
             <a:extLst xmlns:a="http://schemas.openxmlformats.org/drawingml/2006/main">
               <a:ext uri="{FF2B5EF4-FFF2-40B4-BE49-F238E27FC236}">
-                <a16:creationId xmlns:a16="http://schemas.microsoft.com/office/drawing/2014/main" id="{C97D02F6-17CA-41FF-BDBC-BA2693744E1B}"/>
+                <a16:creationId xmlns:a16="http://schemas.microsoft.com/office/drawing/2014/main" id="{71515897-881A-4830-B804-86276C355FAB}"/>
               </a:ext>
             </a:extLst>
           </p:cNvPr>
@@ -18065,7 +18501,7 @@
           <p:cNvPr id="4" name="">
             <a:extLst xmlns:a="http://schemas.openxmlformats.org/drawingml/2006/main">
               <a:ext uri="{FF2B5EF4-FFF2-40B4-BE49-F238E27FC236}">
-                <a16:creationId xmlns:a16="http://schemas.microsoft.com/office/drawing/2014/main" id="{5665778E-B649-458F-B893-562DD39A1DCD}"/>
+                <a16:creationId xmlns:a16="http://schemas.microsoft.com/office/drawing/2014/main" id="{E880D03F-9D74-4A9F-B678-617167386F7A}"/>
               </a:ext>
             </a:extLst>
           </p:cNvPr>
@@ -18129,7 +18565,7 @@
           <p:cNvPr id="5" name="">
             <a:extLst xmlns:a="http://schemas.openxmlformats.org/drawingml/2006/main">
               <a:ext uri="{FF2B5EF4-FFF2-40B4-BE49-F238E27FC236}">
-                <a16:creationId xmlns:a16="http://schemas.microsoft.com/office/drawing/2014/main" id="{3C418A08-FCB4-43F4-92DF-0BA7BD1EDA3A}"/>
+                <a16:creationId xmlns:a16="http://schemas.microsoft.com/office/drawing/2014/main" id="{45DAF295-2302-43D2-9348-84300BEA318C}"/>
               </a:ext>
             </a:extLst>
           </p:cNvPr>
@@ -18193,7 +18629,7 @@
           <p:cNvPr id="6" name="">
             <a:extLst xmlns:a="http://schemas.openxmlformats.org/drawingml/2006/main">
               <a:ext uri="{FF2B5EF4-FFF2-40B4-BE49-F238E27FC236}">
-                <a16:creationId xmlns:a16="http://schemas.microsoft.com/office/drawing/2014/main" id="{E12AD86A-1823-4375-94BE-B4BD4D26E78A}"/>
+                <a16:creationId xmlns:a16="http://schemas.microsoft.com/office/drawing/2014/main" id="{0FC616DE-9BCD-4523-B6E2-8BFB8A93C659}"/>
               </a:ext>
             </a:extLst>
           </p:cNvPr>
@@ -18257,7 +18693,7 @@
           <p:cNvPr id="7" name="">
             <a:extLst xmlns:a="http://schemas.openxmlformats.org/drawingml/2006/main">
               <a:ext uri="{FF2B5EF4-FFF2-40B4-BE49-F238E27FC236}">
-                <a16:creationId xmlns:a16="http://schemas.microsoft.com/office/drawing/2014/main" id="{9EB52729-61B9-4370-A0EE-B2E74E7395B9}"/>
+                <a16:creationId xmlns:a16="http://schemas.microsoft.com/office/drawing/2014/main" id="{D2A7044D-145B-4837-A6C4-2A3F1CB393D2}"/>
               </a:ext>
             </a:extLst>
           </p:cNvPr>
@@ -18321,7 +18757,7 @@
           <p:cNvPr id="8" name="">
             <a:extLst xmlns:a="http://schemas.openxmlformats.org/drawingml/2006/main">
               <a:ext uri="{FF2B5EF4-FFF2-40B4-BE49-F238E27FC236}">
-                <a16:creationId xmlns:a16="http://schemas.microsoft.com/office/drawing/2014/main" id="{F8B72CBA-35B7-4855-9C4E-6A04F131A7A6}"/>
+                <a16:creationId xmlns:a16="http://schemas.microsoft.com/office/drawing/2014/main" id="{242B8D2D-8FAA-40AA-B4D5-B4B41F029F4C}"/>
               </a:ext>
             </a:extLst>
           </p:cNvPr>
@@ -18354,7 +18790,7 @@
           <p:cNvPr id="9" name="">
             <a:extLst xmlns:a="http://schemas.openxmlformats.org/drawingml/2006/main">
               <a:ext uri="{FF2B5EF4-FFF2-40B4-BE49-F238E27FC236}">
-                <a16:creationId xmlns:a16="http://schemas.microsoft.com/office/drawing/2014/main" id="{827B15C1-180A-4B1E-952E-E82D125A6C7D}"/>
+                <a16:creationId xmlns:a16="http://schemas.microsoft.com/office/drawing/2014/main" id="{4491EB90-599A-4B3E-858C-202786FA2C30}"/>
               </a:ext>
             </a:extLst>
           </p:cNvPr>
@@ -18389,7 +18825,7 @@
           <p:cNvPr id="10" name="">
             <a:extLst xmlns:a="http://schemas.openxmlformats.org/drawingml/2006/main">
               <a:ext uri="{FF2B5EF4-FFF2-40B4-BE49-F238E27FC236}">
-                <a16:creationId xmlns:a16="http://schemas.microsoft.com/office/drawing/2014/main" id="{7C2BA7B3-9B48-4399-9A06-B584E3D628D3}"/>
+                <a16:creationId xmlns:a16="http://schemas.microsoft.com/office/drawing/2014/main" id="{62E725D4-EDD5-470A-BBCE-79EB34AF7E70}"/>
               </a:ext>
             </a:extLst>
           </p:cNvPr>
@@ -18453,7 +18889,7 @@
           <p:cNvPr id="11" name="">
             <a:extLst xmlns:a="http://schemas.openxmlformats.org/drawingml/2006/main">
               <a:ext uri="{FF2B5EF4-FFF2-40B4-BE49-F238E27FC236}">
-                <a16:creationId xmlns:a16="http://schemas.microsoft.com/office/drawing/2014/main" id="{2BBA6D1D-179E-4D09-B6DD-D813D1BF8E88}"/>
+                <a16:creationId xmlns:a16="http://schemas.microsoft.com/office/drawing/2014/main" id="{107A10E6-3512-49C7-9F1F-A7AF4753133A}"/>
               </a:ext>
             </a:extLst>
           </p:cNvPr>
@@ -18517,7 +18953,7 @@
           <p:cNvPr id="12" name="">
             <a:extLst xmlns:a="http://schemas.openxmlformats.org/drawingml/2006/main">
               <a:ext uri="{FF2B5EF4-FFF2-40B4-BE49-F238E27FC236}">
-                <a16:creationId xmlns:a16="http://schemas.microsoft.com/office/drawing/2014/main" id="{93A31476-42F6-4EB7-8F8A-3620A016FA3B}"/>
+                <a16:creationId xmlns:a16="http://schemas.microsoft.com/office/drawing/2014/main" id="{C2FC1D50-9D5C-4EA0-B557-B2BD48E28526}"/>
               </a:ext>
             </a:extLst>
           </p:cNvPr>
@@ -18550,7 +18986,7 @@
           <p:cNvPr id="13" name="">
             <a:extLst xmlns:a="http://schemas.openxmlformats.org/drawingml/2006/main">
               <a:ext uri="{FF2B5EF4-FFF2-40B4-BE49-F238E27FC236}">
-                <a16:creationId xmlns:a16="http://schemas.microsoft.com/office/drawing/2014/main" id="{C7043E6B-9A91-4EED-9431-AE3E6947E771}"/>
+                <a16:creationId xmlns:a16="http://schemas.microsoft.com/office/drawing/2014/main" id="{7A4D6DE0-9510-41BD-85CC-41889263D9EC}"/>
               </a:ext>
             </a:extLst>
           </p:cNvPr>
@@ -18585,7 +19021,7 @@
           <p:cNvPr id="14" name="">
             <a:extLst xmlns:a="http://schemas.openxmlformats.org/drawingml/2006/main">
               <a:ext uri="{FF2B5EF4-FFF2-40B4-BE49-F238E27FC236}">
-                <a16:creationId xmlns:a16="http://schemas.microsoft.com/office/drawing/2014/main" id="{3DB06F19-EB06-439B-B816-915FBE33C9D7}"/>
+                <a16:creationId xmlns:a16="http://schemas.microsoft.com/office/drawing/2014/main" id="{ED447BAC-7B4B-47F6-AC1A-8466239A8117}"/>
               </a:ext>
             </a:extLst>
           </p:cNvPr>
@@ -18649,7 +19085,7 @@
           <p:cNvPr id="15" name="">
             <a:extLst xmlns:a="http://schemas.openxmlformats.org/drawingml/2006/main">
               <a:ext uri="{FF2B5EF4-FFF2-40B4-BE49-F238E27FC236}">
-                <a16:creationId xmlns:a16="http://schemas.microsoft.com/office/drawing/2014/main" id="{C9315573-A8A3-4BF1-871B-242A51F2892F}"/>
+                <a16:creationId xmlns:a16="http://schemas.microsoft.com/office/drawing/2014/main" id="{DBD00E6F-39D9-4DBB-9C58-9E2D4AA26A10}"/>
               </a:ext>
             </a:extLst>
           </p:cNvPr>
@@ -18713,7 +19149,7 @@
           <p:cNvPr id="16" name="">
             <a:extLst xmlns:a="http://schemas.openxmlformats.org/drawingml/2006/main">
               <a:ext uri="{FF2B5EF4-FFF2-40B4-BE49-F238E27FC236}">
-                <a16:creationId xmlns:a16="http://schemas.microsoft.com/office/drawing/2014/main" id="{5CD5189E-A8B7-43BC-9D0E-3B9B3F05F3C6}"/>
+                <a16:creationId xmlns:a16="http://schemas.microsoft.com/office/drawing/2014/main" id="{0BCBBF1A-21B4-4629-A48A-ABCF408B11C6}"/>
               </a:ext>
             </a:extLst>
           </p:cNvPr>
@@ -18746,7 +19182,7 @@
           <p:cNvPr id="17" name="">
             <a:extLst xmlns:a="http://schemas.openxmlformats.org/drawingml/2006/main">
               <a:ext uri="{FF2B5EF4-FFF2-40B4-BE49-F238E27FC236}">
-                <a16:creationId xmlns:a16="http://schemas.microsoft.com/office/drawing/2014/main" id="{45A3ACB8-627C-4CE5-9D6B-28E8E4B177EA}"/>
+                <a16:creationId xmlns:a16="http://schemas.microsoft.com/office/drawing/2014/main" id="{7CDFFE7B-DE3B-4081-920B-3F2BF4FDEF2F}"/>
               </a:ext>
             </a:extLst>
           </p:cNvPr>
@@ -18781,7 +19217,7 @@
           <p:cNvPr id="18" name="">
             <a:extLst xmlns:a="http://schemas.openxmlformats.org/drawingml/2006/main">
               <a:ext uri="{FF2B5EF4-FFF2-40B4-BE49-F238E27FC236}">
-                <a16:creationId xmlns:a16="http://schemas.microsoft.com/office/drawing/2014/main" id="{E25FAD88-D6A4-4CAE-89A9-6E1B55D75838}"/>
+                <a16:creationId xmlns:a16="http://schemas.microsoft.com/office/drawing/2014/main" id="{4D680AF3-B129-47CB-9037-278298E8D9F1}"/>
               </a:ext>
             </a:extLst>
           </p:cNvPr>
@@ -18845,7 +19281,7 @@
           <p:cNvPr id="19" name="">
             <a:extLst xmlns:a="http://schemas.openxmlformats.org/drawingml/2006/main">
               <a:ext uri="{FF2B5EF4-FFF2-40B4-BE49-F238E27FC236}">
-                <a16:creationId xmlns:a16="http://schemas.microsoft.com/office/drawing/2014/main" id="{080C0555-4BAC-4FB8-81CA-49BFE2541F1E}"/>
+                <a16:creationId xmlns:a16="http://schemas.microsoft.com/office/drawing/2014/main" id="{B8959EE0-DBB0-45AE-8A5C-D27EBC93798C}"/>
               </a:ext>
             </a:extLst>
           </p:cNvPr>
@@ -18907,7 +19343,7 @@
     </p:spTree>
     <p:extLst>
       <p:ext uri="{BB962C8B-B14F-4D97-AF65-F5344CB8AC3E}">
-        <p14:creationId xmlns:p14="http://schemas.microsoft.com/office/powerpoint/2010/main" val="882438678"/>
+        <p14:creationId xmlns:p14="http://schemas.microsoft.com/office/powerpoint/2010/main" val="1346354283"/>
       </p:ext>
     </p:extLst>
   </p:cSld>
@@ -18931,7 +19367,7 @@
           <p:cNvPr id="1" name="">
             <a:extLst xmlns:a="http://schemas.openxmlformats.org/drawingml/2006/main">
               <a:ext uri="{FF2B5EF4-FFF2-40B4-BE49-F238E27FC236}">
-                <a16:creationId xmlns:a16="http://schemas.microsoft.com/office/drawing/2014/main" id="{2739A6FE-298B-4CF9-8B82-B7E9E5DAA30D}"/>
+                <a16:creationId xmlns:a16="http://schemas.microsoft.com/office/drawing/2014/main" id="{5F6CF9C3-3D78-4557-877E-8A70506A1F76}"/>
               </a:ext>
             </a:extLst>
           </p:cNvPr>
@@ -18966,7 +19402,7 @@
           <p:cNvPr id="2" name="">
             <a:extLst xmlns:a="http://schemas.openxmlformats.org/drawingml/2006/main">
               <a:ext uri="{FF2B5EF4-FFF2-40B4-BE49-F238E27FC236}">
-                <a16:creationId xmlns:a16="http://schemas.microsoft.com/office/drawing/2014/main" id="{968525D7-D73F-4937-A417-9E82EA10E768}"/>
+                <a16:creationId xmlns:a16="http://schemas.microsoft.com/office/drawing/2014/main" id="{B28B9F50-DDB4-4794-A5B7-6A229DF240BD}"/>
               </a:ext>
             </a:extLst>
           </p:cNvPr>
@@ -19001,7 +19437,7 @@
           <p:cNvPr id="3" name="">
             <a:extLst xmlns:a="http://schemas.openxmlformats.org/drawingml/2006/main">
               <a:ext uri="{FF2B5EF4-FFF2-40B4-BE49-F238E27FC236}">
-                <a16:creationId xmlns:a16="http://schemas.microsoft.com/office/drawing/2014/main" id="{E3A5F584-49BA-4105-99FF-8B9A1EA15319}"/>
+                <a16:creationId xmlns:a16="http://schemas.microsoft.com/office/drawing/2014/main" id="{BB203900-8D21-471C-B7FE-C47B32BBBEA6}"/>
               </a:ext>
             </a:extLst>
           </p:cNvPr>
@@ -19036,7 +19472,7 @@
           <p:cNvPr id="4" name="">
             <a:extLst xmlns:a="http://schemas.openxmlformats.org/drawingml/2006/main">
               <a:ext uri="{FF2B5EF4-FFF2-40B4-BE49-F238E27FC236}">
-                <a16:creationId xmlns:a16="http://schemas.microsoft.com/office/drawing/2014/main" id="{5AD4279B-74D0-4757-BAF7-BE6F75B0BEC7}"/>
+                <a16:creationId xmlns:a16="http://schemas.microsoft.com/office/drawing/2014/main" id="{8627E70A-D263-40F5-8E57-40E76C4DF59F}"/>
               </a:ext>
             </a:extLst>
           </p:cNvPr>
@@ -19100,7 +19536,7 @@
           <p:cNvPr id="5" name="">
             <a:extLst xmlns:a="http://schemas.openxmlformats.org/drawingml/2006/main">
               <a:ext uri="{FF2B5EF4-FFF2-40B4-BE49-F238E27FC236}">
-                <a16:creationId xmlns:a16="http://schemas.microsoft.com/office/drawing/2014/main" id="{D2C731DF-42B6-482D-BAC3-DB09B0FCAC84}"/>
+                <a16:creationId xmlns:a16="http://schemas.microsoft.com/office/drawing/2014/main" id="{8D48496A-BDC6-48D7-B30B-922564E48609}"/>
               </a:ext>
             </a:extLst>
           </p:cNvPr>
@@ -19164,7 +19600,7 @@
           <p:cNvPr id="6" name="">
             <a:extLst xmlns:a="http://schemas.openxmlformats.org/drawingml/2006/main">
               <a:ext uri="{FF2B5EF4-FFF2-40B4-BE49-F238E27FC236}">
-                <a16:creationId xmlns:a16="http://schemas.microsoft.com/office/drawing/2014/main" id="{F3989225-E660-46C5-8807-E4A2B0E5E5F5}"/>
+                <a16:creationId xmlns:a16="http://schemas.microsoft.com/office/drawing/2014/main" id="{72636104-3231-4778-A334-1ECA66E9D3A5}"/>
               </a:ext>
             </a:extLst>
           </p:cNvPr>
@@ -19228,7 +19664,7 @@
           <p:cNvPr id="7" name="">
             <a:extLst xmlns:a="http://schemas.openxmlformats.org/drawingml/2006/main">
               <a:ext uri="{FF2B5EF4-FFF2-40B4-BE49-F238E27FC236}">
-                <a16:creationId xmlns:a16="http://schemas.microsoft.com/office/drawing/2014/main" id="{C1C55A6C-B152-453D-9244-8F9E04B08F40}"/>
+                <a16:creationId xmlns:a16="http://schemas.microsoft.com/office/drawing/2014/main" id="{9D04B259-EE4E-4546-A6CA-3DE26992B0E9}"/>
               </a:ext>
             </a:extLst>
           </p:cNvPr>
@@ -19292,7 +19728,7 @@
           <p:cNvPr id="8" name="">
             <a:extLst xmlns:a="http://schemas.openxmlformats.org/drawingml/2006/main">
               <a:ext uri="{FF2B5EF4-FFF2-40B4-BE49-F238E27FC236}">
-                <a16:creationId xmlns:a16="http://schemas.microsoft.com/office/drawing/2014/main" id="{1F73F9AE-927B-4BC0-90BA-F1B66C372300}"/>
+                <a16:creationId xmlns:a16="http://schemas.microsoft.com/office/drawing/2014/main" id="{2A2D9356-6612-4A28-9EE7-FC944D12B190}"/>
               </a:ext>
             </a:extLst>
           </p:cNvPr>
@@ -19325,7 +19761,7 @@
           <p:cNvPr id="9" name="">
             <a:extLst xmlns:a="http://schemas.openxmlformats.org/drawingml/2006/main">
               <a:ext uri="{FF2B5EF4-FFF2-40B4-BE49-F238E27FC236}">
-                <a16:creationId xmlns:a16="http://schemas.microsoft.com/office/drawing/2014/main" id="{16BC8E94-42F9-465C-BD8D-A1A157EE5AA7}"/>
+                <a16:creationId xmlns:a16="http://schemas.microsoft.com/office/drawing/2014/main" id="{5A1FFA15-6139-4147-8F60-FF831115850F}"/>
               </a:ext>
             </a:extLst>
           </p:cNvPr>
@@ -19360,7 +19796,7 @@
           <p:cNvPr id="10" name="">
             <a:extLst xmlns:a="http://schemas.openxmlformats.org/drawingml/2006/main">
               <a:ext uri="{FF2B5EF4-FFF2-40B4-BE49-F238E27FC236}">
-                <a16:creationId xmlns:a16="http://schemas.microsoft.com/office/drawing/2014/main" id="{22F797F1-DC1A-4452-ABD2-8B006CD3A603}"/>
+                <a16:creationId xmlns:a16="http://schemas.microsoft.com/office/drawing/2014/main" id="{89B26AA2-10A8-475B-96AF-824F5CBDB124}"/>
               </a:ext>
             </a:extLst>
           </p:cNvPr>
@@ -19424,7 +19860,7 @@
           <p:cNvPr id="11" name="">
             <a:extLst xmlns:a="http://schemas.openxmlformats.org/drawingml/2006/main">
               <a:ext uri="{FF2B5EF4-FFF2-40B4-BE49-F238E27FC236}">
-                <a16:creationId xmlns:a16="http://schemas.microsoft.com/office/drawing/2014/main" id="{F7354F60-2813-4287-B22C-DE4BBCE9CF4D}"/>
+                <a16:creationId xmlns:a16="http://schemas.microsoft.com/office/drawing/2014/main" id="{24DDC4B7-07F9-48B8-8A93-0E35762CFAC3}"/>
               </a:ext>
             </a:extLst>
           </p:cNvPr>
@@ -19488,7 +19924,7 @@
           <p:cNvPr id="12" name="">
             <a:extLst xmlns:a="http://schemas.openxmlformats.org/drawingml/2006/main">
               <a:ext uri="{FF2B5EF4-FFF2-40B4-BE49-F238E27FC236}">
-                <a16:creationId xmlns:a16="http://schemas.microsoft.com/office/drawing/2014/main" id="{6D12FC30-EC32-4C40-A37F-3C2A38219EF7}"/>
+                <a16:creationId xmlns:a16="http://schemas.microsoft.com/office/drawing/2014/main" id="{90801689-CF25-4967-9264-B18112405051}"/>
               </a:ext>
             </a:extLst>
           </p:cNvPr>
@@ -19521,7 +19957,7 @@
           <p:cNvPr id="13" name="">
             <a:extLst xmlns:a="http://schemas.openxmlformats.org/drawingml/2006/main">
               <a:ext uri="{FF2B5EF4-FFF2-40B4-BE49-F238E27FC236}">
-                <a16:creationId xmlns:a16="http://schemas.microsoft.com/office/drawing/2014/main" id="{013B3DBA-68B2-45CD-9D5C-9F159D77F1FC}"/>
+                <a16:creationId xmlns:a16="http://schemas.microsoft.com/office/drawing/2014/main" id="{9ABB980B-418C-4BBA-B484-A333A5682FF5}"/>
               </a:ext>
             </a:extLst>
           </p:cNvPr>
@@ -19556,7 +19992,7 @@
           <p:cNvPr id="14" name="">
             <a:extLst xmlns:a="http://schemas.openxmlformats.org/drawingml/2006/main">
               <a:ext uri="{FF2B5EF4-FFF2-40B4-BE49-F238E27FC236}">
-                <a16:creationId xmlns:a16="http://schemas.microsoft.com/office/drawing/2014/main" id="{68E14EA0-4802-46CE-928D-BBB4ECA2AC75}"/>
+                <a16:creationId xmlns:a16="http://schemas.microsoft.com/office/drawing/2014/main" id="{BB8E3FD7-6689-4567-AB11-7945A48A2123}"/>
               </a:ext>
             </a:extLst>
           </p:cNvPr>
@@ -19620,7 +20056,7 @@
           <p:cNvPr id="15" name="">
             <a:extLst xmlns:a="http://schemas.openxmlformats.org/drawingml/2006/main">
               <a:ext uri="{FF2B5EF4-FFF2-40B4-BE49-F238E27FC236}">
-                <a16:creationId xmlns:a16="http://schemas.microsoft.com/office/drawing/2014/main" id="{EB39353D-842F-495C-A42E-3C830EDB2111}"/>
+                <a16:creationId xmlns:a16="http://schemas.microsoft.com/office/drawing/2014/main" id="{11668E85-18D7-43C3-A791-B5C51C87EA9D}"/>
               </a:ext>
             </a:extLst>
           </p:cNvPr>
@@ -19684,7 +20120,7 @@
           <p:cNvPr id="16" name="">
             <a:extLst xmlns:a="http://schemas.openxmlformats.org/drawingml/2006/main">
               <a:ext uri="{FF2B5EF4-FFF2-40B4-BE49-F238E27FC236}">
-                <a16:creationId xmlns:a16="http://schemas.microsoft.com/office/drawing/2014/main" id="{B19807DD-DD2F-4792-9F0E-6C84EA4BEABD}"/>
+                <a16:creationId xmlns:a16="http://schemas.microsoft.com/office/drawing/2014/main" id="{9FDEFF97-B39B-47F4-B3D9-DF7AD5634A6D}"/>
               </a:ext>
             </a:extLst>
           </p:cNvPr>
@@ -19717,7 +20153,7 @@
           <p:cNvPr id="17" name="">
             <a:extLst xmlns:a="http://schemas.openxmlformats.org/drawingml/2006/main">
               <a:ext uri="{FF2B5EF4-FFF2-40B4-BE49-F238E27FC236}">
-                <a16:creationId xmlns:a16="http://schemas.microsoft.com/office/drawing/2014/main" id="{0E8B4F45-C206-4180-B4B3-29A37BCE8D2E}"/>
+                <a16:creationId xmlns:a16="http://schemas.microsoft.com/office/drawing/2014/main" id="{1D98BB80-C126-4C85-B312-87C5E80AAD5B}"/>
               </a:ext>
             </a:extLst>
           </p:cNvPr>
@@ -19781,7 +20217,7 @@
           <p:cNvPr id="18" name="">
             <a:extLst xmlns:a="http://schemas.openxmlformats.org/drawingml/2006/main">
               <a:ext uri="{FF2B5EF4-FFF2-40B4-BE49-F238E27FC236}">
-                <a16:creationId xmlns:a16="http://schemas.microsoft.com/office/drawing/2014/main" id="{6582EE20-2126-46FA-8E53-16B8B6F06A9A}"/>
+                <a16:creationId xmlns:a16="http://schemas.microsoft.com/office/drawing/2014/main" id="{D991B7FC-7870-466F-970D-BC1BC5CEC76A}"/>
               </a:ext>
             </a:extLst>
           </p:cNvPr>
@@ -19912,7 +20348,7 @@
     </p:spTree>
     <p:extLst>
       <p:ext uri="{BB962C8B-B14F-4D97-AF65-F5344CB8AC3E}">
-        <p14:creationId xmlns:p14="http://schemas.microsoft.com/office/powerpoint/2010/main" val="78644125"/>
+        <p14:creationId xmlns:p14="http://schemas.microsoft.com/office/powerpoint/2010/main" val="106299461"/>
       </p:ext>
     </p:extLst>
   </p:cSld>
@@ -19936,7 +20372,7 @@
           <p:cNvPr id="1" name="">
             <a:extLst xmlns:a="http://schemas.openxmlformats.org/drawingml/2006/main">
               <a:ext uri="{FF2B5EF4-FFF2-40B4-BE49-F238E27FC236}">
-                <a16:creationId xmlns:a16="http://schemas.microsoft.com/office/drawing/2014/main" id="{02DEB6C1-E17B-46FB-A76F-442AABDE0621}"/>
+                <a16:creationId xmlns:a16="http://schemas.microsoft.com/office/drawing/2014/main" id="{E0180742-752B-46B0-91F3-DF9956597B9A}"/>
               </a:ext>
             </a:extLst>
           </p:cNvPr>
@@ -19971,7 +20407,7 @@
           <p:cNvPr id="2" name="">
             <a:extLst xmlns:a="http://schemas.openxmlformats.org/drawingml/2006/main">
               <a:ext uri="{FF2B5EF4-FFF2-40B4-BE49-F238E27FC236}">
-                <a16:creationId xmlns:a16="http://schemas.microsoft.com/office/drawing/2014/main" id="{6F981C37-B4FB-4AF7-8210-D401ECCB05A5}"/>
+                <a16:creationId xmlns:a16="http://schemas.microsoft.com/office/drawing/2014/main" id="{7A587179-9147-49AC-987D-7C3BF90128D7}"/>
               </a:ext>
             </a:extLst>
           </p:cNvPr>
@@ -20006,7 +20442,7 @@
           <p:cNvPr id="3" name="">
             <a:extLst xmlns:a="http://schemas.openxmlformats.org/drawingml/2006/main">
               <a:ext uri="{FF2B5EF4-FFF2-40B4-BE49-F238E27FC236}">
-                <a16:creationId xmlns:a16="http://schemas.microsoft.com/office/drawing/2014/main" id="{D6D8578E-3C6F-4CEF-9C2A-8CAE8FBF5422}"/>
+                <a16:creationId xmlns:a16="http://schemas.microsoft.com/office/drawing/2014/main" id="{041C4918-4DA3-4DB8-9F8F-6E774E7B5AA7}"/>
               </a:ext>
             </a:extLst>
           </p:cNvPr>
@@ -20041,7 +20477,7 @@
           <p:cNvPr id="4" name="">
             <a:extLst xmlns:a="http://schemas.openxmlformats.org/drawingml/2006/main">
               <a:ext uri="{FF2B5EF4-FFF2-40B4-BE49-F238E27FC236}">
-                <a16:creationId xmlns:a16="http://schemas.microsoft.com/office/drawing/2014/main" id="{1571187D-A4BF-4F3D-8D10-09092AB294FE}"/>
+                <a16:creationId xmlns:a16="http://schemas.microsoft.com/office/drawing/2014/main" id="{11970529-D770-414C-8764-3026B5D15BA8}"/>
               </a:ext>
             </a:extLst>
           </p:cNvPr>
@@ -20105,7 +20541,7 @@
           <p:cNvPr id="5" name="">
             <a:extLst xmlns:a="http://schemas.openxmlformats.org/drawingml/2006/main">
               <a:ext uri="{FF2B5EF4-FFF2-40B4-BE49-F238E27FC236}">
-                <a16:creationId xmlns:a16="http://schemas.microsoft.com/office/drawing/2014/main" id="{E243086E-5774-42AE-8F95-996F9E90AFF4}"/>
+                <a16:creationId xmlns:a16="http://schemas.microsoft.com/office/drawing/2014/main" id="{A6B781E8-8FB9-4477-AD1F-D50BE1A4D61B}"/>
               </a:ext>
             </a:extLst>
           </p:cNvPr>
@@ -20169,7 +20605,7 @@
           <p:cNvPr id="6" name="">
             <a:extLst xmlns:a="http://schemas.openxmlformats.org/drawingml/2006/main">
               <a:ext uri="{FF2B5EF4-FFF2-40B4-BE49-F238E27FC236}">
-                <a16:creationId xmlns:a16="http://schemas.microsoft.com/office/drawing/2014/main" id="{7C501734-201D-44BE-BA45-A84DA2BA9718}"/>
+                <a16:creationId xmlns:a16="http://schemas.microsoft.com/office/drawing/2014/main" id="{DE0B2DE8-9D29-4AAA-BB7D-3646F34086A6}"/>
               </a:ext>
             </a:extLst>
           </p:cNvPr>
@@ -20233,7 +20669,7 @@
           <p:cNvPr id="7" name="">
             <a:extLst xmlns:a="http://schemas.openxmlformats.org/drawingml/2006/main">
               <a:ext uri="{FF2B5EF4-FFF2-40B4-BE49-F238E27FC236}">
-                <a16:creationId xmlns:a16="http://schemas.microsoft.com/office/drawing/2014/main" id="{1061B974-B608-497F-A718-FF95FE1E4A38}"/>
+                <a16:creationId xmlns:a16="http://schemas.microsoft.com/office/drawing/2014/main" id="{BE466EF7-464F-4841-BE29-18D8E6D713D4}"/>
               </a:ext>
             </a:extLst>
           </p:cNvPr>
@@ -20297,7 +20733,7 @@
           <p:cNvPr id="8" name="">
             <a:extLst xmlns:a="http://schemas.openxmlformats.org/drawingml/2006/main">
               <a:ext uri="{FF2B5EF4-FFF2-40B4-BE49-F238E27FC236}">
-                <a16:creationId xmlns:a16="http://schemas.microsoft.com/office/drawing/2014/main" id="{2F762D5F-89B8-4007-B7C0-E705BF938AF0}"/>
+                <a16:creationId xmlns:a16="http://schemas.microsoft.com/office/drawing/2014/main" id="{57A72D49-861C-4705-B784-4768ADDA549F}"/>
               </a:ext>
             </a:extLst>
           </p:cNvPr>
@@ -20330,7 +20766,7 @@
           <p:cNvPr id="9" name="">
             <a:extLst xmlns:a="http://schemas.openxmlformats.org/drawingml/2006/main">
               <a:ext uri="{FF2B5EF4-FFF2-40B4-BE49-F238E27FC236}">
-                <a16:creationId xmlns:a16="http://schemas.microsoft.com/office/drawing/2014/main" id="{291296E0-16A1-4F83-BFC6-14D1C133BAAD}"/>
+                <a16:creationId xmlns:a16="http://schemas.microsoft.com/office/drawing/2014/main" id="{C57D2E7A-9576-4D13-BD0F-C0B982B849F9}"/>
               </a:ext>
             </a:extLst>
           </p:cNvPr>
@@ -20365,7 +20801,7 @@
           <p:cNvPr id="10" name="">
             <a:extLst xmlns:a="http://schemas.openxmlformats.org/drawingml/2006/main">
               <a:ext uri="{FF2B5EF4-FFF2-40B4-BE49-F238E27FC236}">
-                <a16:creationId xmlns:a16="http://schemas.microsoft.com/office/drawing/2014/main" id="{E3063A2A-EE25-4C30-98CB-46B777E66977}"/>
+                <a16:creationId xmlns:a16="http://schemas.microsoft.com/office/drawing/2014/main" id="{191F6AEF-4DEB-4EE7-8BE4-D489161FE241}"/>
               </a:ext>
             </a:extLst>
           </p:cNvPr>
@@ -20429,7 +20865,7 @@
           <p:cNvPr id="11" name="">
             <a:extLst xmlns:a="http://schemas.openxmlformats.org/drawingml/2006/main">
               <a:ext uri="{FF2B5EF4-FFF2-40B4-BE49-F238E27FC236}">
-                <a16:creationId xmlns:a16="http://schemas.microsoft.com/office/drawing/2014/main" id="{9F743D10-6830-4441-B375-914B5FD3F886}"/>
+                <a16:creationId xmlns:a16="http://schemas.microsoft.com/office/drawing/2014/main" id="{4F97699B-4427-4ED5-8190-AABD41AC7809}"/>
               </a:ext>
             </a:extLst>
           </p:cNvPr>
@@ -20493,7 +20929,7 @@
           <p:cNvPr id="12" name="">
             <a:extLst xmlns:a="http://schemas.openxmlformats.org/drawingml/2006/main">
               <a:ext uri="{FF2B5EF4-FFF2-40B4-BE49-F238E27FC236}">
-                <a16:creationId xmlns:a16="http://schemas.microsoft.com/office/drawing/2014/main" id="{4A999849-ED57-4349-AD21-BB87C89A29F6}"/>
+                <a16:creationId xmlns:a16="http://schemas.microsoft.com/office/drawing/2014/main" id="{947B586F-A254-4E7B-9D63-DB331AC08747}"/>
               </a:ext>
             </a:extLst>
           </p:cNvPr>
@@ -20526,7 +20962,7 @@
           <p:cNvPr id="13" name="">
             <a:extLst xmlns:a="http://schemas.openxmlformats.org/drawingml/2006/main">
               <a:ext uri="{FF2B5EF4-FFF2-40B4-BE49-F238E27FC236}">
-                <a16:creationId xmlns:a16="http://schemas.microsoft.com/office/drawing/2014/main" id="{AC1C313D-9161-4FD2-B082-4FF55CBEDE2E}"/>
+                <a16:creationId xmlns:a16="http://schemas.microsoft.com/office/drawing/2014/main" id="{C8309874-59DF-4E68-9E6B-16AF6AD01A45}"/>
               </a:ext>
             </a:extLst>
           </p:cNvPr>
@@ -20561,7 +20997,7 @@
           <p:cNvPr id="14" name="">
             <a:extLst xmlns:a="http://schemas.openxmlformats.org/drawingml/2006/main">
               <a:ext uri="{FF2B5EF4-FFF2-40B4-BE49-F238E27FC236}">
-                <a16:creationId xmlns:a16="http://schemas.microsoft.com/office/drawing/2014/main" id="{58DCCECC-48C3-4C83-93C9-753139ED97F5}"/>
+                <a16:creationId xmlns:a16="http://schemas.microsoft.com/office/drawing/2014/main" id="{8FB77972-F9D9-4106-9A15-C0ADA3B7D1D4}"/>
               </a:ext>
             </a:extLst>
           </p:cNvPr>
@@ -20625,7 +21061,7 @@
           <p:cNvPr id="15" name="">
             <a:extLst xmlns:a="http://schemas.openxmlformats.org/drawingml/2006/main">
               <a:ext uri="{FF2B5EF4-FFF2-40B4-BE49-F238E27FC236}">
-                <a16:creationId xmlns:a16="http://schemas.microsoft.com/office/drawing/2014/main" id="{588F4BAC-D112-46A3-B464-BFB4BD5F1A0D}"/>
+                <a16:creationId xmlns:a16="http://schemas.microsoft.com/office/drawing/2014/main" id="{506FAC5E-C415-4657-8058-4F3EADF1EE75}"/>
               </a:ext>
             </a:extLst>
           </p:cNvPr>
@@ -20689,7 +21125,7 @@
           <p:cNvPr id="16" name="">
             <a:extLst xmlns:a="http://schemas.openxmlformats.org/drawingml/2006/main">
               <a:ext uri="{FF2B5EF4-FFF2-40B4-BE49-F238E27FC236}">
-                <a16:creationId xmlns:a16="http://schemas.microsoft.com/office/drawing/2014/main" id="{154EA514-FDAE-4BEB-9952-C2960B040D53}"/>
+                <a16:creationId xmlns:a16="http://schemas.microsoft.com/office/drawing/2014/main" id="{C5EAC289-C5B4-4949-8700-C5E6C74B5A6A}"/>
               </a:ext>
             </a:extLst>
           </p:cNvPr>
@@ -20722,7 +21158,7 @@
           <p:cNvPr id="17" name="">
             <a:extLst xmlns:a="http://schemas.openxmlformats.org/drawingml/2006/main">
               <a:ext uri="{FF2B5EF4-FFF2-40B4-BE49-F238E27FC236}">
-                <a16:creationId xmlns:a16="http://schemas.microsoft.com/office/drawing/2014/main" id="{1E82B300-1F1B-4A4F-AA90-5082240CE7BF}"/>
+                <a16:creationId xmlns:a16="http://schemas.microsoft.com/office/drawing/2014/main" id="{7D522ADC-5F7E-4F4E-AB65-5665108E1018}"/>
               </a:ext>
             </a:extLst>
           </p:cNvPr>
@@ -20757,7 +21193,7 @@
           <p:cNvPr id="18" name="">
             <a:extLst xmlns:a="http://schemas.openxmlformats.org/drawingml/2006/main">
               <a:ext uri="{FF2B5EF4-FFF2-40B4-BE49-F238E27FC236}">
-                <a16:creationId xmlns:a16="http://schemas.microsoft.com/office/drawing/2014/main" id="{12A842D7-2C6B-4B64-A174-9268099E004A}"/>
+                <a16:creationId xmlns:a16="http://schemas.microsoft.com/office/drawing/2014/main" id="{3A62F8AE-551E-4845-BE60-7310DD9EC4EC}"/>
               </a:ext>
             </a:extLst>
           </p:cNvPr>
@@ -20821,7 +21257,7 @@
           <p:cNvPr id="19" name="">
             <a:extLst xmlns:a="http://schemas.openxmlformats.org/drawingml/2006/main">
               <a:ext uri="{FF2B5EF4-FFF2-40B4-BE49-F238E27FC236}">
-                <a16:creationId xmlns:a16="http://schemas.microsoft.com/office/drawing/2014/main" id="{71ACDE3C-4320-425F-ADD4-D0C74E060F45}"/>
+                <a16:creationId xmlns:a16="http://schemas.microsoft.com/office/drawing/2014/main" id="{32E0B8D5-9457-4E36-83AF-B7B03AE8220C}"/>
               </a:ext>
             </a:extLst>
           </p:cNvPr>
@@ -20883,7 +21319,7 @@
     </p:spTree>
     <p:extLst>
       <p:ext uri="{BB962C8B-B14F-4D97-AF65-F5344CB8AC3E}">
-        <p14:creationId xmlns:p14="http://schemas.microsoft.com/office/powerpoint/2010/main" val="822154241"/>
+        <p14:creationId xmlns:p14="http://schemas.microsoft.com/office/powerpoint/2010/main" val="2109453654"/>
       </p:ext>
     </p:extLst>
   </p:cSld>
@@ -20907,7 +21343,7 @@
           <p:cNvPr id="1" name="">
             <a:extLst xmlns:a="http://schemas.openxmlformats.org/drawingml/2006/main">
               <a:ext uri="{FF2B5EF4-FFF2-40B4-BE49-F238E27FC236}">
-                <a16:creationId xmlns:a16="http://schemas.microsoft.com/office/drawing/2014/main" id="{6B72057B-81FC-46FD-B875-9B92EFF0AAF4}"/>
+                <a16:creationId xmlns:a16="http://schemas.microsoft.com/office/drawing/2014/main" id="{77F1AD54-7D20-47FD-A71F-270D81175529}"/>
               </a:ext>
             </a:extLst>
           </p:cNvPr>
@@ -20942,7 +21378,7 @@
           <p:cNvPr id="2" name="">
             <a:extLst xmlns:a="http://schemas.openxmlformats.org/drawingml/2006/main">
               <a:ext uri="{FF2B5EF4-FFF2-40B4-BE49-F238E27FC236}">
-                <a16:creationId xmlns:a16="http://schemas.microsoft.com/office/drawing/2014/main" id="{79C9CF3E-2D4C-40CE-9692-FEE1B666C750}"/>
+                <a16:creationId xmlns:a16="http://schemas.microsoft.com/office/drawing/2014/main" id="{F588F128-6312-4EC0-A7A0-604256D01B68}"/>
               </a:ext>
             </a:extLst>
           </p:cNvPr>
@@ -20977,7 +21413,7 @@
           <p:cNvPr id="3" name="">
             <a:extLst xmlns:a="http://schemas.openxmlformats.org/drawingml/2006/main">
               <a:ext uri="{FF2B5EF4-FFF2-40B4-BE49-F238E27FC236}">
-                <a16:creationId xmlns:a16="http://schemas.microsoft.com/office/drawing/2014/main" id="{FFB7E239-E8FB-4998-B6B9-C21561F696DC}"/>
+                <a16:creationId xmlns:a16="http://schemas.microsoft.com/office/drawing/2014/main" id="{8382D6F8-FCEB-467F-AA19-BDB7E40A77E2}"/>
               </a:ext>
             </a:extLst>
           </p:cNvPr>
@@ -21012,7 +21448,7 @@
           <p:cNvPr id="4" name="">
             <a:extLst xmlns:a="http://schemas.openxmlformats.org/drawingml/2006/main">
               <a:ext uri="{FF2B5EF4-FFF2-40B4-BE49-F238E27FC236}">
-                <a16:creationId xmlns:a16="http://schemas.microsoft.com/office/drawing/2014/main" id="{7B61BA40-E01F-4945-B0BC-49199B422643}"/>
+                <a16:creationId xmlns:a16="http://schemas.microsoft.com/office/drawing/2014/main" id="{90D40645-8439-4AF0-B03B-6CF978E5FC9D}"/>
               </a:ext>
             </a:extLst>
           </p:cNvPr>
@@ -21076,7 +21512,7 @@
           <p:cNvPr id="5" name="">
             <a:extLst xmlns:a="http://schemas.openxmlformats.org/drawingml/2006/main">
               <a:ext uri="{FF2B5EF4-FFF2-40B4-BE49-F238E27FC236}">
-                <a16:creationId xmlns:a16="http://schemas.microsoft.com/office/drawing/2014/main" id="{DFE66D4B-DDCF-468F-80CF-E1E2FC25CBAE}"/>
+                <a16:creationId xmlns:a16="http://schemas.microsoft.com/office/drawing/2014/main" id="{EEB38BD9-7A10-4016-B2AB-F3063EE6C4B1}"/>
               </a:ext>
             </a:extLst>
           </p:cNvPr>
@@ -21140,7 +21576,7 @@
           <p:cNvPr id="6" name="">
             <a:extLst xmlns:a="http://schemas.openxmlformats.org/drawingml/2006/main">
               <a:ext uri="{FF2B5EF4-FFF2-40B4-BE49-F238E27FC236}">
-                <a16:creationId xmlns:a16="http://schemas.microsoft.com/office/drawing/2014/main" id="{34CBBF9F-A43B-48C0-8B68-150266BC1DE3}"/>
+                <a16:creationId xmlns:a16="http://schemas.microsoft.com/office/drawing/2014/main" id="{9183A58F-D541-4F20-B4EE-E0DF66E369D8}"/>
               </a:ext>
             </a:extLst>
           </p:cNvPr>
@@ -21204,7 +21640,7 @@
           <p:cNvPr id="7" name="">
             <a:extLst xmlns:a="http://schemas.openxmlformats.org/drawingml/2006/main">
               <a:ext uri="{FF2B5EF4-FFF2-40B4-BE49-F238E27FC236}">
-                <a16:creationId xmlns:a16="http://schemas.microsoft.com/office/drawing/2014/main" id="{B7853507-9BEC-4A4C-8D51-9EAC97A31BAC}"/>
+                <a16:creationId xmlns:a16="http://schemas.microsoft.com/office/drawing/2014/main" id="{1018B5F4-9C14-4C6D-A5E7-23252082C7B7}"/>
               </a:ext>
             </a:extLst>
           </p:cNvPr>
@@ -21268,7 +21704,7 @@
           <p:cNvPr id="8" name="">
             <a:extLst xmlns:a="http://schemas.openxmlformats.org/drawingml/2006/main">
               <a:ext uri="{FF2B5EF4-FFF2-40B4-BE49-F238E27FC236}">
-                <a16:creationId xmlns:a16="http://schemas.microsoft.com/office/drawing/2014/main" id="{38FA882F-49E8-4A2E-810F-6213C71B380B}"/>
+                <a16:creationId xmlns:a16="http://schemas.microsoft.com/office/drawing/2014/main" id="{28E90145-BCFB-4A36-89E4-EE8F98D41F56}"/>
               </a:ext>
             </a:extLst>
           </p:cNvPr>
@@ -21301,7 +21737,7 @@
           <p:cNvPr id="9" name="">
             <a:extLst xmlns:a="http://schemas.openxmlformats.org/drawingml/2006/main">
               <a:ext uri="{FF2B5EF4-FFF2-40B4-BE49-F238E27FC236}">
-                <a16:creationId xmlns:a16="http://schemas.microsoft.com/office/drawing/2014/main" id="{22CA0568-32D6-482F-9CB3-676FB3B76322}"/>
+                <a16:creationId xmlns:a16="http://schemas.microsoft.com/office/drawing/2014/main" id="{2DC117A8-5831-4FC4-A93D-852486AAE5A9}"/>
               </a:ext>
             </a:extLst>
           </p:cNvPr>
@@ -21336,7 +21772,7 @@
           <p:cNvPr id="10" name="">
             <a:extLst xmlns:a="http://schemas.openxmlformats.org/drawingml/2006/main">
               <a:ext uri="{FF2B5EF4-FFF2-40B4-BE49-F238E27FC236}">
-                <a16:creationId xmlns:a16="http://schemas.microsoft.com/office/drawing/2014/main" id="{17EC7019-DECB-48FB-9700-B6436C9D493E}"/>
+                <a16:creationId xmlns:a16="http://schemas.microsoft.com/office/drawing/2014/main" id="{C9DD941F-56DB-4871-B24C-64DD76E8A1E8}"/>
               </a:ext>
             </a:extLst>
           </p:cNvPr>
@@ -21400,7 +21836,7 @@
           <p:cNvPr id="11" name="">
             <a:extLst xmlns:a="http://schemas.openxmlformats.org/drawingml/2006/main">
               <a:ext uri="{FF2B5EF4-FFF2-40B4-BE49-F238E27FC236}">
-                <a16:creationId xmlns:a16="http://schemas.microsoft.com/office/drawing/2014/main" id="{D7064680-7789-42DE-9FBB-6F24BC5D6C44}"/>
+                <a16:creationId xmlns:a16="http://schemas.microsoft.com/office/drawing/2014/main" id="{48A33810-F6B2-477A-AC3D-F435DC919B1F}"/>
               </a:ext>
             </a:extLst>
           </p:cNvPr>
@@ -21464,7 +21900,7 @@
           <p:cNvPr id="12" name="">
             <a:extLst xmlns:a="http://schemas.openxmlformats.org/drawingml/2006/main">
               <a:ext uri="{FF2B5EF4-FFF2-40B4-BE49-F238E27FC236}">
-                <a16:creationId xmlns:a16="http://schemas.microsoft.com/office/drawing/2014/main" id="{5C5107DF-0D8D-4CF3-B6F5-169010AEC52C}"/>
+                <a16:creationId xmlns:a16="http://schemas.microsoft.com/office/drawing/2014/main" id="{A8ABFDA7-4685-4F2D-B2F5-46BA8B7266EB}"/>
               </a:ext>
             </a:extLst>
           </p:cNvPr>
@@ -21497,7 +21933,7 @@
           <p:cNvPr id="13" name="">
             <a:extLst xmlns:a="http://schemas.openxmlformats.org/drawingml/2006/main">
               <a:ext uri="{FF2B5EF4-FFF2-40B4-BE49-F238E27FC236}">
-                <a16:creationId xmlns:a16="http://schemas.microsoft.com/office/drawing/2014/main" id="{1697003E-2E79-480B-A5DD-DB9D9629660C}"/>
+                <a16:creationId xmlns:a16="http://schemas.microsoft.com/office/drawing/2014/main" id="{938A08F3-FE79-4E7A-BCEF-F489FF82C413}"/>
               </a:ext>
             </a:extLst>
           </p:cNvPr>
@@ -21532,7 +21968,7 @@
           <p:cNvPr id="14" name="">
             <a:extLst xmlns:a="http://schemas.openxmlformats.org/drawingml/2006/main">
               <a:ext uri="{FF2B5EF4-FFF2-40B4-BE49-F238E27FC236}">
-                <a16:creationId xmlns:a16="http://schemas.microsoft.com/office/drawing/2014/main" id="{AE87BE4A-40DB-4FE7-8D05-67AFC8668AB7}"/>
+                <a16:creationId xmlns:a16="http://schemas.microsoft.com/office/drawing/2014/main" id="{14277BB6-644B-4CEC-A788-188F6EED561F}"/>
               </a:ext>
             </a:extLst>
           </p:cNvPr>
@@ -21596,7 +22032,7 @@
           <p:cNvPr id="15" name="">
             <a:extLst xmlns:a="http://schemas.openxmlformats.org/drawingml/2006/main">
               <a:ext uri="{FF2B5EF4-FFF2-40B4-BE49-F238E27FC236}">
-                <a16:creationId xmlns:a16="http://schemas.microsoft.com/office/drawing/2014/main" id="{84F9C547-9A87-474F-AA9A-DFFC9B7D230E}"/>
+                <a16:creationId xmlns:a16="http://schemas.microsoft.com/office/drawing/2014/main" id="{B7E76ED1-CB30-439E-98D1-48317FF39C5F}"/>
               </a:ext>
             </a:extLst>
           </p:cNvPr>
@@ -21660,7 +22096,7 @@
           <p:cNvPr id="16" name="">
             <a:extLst xmlns:a="http://schemas.openxmlformats.org/drawingml/2006/main">
               <a:ext uri="{FF2B5EF4-FFF2-40B4-BE49-F238E27FC236}">
-                <a16:creationId xmlns:a16="http://schemas.microsoft.com/office/drawing/2014/main" id="{91316A6C-611F-4F95-A6D9-F22FD122E8A3}"/>
+                <a16:creationId xmlns:a16="http://schemas.microsoft.com/office/drawing/2014/main" id="{646B286A-7DCE-472B-9E23-7F44F497A770}"/>
               </a:ext>
             </a:extLst>
           </p:cNvPr>
@@ -21693,7 +22129,7 @@
           <p:cNvPr id="17" name="">
             <a:extLst xmlns:a="http://schemas.openxmlformats.org/drawingml/2006/main">
               <a:ext uri="{FF2B5EF4-FFF2-40B4-BE49-F238E27FC236}">
-                <a16:creationId xmlns:a16="http://schemas.microsoft.com/office/drawing/2014/main" id="{1C3EA8C4-C66B-439A-9C8B-B84728A902B1}"/>
+                <a16:creationId xmlns:a16="http://schemas.microsoft.com/office/drawing/2014/main" id="{06868A2B-7D74-4591-9668-D188CA5FEA96}"/>
               </a:ext>
             </a:extLst>
           </p:cNvPr>
@@ -21728,7 +22164,7 @@
           <p:cNvPr id="18" name="">
             <a:extLst xmlns:a="http://schemas.openxmlformats.org/drawingml/2006/main">
               <a:ext uri="{FF2B5EF4-FFF2-40B4-BE49-F238E27FC236}">
-                <a16:creationId xmlns:a16="http://schemas.microsoft.com/office/drawing/2014/main" id="{1FB95A81-3C9E-431D-9765-956471411B5C}"/>
+                <a16:creationId xmlns:a16="http://schemas.microsoft.com/office/drawing/2014/main" id="{1FB7C996-2DF7-4E27-BC90-A4DA03D22738}"/>
               </a:ext>
             </a:extLst>
           </p:cNvPr>
@@ -21792,7 +22228,7 @@
           <p:cNvPr id="19" name="">
             <a:extLst xmlns:a="http://schemas.openxmlformats.org/drawingml/2006/main">
               <a:ext uri="{FF2B5EF4-FFF2-40B4-BE49-F238E27FC236}">
-                <a16:creationId xmlns:a16="http://schemas.microsoft.com/office/drawing/2014/main" id="{21278B6C-081B-4A31-978C-E50AF21F6727}"/>
+                <a16:creationId xmlns:a16="http://schemas.microsoft.com/office/drawing/2014/main" id="{7C220244-36B2-4826-9E53-647AD3C8C13D}"/>
               </a:ext>
             </a:extLst>
           </p:cNvPr>
@@ -21856,7 +22292,7 @@
           <p:cNvPr id="20" name="">
             <a:extLst xmlns:a="http://schemas.openxmlformats.org/drawingml/2006/main">
               <a:ext uri="{FF2B5EF4-FFF2-40B4-BE49-F238E27FC236}">
-                <a16:creationId xmlns:a16="http://schemas.microsoft.com/office/drawing/2014/main" id="{B7C0D04F-9452-4F0F-A313-5B2AC87942B0}"/>
+                <a16:creationId xmlns:a16="http://schemas.microsoft.com/office/drawing/2014/main" id="{368519DE-6102-41CB-8A14-878F05C5D8F4}"/>
               </a:ext>
             </a:extLst>
           </p:cNvPr>
@@ -21889,7 +22325,7 @@
           <p:cNvPr id="21" name="">
             <a:extLst xmlns:a="http://schemas.openxmlformats.org/drawingml/2006/main">
               <a:ext uri="{FF2B5EF4-FFF2-40B4-BE49-F238E27FC236}">
-                <a16:creationId xmlns:a16="http://schemas.microsoft.com/office/drawing/2014/main" id="{3489321E-4D54-4A93-AC2F-2E7C92570ED9}"/>
+                <a16:creationId xmlns:a16="http://schemas.microsoft.com/office/drawing/2014/main" id="{CDB559BF-5EB7-4A7A-8150-C83138D5210A}"/>
               </a:ext>
             </a:extLst>
           </p:cNvPr>
@@ -21924,7 +22360,7 @@
           <p:cNvPr id="22" name="">
             <a:extLst xmlns:a="http://schemas.openxmlformats.org/drawingml/2006/main">
               <a:ext uri="{FF2B5EF4-FFF2-40B4-BE49-F238E27FC236}">
-                <a16:creationId xmlns:a16="http://schemas.microsoft.com/office/drawing/2014/main" id="{0890047D-3ADD-48F0-9062-C9360F0DF3D6}"/>
+                <a16:creationId xmlns:a16="http://schemas.microsoft.com/office/drawing/2014/main" id="{4F096E19-FB91-4836-9B8D-C4C6666D2292}"/>
               </a:ext>
             </a:extLst>
           </p:cNvPr>
@@ -21988,7 +22424,7 @@
           <p:cNvPr id="23" name="">
             <a:extLst xmlns:a="http://schemas.openxmlformats.org/drawingml/2006/main">
               <a:ext uri="{FF2B5EF4-FFF2-40B4-BE49-F238E27FC236}">
-                <a16:creationId xmlns:a16="http://schemas.microsoft.com/office/drawing/2014/main" id="{49436F62-612F-4AA3-B708-87C9CE563E9F}"/>
+                <a16:creationId xmlns:a16="http://schemas.microsoft.com/office/drawing/2014/main" id="{3B60BA12-A1A5-4A2F-B29C-013ABB408B6B}"/>
               </a:ext>
             </a:extLst>
           </p:cNvPr>
@@ -22050,7 +22486,7 @@
     </p:spTree>
     <p:extLst>
       <p:ext uri="{BB962C8B-B14F-4D97-AF65-F5344CB8AC3E}">
-        <p14:creationId xmlns:p14="http://schemas.microsoft.com/office/powerpoint/2010/main" val="1293419248"/>
+        <p14:creationId xmlns:p14="http://schemas.microsoft.com/office/powerpoint/2010/main" val="1530667072"/>
       </p:ext>
     </p:extLst>
   </p:cSld>
@@ -22074,7 +22510,7 @@
           <p:cNvPr id="1" name="">
             <a:extLst xmlns:a="http://schemas.openxmlformats.org/drawingml/2006/main">
               <a:ext uri="{FF2B5EF4-FFF2-40B4-BE49-F238E27FC236}">
-                <a16:creationId xmlns:a16="http://schemas.microsoft.com/office/drawing/2014/main" id="{A02F1EFB-8698-4C07-AC49-F91B4C8BC54C}"/>
+                <a16:creationId xmlns:a16="http://schemas.microsoft.com/office/drawing/2014/main" id="{E22ACB9A-1F54-4455-894E-9951B45B7753}"/>
               </a:ext>
             </a:extLst>
           </p:cNvPr>
@@ -22109,7 +22545,7 @@
           <p:cNvPr id="2" name="">
             <a:extLst xmlns:a="http://schemas.openxmlformats.org/drawingml/2006/main">
               <a:ext uri="{FF2B5EF4-FFF2-40B4-BE49-F238E27FC236}">
-                <a16:creationId xmlns:a16="http://schemas.microsoft.com/office/drawing/2014/main" id="{A0D67707-8325-4EB2-9E22-19234C6DCE03}"/>
+                <a16:creationId xmlns:a16="http://schemas.microsoft.com/office/drawing/2014/main" id="{39584676-BA2F-4490-A759-F095A036B1CF}"/>
               </a:ext>
             </a:extLst>
           </p:cNvPr>
@@ -22144,7 +22580,7 @@
           <p:cNvPr id="3" name="">
             <a:extLst xmlns:a="http://schemas.openxmlformats.org/drawingml/2006/main">
               <a:ext uri="{FF2B5EF4-FFF2-40B4-BE49-F238E27FC236}">
-                <a16:creationId xmlns:a16="http://schemas.microsoft.com/office/drawing/2014/main" id="{73228FBE-6675-4B60-B5FB-FD9D383EC2AC}"/>
+                <a16:creationId xmlns:a16="http://schemas.microsoft.com/office/drawing/2014/main" id="{0351A558-42A7-4AA7-A6D6-C2B0A6F4FD65}"/>
               </a:ext>
             </a:extLst>
           </p:cNvPr>
@@ -22179,7 +22615,7 @@
           <p:cNvPr id="4" name="">
             <a:extLst xmlns:a="http://schemas.openxmlformats.org/drawingml/2006/main">
               <a:ext uri="{FF2B5EF4-FFF2-40B4-BE49-F238E27FC236}">
-                <a16:creationId xmlns:a16="http://schemas.microsoft.com/office/drawing/2014/main" id="{7AF01928-FDE4-4285-A784-9C43CD2A65ED}"/>
+                <a16:creationId xmlns:a16="http://schemas.microsoft.com/office/drawing/2014/main" id="{4548F582-DDC3-41DC-AB26-33252103EA4A}"/>
               </a:ext>
             </a:extLst>
           </p:cNvPr>
@@ -22243,7 +22679,7 @@
           <p:cNvPr id="5" name="">
             <a:extLst xmlns:a="http://schemas.openxmlformats.org/drawingml/2006/main">
               <a:ext uri="{FF2B5EF4-FFF2-40B4-BE49-F238E27FC236}">
-                <a16:creationId xmlns:a16="http://schemas.microsoft.com/office/drawing/2014/main" id="{FED4DDD6-4B74-4BA2-B633-7FB816F19979}"/>
+                <a16:creationId xmlns:a16="http://schemas.microsoft.com/office/drawing/2014/main" id="{463F672C-E004-4251-AD6A-43B58FC36B26}"/>
               </a:ext>
             </a:extLst>
           </p:cNvPr>
@@ -22307,7 +22743,7 @@
           <p:cNvPr id="6" name="">
             <a:extLst xmlns:a="http://schemas.openxmlformats.org/drawingml/2006/main">
               <a:ext uri="{FF2B5EF4-FFF2-40B4-BE49-F238E27FC236}">
-                <a16:creationId xmlns:a16="http://schemas.microsoft.com/office/drawing/2014/main" id="{D8E7D91C-254B-4194-AAE2-8B690E3D1963}"/>
+                <a16:creationId xmlns:a16="http://schemas.microsoft.com/office/drawing/2014/main" id="{F943E3A1-A70C-4A1D-8623-E3B20DA8939D}"/>
               </a:ext>
             </a:extLst>
           </p:cNvPr>
@@ -22371,7 +22807,7 @@
           <p:cNvPr id="7" name="">
             <a:extLst xmlns:a="http://schemas.openxmlformats.org/drawingml/2006/main">
               <a:ext uri="{FF2B5EF4-FFF2-40B4-BE49-F238E27FC236}">
-                <a16:creationId xmlns:a16="http://schemas.microsoft.com/office/drawing/2014/main" id="{E270AE32-A19E-4007-B530-2207665FB481}"/>
+                <a16:creationId xmlns:a16="http://schemas.microsoft.com/office/drawing/2014/main" id="{B8528E12-7EFC-4206-BC84-42A62E084E8A}"/>
               </a:ext>
             </a:extLst>
           </p:cNvPr>
@@ -22435,7 +22871,7 @@
           <p:cNvPr id="8" name="">
             <a:extLst xmlns:a="http://schemas.openxmlformats.org/drawingml/2006/main">
               <a:ext uri="{FF2B5EF4-FFF2-40B4-BE49-F238E27FC236}">
-                <a16:creationId xmlns:a16="http://schemas.microsoft.com/office/drawing/2014/main" id="{2B5F05CD-92F2-4348-8A73-75460A542685}"/>
+                <a16:creationId xmlns:a16="http://schemas.microsoft.com/office/drawing/2014/main" id="{5A0FDCD4-A82C-4DC3-9A7B-28DBD2C98CB0}"/>
               </a:ext>
             </a:extLst>
           </p:cNvPr>
@@ -22468,7 +22904,7 @@
           <p:cNvPr id="9" name="">
             <a:extLst xmlns:a="http://schemas.openxmlformats.org/drawingml/2006/main">
               <a:ext uri="{FF2B5EF4-FFF2-40B4-BE49-F238E27FC236}">
-                <a16:creationId xmlns:a16="http://schemas.microsoft.com/office/drawing/2014/main" id="{81F8ECC6-63EC-49B7-81ED-CB3612CAAFA4}"/>
+                <a16:creationId xmlns:a16="http://schemas.microsoft.com/office/drawing/2014/main" id="{2AAC905A-C7C4-483B-9A26-3E5DE4351546}"/>
               </a:ext>
             </a:extLst>
           </p:cNvPr>
@@ -22503,7 +22939,7 @@
           <p:cNvPr id="10" name="">
             <a:extLst xmlns:a="http://schemas.openxmlformats.org/drawingml/2006/main">
               <a:ext uri="{FF2B5EF4-FFF2-40B4-BE49-F238E27FC236}">
-                <a16:creationId xmlns:a16="http://schemas.microsoft.com/office/drawing/2014/main" id="{229D207F-80C7-4206-B063-33994A745B7B}"/>
+                <a16:creationId xmlns:a16="http://schemas.microsoft.com/office/drawing/2014/main" id="{903502C2-BFC1-45B0-9811-1DE9777B21D2}"/>
               </a:ext>
             </a:extLst>
           </p:cNvPr>
@@ -22567,7 +23003,7 @@
           <p:cNvPr id="11" name="">
             <a:extLst xmlns:a="http://schemas.openxmlformats.org/drawingml/2006/main">
               <a:ext uri="{FF2B5EF4-FFF2-40B4-BE49-F238E27FC236}">
-                <a16:creationId xmlns:a16="http://schemas.microsoft.com/office/drawing/2014/main" id="{94FEF52C-CDCA-4C42-9AEE-337D830BFE25}"/>
+                <a16:creationId xmlns:a16="http://schemas.microsoft.com/office/drawing/2014/main" id="{666A508F-D867-4F48-8E07-277BF71C1082}"/>
               </a:ext>
             </a:extLst>
           </p:cNvPr>
@@ -22631,7 +23067,7 @@
           <p:cNvPr id="12" name="">
             <a:extLst xmlns:a="http://schemas.openxmlformats.org/drawingml/2006/main">
               <a:ext uri="{FF2B5EF4-FFF2-40B4-BE49-F238E27FC236}">
-                <a16:creationId xmlns:a16="http://schemas.microsoft.com/office/drawing/2014/main" id="{742CF2AB-D801-4D37-B331-77A8BFF9DE7B}"/>
+                <a16:creationId xmlns:a16="http://schemas.microsoft.com/office/drawing/2014/main" id="{D526401A-2F38-4360-B433-A34D35C6D4B1}"/>
               </a:ext>
             </a:extLst>
           </p:cNvPr>
@@ -22664,7 +23100,7 @@
           <p:cNvPr id="13" name="">
             <a:extLst xmlns:a="http://schemas.openxmlformats.org/drawingml/2006/main">
               <a:ext uri="{FF2B5EF4-FFF2-40B4-BE49-F238E27FC236}">
-                <a16:creationId xmlns:a16="http://schemas.microsoft.com/office/drawing/2014/main" id="{60F4B97E-2020-43C8-9BBD-F155DADEF8F8}"/>
+                <a16:creationId xmlns:a16="http://schemas.microsoft.com/office/drawing/2014/main" id="{DDD1CCF0-8DD8-46A9-9EF3-AA7F3F4FDFA6}"/>
               </a:ext>
             </a:extLst>
           </p:cNvPr>
@@ -22699,7 +23135,7 @@
           <p:cNvPr id="14" name="">
             <a:extLst xmlns:a="http://schemas.openxmlformats.org/drawingml/2006/main">
               <a:ext uri="{FF2B5EF4-FFF2-40B4-BE49-F238E27FC236}">
-                <a16:creationId xmlns:a16="http://schemas.microsoft.com/office/drawing/2014/main" id="{CDB914F5-DF29-48DE-8D0A-824B3035FAAD}"/>
+                <a16:creationId xmlns:a16="http://schemas.microsoft.com/office/drawing/2014/main" id="{5DB05D51-FBB1-4C07-A49C-AB82082B2663}"/>
               </a:ext>
             </a:extLst>
           </p:cNvPr>
@@ -22763,7 +23199,7 @@
           <p:cNvPr id="15" name="">
             <a:extLst xmlns:a="http://schemas.openxmlformats.org/drawingml/2006/main">
               <a:ext uri="{FF2B5EF4-FFF2-40B4-BE49-F238E27FC236}">
-                <a16:creationId xmlns:a16="http://schemas.microsoft.com/office/drawing/2014/main" id="{6C1953F3-AB0D-4815-B4A6-2618869B3E29}"/>
+                <a16:creationId xmlns:a16="http://schemas.microsoft.com/office/drawing/2014/main" id="{CFC34C01-102B-47D9-8F1D-C531D7C4AA7D}"/>
               </a:ext>
             </a:extLst>
           </p:cNvPr>
@@ -22827,7 +23263,7 @@
           <p:cNvPr id="16" name="">
             <a:extLst xmlns:a="http://schemas.openxmlformats.org/drawingml/2006/main">
               <a:ext uri="{FF2B5EF4-FFF2-40B4-BE49-F238E27FC236}">
-                <a16:creationId xmlns:a16="http://schemas.microsoft.com/office/drawing/2014/main" id="{0204A4FD-99C7-4C3C-AF92-3A2355C40481}"/>
+                <a16:creationId xmlns:a16="http://schemas.microsoft.com/office/drawing/2014/main" id="{0820990B-4459-4F27-AD76-84C91078A60D}"/>
               </a:ext>
             </a:extLst>
           </p:cNvPr>
@@ -22860,7 +23296,7 @@
           <p:cNvPr id="17" name="">
             <a:extLst xmlns:a="http://schemas.openxmlformats.org/drawingml/2006/main">
               <a:ext uri="{FF2B5EF4-FFF2-40B4-BE49-F238E27FC236}">
-                <a16:creationId xmlns:a16="http://schemas.microsoft.com/office/drawing/2014/main" id="{F6C6497C-6CCA-424F-BF2E-2DCC7A0F399A}"/>
+                <a16:creationId xmlns:a16="http://schemas.microsoft.com/office/drawing/2014/main" id="{7F7635AB-68AC-4C97-A2D7-AA1FAD1CBBA4}"/>
               </a:ext>
             </a:extLst>
           </p:cNvPr>
@@ -22895,7 +23331,7 @@
           <p:cNvPr id="18" name="">
             <a:extLst xmlns:a="http://schemas.openxmlformats.org/drawingml/2006/main">
               <a:ext uri="{FF2B5EF4-FFF2-40B4-BE49-F238E27FC236}">
-                <a16:creationId xmlns:a16="http://schemas.microsoft.com/office/drawing/2014/main" id="{9D95DFEA-6C00-4BD8-9497-1252C234A1C3}"/>
+                <a16:creationId xmlns:a16="http://schemas.microsoft.com/office/drawing/2014/main" id="{F32B1F64-4F91-46E6-954E-4F159DBD86E1}"/>
               </a:ext>
             </a:extLst>
           </p:cNvPr>
@@ -22959,7 +23395,7 @@
           <p:cNvPr id="19" name="">
             <a:extLst xmlns:a="http://schemas.openxmlformats.org/drawingml/2006/main">
               <a:ext uri="{FF2B5EF4-FFF2-40B4-BE49-F238E27FC236}">
-                <a16:creationId xmlns:a16="http://schemas.microsoft.com/office/drawing/2014/main" id="{2335C644-E040-4333-80A5-25B865B1937C}"/>
+                <a16:creationId xmlns:a16="http://schemas.microsoft.com/office/drawing/2014/main" id="{40DB2372-784E-4F95-ABC6-D94059CD9C57}"/>
               </a:ext>
             </a:extLst>
           </p:cNvPr>
@@ -23021,7 +23457,7 @@
     </p:spTree>
     <p:extLst>
       <p:ext uri="{BB962C8B-B14F-4D97-AF65-F5344CB8AC3E}">
-        <p14:creationId xmlns:p14="http://schemas.microsoft.com/office/powerpoint/2010/main" val="742654368"/>
+        <p14:creationId xmlns:p14="http://schemas.microsoft.com/office/powerpoint/2010/main" val="450943096"/>
       </p:ext>
     </p:extLst>
   </p:cSld>
@@ -23045,7 +23481,7 @@
           <p:cNvPr id="1" name="">
             <a:extLst xmlns:a="http://schemas.openxmlformats.org/drawingml/2006/main">
               <a:ext uri="{FF2B5EF4-FFF2-40B4-BE49-F238E27FC236}">
-                <a16:creationId xmlns:a16="http://schemas.microsoft.com/office/drawing/2014/main" id="{E6071667-65E1-4011-BEBA-C548E4561E6D}"/>
+                <a16:creationId xmlns:a16="http://schemas.microsoft.com/office/drawing/2014/main" id="{88D4370D-319C-4659-A143-C476A141E86B}"/>
               </a:ext>
             </a:extLst>
           </p:cNvPr>
@@ -23080,7 +23516,7 @@
           <p:cNvPr id="2" name="">
             <a:extLst xmlns:a="http://schemas.openxmlformats.org/drawingml/2006/main">
               <a:ext uri="{FF2B5EF4-FFF2-40B4-BE49-F238E27FC236}">
-                <a16:creationId xmlns:a16="http://schemas.microsoft.com/office/drawing/2014/main" id="{C5420A72-2633-406F-A010-74D3E0810AB3}"/>
+                <a16:creationId xmlns:a16="http://schemas.microsoft.com/office/drawing/2014/main" id="{AAB3A50E-38C8-461C-8565-30E05B86C806}"/>
               </a:ext>
             </a:extLst>
           </p:cNvPr>
@@ -23115,7 +23551,7 @@
           <p:cNvPr id="3" name="">
             <a:extLst xmlns:a="http://schemas.openxmlformats.org/drawingml/2006/main">
               <a:ext uri="{FF2B5EF4-FFF2-40B4-BE49-F238E27FC236}">
-                <a16:creationId xmlns:a16="http://schemas.microsoft.com/office/drawing/2014/main" id="{27378C86-5200-4364-AB15-93DB1C67F03C}"/>
+                <a16:creationId xmlns:a16="http://schemas.microsoft.com/office/drawing/2014/main" id="{13FBD59C-FABE-433B-9E48-8CED8F19FB9C}"/>
               </a:ext>
             </a:extLst>
           </p:cNvPr>
@@ -23150,7 +23586,7 @@
           <p:cNvPr id="4" name="">
             <a:extLst xmlns:a="http://schemas.openxmlformats.org/drawingml/2006/main">
               <a:ext uri="{FF2B5EF4-FFF2-40B4-BE49-F238E27FC236}">
-                <a16:creationId xmlns:a16="http://schemas.microsoft.com/office/drawing/2014/main" id="{30FFF0DB-1E0C-48F0-BC9A-F252565FF72A}"/>
+                <a16:creationId xmlns:a16="http://schemas.microsoft.com/office/drawing/2014/main" id="{17935770-3841-4F28-80C0-F29DBA6431C4}"/>
               </a:ext>
             </a:extLst>
           </p:cNvPr>
@@ -23214,7 +23650,7 @@
           <p:cNvPr id="5" name="">
             <a:extLst xmlns:a="http://schemas.openxmlformats.org/drawingml/2006/main">
               <a:ext uri="{FF2B5EF4-FFF2-40B4-BE49-F238E27FC236}">
-                <a16:creationId xmlns:a16="http://schemas.microsoft.com/office/drawing/2014/main" id="{051F2DC5-F158-4A3D-A0F5-DD0B61F0BC8D}"/>
+                <a16:creationId xmlns:a16="http://schemas.microsoft.com/office/drawing/2014/main" id="{AB380D73-63BB-4F18-B760-7ACE4E066BC3}"/>
               </a:ext>
             </a:extLst>
           </p:cNvPr>
@@ -23278,7 +23714,7 @@
           <p:cNvPr id="6" name="">
             <a:extLst xmlns:a="http://schemas.openxmlformats.org/drawingml/2006/main">
               <a:ext uri="{FF2B5EF4-FFF2-40B4-BE49-F238E27FC236}">
-                <a16:creationId xmlns:a16="http://schemas.microsoft.com/office/drawing/2014/main" id="{BBFD20F0-F242-45DB-87F7-92D8D5A303E0}"/>
+                <a16:creationId xmlns:a16="http://schemas.microsoft.com/office/drawing/2014/main" id="{6B839156-CF84-4FB9-985C-7E4F267A6333}"/>
               </a:ext>
             </a:extLst>
           </p:cNvPr>
@@ -23342,7 +23778,7 @@
           <p:cNvPr id="7" name="">
             <a:extLst xmlns:a="http://schemas.openxmlformats.org/drawingml/2006/main">
               <a:ext uri="{FF2B5EF4-FFF2-40B4-BE49-F238E27FC236}">
-                <a16:creationId xmlns:a16="http://schemas.microsoft.com/office/drawing/2014/main" id="{E45E5939-A4F8-451C-B177-686534FAB305}"/>
+                <a16:creationId xmlns:a16="http://schemas.microsoft.com/office/drawing/2014/main" id="{0D5CC55C-5FD5-406A-8F35-9898661D4C14}"/>
               </a:ext>
             </a:extLst>
           </p:cNvPr>
@@ -23406,7 +23842,7 @@
           <p:cNvPr id="8" name="">
             <a:extLst xmlns:a="http://schemas.openxmlformats.org/drawingml/2006/main">
               <a:ext uri="{FF2B5EF4-FFF2-40B4-BE49-F238E27FC236}">
-                <a16:creationId xmlns:a16="http://schemas.microsoft.com/office/drawing/2014/main" id="{A19D3EB5-EE11-47A9-A779-CC895EDE9FB8}"/>
+                <a16:creationId xmlns:a16="http://schemas.microsoft.com/office/drawing/2014/main" id="{FB53A823-9B5E-4A0E-8DD9-07A237081F39}"/>
               </a:ext>
             </a:extLst>
           </p:cNvPr>
@@ -23439,7 +23875,7 @@
           <p:cNvPr id="9" name="">
             <a:extLst xmlns:a="http://schemas.openxmlformats.org/drawingml/2006/main">
               <a:ext uri="{FF2B5EF4-FFF2-40B4-BE49-F238E27FC236}">
-                <a16:creationId xmlns:a16="http://schemas.microsoft.com/office/drawing/2014/main" id="{553ACE87-9787-4F2D-AA7A-7384289E1ABD}"/>
+                <a16:creationId xmlns:a16="http://schemas.microsoft.com/office/drawing/2014/main" id="{34C0938F-C953-4A7B-877C-EA064237D4A6}"/>
               </a:ext>
             </a:extLst>
           </p:cNvPr>
@@ -23474,7 +23910,7 @@
           <p:cNvPr id="10" name="">
             <a:extLst xmlns:a="http://schemas.openxmlformats.org/drawingml/2006/main">
               <a:ext uri="{FF2B5EF4-FFF2-40B4-BE49-F238E27FC236}">
-                <a16:creationId xmlns:a16="http://schemas.microsoft.com/office/drawing/2014/main" id="{76627314-1BFC-438F-A2A8-D271DECAD855}"/>
+                <a16:creationId xmlns:a16="http://schemas.microsoft.com/office/drawing/2014/main" id="{2DEABFA2-B23E-4957-8422-44BFD3952F28}"/>
               </a:ext>
             </a:extLst>
           </p:cNvPr>
@@ -23538,7 +23974,7 @@
           <p:cNvPr id="11" name="">
             <a:extLst xmlns:a="http://schemas.openxmlformats.org/drawingml/2006/main">
               <a:ext uri="{FF2B5EF4-FFF2-40B4-BE49-F238E27FC236}">
-                <a16:creationId xmlns:a16="http://schemas.microsoft.com/office/drawing/2014/main" id="{639E6DC0-3BC3-456F-947C-081F9F1BEE3B}"/>
+                <a16:creationId xmlns:a16="http://schemas.microsoft.com/office/drawing/2014/main" id="{0E191674-870A-4B6D-907B-09F59CD58A10}"/>
               </a:ext>
             </a:extLst>
           </p:cNvPr>
@@ -23602,7 +24038,7 @@
           <p:cNvPr id="12" name="">
             <a:extLst xmlns:a="http://schemas.openxmlformats.org/drawingml/2006/main">
               <a:ext uri="{FF2B5EF4-FFF2-40B4-BE49-F238E27FC236}">
-                <a16:creationId xmlns:a16="http://schemas.microsoft.com/office/drawing/2014/main" id="{011897FB-B883-4C2C-BADC-72C8CCC63824}"/>
+                <a16:creationId xmlns:a16="http://schemas.microsoft.com/office/drawing/2014/main" id="{140F8C50-1AED-4D21-8F01-D36E8C17B349}"/>
               </a:ext>
             </a:extLst>
           </p:cNvPr>
@@ -23635,7 +24071,7 @@
           <p:cNvPr id="13" name="">
             <a:extLst xmlns:a="http://schemas.openxmlformats.org/drawingml/2006/main">
               <a:ext uri="{FF2B5EF4-FFF2-40B4-BE49-F238E27FC236}">
-                <a16:creationId xmlns:a16="http://schemas.microsoft.com/office/drawing/2014/main" id="{34CB3CF1-98DD-427C-97D9-5689D036A605}"/>
+                <a16:creationId xmlns:a16="http://schemas.microsoft.com/office/drawing/2014/main" id="{B9DD9B77-B277-46DF-96E4-72F4237D2454}"/>
               </a:ext>
             </a:extLst>
           </p:cNvPr>
@@ -23670,7 +24106,7 @@
           <p:cNvPr id="14" name="">
             <a:extLst xmlns:a="http://schemas.openxmlformats.org/drawingml/2006/main">
               <a:ext uri="{FF2B5EF4-FFF2-40B4-BE49-F238E27FC236}">
-                <a16:creationId xmlns:a16="http://schemas.microsoft.com/office/drawing/2014/main" id="{6FE87E75-B56E-4AE9-A6BB-805C546F15C5}"/>
+                <a16:creationId xmlns:a16="http://schemas.microsoft.com/office/drawing/2014/main" id="{E4683F7F-5874-4EC1-92D8-674F6A06DEDD}"/>
               </a:ext>
             </a:extLst>
           </p:cNvPr>
@@ -23734,7 +24170,7 @@
           <p:cNvPr id="15" name="">
             <a:extLst xmlns:a="http://schemas.openxmlformats.org/drawingml/2006/main">
               <a:ext uri="{FF2B5EF4-FFF2-40B4-BE49-F238E27FC236}">
-                <a16:creationId xmlns:a16="http://schemas.microsoft.com/office/drawing/2014/main" id="{4DB6672F-2FF8-4D09-9661-752D7BC904AF}"/>
+                <a16:creationId xmlns:a16="http://schemas.microsoft.com/office/drawing/2014/main" id="{C03053BF-D04E-4E13-9059-F3F11A70D1EE}"/>
               </a:ext>
             </a:extLst>
           </p:cNvPr>
@@ -23798,7 +24234,7 @@
           <p:cNvPr id="16" name="">
             <a:extLst xmlns:a="http://schemas.openxmlformats.org/drawingml/2006/main">
               <a:ext uri="{FF2B5EF4-FFF2-40B4-BE49-F238E27FC236}">
-                <a16:creationId xmlns:a16="http://schemas.microsoft.com/office/drawing/2014/main" id="{19C091EF-B7FA-4F47-BD98-7A6A84D19E14}"/>
+                <a16:creationId xmlns:a16="http://schemas.microsoft.com/office/drawing/2014/main" id="{1158F5CC-1A25-4158-BDCC-A6A30D52158F}"/>
               </a:ext>
             </a:extLst>
           </p:cNvPr>
@@ -23831,7 +24267,7 @@
           <p:cNvPr id="17" name="">
             <a:extLst xmlns:a="http://schemas.openxmlformats.org/drawingml/2006/main">
               <a:ext uri="{FF2B5EF4-FFF2-40B4-BE49-F238E27FC236}">
-                <a16:creationId xmlns:a16="http://schemas.microsoft.com/office/drawing/2014/main" id="{D2E788F7-7146-4807-9A46-3E45ECD39950}"/>
+                <a16:creationId xmlns:a16="http://schemas.microsoft.com/office/drawing/2014/main" id="{A4311F24-4137-41DA-8A47-E792D1A365F1}"/>
               </a:ext>
             </a:extLst>
           </p:cNvPr>
@@ -23866,7 +24302,7 @@
           <p:cNvPr id="18" name="">
             <a:extLst xmlns:a="http://schemas.openxmlformats.org/drawingml/2006/main">
               <a:ext uri="{FF2B5EF4-FFF2-40B4-BE49-F238E27FC236}">
-                <a16:creationId xmlns:a16="http://schemas.microsoft.com/office/drawing/2014/main" id="{EFEE2C2D-3435-4E09-BB3B-AB53B19166FC}"/>
+                <a16:creationId xmlns:a16="http://schemas.microsoft.com/office/drawing/2014/main" id="{AB55F72D-F179-4BEC-9882-7D0D81F22B3A}"/>
               </a:ext>
             </a:extLst>
           </p:cNvPr>
@@ -23930,7 +24366,7 @@
           <p:cNvPr id="19" name="">
             <a:extLst xmlns:a="http://schemas.openxmlformats.org/drawingml/2006/main">
               <a:ext uri="{FF2B5EF4-FFF2-40B4-BE49-F238E27FC236}">
-                <a16:creationId xmlns:a16="http://schemas.microsoft.com/office/drawing/2014/main" id="{2F698A8A-44E1-4763-9964-6F07262B08FC}"/>
+                <a16:creationId xmlns:a16="http://schemas.microsoft.com/office/drawing/2014/main" id="{5CF03FF0-F3F0-44AB-A0FE-FA859A5CA913}"/>
               </a:ext>
             </a:extLst>
           </p:cNvPr>
@@ -23992,7 +24428,7 @@
     </p:spTree>
     <p:extLst>
       <p:ext uri="{BB962C8B-B14F-4D97-AF65-F5344CB8AC3E}">
-        <p14:creationId xmlns:p14="http://schemas.microsoft.com/office/powerpoint/2010/main" val="1715611661"/>
+        <p14:creationId xmlns:p14="http://schemas.microsoft.com/office/powerpoint/2010/main" val="1494262064"/>
       </p:ext>
     </p:extLst>
   </p:cSld>
@@ -24016,7 +24452,7 @@
           <p:cNvPr id="1" name="">
             <a:extLst xmlns:a="http://schemas.openxmlformats.org/drawingml/2006/main">
               <a:ext uri="{FF2B5EF4-FFF2-40B4-BE49-F238E27FC236}">
-                <a16:creationId xmlns:a16="http://schemas.microsoft.com/office/drawing/2014/main" id="{6CCAEA2D-3984-427A-94A9-42EC87EB50D7}"/>
+                <a16:creationId xmlns:a16="http://schemas.microsoft.com/office/drawing/2014/main" id="{924A78C2-579E-475A-9C31-1B6863646B8A}"/>
               </a:ext>
             </a:extLst>
           </p:cNvPr>
@@ -24051,7 +24487,7 @@
           <p:cNvPr id="2" name="">
             <a:extLst xmlns:a="http://schemas.openxmlformats.org/drawingml/2006/main">
               <a:ext uri="{FF2B5EF4-FFF2-40B4-BE49-F238E27FC236}">
-                <a16:creationId xmlns:a16="http://schemas.microsoft.com/office/drawing/2014/main" id="{6674D4A2-DB6F-4667-97FD-E5F484A6E25C}"/>
+                <a16:creationId xmlns:a16="http://schemas.microsoft.com/office/drawing/2014/main" id="{7149BE8F-287D-4F71-BED4-5B809AA8CC8D}"/>
               </a:ext>
             </a:extLst>
           </p:cNvPr>
@@ -24086,7 +24522,7 @@
           <p:cNvPr id="3" name="">
             <a:extLst xmlns:a="http://schemas.openxmlformats.org/drawingml/2006/main">
               <a:ext uri="{FF2B5EF4-FFF2-40B4-BE49-F238E27FC236}">
-                <a16:creationId xmlns:a16="http://schemas.microsoft.com/office/drawing/2014/main" id="{3BF1CBC3-0381-4636-92E2-4A4CAF5963D0}"/>
+                <a16:creationId xmlns:a16="http://schemas.microsoft.com/office/drawing/2014/main" id="{2F237C4E-87FC-44E7-9930-45A5CD9416C7}"/>
               </a:ext>
             </a:extLst>
           </p:cNvPr>
@@ -24121,7 +24557,7 @@
           <p:cNvPr id="4" name="">
             <a:extLst xmlns:a="http://schemas.openxmlformats.org/drawingml/2006/main">
               <a:ext uri="{FF2B5EF4-FFF2-40B4-BE49-F238E27FC236}">
-                <a16:creationId xmlns:a16="http://schemas.microsoft.com/office/drawing/2014/main" id="{9CD5508B-B156-43A2-8DD2-EE0F471CA8D0}"/>
+                <a16:creationId xmlns:a16="http://schemas.microsoft.com/office/drawing/2014/main" id="{B1206BE4-81AA-4F0A-AA4E-BA028C2D9E08}"/>
               </a:ext>
             </a:extLst>
           </p:cNvPr>
@@ -24185,7 +24621,7 @@
           <p:cNvPr id="5" name="">
             <a:extLst xmlns:a="http://schemas.openxmlformats.org/drawingml/2006/main">
               <a:ext uri="{FF2B5EF4-FFF2-40B4-BE49-F238E27FC236}">
-                <a16:creationId xmlns:a16="http://schemas.microsoft.com/office/drawing/2014/main" id="{FA31B0DF-7067-4238-BB26-74E03967AB6A}"/>
+                <a16:creationId xmlns:a16="http://schemas.microsoft.com/office/drawing/2014/main" id="{ECBADF8C-E507-4825-A9FB-236EBBC582F0}"/>
               </a:ext>
             </a:extLst>
           </p:cNvPr>
@@ -24249,7 +24685,7 @@
           <p:cNvPr id="6" name="">
             <a:extLst xmlns:a="http://schemas.openxmlformats.org/drawingml/2006/main">
               <a:ext uri="{FF2B5EF4-FFF2-40B4-BE49-F238E27FC236}">
-                <a16:creationId xmlns:a16="http://schemas.microsoft.com/office/drawing/2014/main" id="{52AB06A4-E565-412F-BC6E-E20375CF61CF}"/>
+                <a16:creationId xmlns:a16="http://schemas.microsoft.com/office/drawing/2014/main" id="{73B65E92-8550-4F6C-9E6B-7F6318C2763A}"/>
               </a:ext>
             </a:extLst>
           </p:cNvPr>
@@ -24313,7 +24749,7 @@
           <p:cNvPr id="7" name="">
             <a:extLst xmlns:a="http://schemas.openxmlformats.org/drawingml/2006/main">
               <a:ext uri="{FF2B5EF4-FFF2-40B4-BE49-F238E27FC236}">
-                <a16:creationId xmlns:a16="http://schemas.microsoft.com/office/drawing/2014/main" id="{3A3CB5CD-9B5B-40F9-A6E4-07880188D2D6}"/>
+                <a16:creationId xmlns:a16="http://schemas.microsoft.com/office/drawing/2014/main" id="{963113B0-A66A-47D1-A63C-B5D4DDD20D9F}"/>
               </a:ext>
             </a:extLst>
           </p:cNvPr>
@@ -24377,7 +24813,7 @@
           <p:cNvPr id="8" name="">
             <a:extLst xmlns:a="http://schemas.openxmlformats.org/drawingml/2006/main">
               <a:ext uri="{FF2B5EF4-FFF2-40B4-BE49-F238E27FC236}">
-                <a16:creationId xmlns:a16="http://schemas.microsoft.com/office/drawing/2014/main" id="{F0766AF8-09A9-45EA-909A-BD23A4E811AA}"/>
+                <a16:creationId xmlns:a16="http://schemas.microsoft.com/office/drawing/2014/main" id="{BAB656AF-8892-472D-AEC7-4F91355EC9A0}"/>
               </a:ext>
             </a:extLst>
           </p:cNvPr>
@@ -24410,7 +24846,7 @@
           <p:cNvPr id="9" name="">
             <a:extLst xmlns:a="http://schemas.openxmlformats.org/drawingml/2006/main">
               <a:ext uri="{FF2B5EF4-FFF2-40B4-BE49-F238E27FC236}">
-                <a16:creationId xmlns:a16="http://schemas.microsoft.com/office/drawing/2014/main" id="{1A099355-FFA5-44FD-AA99-0187186B17F9}"/>
+                <a16:creationId xmlns:a16="http://schemas.microsoft.com/office/drawing/2014/main" id="{74ABEC92-E875-4F2D-B428-616172F6B365}"/>
               </a:ext>
             </a:extLst>
           </p:cNvPr>
@@ -24445,7 +24881,7 @@
           <p:cNvPr id="10" name="">
             <a:extLst xmlns:a="http://schemas.openxmlformats.org/drawingml/2006/main">
               <a:ext uri="{FF2B5EF4-FFF2-40B4-BE49-F238E27FC236}">
-                <a16:creationId xmlns:a16="http://schemas.microsoft.com/office/drawing/2014/main" id="{E8A937A2-6728-4B64-8311-899AD33F1A30}"/>
+                <a16:creationId xmlns:a16="http://schemas.microsoft.com/office/drawing/2014/main" id="{C2CECEA3-4D92-437A-BBFB-358A3B1ACD24}"/>
               </a:ext>
             </a:extLst>
           </p:cNvPr>
@@ -24509,7 +24945,7 @@
           <p:cNvPr id="11" name="">
             <a:extLst xmlns:a="http://schemas.openxmlformats.org/drawingml/2006/main">
               <a:ext uri="{FF2B5EF4-FFF2-40B4-BE49-F238E27FC236}">
-                <a16:creationId xmlns:a16="http://schemas.microsoft.com/office/drawing/2014/main" id="{FD0066CB-96C2-4561-87B5-9E9275F512AD}"/>
+                <a16:creationId xmlns:a16="http://schemas.microsoft.com/office/drawing/2014/main" id="{9A38E70C-DFD6-4BC1-87D9-22531718F49E}"/>
               </a:ext>
             </a:extLst>
           </p:cNvPr>
@@ -24573,7 +25009,7 @@
           <p:cNvPr id="12" name="">
             <a:extLst xmlns:a="http://schemas.openxmlformats.org/drawingml/2006/main">
               <a:ext uri="{FF2B5EF4-FFF2-40B4-BE49-F238E27FC236}">
-                <a16:creationId xmlns:a16="http://schemas.microsoft.com/office/drawing/2014/main" id="{6DBE39AB-6234-43F0-B455-51C4BF6617F5}"/>
+                <a16:creationId xmlns:a16="http://schemas.microsoft.com/office/drawing/2014/main" id="{4A4D083A-B52B-449A-A59A-245EDCA8C461}"/>
               </a:ext>
             </a:extLst>
           </p:cNvPr>
@@ -24606,7 +25042,7 @@
           <p:cNvPr id="13" name="">
             <a:extLst xmlns:a="http://schemas.openxmlformats.org/drawingml/2006/main">
               <a:ext uri="{FF2B5EF4-FFF2-40B4-BE49-F238E27FC236}">
-                <a16:creationId xmlns:a16="http://schemas.microsoft.com/office/drawing/2014/main" id="{14AB11CC-5E55-456B-83FA-B4E472EB207A}"/>
+                <a16:creationId xmlns:a16="http://schemas.microsoft.com/office/drawing/2014/main" id="{1A521B57-3B7B-47AC-A039-A7567F39E5E1}"/>
               </a:ext>
             </a:extLst>
           </p:cNvPr>
@@ -24641,7 +25077,7 @@
           <p:cNvPr id="14" name="">
             <a:extLst xmlns:a="http://schemas.openxmlformats.org/drawingml/2006/main">
               <a:ext uri="{FF2B5EF4-FFF2-40B4-BE49-F238E27FC236}">
-                <a16:creationId xmlns:a16="http://schemas.microsoft.com/office/drawing/2014/main" id="{F617B362-E1A7-4DEB-99E0-88675367647C}"/>
+                <a16:creationId xmlns:a16="http://schemas.microsoft.com/office/drawing/2014/main" id="{0943EDE0-C144-4981-BBFF-ED9A934DE247}"/>
               </a:ext>
             </a:extLst>
           </p:cNvPr>
@@ -24705,7 +25141,7 @@
           <p:cNvPr id="15" name="">
             <a:extLst xmlns:a="http://schemas.openxmlformats.org/drawingml/2006/main">
               <a:ext uri="{FF2B5EF4-FFF2-40B4-BE49-F238E27FC236}">
-                <a16:creationId xmlns:a16="http://schemas.microsoft.com/office/drawing/2014/main" id="{C57F5013-E190-4E29-B662-C0D886E012C8}"/>
+                <a16:creationId xmlns:a16="http://schemas.microsoft.com/office/drawing/2014/main" id="{718AACB2-5272-4781-9288-EE0D3699102C}"/>
               </a:ext>
             </a:extLst>
           </p:cNvPr>
@@ -24769,7 +25205,7 @@
           <p:cNvPr id="16" name="">
             <a:extLst xmlns:a="http://schemas.openxmlformats.org/drawingml/2006/main">
               <a:ext uri="{FF2B5EF4-FFF2-40B4-BE49-F238E27FC236}">
-                <a16:creationId xmlns:a16="http://schemas.microsoft.com/office/drawing/2014/main" id="{C03B8230-00DE-40C8-B225-3801B4C7F597}"/>
+                <a16:creationId xmlns:a16="http://schemas.microsoft.com/office/drawing/2014/main" id="{4687B2C5-5C7D-445B-9A04-74950A6572C0}"/>
               </a:ext>
             </a:extLst>
           </p:cNvPr>
@@ -24802,7 +25238,7 @@
           <p:cNvPr id="17" name="">
             <a:extLst xmlns:a="http://schemas.openxmlformats.org/drawingml/2006/main">
               <a:ext uri="{FF2B5EF4-FFF2-40B4-BE49-F238E27FC236}">
-                <a16:creationId xmlns:a16="http://schemas.microsoft.com/office/drawing/2014/main" id="{D9A35074-5796-4F2B-94E9-64212D733886}"/>
+                <a16:creationId xmlns:a16="http://schemas.microsoft.com/office/drawing/2014/main" id="{CBA11B9D-45B9-42EA-8039-2E68EFC0F9C1}"/>
               </a:ext>
             </a:extLst>
           </p:cNvPr>
@@ -24837,7 +25273,7 @@
           <p:cNvPr id="18" name="">
             <a:extLst xmlns:a="http://schemas.openxmlformats.org/drawingml/2006/main">
               <a:ext uri="{FF2B5EF4-FFF2-40B4-BE49-F238E27FC236}">
-                <a16:creationId xmlns:a16="http://schemas.microsoft.com/office/drawing/2014/main" id="{7DB0A24D-34B3-4A2F-950B-B98746966DAE}"/>
+                <a16:creationId xmlns:a16="http://schemas.microsoft.com/office/drawing/2014/main" id="{3C321350-B735-4542-BB57-D4BDDE23AAE4}"/>
               </a:ext>
             </a:extLst>
           </p:cNvPr>
@@ -24901,7 +25337,7 @@
           <p:cNvPr id="19" name="">
             <a:extLst xmlns:a="http://schemas.openxmlformats.org/drawingml/2006/main">
               <a:ext uri="{FF2B5EF4-FFF2-40B4-BE49-F238E27FC236}">
-                <a16:creationId xmlns:a16="http://schemas.microsoft.com/office/drawing/2014/main" id="{F24CCC3F-D852-4002-9138-9AC4C4E223D8}"/>
+                <a16:creationId xmlns:a16="http://schemas.microsoft.com/office/drawing/2014/main" id="{737BBE5D-8775-4969-AC38-74A83D645323}"/>
               </a:ext>
             </a:extLst>
           </p:cNvPr>
@@ -24963,7 +25399,7 @@
     </p:spTree>
     <p:extLst>
       <p:ext uri="{BB962C8B-B14F-4D97-AF65-F5344CB8AC3E}">
-        <p14:creationId xmlns:p14="http://schemas.microsoft.com/office/powerpoint/2010/main" val="1235326470"/>
+        <p14:creationId xmlns:p14="http://schemas.microsoft.com/office/powerpoint/2010/main" val="155329173"/>
       </p:ext>
     </p:extLst>
   </p:cSld>
@@ -24987,7 +25423,7 @@
           <p:cNvPr id="1" name="">
             <a:extLst xmlns:a="http://schemas.openxmlformats.org/drawingml/2006/main">
               <a:ext uri="{FF2B5EF4-FFF2-40B4-BE49-F238E27FC236}">
-                <a16:creationId xmlns:a16="http://schemas.microsoft.com/office/drawing/2014/main" id="{D62085F3-4E25-4677-8EAF-44D21324EFD5}"/>
+                <a16:creationId xmlns:a16="http://schemas.microsoft.com/office/drawing/2014/main" id="{A7846FEB-F934-4C3F-A724-DED5ACCB5AC6}"/>
               </a:ext>
             </a:extLst>
           </p:cNvPr>
@@ -25022,7 +25458,7 @@
           <p:cNvPr id="2" name="">
             <a:extLst xmlns:a="http://schemas.openxmlformats.org/drawingml/2006/main">
               <a:ext uri="{FF2B5EF4-FFF2-40B4-BE49-F238E27FC236}">
-                <a16:creationId xmlns:a16="http://schemas.microsoft.com/office/drawing/2014/main" id="{A9EF5027-538A-4F82-AACE-97D7ADDCD77E}"/>
+                <a16:creationId xmlns:a16="http://schemas.microsoft.com/office/drawing/2014/main" id="{71969A12-87FE-49FF-877D-BD5F1F6E2EBF}"/>
               </a:ext>
             </a:extLst>
           </p:cNvPr>
@@ -25057,7 +25493,7 @@
           <p:cNvPr id="3" name="">
             <a:extLst xmlns:a="http://schemas.openxmlformats.org/drawingml/2006/main">
               <a:ext uri="{FF2B5EF4-FFF2-40B4-BE49-F238E27FC236}">
-                <a16:creationId xmlns:a16="http://schemas.microsoft.com/office/drawing/2014/main" id="{D6405A25-0451-41E1-BDEE-C4042A6CDE62}"/>
+                <a16:creationId xmlns:a16="http://schemas.microsoft.com/office/drawing/2014/main" id="{B6242C91-BE46-4E14-92B3-AC75B41CBFDC}"/>
               </a:ext>
             </a:extLst>
           </p:cNvPr>
@@ -25092,7 +25528,7 @@
           <p:cNvPr id="4" name="">
             <a:extLst xmlns:a="http://schemas.openxmlformats.org/drawingml/2006/main">
               <a:ext uri="{FF2B5EF4-FFF2-40B4-BE49-F238E27FC236}">
-                <a16:creationId xmlns:a16="http://schemas.microsoft.com/office/drawing/2014/main" id="{5767A3EE-B598-4BA9-AC66-EF5B852E8A13}"/>
+                <a16:creationId xmlns:a16="http://schemas.microsoft.com/office/drawing/2014/main" id="{8625AD6A-2967-4660-80B0-9CA1878755D1}"/>
               </a:ext>
             </a:extLst>
           </p:cNvPr>
@@ -25156,7 +25592,7 @@
           <p:cNvPr id="5" name="">
             <a:extLst xmlns:a="http://schemas.openxmlformats.org/drawingml/2006/main">
               <a:ext uri="{FF2B5EF4-FFF2-40B4-BE49-F238E27FC236}">
-                <a16:creationId xmlns:a16="http://schemas.microsoft.com/office/drawing/2014/main" id="{2615889E-0B11-48E4-8280-4ABF5C71FE8A}"/>
+                <a16:creationId xmlns:a16="http://schemas.microsoft.com/office/drawing/2014/main" id="{69830198-BD97-47BC-8F05-D197E8CAAEB5}"/>
               </a:ext>
             </a:extLst>
           </p:cNvPr>
@@ -25220,7 +25656,7 @@
           <p:cNvPr id="6" name="">
             <a:extLst xmlns:a="http://schemas.openxmlformats.org/drawingml/2006/main">
               <a:ext uri="{FF2B5EF4-FFF2-40B4-BE49-F238E27FC236}">
-                <a16:creationId xmlns:a16="http://schemas.microsoft.com/office/drawing/2014/main" id="{6490025C-46D3-426F-8E9D-89827D29E153}"/>
+                <a16:creationId xmlns:a16="http://schemas.microsoft.com/office/drawing/2014/main" id="{915BF3BD-F6E5-4FDB-88BC-7CFD64BEE700}"/>
               </a:ext>
             </a:extLst>
           </p:cNvPr>
@@ -25284,7 +25720,7 @@
           <p:cNvPr id="7" name="">
             <a:extLst xmlns:a="http://schemas.openxmlformats.org/drawingml/2006/main">
               <a:ext uri="{FF2B5EF4-FFF2-40B4-BE49-F238E27FC236}">
-                <a16:creationId xmlns:a16="http://schemas.microsoft.com/office/drawing/2014/main" id="{108A891C-8486-4507-A10A-E7E25C7E9BF4}"/>
+                <a16:creationId xmlns:a16="http://schemas.microsoft.com/office/drawing/2014/main" id="{BD380C85-1584-4795-9029-74ECFBD62B1F}"/>
               </a:ext>
             </a:extLst>
           </p:cNvPr>
@@ -25348,7 +25784,7 @@
           <p:cNvPr id="8" name="">
             <a:extLst xmlns:a="http://schemas.openxmlformats.org/drawingml/2006/main">
               <a:ext uri="{FF2B5EF4-FFF2-40B4-BE49-F238E27FC236}">
-                <a16:creationId xmlns:a16="http://schemas.microsoft.com/office/drawing/2014/main" id="{307408C3-F68B-4EEF-A2F3-FEE0280B3941}"/>
+                <a16:creationId xmlns:a16="http://schemas.microsoft.com/office/drawing/2014/main" id="{B6DF05EB-46F6-49E4-B0FC-01121148B80E}"/>
               </a:ext>
             </a:extLst>
           </p:cNvPr>
@@ -25381,7 +25817,7 @@
           <p:cNvPr id="9" name="">
             <a:extLst xmlns:a="http://schemas.openxmlformats.org/drawingml/2006/main">
               <a:ext uri="{FF2B5EF4-FFF2-40B4-BE49-F238E27FC236}">
-                <a16:creationId xmlns:a16="http://schemas.microsoft.com/office/drawing/2014/main" id="{1F9E97A6-ED88-4E1B-B574-910D8909C332}"/>
+                <a16:creationId xmlns:a16="http://schemas.microsoft.com/office/drawing/2014/main" id="{61DBFAAC-7215-4A78-BC8A-2584105B820A}"/>
               </a:ext>
             </a:extLst>
           </p:cNvPr>
@@ -25416,7 +25852,7 @@
           <p:cNvPr id="10" name="">
             <a:extLst xmlns:a="http://schemas.openxmlformats.org/drawingml/2006/main">
               <a:ext uri="{FF2B5EF4-FFF2-40B4-BE49-F238E27FC236}">
-                <a16:creationId xmlns:a16="http://schemas.microsoft.com/office/drawing/2014/main" id="{D3FAD0A5-99EB-4249-90F1-33F4A0A25F85}"/>
+                <a16:creationId xmlns:a16="http://schemas.microsoft.com/office/drawing/2014/main" id="{F9E78B5A-3E0F-41BF-9BDA-678358E94E0D}"/>
               </a:ext>
             </a:extLst>
           </p:cNvPr>
@@ -25480,7 +25916,7 @@
           <p:cNvPr id="11" name="">
             <a:extLst xmlns:a="http://schemas.openxmlformats.org/drawingml/2006/main">
               <a:ext uri="{FF2B5EF4-FFF2-40B4-BE49-F238E27FC236}">
-                <a16:creationId xmlns:a16="http://schemas.microsoft.com/office/drawing/2014/main" id="{D914C399-7A96-4CA2-9C95-4F5510FA3EB8}"/>
+                <a16:creationId xmlns:a16="http://schemas.microsoft.com/office/drawing/2014/main" id="{D99EF556-12D0-452F-9C2C-F99FBE1F6C69}"/>
               </a:ext>
             </a:extLst>
           </p:cNvPr>
@@ -25544,7 +25980,7 @@
           <p:cNvPr id="12" name="">
             <a:extLst xmlns:a="http://schemas.openxmlformats.org/drawingml/2006/main">
               <a:ext uri="{FF2B5EF4-FFF2-40B4-BE49-F238E27FC236}">
-                <a16:creationId xmlns:a16="http://schemas.microsoft.com/office/drawing/2014/main" id="{E1EDBC7F-C95A-41C3-B105-11C08A851608}"/>
+                <a16:creationId xmlns:a16="http://schemas.microsoft.com/office/drawing/2014/main" id="{7CF7A1D8-FBCD-46C0-B4F9-4D1A78096B50}"/>
               </a:ext>
             </a:extLst>
           </p:cNvPr>
@@ -25577,7 +26013,7 @@
           <p:cNvPr id="13" name="">
             <a:extLst xmlns:a="http://schemas.openxmlformats.org/drawingml/2006/main">
               <a:ext uri="{FF2B5EF4-FFF2-40B4-BE49-F238E27FC236}">
-                <a16:creationId xmlns:a16="http://schemas.microsoft.com/office/drawing/2014/main" id="{8B9EFC8E-EAA0-4D9B-82CA-25FF4C4AF542}"/>
+                <a16:creationId xmlns:a16="http://schemas.microsoft.com/office/drawing/2014/main" id="{AB0D16B9-0AB1-4DD4-AAD5-00E37FBC4F67}"/>
               </a:ext>
             </a:extLst>
           </p:cNvPr>
@@ -25612,7 +26048,7 @@
           <p:cNvPr id="14" name="">
             <a:extLst xmlns:a="http://schemas.openxmlformats.org/drawingml/2006/main">
               <a:ext uri="{FF2B5EF4-FFF2-40B4-BE49-F238E27FC236}">
-                <a16:creationId xmlns:a16="http://schemas.microsoft.com/office/drawing/2014/main" id="{C44C81DD-4A8E-43F7-91D3-A2BD072C0EB9}"/>
+                <a16:creationId xmlns:a16="http://schemas.microsoft.com/office/drawing/2014/main" id="{803E0350-F6E0-426F-A552-611507BFB17A}"/>
               </a:ext>
             </a:extLst>
           </p:cNvPr>
@@ -25676,7 +26112,7 @@
           <p:cNvPr id="15" name="">
             <a:extLst xmlns:a="http://schemas.openxmlformats.org/drawingml/2006/main">
               <a:ext uri="{FF2B5EF4-FFF2-40B4-BE49-F238E27FC236}">
-                <a16:creationId xmlns:a16="http://schemas.microsoft.com/office/drawing/2014/main" id="{E5CC5DDA-B144-4AFA-A1FF-6B7BC0DAB6AF}"/>
+                <a16:creationId xmlns:a16="http://schemas.microsoft.com/office/drawing/2014/main" id="{D7211090-31FE-4106-BDD6-48330FD1850A}"/>
               </a:ext>
             </a:extLst>
           </p:cNvPr>
@@ -25740,7 +26176,7 @@
           <p:cNvPr id="16" name="">
             <a:extLst xmlns:a="http://schemas.openxmlformats.org/drawingml/2006/main">
               <a:ext uri="{FF2B5EF4-FFF2-40B4-BE49-F238E27FC236}">
-                <a16:creationId xmlns:a16="http://schemas.microsoft.com/office/drawing/2014/main" id="{7FB5FDA2-8192-4B50-AC39-6C0DE3427A5D}"/>
+                <a16:creationId xmlns:a16="http://schemas.microsoft.com/office/drawing/2014/main" id="{13DCE97A-2838-4E5B-B75A-B08B7AC12C7A}"/>
               </a:ext>
             </a:extLst>
           </p:cNvPr>
@@ -25773,7 +26209,7 @@
           <p:cNvPr id="17" name="">
             <a:extLst xmlns:a="http://schemas.openxmlformats.org/drawingml/2006/main">
               <a:ext uri="{FF2B5EF4-FFF2-40B4-BE49-F238E27FC236}">
-                <a16:creationId xmlns:a16="http://schemas.microsoft.com/office/drawing/2014/main" id="{337FAF69-311F-4D68-8526-6C58B844A2EE}"/>
+                <a16:creationId xmlns:a16="http://schemas.microsoft.com/office/drawing/2014/main" id="{FFE81AE1-AFA3-4FB9-8542-62FA9630B304}"/>
               </a:ext>
             </a:extLst>
           </p:cNvPr>
@@ -25808,7 +26244,7 @@
           <p:cNvPr id="18" name="">
             <a:extLst xmlns:a="http://schemas.openxmlformats.org/drawingml/2006/main">
               <a:ext uri="{FF2B5EF4-FFF2-40B4-BE49-F238E27FC236}">
-                <a16:creationId xmlns:a16="http://schemas.microsoft.com/office/drawing/2014/main" id="{BFA42933-B4D0-4B1A-B5CF-435579A817AB}"/>
+                <a16:creationId xmlns:a16="http://schemas.microsoft.com/office/drawing/2014/main" id="{C7945654-4CFC-427C-A2FA-B256B9D79ECE}"/>
               </a:ext>
             </a:extLst>
           </p:cNvPr>
@@ -25872,7 +26308,7 @@
           <p:cNvPr id="19" name="">
             <a:extLst xmlns:a="http://schemas.openxmlformats.org/drawingml/2006/main">
               <a:ext uri="{FF2B5EF4-FFF2-40B4-BE49-F238E27FC236}">
-                <a16:creationId xmlns:a16="http://schemas.microsoft.com/office/drawing/2014/main" id="{A6717B60-739C-4A20-B731-4581F3110F25}"/>
+                <a16:creationId xmlns:a16="http://schemas.microsoft.com/office/drawing/2014/main" id="{E38D5CE4-316B-41B3-9D85-F69EAE5496AA}"/>
               </a:ext>
             </a:extLst>
           </p:cNvPr>
@@ -25934,7 +26370,7 @@
     </p:spTree>
     <p:extLst>
       <p:ext uri="{BB962C8B-B14F-4D97-AF65-F5344CB8AC3E}">
-        <p14:creationId xmlns:p14="http://schemas.microsoft.com/office/powerpoint/2010/main" val="1203978447"/>
+        <p14:creationId xmlns:p14="http://schemas.microsoft.com/office/powerpoint/2010/main" val="686591985"/>
       </p:ext>
     </p:extLst>
   </p:cSld>
@@ -25958,7 +26394,7 @@
           <p:cNvPr id="1" name="">
             <a:extLst xmlns:a="http://schemas.openxmlformats.org/drawingml/2006/main">
               <a:ext uri="{FF2B5EF4-FFF2-40B4-BE49-F238E27FC236}">
-                <a16:creationId xmlns:a16="http://schemas.microsoft.com/office/drawing/2014/main" id="{C4B80BE4-EB24-4E8B-8CBE-35E47B6AB48F}"/>
+                <a16:creationId xmlns:a16="http://schemas.microsoft.com/office/drawing/2014/main" id="{8EC80759-0453-49C4-BC81-9F62EFFC6FAC}"/>
               </a:ext>
             </a:extLst>
           </p:cNvPr>
@@ -25993,7 +26429,7 @@
           <p:cNvPr id="2" name="">
             <a:extLst xmlns:a="http://schemas.openxmlformats.org/drawingml/2006/main">
               <a:ext uri="{FF2B5EF4-FFF2-40B4-BE49-F238E27FC236}">
-                <a16:creationId xmlns:a16="http://schemas.microsoft.com/office/drawing/2014/main" id="{22929F6A-7910-4FA2-8851-3F015F129A7E}"/>
+                <a16:creationId xmlns:a16="http://schemas.microsoft.com/office/drawing/2014/main" id="{DDEE9CB0-1DF0-4F07-97B9-4BEBEAA9C94B}"/>
               </a:ext>
             </a:extLst>
           </p:cNvPr>
@@ -26028,7 +26464,7 @@
           <p:cNvPr id="3" name="">
             <a:extLst xmlns:a="http://schemas.openxmlformats.org/drawingml/2006/main">
               <a:ext uri="{FF2B5EF4-FFF2-40B4-BE49-F238E27FC236}">
-                <a16:creationId xmlns:a16="http://schemas.microsoft.com/office/drawing/2014/main" id="{F5FF5D31-B18E-42DD-8B9D-E4762154C1F5}"/>
+                <a16:creationId xmlns:a16="http://schemas.microsoft.com/office/drawing/2014/main" id="{CC8DA214-73DC-4594-AA82-0D8B09C020AA}"/>
               </a:ext>
             </a:extLst>
           </p:cNvPr>
@@ -26063,7 +26499,7 @@
           <p:cNvPr id="4" name="">
             <a:extLst xmlns:a="http://schemas.openxmlformats.org/drawingml/2006/main">
               <a:ext uri="{FF2B5EF4-FFF2-40B4-BE49-F238E27FC236}">
-                <a16:creationId xmlns:a16="http://schemas.microsoft.com/office/drawing/2014/main" id="{E2639BB2-FCF0-44F5-8DA1-3CC7D269FEA6}"/>
+                <a16:creationId xmlns:a16="http://schemas.microsoft.com/office/drawing/2014/main" id="{35E796C0-5BFF-48B8-80CF-C1690F267313}"/>
               </a:ext>
             </a:extLst>
           </p:cNvPr>
@@ -26127,7 +26563,7 @@
           <p:cNvPr id="5" name="">
             <a:extLst xmlns:a="http://schemas.openxmlformats.org/drawingml/2006/main">
               <a:ext uri="{FF2B5EF4-FFF2-40B4-BE49-F238E27FC236}">
-                <a16:creationId xmlns:a16="http://schemas.microsoft.com/office/drawing/2014/main" id="{5F3D4422-0BB6-4480-9BDE-79900048F418}"/>
+                <a16:creationId xmlns:a16="http://schemas.microsoft.com/office/drawing/2014/main" id="{3EBE0758-2897-489E-BB1A-26CE5346690B}"/>
               </a:ext>
             </a:extLst>
           </p:cNvPr>
@@ -26191,7 +26627,7 @@
           <p:cNvPr id="6" name="">
             <a:extLst xmlns:a="http://schemas.openxmlformats.org/drawingml/2006/main">
               <a:ext uri="{FF2B5EF4-FFF2-40B4-BE49-F238E27FC236}">
-                <a16:creationId xmlns:a16="http://schemas.microsoft.com/office/drawing/2014/main" id="{D35A6BAE-278F-4E88-B020-4F6FBF562AB9}"/>
+                <a16:creationId xmlns:a16="http://schemas.microsoft.com/office/drawing/2014/main" id="{AA55E6F1-3282-4495-95E0-9B10EF642CF9}"/>
               </a:ext>
             </a:extLst>
           </p:cNvPr>
@@ -26255,7 +26691,7 @@
           <p:cNvPr id="7" name="">
             <a:extLst xmlns:a="http://schemas.openxmlformats.org/drawingml/2006/main">
               <a:ext uri="{FF2B5EF4-FFF2-40B4-BE49-F238E27FC236}">
-                <a16:creationId xmlns:a16="http://schemas.microsoft.com/office/drawing/2014/main" id="{0D205ABB-8445-43A4-B475-A261363ECDEE}"/>
+                <a16:creationId xmlns:a16="http://schemas.microsoft.com/office/drawing/2014/main" id="{7257611A-87EF-4390-BDAC-3716FFC267F4}"/>
               </a:ext>
             </a:extLst>
           </p:cNvPr>
@@ -26319,7 +26755,7 @@
           <p:cNvPr id="8" name="">
             <a:extLst xmlns:a="http://schemas.openxmlformats.org/drawingml/2006/main">
               <a:ext uri="{FF2B5EF4-FFF2-40B4-BE49-F238E27FC236}">
-                <a16:creationId xmlns:a16="http://schemas.microsoft.com/office/drawing/2014/main" id="{9A472420-C8BC-4820-A15C-4A40D64C5CF8}"/>
+                <a16:creationId xmlns:a16="http://schemas.microsoft.com/office/drawing/2014/main" id="{F3EA9D36-2666-436A-8AA1-2A7AAB323631}"/>
               </a:ext>
             </a:extLst>
           </p:cNvPr>
@@ -26352,7 +26788,7 @@
           <p:cNvPr id="9" name="">
             <a:extLst xmlns:a="http://schemas.openxmlformats.org/drawingml/2006/main">
               <a:ext uri="{FF2B5EF4-FFF2-40B4-BE49-F238E27FC236}">
-                <a16:creationId xmlns:a16="http://schemas.microsoft.com/office/drawing/2014/main" id="{6F026F11-AB68-4713-BB8A-039ABF5BE843}"/>
+                <a16:creationId xmlns:a16="http://schemas.microsoft.com/office/drawing/2014/main" id="{4C90556F-837E-454D-B043-A99B468EC133}"/>
               </a:ext>
             </a:extLst>
           </p:cNvPr>
@@ -26387,7 +26823,7 @@
           <p:cNvPr id="10" name="">
             <a:extLst xmlns:a="http://schemas.openxmlformats.org/drawingml/2006/main">
               <a:ext uri="{FF2B5EF4-FFF2-40B4-BE49-F238E27FC236}">
-                <a16:creationId xmlns:a16="http://schemas.microsoft.com/office/drawing/2014/main" id="{959578B5-176D-4B55-AE12-44401C1BF745}"/>
+                <a16:creationId xmlns:a16="http://schemas.microsoft.com/office/drawing/2014/main" id="{10D95FC0-94FE-4186-97CB-668FCE27B71F}"/>
               </a:ext>
             </a:extLst>
           </p:cNvPr>
@@ -26451,7 +26887,7 @@
           <p:cNvPr id="11" name="">
             <a:extLst xmlns:a="http://schemas.openxmlformats.org/drawingml/2006/main">
               <a:ext uri="{FF2B5EF4-FFF2-40B4-BE49-F238E27FC236}">
-                <a16:creationId xmlns:a16="http://schemas.microsoft.com/office/drawing/2014/main" id="{0E34B17A-C271-4326-8322-F2CF8C6ED9E0}"/>
+                <a16:creationId xmlns:a16="http://schemas.microsoft.com/office/drawing/2014/main" id="{7D04D49A-8CB1-4589-AE96-9ED2941C8390}"/>
               </a:ext>
             </a:extLst>
           </p:cNvPr>
@@ -26515,7 +26951,7 @@
           <p:cNvPr id="12" name="">
             <a:extLst xmlns:a="http://schemas.openxmlformats.org/drawingml/2006/main">
               <a:ext uri="{FF2B5EF4-FFF2-40B4-BE49-F238E27FC236}">
-                <a16:creationId xmlns:a16="http://schemas.microsoft.com/office/drawing/2014/main" id="{201D8CC6-7356-4B5B-BD73-8A36AD775A37}"/>
+                <a16:creationId xmlns:a16="http://schemas.microsoft.com/office/drawing/2014/main" id="{39391127-2197-4E32-8D25-9DB3D352A8EB}"/>
               </a:ext>
             </a:extLst>
           </p:cNvPr>
@@ -26548,7 +26984,7 @@
           <p:cNvPr id="13" name="">
             <a:extLst xmlns:a="http://schemas.openxmlformats.org/drawingml/2006/main">
               <a:ext uri="{FF2B5EF4-FFF2-40B4-BE49-F238E27FC236}">
-                <a16:creationId xmlns:a16="http://schemas.microsoft.com/office/drawing/2014/main" id="{10AD40D8-6D86-4582-A2E8-AD26C01729A0}"/>
+                <a16:creationId xmlns:a16="http://schemas.microsoft.com/office/drawing/2014/main" id="{2132655E-61F0-47F9-AB18-0ABBBEB05012}"/>
               </a:ext>
             </a:extLst>
           </p:cNvPr>
@@ -26583,7 +27019,7 @@
           <p:cNvPr id="14" name="">
             <a:extLst xmlns:a="http://schemas.openxmlformats.org/drawingml/2006/main">
               <a:ext uri="{FF2B5EF4-FFF2-40B4-BE49-F238E27FC236}">
-                <a16:creationId xmlns:a16="http://schemas.microsoft.com/office/drawing/2014/main" id="{1ADF46D4-8D5F-4922-83E1-9DF875BF47E1}"/>
+                <a16:creationId xmlns:a16="http://schemas.microsoft.com/office/drawing/2014/main" id="{51440D67-7132-467D-A276-BA09C20A19C5}"/>
               </a:ext>
             </a:extLst>
           </p:cNvPr>
@@ -26647,7 +27083,7 @@
           <p:cNvPr id="15" name="">
             <a:extLst xmlns:a="http://schemas.openxmlformats.org/drawingml/2006/main">
               <a:ext uri="{FF2B5EF4-FFF2-40B4-BE49-F238E27FC236}">
-                <a16:creationId xmlns:a16="http://schemas.microsoft.com/office/drawing/2014/main" id="{429DCFB4-CB0F-415C-8318-00BA5C878460}"/>
+                <a16:creationId xmlns:a16="http://schemas.microsoft.com/office/drawing/2014/main" id="{3481F2EC-94A7-4C22-9E97-AAF729686B88}"/>
               </a:ext>
             </a:extLst>
           </p:cNvPr>
@@ -26711,7 +27147,7 @@
           <p:cNvPr id="16" name="">
             <a:extLst xmlns:a="http://schemas.openxmlformats.org/drawingml/2006/main">
               <a:ext uri="{FF2B5EF4-FFF2-40B4-BE49-F238E27FC236}">
-                <a16:creationId xmlns:a16="http://schemas.microsoft.com/office/drawing/2014/main" id="{9BF9E768-CF43-4867-AC2E-8091FD3A1A60}"/>
+                <a16:creationId xmlns:a16="http://schemas.microsoft.com/office/drawing/2014/main" id="{14E7D6CF-21BC-46FD-977A-CFF408FADF2A}"/>
               </a:ext>
             </a:extLst>
           </p:cNvPr>
@@ -26744,7 +27180,7 @@
           <p:cNvPr id="17" name="">
             <a:extLst xmlns:a="http://schemas.openxmlformats.org/drawingml/2006/main">
               <a:ext uri="{FF2B5EF4-FFF2-40B4-BE49-F238E27FC236}">
-                <a16:creationId xmlns:a16="http://schemas.microsoft.com/office/drawing/2014/main" id="{261DDB4C-6FAD-4EC8-8A8A-7408F70AAC9B}"/>
+                <a16:creationId xmlns:a16="http://schemas.microsoft.com/office/drawing/2014/main" id="{23EA9614-1361-41F9-8D09-E728E1D4ACB5}"/>
               </a:ext>
             </a:extLst>
           </p:cNvPr>
@@ -26779,7 +27215,7 @@
           <p:cNvPr id="18" name="">
             <a:extLst xmlns:a="http://schemas.openxmlformats.org/drawingml/2006/main">
               <a:ext uri="{FF2B5EF4-FFF2-40B4-BE49-F238E27FC236}">
-                <a16:creationId xmlns:a16="http://schemas.microsoft.com/office/drawing/2014/main" id="{8C31F53A-2EB8-456C-A230-EE75B0CDBA6A}"/>
+                <a16:creationId xmlns:a16="http://schemas.microsoft.com/office/drawing/2014/main" id="{3355B5DD-11EA-450A-8BF6-25A4A2FABDE0}"/>
               </a:ext>
             </a:extLst>
           </p:cNvPr>
@@ -26843,7 +27279,7 @@
           <p:cNvPr id="19" name="">
             <a:extLst xmlns:a="http://schemas.openxmlformats.org/drawingml/2006/main">
               <a:ext uri="{FF2B5EF4-FFF2-40B4-BE49-F238E27FC236}">
-                <a16:creationId xmlns:a16="http://schemas.microsoft.com/office/drawing/2014/main" id="{5BAC73BB-965D-4417-B08A-D9153C3DECC7}"/>
+                <a16:creationId xmlns:a16="http://schemas.microsoft.com/office/drawing/2014/main" id="{E8A6A67A-12D6-43E8-B55F-CC076B46EF3E}"/>
               </a:ext>
             </a:extLst>
           </p:cNvPr>
@@ -26905,7 +27341,7 @@
     </p:spTree>
     <p:extLst>
       <p:ext uri="{BB962C8B-B14F-4D97-AF65-F5344CB8AC3E}">
-        <p14:creationId xmlns:p14="http://schemas.microsoft.com/office/powerpoint/2010/main" val="1424769157"/>
+        <p14:creationId xmlns:p14="http://schemas.microsoft.com/office/powerpoint/2010/main" val="648372142"/>
       </p:ext>
     </p:extLst>
   </p:cSld>
@@ -26929,7 +27365,7 @@
           <p:cNvPr id="1" name="">
             <a:extLst xmlns:a="http://schemas.openxmlformats.org/drawingml/2006/main">
               <a:ext uri="{FF2B5EF4-FFF2-40B4-BE49-F238E27FC236}">
-                <a16:creationId xmlns:a16="http://schemas.microsoft.com/office/drawing/2014/main" id="{9E9B12FA-44F0-449C-A5E9-6083DD2A523C}"/>
+                <a16:creationId xmlns:a16="http://schemas.microsoft.com/office/drawing/2014/main" id="{05F12577-3557-4DC4-8AFA-C076F9574216}"/>
               </a:ext>
             </a:extLst>
           </p:cNvPr>
@@ -26964,7 +27400,7 @@
           <p:cNvPr id="2" name="">
             <a:extLst xmlns:a="http://schemas.openxmlformats.org/drawingml/2006/main">
               <a:ext uri="{FF2B5EF4-FFF2-40B4-BE49-F238E27FC236}">
-                <a16:creationId xmlns:a16="http://schemas.microsoft.com/office/drawing/2014/main" id="{5A579A8B-620D-427E-88D9-5B53198AF321}"/>
+                <a16:creationId xmlns:a16="http://schemas.microsoft.com/office/drawing/2014/main" id="{DE57EA30-E3D6-47B9-AB52-63E223D9EF30}"/>
               </a:ext>
             </a:extLst>
           </p:cNvPr>
@@ -26999,7 +27435,7 @@
           <p:cNvPr id="3" name="">
             <a:extLst xmlns:a="http://schemas.openxmlformats.org/drawingml/2006/main">
               <a:ext uri="{FF2B5EF4-FFF2-40B4-BE49-F238E27FC236}">
-                <a16:creationId xmlns:a16="http://schemas.microsoft.com/office/drawing/2014/main" id="{0DE7BB4D-9F98-48A6-B895-440479C8218C}"/>
+                <a16:creationId xmlns:a16="http://schemas.microsoft.com/office/drawing/2014/main" id="{7F967C8F-C311-47FE-B51A-57517216566B}"/>
               </a:ext>
             </a:extLst>
           </p:cNvPr>
@@ -27034,7 +27470,7 @@
           <p:cNvPr id="4" name="">
             <a:extLst xmlns:a="http://schemas.openxmlformats.org/drawingml/2006/main">
               <a:ext uri="{FF2B5EF4-FFF2-40B4-BE49-F238E27FC236}">
-                <a16:creationId xmlns:a16="http://schemas.microsoft.com/office/drawing/2014/main" id="{4271C509-BA3D-4D89-BA54-04A7BD15BD52}"/>
+                <a16:creationId xmlns:a16="http://schemas.microsoft.com/office/drawing/2014/main" id="{396D639D-1DCA-4A12-B4A3-E549F2645732}"/>
               </a:ext>
             </a:extLst>
           </p:cNvPr>
@@ -27098,7 +27534,7 @@
           <p:cNvPr id="5" name="">
             <a:extLst xmlns:a="http://schemas.openxmlformats.org/drawingml/2006/main">
               <a:ext uri="{FF2B5EF4-FFF2-40B4-BE49-F238E27FC236}">
-                <a16:creationId xmlns:a16="http://schemas.microsoft.com/office/drawing/2014/main" id="{56BC241B-CBCF-497D-A7A8-E562F3B689D4}"/>
+                <a16:creationId xmlns:a16="http://schemas.microsoft.com/office/drawing/2014/main" id="{0FE105B9-E04D-42B5-94CD-B9A34727B872}"/>
               </a:ext>
             </a:extLst>
           </p:cNvPr>
@@ -27162,7 +27598,7 @@
           <p:cNvPr id="6" name="">
             <a:extLst xmlns:a="http://schemas.openxmlformats.org/drawingml/2006/main">
               <a:ext uri="{FF2B5EF4-FFF2-40B4-BE49-F238E27FC236}">
-                <a16:creationId xmlns:a16="http://schemas.microsoft.com/office/drawing/2014/main" id="{BC719EC2-D549-4392-9ECB-54F729F25BDD}"/>
+                <a16:creationId xmlns:a16="http://schemas.microsoft.com/office/drawing/2014/main" id="{960FC632-DD44-4E76-855D-8FA2D5A9C2DF}"/>
               </a:ext>
             </a:extLst>
           </p:cNvPr>
@@ -27226,7 +27662,7 @@
           <p:cNvPr id="7" name="">
             <a:extLst xmlns:a="http://schemas.openxmlformats.org/drawingml/2006/main">
               <a:ext uri="{FF2B5EF4-FFF2-40B4-BE49-F238E27FC236}">
-                <a16:creationId xmlns:a16="http://schemas.microsoft.com/office/drawing/2014/main" id="{AE664C2E-44A2-4203-832A-360BE87AF8E6}"/>
+                <a16:creationId xmlns:a16="http://schemas.microsoft.com/office/drawing/2014/main" id="{8003DC36-190F-4ED4-96D0-0AD920A9FE24}"/>
               </a:ext>
             </a:extLst>
           </p:cNvPr>
@@ -27290,7 +27726,7 @@
           <p:cNvPr id="8" name="">
             <a:extLst xmlns:a="http://schemas.openxmlformats.org/drawingml/2006/main">
               <a:ext uri="{FF2B5EF4-FFF2-40B4-BE49-F238E27FC236}">
-                <a16:creationId xmlns:a16="http://schemas.microsoft.com/office/drawing/2014/main" id="{EC7EC6DA-6AD9-4F63-8F2A-BFCED2689F0C}"/>
+                <a16:creationId xmlns:a16="http://schemas.microsoft.com/office/drawing/2014/main" id="{62832EE8-CF78-4963-9A2A-8D622867914A}"/>
               </a:ext>
             </a:extLst>
           </p:cNvPr>
@@ -27323,7 +27759,7 @@
           <p:cNvPr id="9" name="">
             <a:extLst xmlns:a="http://schemas.openxmlformats.org/drawingml/2006/main">
               <a:ext uri="{FF2B5EF4-FFF2-40B4-BE49-F238E27FC236}">
-                <a16:creationId xmlns:a16="http://schemas.microsoft.com/office/drawing/2014/main" id="{6D2BDC26-7E62-49DF-91BC-E97945F0BF55}"/>
+                <a16:creationId xmlns:a16="http://schemas.microsoft.com/office/drawing/2014/main" id="{5BBF88E5-632F-411C-8BAD-80DBB712387B}"/>
               </a:ext>
             </a:extLst>
           </p:cNvPr>
@@ -27358,7 +27794,7 @@
           <p:cNvPr id="10" name="">
             <a:extLst xmlns:a="http://schemas.openxmlformats.org/drawingml/2006/main">
               <a:ext uri="{FF2B5EF4-FFF2-40B4-BE49-F238E27FC236}">
-                <a16:creationId xmlns:a16="http://schemas.microsoft.com/office/drawing/2014/main" id="{EEAF082D-609E-4C2B-B45F-B73B2B7BC609}"/>
+                <a16:creationId xmlns:a16="http://schemas.microsoft.com/office/drawing/2014/main" id="{AC2E8A3B-1073-4EBF-9E95-B59110321B15}"/>
               </a:ext>
             </a:extLst>
           </p:cNvPr>
@@ -27422,7 +27858,7 @@
           <p:cNvPr id="11" name="">
             <a:extLst xmlns:a="http://schemas.openxmlformats.org/drawingml/2006/main">
               <a:ext uri="{FF2B5EF4-FFF2-40B4-BE49-F238E27FC236}">
-                <a16:creationId xmlns:a16="http://schemas.microsoft.com/office/drawing/2014/main" id="{BFAC5E0B-9C62-4C64-A2E3-5030412460A0}"/>
+                <a16:creationId xmlns:a16="http://schemas.microsoft.com/office/drawing/2014/main" id="{30CFEA1D-4BF7-4B0D-B082-CD1F5679BD2C}"/>
               </a:ext>
             </a:extLst>
           </p:cNvPr>
@@ -27486,7 +27922,7 @@
           <p:cNvPr id="12" name="">
             <a:extLst xmlns:a="http://schemas.openxmlformats.org/drawingml/2006/main">
               <a:ext uri="{FF2B5EF4-FFF2-40B4-BE49-F238E27FC236}">
-                <a16:creationId xmlns:a16="http://schemas.microsoft.com/office/drawing/2014/main" id="{112EEF6C-1203-450D-B3F9-855AE7759785}"/>
+                <a16:creationId xmlns:a16="http://schemas.microsoft.com/office/drawing/2014/main" id="{B9D79BF0-4915-43D4-9B5B-21CDC5891B07}"/>
               </a:ext>
             </a:extLst>
           </p:cNvPr>
@@ -27519,7 +27955,7 @@
           <p:cNvPr id="13" name="">
             <a:extLst xmlns:a="http://schemas.openxmlformats.org/drawingml/2006/main">
               <a:ext uri="{FF2B5EF4-FFF2-40B4-BE49-F238E27FC236}">
-                <a16:creationId xmlns:a16="http://schemas.microsoft.com/office/drawing/2014/main" id="{6EF4F6D2-3E37-4FF9-B8D6-2B4967E954FC}"/>
+                <a16:creationId xmlns:a16="http://schemas.microsoft.com/office/drawing/2014/main" id="{F248A12D-01C2-460E-BABD-A0DEA56941D7}"/>
               </a:ext>
             </a:extLst>
           </p:cNvPr>
@@ -27554,7 +27990,7 @@
           <p:cNvPr id="14" name="">
             <a:extLst xmlns:a="http://schemas.openxmlformats.org/drawingml/2006/main">
               <a:ext uri="{FF2B5EF4-FFF2-40B4-BE49-F238E27FC236}">
-                <a16:creationId xmlns:a16="http://schemas.microsoft.com/office/drawing/2014/main" id="{C3C6B93B-FBD6-4145-9504-090DCF741FE0}"/>
+                <a16:creationId xmlns:a16="http://schemas.microsoft.com/office/drawing/2014/main" id="{21D31E20-3497-4370-8F55-7F2F9D4A2499}"/>
               </a:ext>
             </a:extLst>
           </p:cNvPr>
@@ -27618,7 +28054,7 @@
           <p:cNvPr id="15" name="">
             <a:extLst xmlns:a="http://schemas.openxmlformats.org/drawingml/2006/main">
               <a:ext uri="{FF2B5EF4-FFF2-40B4-BE49-F238E27FC236}">
-                <a16:creationId xmlns:a16="http://schemas.microsoft.com/office/drawing/2014/main" id="{875FCF55-B847-409C-9DBA-F42572CA1E6E}"/>
+                <a16:creationId xmlns:a16="http://schemas.microsoft.com/office/drawing/2014/main" id="{E25A69CA-9049-45A4-8345-867405A4597D}"/>
               </a:ext>
             </a:extLst>
           </p:cNvPr>
@@ -27682,7 +28118,7 @@
           <p:cNvPr id="16" name="">
             <a:extLst xmlns:a="http://schemas.openxmlformats.org/drawingml/2006/main">
               <a:ext uri="{FF2B5EF4-FFF2-40B4-BE49-F238E27FC236}">
-                <a16:creationId xmlns:a16="http://schemas.microsoft.com/office/drawing/2014/main" id="{ED04A090-1A59-4B2A-BC9F-040C7911000E}"/>
+                <a16:creationId xmlns:a16="http://schemas.microsoft.com/office/drawing/2014/main" id="{210F0064-9792-4E1E-BF06-9D761A40C4FF}"/>
               </a:ext>
             </a:extLst>
           </p:cNvPr>
@@ -27715,7 +28151,7 @@
           <p:cNvPr id="17" name="">
             <a:extLst xmlns:a="http://schemas.openxmlformats.org/drawingml/2006/main">
               <a:ext uri="{FF2B5EF4-FFF2-40B4-BE49-F238E27FC236}">
-                <a16:creationId xmlns:a16="http://schemas.microsoft.com/office/drawing/2014/main" id="{9F500F03-36A2-418E-86D3-2F3379FFA6BB}"/>
+                <a16:creationId xmlns:a16="http://schemas.microsoft.com/office/drawing/2014/main" id="{7FFC6E9C-0E73-438A-9F73-0CEAD9693E05}"/>
               </a:ext>
             </a:extLst>
           </p:cNvPr>
@@ -27750,7 +28186,7 @@
           <p:cNvPr id="18" name="">
             <a:extLst xmlns:a="http://schemas.openxmlformats.org/drawingml/2006/main">
               <a:ext uri="{FF2B5EF4-FFF2-40B4-BE49-F238E27FC236}">
-                <a16:creationId xmlns:a16="http://schemas.microsoft.com/office/drawing/2014/main" id="{2803CF4A-7AE1-4B79-8891-B8076DB502DE}"/>
+                <a16:creationId xmlns:a16="http://schemas.microsoft.com/office/drawing/2014/main" id="{B322C3D9-7A0B-4003-9EC0-5425019C4975}"/>
               </a:ext>
             </a:extLst>
           </p:cNvPr>
@@ -27814,7 +28250,7 @@
           <p:cNvPr id="19" name="">
             <a:extLst xmlns:a="http://schemas.openxmlformats.org/drawingml/2006/main">
               <a:ext uri="{FF2B5EF4-FFF2-40B4-BE49-F238E27FC236}">
-                <a16:creationId xmlns:a16="http://schemas.microsoft.com/office/drawing/2014/main" id="{3A64180D-7322-46F2-8A5A-E36328BAB157}"/>
+                <a16:creationId xmlns:a16="http://schemas.microsoft.com/office/drawing/2014/main" id="{7AA27DC5-408C-4793-A96F-EA2B518AAFCD}"/>
               </a:ext>
             </a:extLst>
           </p:cNvPr>
@@ -27876,7 +28312,7 @@
     </p:spTree>
     <p:extLst>
       <p:ext uri="{BB962C8B-B14F-4D97-AF65-F5344CB8AC3E}">
-        <p14:creationId xmlns:p14="http://schemas.microsoft.com/office/powerpoint/2010/main" val="1318901633"/>
+        <p14:creationId xmlns:p14="http://schemas.microsoft.com/office/powerpoint/2010/main" val="197155924"/>
       </p:ext>
     </p:extLst>
   </p:cSld>
@@ -27900,7 +28336,7 @@
           <p:cNvPr id="1" name="">
             <a:extLst xmlns:a="http://schemas.openxmlformats.org/drawingml/2006/main">
               <a:ext uri="{FF2B5EF4-FFF2-40B4-BE49-F238E27FC236}">
-                <a16:creationId xmlns:a16="http://schemas.microsoft.com/office/drawing/2014/main" id="{13DD2BC1-6B3C-46CC-B287-81F8DF16714D}"/>
+                <a16:creationId xmlns:a16="http://schemas.microsoft.com/office/drawing/2014/main" id="{97B76B9C-4362-4B36-8BDF-5BA4E815945C}"/>
               </a:ext>
             </a:extLst>
           </p:cNvPr>
@@ -27935,7 +28371,7 @@
           <p:cNvPr id="2" name="">
             <a:extLst xmlns:a="http://schemas.openxmlformats.org/drawingml/2006/main">
               <a:ext uri="{FF2B5EF4-FFF2-40B4-BE49-F238E27FC236}">
-                <a16:creationId xmlns:a16="http://schemas.microsoft.com/office/drawing/2014/main" id="{975F7C3A-F2D3-4202-B3F9-835D1DB57105}"/>
+                <a16:creationId xmlns:a16="http://schemas.microsoft.com/office/drawing/2014/main" id="{323076D0-F4F8-490A-AE29-28DDC45CDFF5}"/>
               </a:ext>
             </a:extLst>
           </p:cNvPr>
@@ -27970,7 +28406,7 @@
           <p:cNvPr id="3" name="">
             <a:extLst xmlns:a="http://schemas.openxmlformats.org/drawingml/2006/main">
               <a:ext uri="{FF2B5EF4-FFF2-40B4-BE49-F238E27FC236}">
-                <a16:creationId xmlns:a16="http://schemas.microsoft.com/office/drawing/2014/main" id="{517B62E5-9C4B-4BD6-A428-A5D46F875C82}"/>
+                <a16:creationId xmlns:a16="http://schemas.microsoft.com/office/drawing/2014/main" id="{17068413-7058-46A7-BC5F-47D1D0756F00}"/>
               </a:ext>
             </a:extLst>
           </p:cNvPr>
@@ -28005,7 +28441,7 @@
           <p:cNvPr id="4" name="">
             <a:extLst xmlns:a="http://schemas.openxmlformats.org/drawingml/2006/main">
               <a:ext uri="{FF2B5EF4-FFF2-40B4-BE49-F238E27FC236}">
-                <a16:creationId xmlns:a16="http://schemas.microsoft.com/office/drawing/2014/main" id="{C259355B-F5F8-4DAC-B5B7-11B0BA64F847}"/>
+                <a16:creationId xmlns:a16="http://schemas.microsoft.com/office/drawing/2014/main" id="{9FBE9D11-73DE-4B6E-8A40-EDDFB4835A66}"/>
               </a:ext>
             </a:extLst>
           </p:cNvPr>
@@ -28069,7 +28505,7 @@
           <p:cNvPr id="5" name="">
             <a:extLst xmlns:a="http://schemas.openxmlformats.org/drawingml/2006/main">
               <a:ext uri="{FF2B5EF4-FFF2-40B4-BE49-F238E27FC236}">
-                <a16:creationId xmlns:a16="http://schemas.microsoft.com/office/drawing/2014/main" id="{FDAB8181-BC8B-4E86-99DA-657C0FA761C1}"/>
+                <a16:creationId xmlns:a16="http://schemas.microsoft.com/office/drawing/2014/main" id="{594D522A-CACF-486D-A155-2170C11B27F1}"/>
               </a:ext>
             </a:extLst>
           </p:cNvPr>
@@ -28133,7 +28569,7 @@
           <p:cNvPr id="6" name="">
             <a:extLst xmlns:a="http://schemas.openxmlformats.org/drawingml/2006/main">
               <a:ext uri="{FF2B5EF4-FFF2-40B4-BE49-F238E27FC236}">
-                <a16:creationId xmlns:a16="http://schemas.microsoft.com/office/drawing/2014/main" id="{8C9EFE63-3E0D-4CCA-838F-C530956BAA92}"/>
+                <a16:creationId xmlns:a16="http://schemas.microsoft.com/office/drawing/2014/main" id="{4540CF39-F014-46FB-BF6F-2CF320D8B0A7}"/>
               </a:ext>
             </a:extLst>
           </p:cNvPr>
@@ -28197,7 +28633,7 @@
           <p:cNvPr id="7" name="">
             <a:extLst xmlns:a="http://schemas.openxmlformats.org/drawingml/2006/main">
               <a:ext uri="{FF2B5EF4-FFF2-40B4-BE49-F238E27FC236}">
-                <a16:creationId xmlns:a16="http://schemas.microsoft.com/office/drawing/2014/main" id="{DDD2D453-A9C9-4D28-A534-B55A48A4E91D}"/>
+                <a16:creationId xmlns:a16="http://schemas.microsoft.com/office/drawing/2014/main" id="{371E39A5-D1B2-4B33-8F91-78B0FF71FF99}"/>
               </a:ext>
             </a:extLst>
           </p:cNvPr>
@@ -28261,7 +28697,7 @@
           <p:cNvPr id="8" name="">
             <a:extLst xmlns:a="http://schemas.openxmlformats.org/drawingml/2006/main">
               <a:ext uri="{FF2B5EF4-FFF2-40B4-BE49-F238E27FC236}">
-                <a16:creationId xmlns:a16="http://schemas.microsoft.com/office/drawing/2014/main" id="{43C9DC11-8729-4234-A28E-1ADA4E900D41}"/>
+                <a16:creationId xmlns:a16="http://schemas.microsoft.com/office/drawing/2014/main" id="{6419BA5B-CFAB-4B3A-BB60-8078109D8E2D}"/>
               </a:ext>
             </a:extLst>
           </p:cNvPr>
@@ -28294,7 +28730,7 @@
           <p:cNvPr id="9" name="">
             <a:extLst xmlns:a="http://schemas.openxmlformats.org/drawingml/2006/main">
               <a:ext uri="{FF2B5EF4-FFF2-40B4-BE49-F238E27FC236}">
-                <a16:creationId xmlns:a16="http://schemas.microsoft.com/office/drawing/2014/main" id="{BA8B90CD-D95C-40B6-9992-2219839C08C1}"/>
+                <a16:creationId xmlns:a16="http://schemas.microsoft.com/office/drawing/2014/main" id="{B72F4E1F-5CB2-4A2E-A924-4BB08F8E35E9}"/>
               </a:ext>
             </a:extLst>
           </p:cNvPr>
@@ -28329,7 +28765,7 @@
           <p:cNvPr id="10" name="">
             <a:extLst xmlns:a="http://schemas.openxmlformats.org/drawingml/2006/main">
               <a:ext uri="{FF2B5EF4-FFF2-40B4-BE49-F238E27FC236}">
-                <a16:creationId xmlns:a16="http://schemas.microsoft.com/office/drawing/2014/main" id="{23C88AFA-D540-4AC9-8246-3074FE586828}"/>
+                <a16:creationId xmlns:a16="http://schemas.microsoft.com/office/drawing/2014/main" id="{41C96AF9-EAB4-412B-868C-803DE4196D62}"/>
               </a:ext>
             </a:extLst>
           </p:cNvPr>
@@ -28393,7 +28829,7 @@
           <p:cNvPr id="11" name="">
             <a:extLst xmlns:a="http://schemas.openxmlformats.org/drawingml/2006/main">
               <a:ext uri="{FF2B5EF4-FFF2-40B4-BE49-F238E27FC236}">
-                <a16:creationId xmlns:a16="http://schemas.microsoft.com/office/drawing/2014/main" id="{1D6740CB-E3DF-4B35-B740-945B18D2E3B5}"/>
+                <a16:creationId xmlns:a16="http://schemas.microsoft.com/office/drawing/2014/main" id="{FC7AF251-74A3-437C-80C1-85189FC9EA2C}"/>
               </a:ext>
             </a:extLst>
           </p:cNvPr>
@@ -28457,7 +28893,7 @@
           <p:cNvPr id="12" name="">
             <a:extLst xmlns:a="http://schemas.openxmlformats.org/drawingml/2006/main">
               <a:ext uri="{FF2B5EF4-FFF2-40B4-BE49-F238E27FC236}">
-                <a16:creationId xmlns:a16="http://schemas.microsoft.com/office/drawing/2014/main" id="{A323436C-4E74-424B-A581-C0AE8E6F152D}"/>
+                <a16:creationId xmlns:a16="http://schemas.microsoft.com/office/drawing/2014/main" id="{C2CD0F87-A0E7-467A-A9B7-1DD84A8FC874}"/>
               </a:ext>
             </a:extLst>
           </p:cNvPr>
@@ -28490,7 +28926,7 @@
           <p:cNvPr id="13" name="">
             <a:extLst xmlns:a="http://schemas.openxmlformats.org/drawingml/2006/main">
               <a:ext uri="{FF2B5EF4-FFF2-40B4-BE49-F238E27FC236}">
-                <a16:creationId xmlns:a16="http://schemas.microsoft.com/office/drawing/2014/main" id="{A49BFB75-3070-433C-BA51-FEE25BF1F383}"/>
+                <a16:creationId xmlns:a16="http://schemas.microsoft.com/office/drawing/2014/main" id="{A2109BDD-8E87-4840-B8C4-29A540423029}"/>
               </a:ext>
             </a:extLst>
           </p:cNvPr>
@@ -28525,7 +28961,7 @@
           <p:cNvPr id="14" name="">
             <a:extLst xmlns:a="http://schemas.openxmlformats.org/drawingml/2006/main">
               <a:ext uri="{FF2B5EF4-FFF2-40B4-BE49-F238E27FC236}">
-                <a16:creationId xmlns:a16="http://schemas.microsoft.com/office/drawing/2014/main" id="{47E193EB-9850-48D6-A4F7-2912FB2CC89A}"/>
+                <a16:creationId xmlns:a16="http://schemas.microsoft.com/office/drawing/2014/main" id="{CE60F70C-5122-4AEA-B364-1280E84C4844}"/>
               </a:ext>
             </a:extLst>
           </p:cNvPr>
@@ -28589,7 +29025,7 @@
           <p:cNvPr id="15" name="">
             <a:extLst xmlns:a="http://schemas.openxmlformats.org/drawingml/2006/main">
               <a:ext uri="{FF2B5EF4-FFF2-40B4-BE49-F238E27FC236}">
-                <a16:creationId xmlns:a16="http://schemas.microsoft.com/office/drawing/2014/main" id="{92567B21-7DB5-4CF5-9F6C-EB6F6FE56708}"/>
+                <a16:creationId xmlns:a16="http://schemas.microsoft.com/office/drawing/2014/main" id="{3FC5BF91-ACC0-491F-99BB-BE99726C4E9A}"/>
               </a:ext>
             </a:extLst>
           </p:cNvPr>
@@ -28653,7 +29089,7 @@
           <p:cNvPr id="16" name="">
             <a:extLst xmlns:a="http://schemas.openxmlformats.org/drawingml/2006/main">
               <a:ext uri="{FF2B5EF4-FFF2-40B4-BE49-F238E27FC236}">
-                <a16:creationId xmlns:a16="http://schemas.microsoft.com/office/drawing/2014/main" id="{1E43D89F-8DA5-4233-A809-699E48C5AF97}"/>
+                <a16:creationId xmlns:a16="http://schemas.microsoft.com/office/drawing/2014/main" id="{DFD01A5F-BB8C-46E7-A81F-6F7558ECC5C0}"/>
               </a:ext>
             </a:extLst>
           </p:cNvPr>
@@ -28686,7 +29122,7 @@
           <p:cNvPr id="17" name="">
             <a:extLst xmlns:a="http://schemas.openxmlformats.org/drawingml/2006/main">
               <a:ext uri="{FF2B5EF4-FFF2-40B4-BE49-F238E27FC236}">
-                <a16:creationId xmlns:a16="http://schemas.microsoft.com/office/drawing/2014/main" id="{E55DA671-2AC6-4704-9574-CB438A54EAE2}"/>
+                <a16:creationId xmlns:a16="http://schemas.microsoft.com/office/drawing/2014/main" id="{5D7B2F4E-1DAE-423F-B9BB-C65135219897}"/>
               </a:ext>
             </a:extLst>
           </p:cNvPr>
@@ -28721,7 +29157,7 @@
           <p:cNvPr id="18" name="">
             <a:extLst xmlns:a="http://schemas.openxmlformats.org/drawingml/2006/main">
               <a:ext uri="{FF2B5EF4-FFF2-40B4-BE49-F238E27FC236}">
-                <a16:creationId xmlns:a16="http://schemas.microsoft.com/office/drawing/2014/main" id="{651D2BA5-2E8E-4F00-B204-FF2FFBE46699}"/>
+                <a16:creationId xmlns:a16="http://schemas.microsoft.com/office/drawing/2014/main" id="{0932D186-76F5-42D1-8787-36FA6AA1F8A7}"/>
               </a:ext>
             </a:extLst>
           </p:cNvPr>
@@ -28785,7 +29221,7 @@
           <p:cNvPr id="19" name="">
             <a:extLst xmlns:a="http://schemas.openxmlformats.org/drawingml/2006/main">
               <a:ext uri="{FF2B5EF4-FFF2-40B4-BE49-F238E27FC236}">
-                <a16:creationId xmlns:a16="http://schemas.microsoft.com/office/drawing/2014/main" id="{06A47279-1451-4733-9331-4244DAB9DDC0}"/>
+                <a16:creationId xmlns:a16="http://schemas.microsoft.com/office/drawing/2014/main" id="{10284B0A-211C-40A5-8B72-CAE07D12AA07}"/>
               </a:ext>
             </a:extLst>
           </p:cNvPr>
@@ -28849,7 +29285,7 @@
           <p:cNvPr id="20" name="">
             <a:extLst xmlns:a="http://schemas.openxmlformats.org/drawingml/2006/main">
               <a:ext uri="{FF2B5EF4-FFF2-40B4-BE49-F238E27FC236}">
-                <a16:creationId xmlns:a16="http://schemas.microsoft.com/office/drawing/2014/main" id="{49E67B9B-E46F-48BB-B888-B765F5855F04}"/>
+                <a16:creationId xmlns:a16="http://schemas.microsoft.com/office/drawing/2014/main" id="{F924B09D-3B31-4433-A516-D01ECED84EA9}"/>
               </a:ext>
             </a:extLst>
           </p:cNvPr>
@@ -28882,7 +29318,7 @@
           <p:cNvPr id="21" name="">
             <a:extLst xmlns:a="http://schemas.openxmlformats.org/drawingml/2006/main">
               <a:ext uri="{FF2B5EF4-FFF2-40B4-BE49-F238E27FC236}">
-                <a16:creationId xmlns:a16="http://schemas.microsoft.com/office/drawing/2014/main" id="{3B9DED0E-94A3-4901-B533-4A65F81D33B5}"/>
+                <a16:creationId xmlns:a16="http://schemas.microsoft.com/office/drawing/2014/main" id="{562061A5-302D-444D-BDA5-C30104D26547}"/>
               </a:ext>
             </a:extLst>
           </p:cNvPr>
@@ -28917,7 +29353,7 @@
           <p:cNvPr id="22" name="">
             <a:extLst xmlns:a="http://schemas.openxmlformats.org/drawingml/2006/main">
               <a:ext uri="{FF2B5EF4-FFF2-40B4-BE49-F238E27FC236}">
-                <a16:creationId xmlns:a16="http://schemas.microsoft.com/office/drawing/2014/main" id="{1E9E5E22-38BB-4BB9-8350-5F76E30CC7EE}"/>
+                <a16:creationId xmlns:a16="http://schemas.microsoft.com/office/drawing/2014/main" id="{670A2C86-DAD2-4AB8-87D2-D7C7717ABFA9}"/>
               </a:ext>
             </a:extLst>
           </p:cNvPr>
@@ -28981,7 +29417,7 @@
           <p:cNvPr id="23" name="">
             <a:extLst xmlns:a="http://schemas.openxmlformats.org/drawingml/2006/main">
               <a:ext uri="{FF2B5EF4-FFF2-40B4-BE49-F238E27FC236}">
-                <a16:creationId xmlns:a16="http://schemas.microsoft.com/office/drawing/2014/main" id="{3ABDC923-3896-4634-8503-A6C079514A51}"/>
+                <a16:creationId xmlns:a16="http://schemas.microsoft.com/office/drawing/2014/main" id="{04FC8E04-AC19-43D0-88A0-DA27D94EBB47}"/>
               </a:ext>
             </a:extLst>
           </p:cNvPr>
@@ -29043,7 +29479,1381 @@
     </p:spTree>
     <p:extLst>
       <p:ext uri="{BB962C8B-B14F-4D97-AF65-F5344CB8AC3E}">
-        <p14:creationId xmlns:p14="http://schemas.microsoft.com/office/powerpoint/2010/main" val="465059109"/>
+        <p14:creationId xmlns:p14="http://schemas.microsoft.com/office/powerpoint/2010/main" val="293273700"/>
+      </p:ext>
+    </p:extLst>
+  </p:cSld>
+</p:sld>
+</file>
+
+<file path=ppt/slides/slide32.xml><?xml version="1.0" encoding="utf-8"?>
+<p:sld xmlns:p="http://schemas.openxmlformats.org/presentationml/2006/main">
+  <p:cSld>
+    <p:spTree>
+      <p:nvGrpSpPr>
+        <p:cNvPr id="1" name=""/>
+        <p:cNvGrpSpPr/>
+        <p:nvPr/>
+      </p:nvGrpSpPr>
+      <p:grpSpPr>
+        <a:xfrm xmlns:a="http://schemas.openxmlformats.org/drawingml/2006/main"/>
+      </p:grpSpPr>
+      <p:sp>
+        <p:nvSpPr>
+          <p:cNvPr id="1" name="">
+            <a:extLst xmlns:a="http://schemas.openxmlformats.org/drawingml/2006/main">
+              <a:ext uri="{FF2B5EF4-FFF2-40B4-BE49-F238E27FC236}">
+                <a16:creationId xmlns:a16="http://schemas.microsoft.com/office/drawing/2014/main" id="{CC81D2C8-8995-48D8-A015-31835D90AD2A}"/>
+              </a:ext>
+            </a:extLst>
+          </p:cNvPr>
+          <p:cNvSpPr>
+            <a:spLocks xmlns:a="http://schemas.openxmlformats.org/drawingml/2006/main" noGrp="1"/>
+          </p:cNvSpPr>
+          <p:nvPr/>
+        </p:nvSpPr>
+        <p:spPr>
+          <a:xfrm xmlns:a="http://schemas.openxmlformats.org/drawingml/2006/main">
+            <a:off x="0" y="0"/>
+            <a:ext cx="12192000" cy="6858000"/>
+          </a:xfrm>
+          <a:prstGeom xmlns:a="http://schemas.openxmlformats.org/drawingml/2006/main" prst="rect">
+            <a:avLst/>
+          </a:prstGeom>
+          <a:solidFill xmlns:a="http://schemas.openxmlformats.org/drawingml/2006/main">
+            <a:srgbClr val="F7F7F4"/>
+          </a:solidFill>
+          <a:ln xmlns:a="http://schemas.openxmlformats.org/drawingml/2006/main" w="0">
+            <a:solidFill>
+              <a:srgbClr val="000000">
+                <a:alpha val="0"/>
+              </a:srgbClr>
+            </a:solidFill>
+            <a:prstDash val="solid"/>
+          </a:ln>
+        </p:spPr>
+      </p:sp>
+      <p:sp>
+        <p:nvSpPr>
+          <p:cNvPr id="2" name="">
+            <a:extLst xmlns:a="http://schemas.openxmlformats.org/drawingml/2006/main">
+              <a:ext uri="{FF2B5EF4-FFF2-40B4-BE49-F238E27FC236}">
+                <a16:creationId xmlns:a16="http://schemas.microsoft.com/office/drawing/2014/main" id="{3223CBF7-12B5-4A56-BCDA-DAF61726BF12}"/>
+              </a:ext>
+            </a:extLst>
+          </p:cNvPr>
+          <p:cNvSpPr>
+            <a:spLocks xmlns:a="http://schemas.openxmlformats.org/drawingml/2006/main" noGrp="1"/>
+          </p:cNvSpPr>
+          <p:nvPr/>
+        </p:nvSpPr>
+        <p:spPr>
+          <a:xfrm xmlns:a="http://schemas.openxmlformats.org/drawingml/2006/main">
+            <a:off x="0" y="0"/>
+            <a:ext cx="12192000" cy="9525"/>
+          </a:xfrm>
+          <a:prstGeom xmlns:a="http://schemas.openxmlformats.org/drawingml/2006/main" prst="rect">
+            <a:avLst/>
+          </a:prstGeom>
+          <a:solidFill xmlns:a="http://schemas.openxmlformats.org/drawingml/2006/main">
+            <a:srgbClr val="D8D7D0"/>
+          </a:solidFill>
+          <a:ln xmlns:a="http://schemas.openxmlformats.org/drawingml/2006/main" w="0">
+            <a:solidFill>
+              <a:srgbClr val="000000">
+                <a:alpha val="0"/>
+              </a:srgbClr>
+            </a:solidFill>
+            <a:prstDash val="solid"/>
+          </a:ln>
+        </p:spPr>
+      </p:sp>
+      <p:sp>
+        <p:nvSpPr>
+          <p:cNvPr id="3" name="">
+            <a:extLst xmlns:a="http://schemas.openxmlformats.org/drawingml/2006/main">
+              <a:ext uri="{FF2B5EF4-FFF2-40B4-BE49-F238E27FC236}">
+                <a16:creationId xmlns:a16="http://schemas.microsoft.com/office/drawing/2014/main" id="{B069666E-B151-4C0A-916C-882D8C403CB7}"/>
+              </a:ext>
+            </a:extLst>
+          </p:cNvPr>
+          <p:cNvSpPr>
+            <a:spLocks xmlns:a="http://schemas.openxmlformats.org/drawingml/2006/main" noGrp="1"/>
+          </p:cNvSpPr>
+          <p:nvPr/>
+        </p:nvSpPr>
+        <p:spPr>
+          <a:xfrm xmlns:a="http://schemas.openxmlformats.org/drawingml/2006/main">
+            <a:off x="0" y="6848475"/>
+            <a:ext cx="12192000" cy="9525"/>
+          </a:xfrm>
+          <a:prstGeom xmlns:a="http://schemas.openxmlformats.org/drawingml/2006/main" prst="rect">
+            <a:avLst/>
+          </a:prstGeom>
+          <a:solidFill xmlns:a="http://schemas.openxmlformats.org/drawingml/2006/main">
+            <a:srgbClr val="D8D7D0"/>
+          </a:solidFill>
+          <a:ln xmlns:a="http://schemas.openxmlformats.org/drawingml/2006/main" w="0">
+            <a:solidFill>
+              <a:srgbClr val="000000">
+                <a:alpha val="0"/>
+              </a:srgbClr>
+            </a:solidFill>
+            <a:prstDash val="solid"/>
+          </a:ln>
+        </p:spPr>
+      </p:sp>
+      <p:sp>
+        <p:nvSpPr>
+          <p:cNvPr id="4" name="">
+            <a:extLst xmlns:a="http://schemas.openxmlformats.org/drawingml/2006/main">
+              <a:ext uri="{FF2B5EF4-FFF2-40B4-BE49-F238E27FC236}">
+                <a16:creationId xmlns:a16="http://schemas.microsoft.com/office/drawing/2014/main" id="{9C86BE10-6834-4490-8AF2-EE4023870BCF}"/>
+              </a:ext>
+            </a:extLst>
+          </p:cNvPr>
+          <p:cNvSpPr>
+            <a:spLocks xmlns:a="http://schemas.openxmlformats.org/drawingml/2006/main" noGrp="1"/>
+          </p:cNvSpPr>
+          <p:nvPr/>
+        </p:nvSpPr>
+        <p:spPr>
+          <a:xfrm xmlns:a="http://schemas.openxmlformats.org/drawingml/2006/main">
+            <a:off x="457200" y="323850"/>
+            <a:ext cx="3429000" cy="228600"/>
+          </a:xfrm>
+          <a:prstGeom xmlns:a="http://schemas.openxmlformats.org/drawingml/2006/main" prst="rect">
+            <a:avLst/>
+          </a:prstGeom>
+          <a:solidFill xmlns:a="http://schemas.openxmlformats.org/drawingml/2006/main">
+            <a:srgbClr val="000000">
+              <a:alpha val="0"/>
+            </a:srgbClr>
+          </a:solidFill>
+          <a:ln xmlns:a="http://schemas.openxmlformats.org/drawingml/2006/main" w="0">
+            <a:solidFill>
+              <a:srgbClr val="000000">
+                <a:alpha val="0"/>
+              </a:srgbClr>
+            </a:solidFill>
+            <a:prstDash val="solid"/>
+          </a:ln>
+        </p:spPr>
+        <p:txBody>
+          <a:bodyPr xmlns:a="http://schemas.openxmlformats.org/drawingml/2006/main" lIns="0" tIns="0" rIns="0" bIns="0" anchor="t"/>
+          <a:lstStyle xmlns:a="http://schemas.openxmlformats.org/drawingml/2006/main"/>
+          <a:p xmlns:a="http://schemas.openxmlformats.org/drawingml/2006/main">
+            <a:pPr algn="l">
+              <a:defRPr sz="1050" b="1">
+                <a:solidFill>
+                  <a:srgbClr val="10A37F"/>
+                </a:solidFill>
+                <a:latin typeface="Aptos"/>
+                <a:ea typeface="Aptos"/>
+                <a:cs typeface="Aptos"/>
+              </a:defRPr>
+            </a:pPr>
+            <a:r>
+              <a:rPr sz="1050" b="1">
+                <a:solidFill>
+                  <a:srgbClr val="10A37F"/>
+                </a:solidFill>
+                <a:latin typeface="Aptos"/>
+                <a:ea typeface="Aptos"/>
+                <a:cs typeface="Aptos"/>
+              </a:rPr>
+              <a:t>APPENDIX</a:t>
+            </a:r>
+          </a:p>
+        </p:txBody>
+      </p:sp>
+      <p:sp>
+        <p:nvSpPr>
+          <p:cNvPr id="5" name="">
+            <a:extLst xmlns:a="http://schemas.openxmlformats.org/drawingml/2006/main">
+              <a:ext uri="{FF2B5EF4-FFF2-40B4-BE49-F238E27FC236}">
+                <a16:creationId xmlns:a16="http://schemas.microsoft.com/office/drawing/2014/main" id="{01BAC06F-892A-4694-A888-19F776C8DDC1}"/>
+              </a:ext>
+            </a:extLst>
+          </p:cNvPr>
+          <p:cNvSpPr>
+            <a:spLocks xmlns:a="http://schemas.openxmlformats.org/drawingml/2006/main" noGrp="1"/>
+          </p:cNvSpPr>
+          <p:nvPr/>
+        </p:nvSpPr>
+        <p:spPr>
+          <a:xfrm xmlns:a="http://schemas.openxmlformats.org/drawingml/2006/main">
+            <a:off x="457200" y="666750"/>
+            <a:ext cx="7524750" cy="914400"/>
+          </a:xfrm>
+          <a:prstGeom xmlns:a="http://schemas.openxmlformats.org/drawingml/2006/main" prst="rect">
+            <a:avLst/>
+          </a:prstGeom>
+          <a:solidFill xmlns:a="http://schemas.openxmlformats.org/drawingml/2006/main">
+            <a:srgbClr val="000000">
+              <a:alpha val="0"/>
+            </a:srgbClr>
+          </a:solidFill>
+          <a:ln xmlns:a="http://schemas.openxmlformats.org/drawingml/2006/main" w="0">
+            <a:solidFill>
+              <a:srgbClr val="000000">
+                <a:alpha val="0"/>
+              </a:srgbClr>
+            </a:solidFill>
+            <a:prstDash val="solid"/>
+          </a:ln>
+        </p:spPr>
+        <p:txBody>
+          <a:bodyPr xmlns:a="http://schemas.openxmlformats.org/drawingml/2006/main" lIns="0" tIns="0" rIns="0" bIns="0" anchor="t"/>
+          <a:lstStyle xmlns:a="http://schemas.openxmlformats.org/drawingml/2006/main"/>
+          <a:p xmlns:a="http://schemas.openxmlformats.org/drawingml/2006/main">
+            <a:pPr algn="l">
+              <a:defRPr sz="2850" b="1">
+                <a:solidFill>
+                  <a:srgbClr val="202123"/>
+                </a:solidFill>
+                <a:latin typeface="Aptos Display"/>
+                <a:ea typeface="Aptos Display"/>
+                <a:cs typeface="Aptos Display"/>
+              </a:defRPr>
+            </a:pPr>
+            <a:r>
+              <a:rPr sz="2850" b="1">
+                <a:solidFill>
+                  <a:srgbClr val="202123"/>
+                </a:solidFill>
+                <a:latin typeface="Aptos Display"/>
+                <a:ea typeface="Aptos Display"/>
+                <a:cs typeface="Aptos Display"/>
+              </a:rPr>
+              <a:t>Partition catalog: как смотреть и считать</a:t>
+            </a:r>
+          </a:p>
+        </p:txBody>
+      </p:sp>
+      <p:sp>
+        <p:nvSpPr>
+          <p:cNvPr id="6" name="">
+            <a:extLst xmlns:a="http://schemas.openxmlformats.org/drawingml/2006/main">
+              <a:ext uri="{FF2B5EF4-FFF2-40B4-BE49-F238E27FC236}">
+                <a16:creationId xmlns:a16="http://schemas.microsoft.com/office/drawing/2014/main" id="{4E88248E-08ED-4479-8BC6-D2AE24A45492}"/>
+              </a:ext>
+            </a:extLst>
+          </p:cNvPr>
+          <p:cNvSpPr>
+            <a:spLocks xmlns:a="http://schemas.openxmlformats.org/drawingml/2006/main" noGrp="1"/>
+          </p:cNvSpPr>
+          <p:nvPr/>
+        </p:nvSpPr>
+        <p:spPr>
+          <a:xfrm xmlns:a="http://schemas.openxmlformats.org/drawingml/2006/main">
+            <a:off x="476250" y="1619250"/>
+            <a:ext cx="7048500" cy="457200"/>
+          </a:xfrm>
+          <a:prstGeom xmlns:a="http://schemas.openxmlformats.org/drawingml/2006/main" prst="rect">
+            <a:avLst/>
+          </a:prstGeom>
+          <a:solidFill xmlns:a="http://schemas.openxmlformats.org/drawingml/2006/main">
+            <a:srgbClr val="000000">
+              <a:alpha val="0"/>
+            </a:srgbClr>
+          </a:solidFill>
+          <a:ln xmlns:a="http://schemas.openxmlformats.org/drawingml/2006/main" w="0">
+            <a:solidFill>
+              <a:srgbClr val="000000">
+                <a:alpha val="0"/>
+              </a:srgbClr>
+            </a:solidFill>
+            <a:prstDash val="solid"/>
+          </a:ln>
+        </p:spPr>
+        <p:txBody>
+          <a:bodyPr xmlns:a="http://schemas.openxmlformats.org/drawingml/2006/main" lIns="0" tIns="0" rIns="0" bIns="0" anchor="t"/>
+          <a:lstStyle xmlns:a="http://schemas.openxmlformats.org/drawingml/2006/main"/>
+          <a:p xmlns:a="http://schemas.openxmlformats.org/drawingml/2006/main">
+            <a:pPr algn="l">
+              <a:defRPr sz="1425" b="0">
+                <a:solidFill>
+                  <a:srgbClr val="6E6E68"/>
+                </a:solidFill>
+                <a:latin typeface="Aptos"/>
+                <a:ea typeface="Aptos"/>
+                <a:cs typeface="Aptos"/>
+              </a:defRPr>
+            </a:pPr>
+            <a:r>
+              <a:rPr sz="1425" b="0">
+                <a:solidFill>
+                  <a:srgbClr val="6E6E68"/>
+                </a:solidFill>
+                <a:latin typeface="Aptos"/>
+                <a:ea typeface="Aptos"/>
+                <a:cs typeface="Aptos"/>
+              </a:rPr>
+              <a:t>В Greenplum 7 основной быстрый путь - pg_partition_tree; compatibility view - gp_toolkit.gp_partitions.</a:t>
+            </a:r>
+          </a:p>
+        </p:txBody>
+      </p:sp>
+      <p:sp>
+        <p:nvSpPr>
+          <p:cNvPr id="7" name="">
+            <a:extLst xmlns:a="http://schemas.openxmlformats.org/drawingml/2006/main">
+              <a:ext uri="{FF2B5EF4-FFF2-40B4-BE49-F238E27FC236}">
+                <a16:creationId xmlns:a16="http://schemas.microsoft.com/office/drawing/2014/main" id="{276A8136-291E-4313-B7B3-872152D198F7}"/>
+              </a:ext>
+            </a:extLst>
+          </p:cNvPr>
+          <p:cNvSpPr>
+            <a:spLocks xmlns:a="http://schemas.openxmlformats.org/drawingml/2006/main" noGrp="1"/>
+          </p:cNvSpPr>
+          <p:nvPr/>
+        </p:nvSpPr>
+        <p:spPr>
+          <a:xfrm xmlns:a="http://schemas.openxmlformats.org/drawingml/2006/main">
+            <a:off x="10553700" y="6400800"/>
+            <a:ext cx="1123950" cy="190500"/>
+          </a:xfrm>
+          <a:prstGeom xmlns:a="http://schemas.openxmlformats.org/drawingml/2006/main" prst="rect">
+            <a:avLst/>
+          </a:prstGeom>
+          <a:solidFill xmlns:a="http://schemas.openxmlformats.org/drawingml/2006/main">
+            <a:srgbClr val="000000">
+              <a:alpha val="0"/>
+            </a:srgbClr>
+          </a:solidFill>
+          <a:ln xmlns:a="http://schemas.openxmlformats.org/drawingml/2006/main" w="0">
+            <a:solidFill>
+              <a:srgbClr val="000000">
+                <a:alpha val="0"/>
+              </a:srgbClr>
+            </a:solidFill>
+            <a:prstDash val="solid"/>
+          </a:ln>
+        </p:spPr>
+        <p:txBody>
+          <a:bodyPr xmlns:a="http://schemas.openxmlformats.org/drawingml/2006/main" lIns="0" tIns="0" rIns="0" bIns="0" anchor="t"/>
+          <a:lstStyle xmlns:a="http://schemas.openxmlformats.org/drawingml/2006/main"/>
+          <a:p xmlns:a="http://schemas.openxmlformats.org/drawingml/2006/main">
+            <a:pPr algn="r">
+              <a:defRPr sz="900" b="0">
+                <a:solidFill>
+                  <a:srgbClr val="6E6E68"/>
+                </a:solidFill>
+                <a:latin typeface="Aptos"/>
+                <a:ea typeface="Aptos"/>
+                <a:cs typeface="Aptos"/>
+              </a:defRPr>
+            </a:pPr>
+            <a:r>
+              <a:rPr sz="900" b="0">
+                <a:solidFill>
+                  <a:srgbClr val="6E6E68"/>
+                </a:solidFill>
+                <a:latin typeface="Aptos"/>
+                <a:ea typeface="Aptos"/>
+                <a:cs typeface="Aptos"/>
+              </a:rPr>
+              <a:t>Урок 01</a:t>
+            </a:r>
+          </a:p>
+        </p:txBody>
+      </p:sp>
+      <p:sp>
+        <p:nvSpPr>
+          <p:cNvPr id="8" name="">
+            <a:extLst xmlns:a="http://schemas.openxmlformats.org/drawingml/2006/main">
+              <a:ext uri="{FF2B5EF4-FFF2-40B4-BE49-F238E27FC236}">
+                <a16:creationId xmlns:a16="http://schemas.microsoft.com/office/drawing/2014/main" id="{AC485364-3AD0-42F7-BDD6-63A9490F7E8B}"/>
+              </a:ext>
+            </a:extLst>
+          </p:cNvPr>
+          <p:cNvSpPr>
+            <a:spLocks xmlns:a="http://schemas.openxmlformats.org/drawingml/2006/main" noGrp="1"/>
+          </p:cNvSpPr>
+          <p:nvPr/>
+        </p:nvSpPr>
+        <p:spPr>
+          <a:xfrm xmlns:a="http://schemas.openxmlformats.org/drawingml/2006/main">
+            <a:off x="571500" y="2333625"/>
+            <a:ext cx="4953000" cy="1257300"/>
+          </a:xfrm>
+          <a:prstGeom xmlns:a="http://schemas.openxmlformats.org/drawingml/2006/main" prst="rect">
+            <a:avLst/>
+          </a:prstGeom>
+          <a:solidFill xmlns:a="http://schemas.openxmlformats.org/drawingml/2006/main">
+            <a:srgbClr val="FFFFFF"/>
+          </a:solidFill>
+          <a:ln xmlns:a="http://schemas.openxmlformats.org/drawingml/2006/main" w="9525">
+            <a:solidFill>
+              <a:srgbClr val="D8D7D0"/>
+            </a:solidFill>
+            <a:prstDash val="solid"/>
+          </a:ln>
+        </p:spPr>
+      </p:sp>
+      <p:sp>
+        <p:nvSpPr>
+          <p:cNvPr id="9" name="">
+            <a:extLst xmlns:a="http://schemas.openxmlformats.org/drawingml/2006/main">
+              <a:ext uri="{FF2B5EF4-FFF2-40B4-BE49-F238E27FC236}">
+                <a16:creationId xmlns:a16="http://schemas.microsoft.com/office/drawing/2014/main" id="{0EBB67A4-CF72-4E16-9333-F9118B93391A}"/>
+              </a:ext>
+            </a:extLst>
+          </p:cNvPr>
+          <p:cNvSpPr>
+            <a:spLocks xmlns:a="http://schemas.openxmlformats.org/drawingml/2006/main" noGrp="1"/>
+          </p:cNvSpPr>
+          <p:nvPr/>
+        </p:nvSpPr>
+        <p:spPr>
+          <a:xfrm xmlns:a="http://schemas.openxmlformats.org/drawingml/2006/main">
+            <a:off x="742950" y="2505075"/>
+            <a:ext cx="400050" cy="38100"/>
+          </a:xfrm>
+          <a:prstGeom xmlns:a="http://schemas.openxmlformats.org/drawingml/2006/main" prst="rect">
+            <a:avLst/>
+          </a:prstGeom>
+          <a:solidFill xmlns:a="http://schemas.openxmlformats.org/drawingml/2006/main">
+            <a:srgbClr val="10A37F"/>
+          </a:solidFill>
+          <a:ln xmlns:a="http://schemas.openxmlformats.org/drawingml/2006/main" w="0">
+            <a:solidFill>
+              <a:srgbClr val="000000">
+                <a:alpha val="0"/>
+              </a:srgbClr>
+            </a:solidFill>
+            <a:prstDash val="solid"/>
+          </a:ln>
+        </p:spPr>
+      </p:sp>
+      <p:sp>
+        <p:nvSpPr>
+          <p:cNvPr id="10" name="">
+            <a:extLst xmlns:a="http://schemas.openxmlformats.org/drawingml/2006/main">
+              <a:ext uri="{FF2B5EF4-FFF2-40B4-BE49-F238E27FC236}">
+                <a16:creationId xmlns:a16="http://schemas.microsoft.com/office/drawing/2014/main" id="{3C974B64-F253-484C-86FE-D1B3E846A624}"/>
+              </a:ext>
+            </a:extLst>
+          </p:cNvPr>
+          <p:cNvSpPr>
+            <a:spLocks xmlns:a="http://schemas.openxmlformats.org/drawingml/2006/main" noGrp="1"/>
+          </p:cNvSpPr>
+          <p:nvPr/>
+        </p:nvSpPr>
+        <p:spPr>
+          <a:xfrm xmlns:a="http://schemas.openxmlformats.org/drawingml/2006/main">
+            <a:off x="781050" y="2676525"/>
+            <a:ext cx="4572000" cy="514350"/>
+          </a:xfrm>
+          <a:prstGeom xmlns:a="http://schemas.openxmlformats.org/drawingml/2006/main" prst="rect">
+            <a:avLst/>
+          </a:prstGeom>
+          <a:solidFill xmlns:a="http://schemas.openxmlformats.org/drawingml/2006/main">
+            <a:srgbClr val="000000">
+              <a:alpha val="0"/>
+            </a:srgbClr>
+          </a:solidFill>
+          <a:ln xmlns:a="http://schemas.openxmlformats.org/drawingml/2006/main" w="0">
+            <a:solidFill>
+              <a:srgbClr val="000000">
+                <a:alpha val="0"/>
+              </a:srgbClr>
+            </a:solidFill>
+            <a:prstDash val="solid"/>
+          </a:ln>
+        </p:spPr>
+        <p:txBody>
+          <a:bodyPr xmlns:a="http://schemas.openxmlformats.org/drawingml/2006/main" lIns="0" tIns="0" rIns="0" bIns="0" anchor="t"/>
+          <a:lstStyle xmlns:a="http://schemas.openxmlformats.org/drawingml/2006/main"/>
+          <a:p xmlns:a="http://schemas.openxmlformats.org/drawingml/2006/main">
+            <a:pPr algn="l">
+              <a:defRPr sz="1500" b="1">
+                <a:solidFill>
+                  <a:srgbClr val="202123"/>
+                </a:solidFill>
+                <a:latin typeface="Aptos"/>
+                <a:ea typeface="Aptos"/>
+                <a:cs typeface="Aptos"/>
+              </a:defRPr>
+            </a:pPr>
+            <a:r>
+              <a:rPr sz="1500" b="1">
+                <a:solidFill>
+                  <a:srgbClr val="202123"/>
+                </a:solidFill>
+                <a:latin typeface="Aptos"/>
+                <a:ea typeface="Aptos"/>
+                <a:cs typeface="Aptos"/>
+              </a:rPr>
+              <a:t>pg_partition_tree</a:t>
+            </a:r>
+          </a:p>
+        </p:txBody>
+      </p:sp>
+      <p:sp>
+        <p:nvSpPr>
+          <p:cNvPr id="11" name="">
+            <a:extLst xmlns:a="http://schemas.openxmlformats.org/drawingml/2006/main">
+              <a:ext uri="{FF2B5EF4-FFF2-40B4-BE49-F238E27FC236}">
+                <a16:creationId xmlns:a16="http://schemas.microsoft.com/office/drawing/2014/main" id="{C2012039-FBC4-49BE-B13D-CC4084897EE7}"/>
+              </a:ext>
+            </a:extLst>
+          </p:cNvPr>
+          <p:cNvSpPr>
+            <a:spLocks xmlns:a="http://schemas.openxmlformats.org/drawingml/2006/main" noGrp="1"/>
+          </p:cNvSpPr>
+          <p:nvPr/>
+        </p:nvSpPr>
+        <p:spPr>
+          <a:xfrm xmlns:a="http://schemas.openxmlformats.org/drawingml/2006/main">
+            <a:off x="781050" y="3209925"/>
+            <a:ext cx="4552950" cy="381000"/>
+          </a:xfrm>
+          <a:prstGeom xmlns:a="http://schemas.openxmlformats.org/drawingml/2006/main" prst="rect">
+            <a:avLst/>
+          </a:prstGeom>
+          <a:solidFill xmlns:a="http://schemas.openxmlformats.org/drawingml/2006/main">
+            <a:srgbClr val="000000">
+              <a:alpha val="0"/>
+            </a:srgbClr>
+          </a:solidFill>
+          <a:ln xmlns:a="http://schemas.openxmlformats.org/drawingml/2006/main" w="0">
+            <a:solidFill>
+              <a:srgbClr val="000000">
+                <a:alpha val="0"/>
+              </a:srgbClr>
+            </a:solidFill>
+            <a:prstDash val="solid"/>
+          </a:ln>
+        </p:spPr>
+        <p:txBody>
+          <a:bodyPr xmlns:a="http://schemas.openxmlformats.org/drawingml/2006/main" lIns="0" tIns="0" rIns="0" bIns="0" anchor="t"/>
+          <a:lstStyle xmlns:a="http://schemas.openxmlformats.org/drawingml/2006/main"/>
+          <a:p xmlns:a="http://schemas.openxmlformats.org/drawingml/2006/main">
+            <a:pPr algn="l">
+              <a:defRPr sz="1125" b="0">
+                <a:solidFill>
+                  <a:srgbClr val="6E6E68"/>
+                </a:solidFill>
+                <a:latin typeface="Aptos"/>
+                <a:ea typeface="Aptos"/>
+                <a:cs typeface="Aptos"/>
+              </a:defRPr>
+            </a:pPr>
+            <a:r>
+              <a:rPr sz="1125" b="0">
+                <a:solidFill>
+                  <a:srgbClr val="6E6E68"/>
+                </a:solidFill>
+                <a:latin typeface="Aptos"/>
+                <a:ea typeface="Aptos"/>
+                <a:cs typeface="Aptos"/>
+              </a:rPr>
+              <a:t>Показывает root/internal/leaf nodes, level и parent relation для partitioned table.</a:t>
+            </a:r>
+          </a:p>
+        </p:txBody>
+      </p:sp>
+      <p:sp>
+        <p:nvSpPr>
+          <p:cNvPr id="12" name="">
+            <a:extLst xmlns:a="http://schemas.openxmlformats.org/drawingml/2006/main">
+              <a:ext uri="{FF2B5EF4-FFF2-40B4-BE49-F238E27FC236}">
+                <a16:creationId xmlns:a16="http://schemas.microsoft.com/office/drawing/2014/main" id="{2FC8FE03-3D39-4CCF-A77C-B9E34DA233E1}"/>
+              </a:ext>
+            </a:extLst>
+          </p:cNvPr>
+          <p:cNvSpPr>
+            <a:spLocks xmlns:a="http://schemas.openxmlformats.org/drawingml/2006/main" noGrp="1"/>
+          </p:cNvSpPr>
+          <p:nvPr/>
+        </p:nvSpPr>
+        <p:spPr>
+          <a:xfrm xmlns:a="http://schemas.openxmlformats.org/drawingml/2006/main">
+            <a:off x="6191250" y="2333625"/>
+            <a:ext cx="4953000" cy="1257300"/>
+          </a:xfrm>
+          <a:prstGeom xmlns:a="http://schemas.openxmlformats.org/drawingml/2006/main" prst="rect">
+            <a:avLst/>
+          </a:prstGeom>
+          <a:solidFill xmlns:a="http://schemas.openxmlformats.org/drawingml/2006/main">
+            <a:srgbClr val="FFFFFF"/>
+          </a:solidFill>
+          <a:ln xmlns:a="http://schemas.openxmlformats.org/drawingml/2006/main" w="9525">
+            <a:solidFill>
+              <a:srgbClr val="D8D7D0"/>
+            </a:solidFill>
+            <a:prstDash val="solid"/>
+          </a:ln>
+        </p:spPr>
+      </p:sp>
+      <p:sp>
+        <p:nvSpPr>
+          <p:cNvPr id="13" name="">
+            <a:extLst xmlns:a="http://schemas.openxmlformats.org/drawingml/2006/main">
+              <a:ext uri="{FF2B5EF4-FFF2-40B4-BE49-F238E27FC236}">
+                <a16:creationId xmlns:a16="http://schemas.microsoft.com/office/drawing/2014/main" id="{2F3CA359-2E64-4915-B62F-6F2698F42E04}"/>
+              </a:ext>
+            </a:extLst>
+          </p:cNvPr>
+          <p:cNvSpPr>
+            <a:spLocks xmlns:a="http://schemas.openxmlformats.org/drawingml/2006/main" noGrp="1"/>
+          </p:cNvSpPr>
+          <p:nvPr/>
+        </p:nvSpPr>
+        <p:spPr>
+          <a:xfrm xmlns:a="http://schemas.openxmlformats.org/drawingml/2006/main">
+            <a:off x="6362700" y="2505075"/>
+            <a:ext cx="400050" cy="38100"/>
+          </a:xfrm>
+          <a:prstGeom xmlns:a="http://schemas.openxmlformats.org/drawingml/2006/main" prst="rect">
+            <a:avLst/>
+          </a:prstGeom>
+          <a:solidFill xmlns:a="http://schemas.openxmlformats.org/drawingml/2006/main">
+            <a:srgbClr val="2F6FED"/>
+          </a:solidFill>
+          <a:ln xmlns:a="http://schemas.openxmlformats.org/drawingml/2006/main" w="0">
+            <a:solidFill>
+              <a:srgbClr val="000000">
+                <a:alpha val="0"/>
+              </a:srgbClr>
+            </a:solidFill>
+            <a:prstDash val="solid"/>
+          </a:ln>
+        </p:spPr>
+      </p:sp>
+      <p:sp>
+        <p:nvSpPr>
+          <p:cNvPr id="14" name="">
+            <a:extLst xmlns:a="http://schemas.openxmlformats.org/drawingml/2006/main">
+              <a:ext uri="{FF2B5EF4-FFF2-40B4-BE49-F238E27FC236}">
+                <a16:creationId xmlns:a16="http://schemas.microsoft.com/office/drawing/2014/main" id="{4253496F-088C-4857-8031-75FF02D05361}"/>
+              </a:ext>
+            </a:extLst>
+          </p:cNvPr>
+          <p:cNvSpPr>
+            <a:spLocks xmlns:a="http://schemas.openxmlformats.org/drawingml/2006/main" noGrp="1"/>
+          </p:cNvSpPr>
+          <p:nvPr/>
+        </p:nvSpPr>
+        <p:spPr>
+          <a:xfrm xmlns:a="http://schemas.openxmlformats.org/drawingml/2006/main">
+            <a:off x="6400800" y="2676525"/>
+            <a:ext cx="4572000" cy="514350"/>
+          </a:xfrm>
+          <a:prstGeom xmlns:a="http://schemas.openxmlformats.org/drawingml/2006/main" prst="rect">
+            <a:avLst/>
+          </a:prstGeom>
+          <a:solidFill xmlns:a="http://schemas.openxmlformats.org/drawingml/2006/main">
+            <a:srgbClr val="000000">
+              <a:alpha val="0"/>
+            </a:srgbClr>
+          </a:solidFill>
+          <a:ln xmlns:a="http://schemas.openxmlformats.org/drawingml/2006/main" w="0">
+            <a:solidFill>
+              <a:srgbClr val="000000">
+                <a:alpha val="0"/>
+              </a:srgbClr>
+            </a:solidFill>
+            <a:prstDash val="solid"/>
+          </a:ln>
+        </p:spPr>
+        <p:txBody>
+          <a:bodyPr xmlns:a="http://schemas.openxmlformats.org/drawingml/2006/main" lIns="0" tIns="0" rIns="0" bIns="0" anchor="t"/>
+          <a:lstStyle xmlns:a="http://schemas.openxmlformats.org/drawingml/2006/main"/>
+          <a:p xmlns:a="http://schemas.openxmlformats.org/drawingml/2006/main">
+            <a:pPr algn="l">
+              <a:defRPr sz="1500" b="1">
+                <a:solidFill>
+                  <a:srgbClr val="202123"/>
+                </a:solidFill>
+                <a:latin typeface="Aptos"/>
+                <a:ea typeface="Aptos"/>
+                <a:cs typeface="Aptos"/>
+              </a:defRPr>
+            </a:pPr>
+            <a:r>
+              <a:rPr sz="1500" b="1">
+                <a:solidFill>
+                  <a:srgbClr val="202123"/>
+                </a:solidFill>
+                <a:latin typeface="Aptos"/>
+                <a:ea typeface="Aptos"/>
+                <a:cs typeface="Aptos"/>
+              </a:rPr>
+              <a:t>gp_toolkit.gp_partitions</a:t>
+            </a:r>
+          </a:p>
+        </p:txBody>
+      </p:sp>
+      <p:sp>
+        <p:nvSpPr>
+          <p:cNvPr id="15" name="">
+            <a:extLst xmlns:a="http://schemas.openxmlformats.org/drawingml/2006/main">
+              <a:ext uri="{FF2B5EF4-FFF2-40B4-BE49-F238E27FC236}">
+                <a16:creationId xmlns:a16="http://schemas.microsoft.com/office/drawing/2014/main" id="{D009C31E-9C27-4993-9181-38C6B8B04C41}"/>
+              </a:ext>
+            </a:extLst>
+          </p:cNvPr>
+          <p:cNvSpPr>
+            <a:spLocks xmlns:a="http://schemas.openxmlformats.org/drawingml/2006/main" noGrp="1"/>
+          </p:cNvSpPr>
+          <p:nvPr/>
+        </p:nvSpPr>
+        <p:spPr>
+          <a:xfrm xmlns:a="http://schemas.openxmlformats.org/drawingml/2006/main">
+            <a:off x="6400800" y="3209925"/>
+            <a:ext cx="4552950" cy="381000"/>
+          </a:xfrm>
+          <a:prstGeom xmlns:a="http://schemas.openxmlformats.org/drawingml/2006/main" prst="rect">
+            <a:avLst/>
+          </a:prstGeom>
+          <a:solidFill xmlns:a="http://schemas.openxmlformats.org/drawingml/2006/main">
+            <a:srgbClr val="000000">
+              <a:alpha val="0"/>
+            </a:srgbClr>
+          </a:solidFill>
+          <a:ln xmlns:a="http://schemas.openxmlformats.org/drawingml/2006/main" w="0">
+            <a:solidFill>
+              <a:srgbClr val="000000">
+                <a:alpha val="0"/>
+              </a:srgbClr>
+            </a:solidFill>
+            <a:prstDash val="solid"/>
+          </a:ln>
+        </p:spPr>
+        <p:txBody>
+          <a:bodyPr xmlns:a="http://schemas.openxmlformats.org/drawingml/2006/main" lIns="0" tIns="0" rIns="0" bIns="0" anchor="t"/>
+          <a:lstStyle xmlns:a="http://schemas.openxmlformats.org/drawingml/2006/main"/>
+          <a:p xmlns:a="http://schemas.openxmlformats.org/drawingml/2006/main">
+            <a:pPr algn="l">
+              <a:defRPr sz="1125" b="0">
+                <a:solidFill>
+                  <a:srgbClr val="6E6E68"/>
+                </a:solidFill>
+                <a:latin typeface="Aptos"/>
+                <a:ea typeface="Aptos"/>
+                <a:cs typeface="Aptos"/>
+              </a:defRPr>
+            </a:pPr>
+            <a:r>
+              <a:rPr sz="1125" b="0">
+                <a:solidFill>
+                  <a:srgbClr val="6E6E68"/>
+                </a:solidFill>
+                <a:latin typeface="Aptos"/>
+                <a:ea typeface="Aptos"/>
+                <a:cs typeface="Aptos"/>
+              </a:rPr>
+              <a:t>Удобный inventory leaf partitions в базе и совместимость с legacy pg_partitions-подходом.</a:t>
+            </a:r>
+          </a:p>
+        </p:txBody>
+      </p:sp>
+      <p:sp>
+        <p:nvSpPr>
+          <p:cNvPr id="16" name="">
+            <a:extLst xmlns:a="http://schemas.openxmlformats.org/drawingml/2006/main">
+              <a:ext uri="{FF2B5EF4-FFF2-40B4-BE49-F238E27FC236}">
+                <a16:creationId xmlns:a16="http://schemas.microsoft.com/office/drawing/2014/main" id="{F399D111-22E4-4577-B3C4-EBE7F61D407E}"/>
+              </a:ext>
+            </a:extLst>
+          </p:cNvPr>
+          <p:cNvSpPr>
+            <a:spLocks xmlns:a="http://schemas.openxmlformats.org/drawingml/2006/main" noGrp="1"/>
+          </p:cNvSpPr>
+          <p:nvPr/>
+        </p:nvSpPr>
+        <p:spPr>
+          <a:xfrm xmlns:a="http://schemas.openxmlformats.org/drawingml/2006/main">
+            <a:off x="571500" y="3857625"/>
+            <a:ext cx="4953000" cy="1257300"/>
+          </a:xfrm>
+          <a:prstGeom xmlns:a="http://schemas.openxmlformats.org/drawingml/2006/main" prst="rect">
+            <a:avLst/>
+          </a:prstGeom>
+          <a:solidFill xmlns:a="http://schemas.openxmlformats.org/drawingml/2006/main">
+            <a:srgbClr val="FFFFFF"/>
+          </a:solidFill>
+          <a:ln xmlns:a="http://schemas.openxmlformats.org/drawingml/2006/main" w="9525">
+            <a:solidFill>
+              <a:srgbClr val="D8D7D0"/>
+            </a:solidFill>
+            <a:prstDash val="solid"/>
+          </a:ln>
+        </p:spPr>
+      </p:sp>
+      <p:sp>
+        <p:nvSpPr>
+          <p:cNvPr id="17" name="">
+            <a:extLst xmlns:a="http://schemas.openxmlformats.org/drawingml/2006/main">
+              <a:ext uri="{FF2B5EF4-FFF2-40B4-BE49-F238E27FC236}">
+                <a16:creationId xmlns:a16="http://schemas.microsoft.com/office/drawing/2014/main" id="{8529D3A0-8F51-4F19-B2D4-8C5768641074}"/>
+              </a:ext>
+            </a:extLst>
+          </p:cNvPr>
+          <p:cNvSpPr>
+            <a:spLocks xmlns:a="http://schemas.openxmlformats.org/drawingml/2006/main" noGrp="1"/>
+          </p:cNvSpPr>
+          <p:nvPr/>
+        </p:nvSpPr>
+        <p:spPr>
+          <a:xfrm xmlns:a="http://schemas.openxmlformats.org/drawingml/2006/main">
+            <a:off x="742950" y="4029075"/>
+            <a:ext cx="400050" cy="38100"/>
+          </a:xfrm>
+          <a:prstGeom xmlns:a="http://schemas.openxmlformats.org/drawingml/2006/main" prst="rect">
+            <a:avLst/>
+          </a:prstGeom>
+          <a:solidFill xmlns:a="http://schemas.openxmlformats.org/drawingml/2006/main">
+            <a:srgbClr val="10A37F"/>
+          </a:solidFill>
+          <a:ln xmlns:a="http://schemas.openxmlformats.org/drawingml/2006/main" w="0">
+            <a:solidFill>
+              <a:srgbClr val="000000">
+                <a:alpha val="0"/>
+              </a:srgbClr>
+            </a:solidFill>
+            <a:prstDash val="solid"/>
+          </a:ln>
+        </p:spPr>
+      </p:sp>
+      <p:sp>
+        <p:nvSpPr>
+          <p:cNvPr id="18" name="">
+            <a:extLst xmlns:a="http://schemas.openxmlformats.org/drawingml/2006/main">
+              <a:ext uri="{FF2B5EF4-FFF2-40B4-BE49-F238E27FC236}">
+                <a16:creationId xmlns:a16="http://schemas.microsoft.com/office/drawing/2014/main" id="{4B8921A3-8F16-48E4-A741-83686E0B759A}"/>
+              </a:ext>
+            </a:extLst>
+          </p:cNvPr>
+          <p:cNvSpPr>
+            <a:spLocks xmlns:a="http://schemas.openxmlformats.org/drawingml/2006/main" noGrp="1"/>
+          </p:cNvSpPr>
+          <p:nvPr/>
+        </p:nvSpPr>
+        <p:spPr>
+          <a:xfrm xmlns:a="http://schemas.openxmlformats.org/drawingml/2006/main">
+            <a:off x="781050" y="4200525"/>
+            <a:ext cx="4572000" cy="514350"/>
+          </a:xfrm>
+          <a:prstGeom xmlns:a="http://schemas.openxmlformats.org/drawingml/2006/main" prst="rect">
+            <a:avLst/>
+          </a:prstGeom>
+          <a:solidFill xmlns:a="http://schemas.openxmlformats.org/drawingml/2006/main">
+            <a:srgbClr val="000000">
+              <a:alpha val="0"/>
+            </a:srgbClr>
+          </a:solidFill>
+          <a:ln xmlns:a="http://schemas.openxmlformats.org/drawingml/2006/main" w="0">
+            <a:solidFill>
+              <a:srgbClr val="000000">
+                <a:alpha val="0"/>
+              </a:srgbClr>
+            </a:solidFill>
+            <a:prstDash val="solid"/>
+          </a:ln>
+        </p:spPr>
+        <p:txBody>
+          <a:bodyPr xmlns:a="http://schemas.openxmlformats.org/drawingml/2006/main" lIns="0" tIns="0" rIns="0" bIns="0" anchor="t"/>
+          <a:lstStyle xmlns:a="http://schemas.openxmlformats.org/drawingml/2006/main"/>
+          <a:p xmlns:a="http://schemas.openxmlformats.org/drawingml/2006/main">
+            <a:pPr algn="l">
+              <a:defRPr sz="1500" b="1">
+                <a:solidFill>
+                  <a:srgbClr val="202123"/>
+                </a:solidFill>
+                <a:latin typeface="Aptos"/>
+                <a:ea typeface="Aptos"/>
+                <a:cs typeface="Aptos"/>
+              </a:defRPr>
+            </a:pPr>
+            <a:r>
+              <a:rPr sz="1500" b="1">
+                <a:solidFill>
+                  <a:srgbClr val="202123"/>
+                </a:solidFill>
+                <a:latin typeface="Aptos"/>
+                <a:ea typeface="Aptos"/>
+                <a:cs typeface="Aptos"/>
+              </a:rPr>
+              <a:t>leaf partitions</a:t>
+            </a:r>
+          </a:p>
+        </p:txBody>
+      </p:sp>
+      <p:sp>
+        <p:nvSpPr>
+          <p:cNvPr id="19" name="">
+            <a:extLst xmlns:a="http://schemas.openxmlformats.org/drawingml/2006/main">
+              <a:ext uri="{FF2B5EF4-FFF2-40B4-BE49-F238E27FC236}">
+                <a16:creationId xmlns:a16="http://schemas.microsoft.com/office/drawing/2014/main" id="{6CCCE747-DDCB-418E-BDA8-2FC2631A0CE5}"/>
+              </a:ext>
+            </a:extLst>
+          </p:cNvPr>
+          <p:cNvSpPr>
+            <a:spLocks xmlns:a="http://schemas.openxmlformats.org/drawingml/2006/main" noGrp="1"/>
+          </p:cNvSpPr>
+          <p:nvPr/>
+        </p:nvSpPr>
+        <p:spPr>
+          <a:xfrm xmlns:a="http://schemas.openxmlformats.org/drawingml/2006/main">
+            <a:off x="781050" y="4733925"/>
+            <a:ext cx="4552950" cy="381000"/>
+          </a:xfrm>
+          <a:prstGeom xmlns:a="http://schemas.openxmlformats.org/drawingml/2006/main" prst="rect">
+            <a:avLst/>
+          </a:prstGeom>
+          <a:solidFill xmlns:a="http://schemas.openxmlformats.org/drawingml/2006/main">
+            <a:srgbClr val="000000">
+              <a:alpha val="0"/>
+            </a:srgbClr>
+          </a:solidFill>
+          <a:ln xmlns:a="http://schemas.openxmlformats.org/drawingml/2006/main" w="0">
+            <a:solidFill>
+              <a:srgbClr val="000000">
+                <a:alpha val="0"/>
+              </a:srgbClr>
+            </a:solidFill>
+            <a:prstDash val="solid"/>
+          </a:ln>
+        </p:spPr>
+        <p:txBody>
+          <a:bodyPr xmlns:a="http://schemas.openxmlformats.org/drawingml/2006/main" lIns="0" tIns="0" rIns="0" bIns="0" anchor="t"/>
+          <a:lstStyle xmlns:a="http://schemas.openxmlformats.org/drawingml/2006/main"/>
+          <a:p xmlns:a="http://schemas.openxmlformats.org/drawingml/2006/main">
+            <a:pPr algn="l">
+              <a:defRPr sz="1125" b="0">
+                <a:solidFill>
+                  <a:srgbClr val="6E6E68"/>
+                </a:solidFill>
+                <a:latin typeface="Aptos"/>
+                <a:ea typeface="Aptos"/>
+                <a:cs typeface="Aptos"/>
+              </a:defRPr>
+            </a:pPr>
+            <a:r>
+              <a:rPr sz="1125" b="0">
+                <a:solidFill>
+                  <a:srgbClr val="6E6E68"/>
+                </a:solidFill>
+                <a:latin typeface="Aptos"/>
+                <a:ea typeface="Aptos"/>
+                <a:cs typeface="Aptos"/>
+              </a:rPr>
+              <a:t>Считаем именно leaf partitions: они физически держат данные и участвуют в pruning.</a:t>
+            </a:r>
+          </a:p>
+        </p:txBody>
+      </p:sp>
+      <p:sp>
+        <p:nvSpPr>
+          <p:cNvPr id="20" name="">
+            <a:extLst xmlns:a="http://schemas.openxmlformats.org/drawingml/2006/main">
+              <a:ext uri="{FF2B5EF4-FFF2-40B4-BE49-F238E27FC236}">
+                <a16:creationId xmlns:a16="http://schemas.microsoft.com/office/drawing/2014/main" id="{569DDE80-60C8-4632-AF28-824DF5CE68D5}"/>
+              </a:ext>
+            </a:extLst>
+          </p:cNvPr>
+          <p:cNvSpPr>
+            <a:spLocks xmlns:a="http://schemas.openxmlformats.org/drawingml/2006/main" noGrp="1"/>
+          </p:cNvSpPr>
+          <p:nvPr/>
+        </p:nvSpPr>
+        <p:spPr>
+          <a:xfrm xmlns:a="http://schemas.openxmlformats.org/drawingml/2006/main">
+            <a:off x="6191250" y="3857625"/>
+            <a:ext cx="4953000" cy="1257300"/>
+          </a:xfrm>
+          <a:prstGeom xmlns:a="http://schemas.openxmlformats.org/drawingml/2006/main" prst="rect">
+            <a:avLst/>
+          </a:prstGeom>
+          <a:solidFill xmlns:a="http://schemas.openxmlformats.org/drawingml/2006/main">
+            <a:srgbClr val="FFFFFF"/>
+          </a:solidFill>
+          <a:ln xmlns:a="http://schemas.openxmlformats.org/drawingml/2006/main" w="9525">
+            <a:solidFill>
+              <a:srgbClr val="D8D7D0"/>
+            </a:solidFill>
+            <a:prstDash val="solid"/>
+          </a:ln>
+        </p:spPr>
+      </p:sp>
+      <p:sp>
+        <p:nvSpPr>
+          <p:cNvPr id="21" name="">
+            <a:extLst xmlns:a="http://schemas.openxmlformats.org/drawingml/2006/main">
+              <a:ext uri="{FF2B5EF4-FFF2-40B4-BE49-F238E27FC236}">
+                <a16:creationId xmlns:a16="http://schemas.microsoft.com/office/drawing/2014/main" id="{A8706FFF-E820-486B-A509-E51B55F97519}"/>
+              </a:ext>
+            </a:extLst>
+          </p:cNvPr>
+          <p:cNvSpPr>
+            <a:spLocks xmlns:a="http://schemas.openxmlformats.org/drawingml/2006/main" noGrp="1"/>
+          </p:cNvSpPr>
+          <p:nvPr/>
+        </p:nvSpPr>
+        <p:spPr>
+          <a:xfrm xmlns:a="http://schemas.openxmlformats.org/drawingml/2006/main">
+            <a:off x="6362700" y="4029075"/>
+            <a:ext cx="400050" cy="38100"/>
+          </a:xfrm>
+          <a:prstGeom xmlns:a="http://schemas.openxmlformats.org/drawingml/2006/main" prst="rect">
+            <a:avLst/>
+          </a:prstGeom>
+          <a:solidFill xmlns:a="http://schemas.openxmlformats.org/drawingml/2006/main">
+            <a:srgbClr val="2F6FED"/>
+          </a:solidFill>
+          <a:ln xmlns:a="http://schemas.openxmlformats.org/drawingml/2006/main" w="0">
+            <a:solidFill>
+              <a:srgbClr val="000000">
+                <a:alpha val="0"/>
+              </a:srgbClr>
+            </a:solidFill>
+            <a:prstDash val="solid"/>
+          </a:ln>
+        </p:spPr>
+      </p:sp>
+      <p:sp>
+        <p:nvSpPr>
+          <p:cNvPr id="22" name="">
+            <a:extLst xmlns:a="http://schemas.openxmlformats.org/drawingml/2006/main">
+              <a:ext uri="{FF2B5EF4-FFF2-40B4-BE49-F238E27FC236}">
+                <a16:creationId xmlns:a16="http://schemas.microsoft.com/office/drawing/2014/main" id="{66718CCC-EE23-4770-82E3-DCC5444D86D8}"/>
+              </a:ext>
+            </a:extLst>
+          </p:cNvPr>
+          <p:cNvSpPr>
+            <a:spLocks xmlns:a="http://schemas.openxmlformats.org/drawingml/2006/main" noGrp="1"/>
+          </p:cNvSpPr>
+          <p:nvPr/>
+        </p:nvSpPr>
+        <p:spPr>
+          <a:xfrm xmlns:a="http://schemas.openxmlformats.org/drawingml/2006/main">
+            <a:off x="6400800" y="4200525"/>
+            <a:ext cx="4572000" cy="514350"/>
+          </a:xfrm>
+          <a:prstGeom xmlns:a="http://schemas.openxmlformats.org/drawingml/2006/main" prst="rect">
+            <a:avLst/>
+          </a:prstGeom>
+          <a:solidFill xmlns:a="http://schemas.openxmlformats.org/drawingml/2006/main">
+            <a:srgbClr val="000000">
+              <a:alpha val="0"/>
+            </a:srgbClr>
+          </a:solidFill>
+          <a:ln xmlns:a="http://schemas.openxmlformats.org/drawingml/2006/main" w="0">
+            <a:solidFill>
+              <a:srgbClr val="000000">
+                <a:alpha val="0"/>
+              </a:srgbClr>
+            </a:solidFill>
+            <a:prstDash val="solid"/>
+          </a:ln>
+        </p:spPr>
+        <p:txBody>
+          <a:bodyPr xmlns:a="http://schemas.openxmlformats.org/drawingml/2006/main" lIns="0" tIns="0" rIns="0" bIns="0" anchor="t"/>
+          <a:lstStyle xmlns:a="http://schemas.openxmlformats.org/drawingml/2006/main"/>
+          <a:p xmlns:a="http://schemas.openxmlformats.org/drawingml/2006/main">
+            <a:pPr algn="l">
+              <a:defRPr sz="1500" b="1">
+                <a:solidFill>
+                  <a:srgbClr val="202123"/>
+                </a:solidFill>
+                <a:latin typeface="Aptos"/>
+                <a:ea typeface="Aptos"/>
+                <a:cs typeface="Aptos"/>
+              </a:defRPr>
+            </a:pPr>
+            <a:r>
+              <a:rPr sz="1500" b="1">
+                <a:solidFill>
+                  <a:srgbClr val="202123"/>
+                </a:solidFill>
+                <a:latin typeface="Aptos"/>
+                <a:ea typeface="Aptos"/>
+                <a:cs typeface="Aptos"/>
+              </a:rPr>
+              <a:t>Maintenance</a:t>
+            </a:r>
+          </a:p>
+        </p:txBody>
+      </p:sp>
+      <p:sp>
+        <p:nvSpPr>
+          <p:cNvPr id="23" name="">
+            <a:extLst xmlns:a="http://schemas.openxmlformats.org/drawingml/2006/main">
+              <a:ext uri="{FF2B5EF4-FFF2-40B4-BE49-F238E27FC236}">
+                <a16:creationId xmlns:a16="http://schemas.microsoft.com/office/drawing/2014/main" id="{6E02A1F8-FCC9-438A-A2C4-07573E01543C}"/>
+              </a:ext>
+            </a:extLst>
+          </p:cNvPr>
+          <p:cNvSpPr>
+            <a:spLocks xmlns:a="http://schemas.openxmlformats.org/drawingml/2006/main" noGrp="1"/>
+          </p:cNvSpPr>
+          <p:nvPr/>
+        </p:nvSpPr>
+        <p:spPr>
+          <a:xfrm xmlns:a="http://schemas.openxmlformats.org/drawingml/2006/main">
+            <a:off x="6400800" y="4733925"/>
+            <a:ext cx="4552950" cy="381000"/>
+          </a:xfrm>
+          <a:prstGeom xmlns:a="http://schemas.openxmlformats.org/drawingml/2006/main" prst="rect">
+            <a:avLst/>
+          </a:prstGeom>
+          <a:solidFill xmlns:a="http://schemas.openxmlformats.org/drawingml/2006/main">
+            <a:srgbClr val="000000">
+              <a:alpha val="0"/>
+            </a:srgbClr>
+          </a:solidFill>
+          <a:ln xmlns:a="http://schemas.openxmlformats.org/drawingml/2006/main" w="0">
+            <a:solidFill>
+              <a:srgbClr val="000000">
+                <a:alpha val="0"/>
+              </a:srgbClr>
+            </a:solidFill>
+            <a:prstDash val="solid"/>
+          </a:ln>
+        </p:spPr>
+        <p:txBody>
+          <a:bodyPr xmlns:a="http://schemas.openxmlformats.org/drawingml/2006/main" lIns="0" tIns="0" rIns="0" bIns="0" anchor="t"/>
+          <a:lstStyle xmlns:a="http://schemas.openxmlformats.org/drawingml/2006/main"/>
+          <a:p xmlns:a="http://schemas.openxmlformats.org/drawingml/2006/main">
+            <a:pPr algn="l">
+              <a:defRPr sz="1125" b="0">
+                <a:solidFill>
+                  <a:srgbClr val="6E6E68"/>
+                </a:solidFill>
+                <a:latin typeface="Aptos"/>
+                <a:ea typeface="Aptos"/>
+                <a:cs typeface="Aptos"/>
+              </a:defRPr>
+            </a:pPr>
+            <a:r>
+              <a:rPr sz="1125" b="0">
+                <a:solidFill>
+                  <a:srgbClr val="6E6E68"/>
+                </a:solidFill>
+                <a:latin typeface="Aptos"/>
+                <a:ea typeface="Aptos"/>
+                <a:cs typeface="Aptos"/>
+              </a:rPr>
+              <a:t>ATTACH PARTITION, DETACH PARTITION, retention DROP; проверять DEFAULT partition и out-of-range INSERT.</a:t>
+            </a:r>
+          </a:p>
+        </p:txBody>
+      </p:sp>
+      <p:sp>
+        <p:nvSpPr>
+          <p:cNvPr id="24" name="">
+            <a:extLst xmlns:a="http://schemas.openxmlformats.org/drawingml/2006/main">
+              <a:ext uri="{FF2B5EF4-FFF2-40B4-BE49-F238E27FC236}">
+                <a16:creationId xmlns:a16="http://schemas.microsoft.com/office/drawing/2014/main" id="{2B9FEC8C-A1E6-4A2C-8D52-60694F46C66B}"/>
+              </a:ext>
+            </a:extLst>
+          </p:cNvPr>
+          <p:cNvSpPr>
+            <a:spLocks xmlns:a="http://schemas.openxmlformats.org/drawingml/2006/main" noGrp="1"/>
+          </p:cNvSpPr>
+          <p:nvPr/>
+        </p:nvSpPr>
+        <p:spPr>
+          <a:xfrm xmlns:a="http://schemas.openxmlformats.org/drawingml/2006/main">
+            <a:off x="571500" y="5334000"/>
+            <a:ext cx="10382250" cy="876300"/>
+          </a:xfrm>
+          <a:prstGeom xmlns:a="http://schemas.openxmlformats.org/drawingml/2006/main" prst="rect">
+            <a:avLst/>
+          </a:prstGeom>
+          <a:solidFill xmlns:a="http://schemas.openxmlformats.org/drawingml/2006/main">
+            <a:srgbClr val="FFFFFF"/>
+          </a:solidFill>
+          <a:ln xmlns:a="http://schemas.openxmlformats.org/drawingml/2006/main" w="9525">
+            <a:solidFill>
+              <a:srgbClr val="D8D7D0"/>
+            </a:solidFill>
+            <a:prstDash val="solid"/>
+          </a:ln>
+        </p:spPr>
+      </p:sp>
+      <p:sp>
+        <p:nvSpPr>
+          <p:cNvPr id="25" name="">
+            <a:extLst xmlns:a="http://schemas.openxmlformats.org/drawingml/2006/main">
+              <a:ext uri="{FF2B5EF4-FFF2-40B4-BE49-F238E27FC236}">
+                <a16:creationId xmlns:a16="http://schemas.microsoft.com/office/drawing/2014/main" id="{15F39761-CE15-4429-8B54-3F465340E35C}"/>
+              </a:ext>
+            </a:extLst>
+          </p:cNvPr>
+          <p:cNvSpPr>
+            <a:spLocks xmlns:a="http://schemas.openxmlformats.org/drawingml/2006/main" noGrp="1"/>
+          </p:cNvSpPr>
+          <p:nvPr/>
+        </p:nvSpPr>
+        <p:spPr>
+          <a:xfrm xmlns:a="http://schemas.openxmlformats.org/drawingml/2006/main">
+            <a:off x="742950" y="5467350"/>
+            <a:ext cx="1143000" cy="190500"/>
+          </a:xfrm>
+          <a:prstGeom xmlns:a="http://schemas.openxmlformats.org/drawingml/2006/main" prst="rect">
+            <a:avLst/>
+          </a:prstGeom>
+          <a:solidFill xmlns:a="http://schemas.openxmlformats.org/drawingml/2006/main">
+            <a:srgbClr val="000000">
+              <a:alpha val="0"/>
+            </a:srgbClr>
+          </a:solidFill>
+          <a:ln xmlns:a="http://schemas.openxmlformats.org/drawingml/2006/main" w="0">
+            <a:solidFill>
+              <a:srgbClr val="000000">
+                <a:alpha val="0"/>
+              </a:srgbClr>
+            </a:solidFill>
+            <a:prstDash val="solid"/>
+          </a:ln>
+        </p:spPr>
+        <p:txBody>
+          <a:bodyPr xmlns:a="http://schemas.openxmlformats.org/drawingml/2006/main" lIns="0" tIns="0" rIns="0" bIns="0" anchor="t"/>
+          <a:lstStyle xmlns:a="http://schemas.openxmlformats.org/drawingml/2006/main"/>
+          <a:p xmlns:a="http://schemas.openxmlformats.org/drawingml/2006/main">
+            <a:pPr algn="l">
+              <a:defRPr sz="900" b="1">
+                <a:solidFill>
+                  <a:srgbClr val="10A37F"/>
+                </a:solidFill>
+                <a:latin typeface="Aptos"/>
+                <a:ea typeface="Aptos"/>
+                <a:cs typeface="Aptos"/>
+              </a:defRPr>
+            </a:pPr>
+            <a:r>
+              <a:rPr sz="900" b="1">
+                <a:solidFill>
+                  <a:srgbClr val="10A37F"/>
+                </a:solidFill>
+                <a:latin typeface="Aptos"/>
+                <a:ea typeface="Aptos"/>
+                <a:cs typeface="Aptos"/>
+              </a:rPr>
+              <a:t>SQL</a:t>
+            </a:r>
+          </a:p>
+        </p:txBody>
+      </p:sp>
+      <p:sp>
+        <p:nvSpPr>
+          <p:cNvPr id="26" name="">
+            <a:extLst xmlns:a="http://schemas.openxmlformats.org/drawingml/2006/main">
+              <a:ext uri="{FF2B5EF4-FFF2-40B4-BE49-F238E27FC236}">
+                <a16:creationId xmlns:a16="http://schemas.microsoft.com/office/drawing/2014/main" id="{2A1B4556-C0D0-4DC1-AB5B-9B3853B9AB35}"/>
+              </a:ext>
+            </a:extLst>
+          </p:cNvPr>
+          <p:cNvSpPr>
+            <a:spLocks xmlns:a="http://schemas.openxmlformats.org/drawingml/2006/main" noGrp="1"/>
+          </p:cNvSpPr>
+          <p:nvPr/>
+        </p:nvSpPr>
+        <p:spPr>
+          <a:xfrm xmlns:a="http://schemas.openxmlformats.org/drawingml/2006/main">
+            <a:off x="742950" y="5734050"/>
+            <a:ext cx="10039350" cy="381000"/>
+          </a:xfrm>
+          <a:prstGeom xmlns:a="http://schemas.openxmlformats.org/drawingml/2006/main" prst="rect">
+            <a:avLst/>
+          </a:prstGeom>
+          <a:solidFill xmlns:a="http://schemas.openxmlformats.org/drawingml/2006/main">
+            <a:srgbClr val="000000">
+              <a:alpha val="0"/>
+            </a:srgbClr>
+          </a:solidFill>
+          <a:ln xmlns:a="http://schemas.openxmlformats.org/drawingml/2006/main" w="0">
+            <a:solidFill>
+              <a:srgbClr val="000000">
+                <a:alpha val="0"/>
+              </a:srgbClr>
+            </a:solidFill>
+            <a:prstDash val="solid"/>
+          </a:ln>
+        </p:spPr>
+        <p:txBody>
+          <a:bodyPr xmlns:a="http://schemas.openxmlformats.org/drawingml/2006/main" lIns="0" tIns="0" rIns="0" bIns="0" anchor="t"/>
+          <a:lstStyle xmlns:a="http://schemas.openxmlformats.org/drawingml/2006/main"/>
+          <a:p xmlns:a="http://schemas.openxmlformats.org/drawingml/2006/main">
+            <a:pPr algn="l">
+              <a:defRPr sz="1050" b="0">
+                <a:solidFill>
+                  <a:srgbClr val="202123"/>
+                </a:solidFill>
+                <a:latin typeface="Aptos Mono"/>
+                <a:ea typeface="Aptos Mono"/>
+                <a:cs typeface="Aptos Mono"/>
+              </a:defRPr>
+            </a:pPr>
+            <a:r>
+              <a:rPr sz="1050" b="0">
+                <a:solidFill>
+                  <a:srgbClr val="202123"/>
+                </a:solidFill>
+                <a:latin typeface="Aptos Mono"/>
+                <a:ea typeface="Aptos Mono"/>
+                <a:cs typeface="Aptos Mono"/>
+              </a:rPr>
+              <a:t>SELECT * FROM pg_partition_tree('lesson01.partition_range_demo'::regclass);</a:t>
+            </a:r>
+          </a:p>
+          <a:p xmlns:a="http://schemas.openxmlformats.org/drawingml/2006/main">
+            <a:pPr algn="l">
+              <a:defRPr sz="1050" b="0">
+                <a:solidFill>
+                  <a:srgbClr val="202123"/>
+                </a:solidFill>
+                <a:latin typeface="Aptos Mono"/>
+                <a:ea typeface="Aptos Mono"/>
+                <a:cs typeface="Aptos Mono"/>
+              </a:defRPr>
+            </a:pPr>
+            <a:r>
+              <a:rPr sz="1050" b="0">
+                <a:solidFill>
+                  <a:srgbClr val="202123"/>
+                </a:solidFill>
+                <a:latin typeface="Aptos Mono"/>
+                <a:ea typeface="Aptos Mono"/>
+                <a:cs typeface="Aptos Mono"/>
+              </a:rPr>
+              <a:t>SELECT * FROM gp_toolkit.gp_partitions WHERE schemaname = 'lesson01';</a:t>
+            </a:r>
+          </a:p>
+          <a:p xmlns:a="http://schemas.openxmlformats.org/drawingml/2006/main">
+            <a:pPr algn="l">
+              <a:defRPr sz="1050" b="0">
+                <a:solidFill>
+                  <a:srgbClr val="202123"/>
+                </a:solidFill>
+                <a:latin typeface="Aptos Mono"/>
+                <a:ea typeface="Aptos Mono"/>
+                <a:cs typeface="Aptos Mono"/>
+              </a:defRPr>
+            </a:pPr>
+            <a:r>
+              <a:rPr sz="1050" b="0">
+                <a:solidFill>
+                  <a:srgbClr val="202123"/>
+                </a:solidFill>
+                <a:latin typeface="Aptos Mono"/>
+                <a:ea typeface="Aptos Mono"/>
+                <a:cs typeface="Aptos Mono"/>
+              </a:rPr>
+              <a:t>-- COUNT(*) FILTER (WHERE isleaf) AS leaf_partitions</a:t>
+            </a:r>
+          </a:p>
+        </p:txBody>
+      </p:sp>
+    </p:spTree>
+    <p:extLst>
+      <p:ext uri="{BB962C8B-B14F-4D97-AF65-F5344CB8AC3E}">
+        <p14:creationId xmlns:p14="http://schemas.microsoft.com/office/powerpoint/2010/main" val="1151994043"/>
       </p:ext>
     </p:extLst>
   </p:cSld>
@@ -29067,7 +30877,7 @@
           <p:cNvPr id="1" name="">
             <a:extLst xmlns:a="http://schemas.openxmlformats.org/drawingml/2006/main">
               <a:ext uri="{FF2B5EF4-FFF2-40B4-BE49-F238E27FC236}">
-                <a16:creationId xmlns:a16="http://schemas.microsoft.com/office/drawing/2014/main" id="{7A8517E2-5A97-4FCF-80DF-0FC0BBF1AC46}"/>
+                <a16:creationId xmlns:a16="http://schemas.microsoft.com/office/drawing/2014/main" id="{D8149486-DBC3-43CB-A7F9-2B75B34A8715}"/>
               </a:ext>
             </a:extLst>
           </p:cNvPr>
@@ -29102,7 +30912,7 @@
           <p:cNvPr id="2" name="">
             <a:extLst xmlns:a="http://schemas.openxmlformats.org/drawingml/2006/main">
               <a:ext uri="{FF2B5EF4-FFF2-40B4-BE49-F238E27FC236}">
-                <a16:creationId xmlns:a16="http://schemas.microsoft.com/office/drawing/2014/main" id="{C7B0A7E5-4FFF-413B-8578-84E393D04F5D}"/>
+                <a16:creationId xmlns:a16="http://schemas.microsoft.com/office/drawing/2014/main" id="{7D526849-5C8A-4CDD-AB87-BF191FD46940}"/>
               </a:ext>
             </a:extLst>
           </p:cNvPr>
@@ -29137,7 +30947,7 @@
           <p:cNvPr id="3" name="">
             <a:extLst xmlns:a="http://schemas.openxmlformats.org/drawingml/2006/main">
               <a:ext uri="{FF2B5EF4-FFF2-40B4-BE49-F238E27FC236}">
-                <a16:creationId xmlns:a16="http://schemas.microsoft.com/office/drawing/2014/main" id="{A8EABA5A-CC0C-4C01-9B5B-D596B00F15E3}"/>
+                <a16:creationId xmlns:a16="http://schemas.microsoft.com/office/drawing/2014/main" id="{7A2C0749-1392-4247-A06C-343F052A0D86}"/>
               </a:ext>
             </a:extLst>
           </p:cNvPr>
@@ -29172,7 +30982,7 @@
           <p:cNvPr id="4" name="">
             <a:extLst xmlns:a="http://schemas.openxmlformats.org/drawingml/2006/main">
               <a:ext uri="{FF2B5EF4-FFF2-40B4-BE49-F238E27FC236}">
-                <a16:creationId xmlns:a16="http://schemas.microsoft.com/office/drawing/2014/main" id="{70D58D9D-22A4-4E0D-BEDB-E088DFE6C3F1}"/>
+                <a16:creationId xmlns:a16="http://schemas.microsoft.com/office/drawing/2014/main" id="{F59B5EAF-0723-4CE1-932D-7B9450866EC8}"/>
               </a:ext>
             </a:extLst>
           </p:cNvPr>
@@ -29236,7 +31046,7 @@
           <p:cNvPr id="5" name="">
             <a:extLst xmlns:a="http://schemas.openxmlformats.org/drawingml/2006/main">
               <a:ext uri="{FF2B5EF4-FFF2-40B4-BE49-F238E27FC236}">
-                <a16:creationId xmlns:a16="http://schemas.microsoft.com/office/drawing/2014/main" id="{62C7877B-FBEA-46A6-A887-5E76AF0824F5}"/>
+                <a16:creationId xmlns:a16="http://schemas.microsoft.com/office/drawing/2014/main" id="{91023B92-F8E6-4D8E-BA97-A828289C59CF}"/>
               </a:ext>
             </a:extLst>
           </p:cNvPr>
@@ -29300,7 +31110,7 @@
           <p:cNvPr id="6" name="">
             <a:extLst xmlns:a="http://schemas.openxmlformats.org/drawingml/2006/main">
               <a:ext uri="{FF2B5EF4-FFF2-40B4-BE49-F238E27FC236}">
-                <a16:creationId xmlns:a16="http://schemas.microsoft.com/office/drawing/2014/main" id="{BD39B9B7-FD95-4CF7-BE71-9EF70EB4F563}"/>
+                <a16:creationId xmlns:a16="http://schemas.microsoft.com/office/drawing/2014/main" id="{B3056443-ADA9-4965-AB7C-4FB3F94E5833}"/>
               </a:ext>
             </a:extLst>
           </p:cNvPr>
@@ -29364,7 +31174,7 @@
           <p:cNvPr id="7" name="">
             <a:extLst xmlns:a="http://schemas.openxmlformats.org/drawingml/2006/main">
               <a:ext uri="{FF2B5EF4-FFF2-40B4-BE49-F238E27FC236}">
-                <a16:creationId xmlns:a16="http://schemas.microsoft.com/office/drawing/2014/main" id="{783C522A-BF15-4342-B0D6-1B6B83F8F385}"/>
+                <a16:creationId xmlns:a16="http://schemas.microsoft.com/office/drawing/2014/main" id="{73B87380-098F-4257-8FE3-9CBF4B12785A}"/>
               </a:ext>
             </a:extLst>
           </p:cNvPr>
@@ -29428,7 +31238,7 @@
           <p:cNvPr id="8" name="">
             <a:extLst xmlns:a="http://schemas.openxmlformats.org/drawingml/2006/main">
               <a:ext uri="{FF2B5EF4-FFF2-40B4-BE49-F238E27FC236}">
-                <a16:creationId xmlns:a16="http://schemas.microsoft.com/office/drawing/2014/main" id="{9B8B173A-C4F3-479B-87A7-BBD6F07F5D99}"/>
+                <a16:creationId xmlns:a16="http://schemas.microsoft.com/office/drawing/2014/main" id="{C8F37E32-E635-4ED7-B29C-37D5D914CBE5}"/>
               </a:ext>
             </a:extLst>
           </p:cNvPr>
@@ -29461,7 +31271,7 @@
           <p:cNvPr id="9" name="">
             <a:extLst xmlns:a="http://schemas.openxmlformats.org/drawingml/2006/main">
               <a:ext uri="{FF2B5EF4-FFF2-40B4-BE49-F238E27FC236}">
-                <a16:creationId xmlns:a16="http://schemas.microsoft.com/office/drawing/2014/main" id="{6E286AE9-C82B-477C-9FF2-C23BEBEDC17F}"/>
+                <a16:creationId xmlns:a16="http://schemas.microsoft.com/office/drawing/2014/main" id="{214831A3-0402-4AA7-9A12-B000CB8FBD1C}"/>
               </a:ext>
             </a:extLst>
           </p:cNvPr>
@@ -29496,7 +31306,7 @@
           <p:cNvPr id="10" name="">
             <a:extLst xmlns:a="http://schemas.openxmlformats.org/drawingml/2006/main">
               <a:ext uri="{FF2B5EF4-FFF2-40B4-BE49-F238E27FC236}">
-                <a16:creationId xmlns:a16="http://schemas.microsoft.com/office/drawing/2014/main" id="{8AB6D5CA-13E4-4306-A57A-4DA6B7DA36BD}"/>
+                <a16:creationId xmlns:a16="http://schemas.microsoft.com/office/drawing/2014/main" id="{6592BAF8-0406-4387-8E98-DDFD8FA4AB4C}"/>
               </a:ext>
             </a:extLst>
           </p:cNvPr>
@@ -29560,7 +31370,7 @@
           <p:cNvPr id="11" name="">
             <a:extLst xmlns:a="http://schemas.openxmlformats.org/drawingml/2006/main">
               <a:ext uri="{FF2B5EF4-FFF2-40B4-BE49-F238E27FC236}">
-                <a16:creationId xmlns:a16="http://schemas.microsoft.com/office/drawing/2014/main" id="{2D6697DB-60FE-4C1F-9ECA-3121B2684F93}"/>
+                <a16:creationId xmlns:a16="http://schemas.microsoft.com/office/drawing/2014/main" id="{5FB26AD8-86E9-49FB-A9E0-CF3275F5D54D}"/>
               </a:ext>
             </a:extLst>
           </p:cNvPr>
@@ -29624,7 +31434,7 @@
           <p:cNvPr id="12" name="">
             <a:extLst xmlns:a="http://schemas.openxmlformats.org/drawingml/2006/main">
               <a:ext uri="{FF2B5EF4-FFF2-40B4-BE49-F238E27FC236}">
-                <a16:creationId xmlns:a16="http://schemas.microsoft.com/office/drawing/2014/main" id="{07563DC7-B36C-43D7-8ED2-7B15A879F591}"/>
+                <a16:creationId xmlns:a16="http://schemas.microsoft.com/office/drawing/2014/main" id="{8E4A051A-C945-43F5-9884-457DEB6F0EE1}"/>
               </a:ext>
             </a:extLst>
           </p:cNvPr>
@@ -29657,7 +31467,7 @@
           <p:cNvPr id="13" name="">
             <a:extLst xmlns:a="http://schemas.openxmlformats.org/drawingml/2006/main">
               <a:ext uri="{FF2B5EF4-FFF2-40B4-BE49-F238E27FC236}">
-                <a16:creationId xmlns:a16="http://schemas.microsoft.com/office/drawing/2014/main" id="{454DFB26-D0A4-4040-A498-A0EB7746C870}"/>
+                <a16:creationId xmlns:a16="http://schemas.microsoft.com/office/drawing/2014/main" id="{200C07D3-C853-4628-AD82-A82592B44DCD}"/>
               </a:ext>
             </a:extLst>
           </p:cNvPr>
@@ -29692,7 +31502,7 @@
           <p:cNvPr id="14" name="">
             <a:extLst xmlns:a="http://schemas.openxmlformats.org/drawingml/2006/main">
               <a:ext uri="{FF2B5EF4-FFF2-40B4-BE49-F238E27FC236}">
-                <a16:creationId xmlns:a16="http://schemas.microsoft.com/office/drawing/2014/main" id="{EE60C943-2676-45BF-AD78-3070F371CDE1}"/>
+                <a16:creationId xmlns:a16="http://schemas.microsoft.com/office/drawing/2014/main" id="{D0A26B48-8AFD-4E36-8895-A378E83AF04B}"/>
               </a:ext>
             </a:extLst>
           </p:cNvPr>
@@ -29756,7 +31566,7 @@
           <p:cNvPr id="15" name="">
             <a:extLst xmlns:a="http://schemas.openxmlformats.org/drawingml/2006/main">
               <a:ext uri="{FF2B5EF4-FFF2-40B4-BE49-F238E27FC236}">
-                <a16:creationId xmlns:a16="http://schemas.microsoft.com/office/drawing/2014/main" id="{9F295254-5A8D-4A8D-9139-8A6A78F9EAFB}"/>
+                <a16:creationId xmlns:a16="http://schemas.microsoft.com/office/drawing/2014/main" id="{05BD0B20-68A9-4592-B07E-6042B863278E}"/>
               </a:ext>
             </a:extLst>
           </p:cNvPr>
@@ -29820,7 +31630,7 @@
           <p:cNvPr id="16" name="">
             <a:extLst xmlns:a="http://schemas.openxmlformats.org/drawingml/2006/main">
               <a:ext uri="{FF2B5EF4-FFF2-40B4-BE49-F238E27FC236}">
-                <a16:creationId xmlns:a16="http://schemas.microsoft.com/office/drawing/2014/main" id="{917BA83B-5442-4746-9C21-9EF8EE6EC299}"/>
+                <a16:creationId xmlns:a16="http://schemas.microsoft.com/office/drawing/2014/main" id="{03003566-0BDA-4482-8A12-0CB40D2A5951}"/>
               </a:ext>
             </a:extLst>
           </p:cNvPr>
@@ -29853,7 +31663,7 @@
           <p:cNvPr id="17" name="">
             <a:extLst xmlns:a="http://schemas.openxmlformats.org/drawingml/2006/main">
               <a:ext uri="{FF2B5EF4-FFF2-40B4-BE49-F238E27FC236}">
-                <a16:creationId xmlns:a16="http://schemas.microsoft.com/office/drawing/2014/main" id="{31876815-2FA2-4934-9CDD-D2413F90C033}"/>
+                <a16:creationId xmlns:a16="http://schemas.microsoft.com/office/drawing/2014/main" id="{98152DC1-F2A0-4349-9061-052E88ECEBFD}"/>
               </a:ext>
             </a:extLst>
           </p:cNvPr>
@@ -29888,7 +31698,7 @@
           <p:cNvPr id="18" name="">
             <a:extLst xmlns:a="http://schemas.openxmlformats.org/drawingml/2006/main">
               <a:ext uri="{FF2B5EF4-FFF2-40B4-BE49-F238E27FC236}">
-                <a16:creationId xmlns:a16="http://schemas.microsoft.com/office/drawing/2014/main" id="{CD57517B-05FD-4D85-8274-FBC8CB8DC0EE}"/>
+                <a16:creationId xmlns:a16="http://schemas.microsoft.com/office/drawing/2014/main" id="{39D30B8E-DA50-4EA3-9264-E6B209DE1806}"/>
               </a:ext>
             </a:extLst>
           </p:cNvPr>
@@ -29952,7 +31762,7 @@
           <p:cNvPr id="19" name="">
             <a:extLst xmlns:a="http://schemas.openxmlformats.org/drawingml/2006/main">
               <a:ext uri="{FF2B5EF4-FFF2-40B4-BE49-F238E27FC236}">
-                <a16:creationId xmlns:a16="http://schemas.microsoft.com/office/drawing/2014/main" id="{0DE021C9-71CB-4F30-A2F4-BC3ED88DDA75}"/>
+                <a16:creationId xmlns:a16="http://schemas.microsoft.com/office/drawing/2014/main" id="{48410625-A38D-4D63-BE68-A5797581DFC5}"/>
               </a:ext>
             </a:extLst>
           </p:cNvPr>
@@ -30014,7 +31824,7 @@
     </p:spTree>
     <p:extLst>
       <p:ext uri="{BB962C8B-B14F-4D97-AF65-F5344CB8AC3E}">
-        <p14:creationId xmlns:p14="http://schemas.microsoft.com/office/powerpoint/2010/main" val="1715854868"/>
+        <p14:creationId xmlns:p14="http://schemas.microsoft.com/office/powerpoint/2010/main" val="642021445"/>
       </p:ext>
     </p:extLst>
   </p:cSld>
@@ -30038,7 +31848,7 @@
           <p:cNvPr id="1" name="">
             <a:extLst xmlns:a="http://schemas.openxmlformats.org/drawingml/2006/main">
               <a:ext uri="{FF2B5EF4-FFF2-40B4-BE49-F238E27FC236}">
-                <a16:creationId xmlns:a16="http://schemas.microsoft.com/office/drawing/2014/main" id="{45315167-1C04-48B4-B042-C5BDA219F7CF}"/>
+                <a16:creationId xmlns:a16="http://schemas.microsoft.com/office/drawing/2014/main" id="{2FB92680-8885-44DE-AABC-E6466ADB43F4}"/>
               </a:ext>
             </a:extLst>
           </p:cNvPr>
@@ -30073,7 +31883,7 @@
           <p:cNvPr id="2" name="">
             <a:extLst xmlns:a="http://schemas.openxmlformats.org/drawingml/2006/main">
               <a:ext uri="{FF2B5EF4-FFF2-40B4-BE49-F238E27FC236}">
-                <a16:creationId xmlns:a16="http://schemas.microsoft.com/office/drawing/2014/main" id="{29FBADEE-0419-4046-9356-6B6D7AFED42D}"/>
+                <a16:creationId xmlns:a16="http://schemas.microsoft.com/office/drawing/2014/main" id="{D95A935E-0379-4CED-BA52-BF0E4D661213}"/>
               </a:ext>
             </a:extLst>
           </p:cNvPr>
@@ -30108,7 +31918,7 @@
           <p:cNvPr id="3" name="">
             <a:extLst xmlns:a="http://schemas.openxmlformats.org/drawingml/2006/main">
               <a:ext uri="{FF2B5EF4-FFF2-40B4-BE49-F238E27FC236}">
-                <a16:creationId xmlns:a16="http://schemas.microsoft.com/office/drawing/2014/main" id="{DC02BCF7-6D22-4FBA-A6F5-F2D862F06522}"/>
+                <a16:creationId xmlns:a16="http://schemas.microsoft.com/office/drawing/2014/main" id="{4493B003-0573-4DDD-81FD-2E3C442F3225}"/>
               </a:ext>
             </a:extLst>
           </p:cNvPr>
@@ -30143,7 +31953,7 @@
           <p:cNvPr id="4" name="">
             <a:extLst xmlns:a="http://schemas.openxmlformats.org/drawingml/2006/main">
               <a:ext uri="{FF2B5EF4-FFF2-40B4-BE49-F238E27FC236}">
-                <a16:creationId xmlns:a16="http://schemas.microsoft.com/office/drawing/2014/main" id="{230AE759-FBCE-4A58-90C8-7272A9F1917C}"/>
+                <a16:creationId xmlns:a16="http://schemas.microsoft.com/office/drawing/2014/main" id="{E3ACAF8E-EEB7-4F43-8574-6CAA12027A13}"/>
               </a:ext>
             </a:extLst>
           </p:cNvPr>
@@ -30207,7 +32017,7 @@
           <p:cNvPr id="5" name="">
             <a:extLst xmlns:a="http://schemas.openxmlformats.org/drawingml/2006/main">
               <a:ext uri="{FF2B5EF4-FFF2-40B4-BE49-F238E27FC236}">
-                <a16:creationId xmlns:a16="http://schemas.microsoft.com/office/drawing/2014/main" id="{F0C84BEC-BB3D-4970-A2AC-0B8E9C806051}"/>
+                <a16:creationId xmlns:a16="http://schemas.microsoft.com/office/drawing/2014/main" id="{6B1CE98D-1C1D-40BD-A5FF-BE45E166327B}"/>
               </a:ext>
             </a:extLst>
           </p:cNvPr>
@@ -30271,7 +32081,7 @@
           <p:cNvPr id="6" name="">
             <a:extLst xmlns:a="http://schemas.openxmlformats.org/drawingml/2006/main">
               <a:ext uri="{FF2B5EF4-FFF2-40B4-BE49-F238E27FC236}">
-                <a16:creationId xmlns:a16="http://schemas.microsoft.com/office/drawing/2014/main" id="{ED858532-6B23-465D-99C2-9C73E0B0F23A}"/>
+                <a16:creationId xmlns:a16="http://schemas.microsoft.com/office/drawing/2014/main" id="{5DF0B47C-CF23-4F1D-A8F7-6DEBFA87B76E}"/>
               </a:ext>
             </a:extLst>
           </p:cNvPr>
@@ -30335,7 +32145,7 @@
           <p:cNvPr id="7" name="">
             <a:extLst xmlns:a="http://schemas.openxmlformats.org/drawingml/2006/main">
               <a:ext uri="{FF2B5EF4-FFF2-40B4-BE49-F238E27FC236}">
-                <a16:creationId xmlns:a16="http://schemas.microsoft.com/office/drawing/2014/main" id="{12E67915-C8EA-4B1D-B00C-024A8931318D}"/>
+                <a16:creationId xmlns:a16="http://schemas.microsoft.com/office/drawing/2014/main" id="{9479756E-8B84-41B0-9A25-B6AB33F30808}"/>
               </a:ext>
             </a:extLst>
           </p:cNvPr>
@@ -30399,7 +32209,7 @@
           <p:cNvPr id="8" name="">
             <a:extLst xmlns:a="http://schemas.openxmlformats.org/drawingml/2006/main">
               <a:ext uri="{FF2B5EF4-FFF2-40B4-BE49-F238E27FC236}">
-                <a16:creationId xmlns:a16="http://schemas.microsoft.com/office/drawing/2014/main" id="{66EAF82E-CC13-4E49-A0E5-144691CA8322}"/>
+                <a16:creationId xmlns:a16="http://schemas.microsoft.com/office/drawing/2014/main" id="{9B3BD475-902A-4309-AFE6-C06243C26BD2}"/>
               </a:ext>
             </a:extLst>
           </p:cNvPr>
@@ -30432,7 +32242,7 @@
           <p:cNvPr id="9" name="">
             <a:extLst xmlns:a="http://schemas.openxmlformats.org/drawingml/2006/main">
               <a:ext uri="{FF2B5EF4-FFF2-40B4-BE49-F238E27FC236}">
-                <a16:creationId xmlns:a16="http://schemas.microsoft.com/office/drawing/2014/main" id="{CEBB6C36-8562-4774-A8C4-CE56211FAFC9}"/>
+                <a16:creationId xmlns:a16="http://schemas.microsoft.com/office/drawing/2014/main" id="{76C86B56-755F-4149-8B52-D9CE6009BB2A}"/>
               </a:ext>
             </a:extLst>
           </p:cNvPr>
@@ -30467,7 +32277,7 @@
           <p:cNvPr id="10" name="">
             <a:extLst xmlns:a="http://schemas.openxmlformats.org/drawingml/2006/main">
               <a:ext uri="{FF2B5EF4-FFF2-40B4-BE49-F238E27FC236}">
-                <a16:creationId xmlns:a16="http://schemas.microsoft.com/office/drawing/2014/main" id="{CB9D7605-3582-41BE-960B-5AAA9DE73C47}"/>
+                <a16:creationId xmlns:a16="http://schemas.microsoft.com/office/drawing/2014/main" id="{35668EBD-555E-487D-87A5-5BF20A88EBFC}"/>
               </a:ext>
             </a:extLst>
           </p:cNvPr>
@@ -30531,7 +32341,7 @@
           <p:cNvPr id="11" name="">
             <a:extLst xmlns:a="http://schemas.openxmlformats.org/drawingml/2006/main">
               <a:ext uri="{FF2B5EF4-FFF2-40B4-BE49-F238E27FC236}">
-                <a16:creationId xmlns:a16="http://schemas.microsoft.com/office/drawing/2014/main" id="{F981BDA1-8484-4225-B18E-6EAC991EB435}"/>
+                <a16:creationId xmlns:a16="http://schemas.microsoft.com/office/drawing/2014/main" id="{90A589DB-4E5E-47F5-95F7-D4AC92A0608D}"/>
               </a:ext>
             </a:extLst>
           </p:cNvPr>
@@ -30595,7 +32405,7 @@
           <p:cNvPr id="12" name="">
             <a:extLst xmlns:a="http://schemas.openxmlformats.org/drawingml/2006/main">
               <a:ext uri="{FF2B5EF4-FFF2-40B4-BE49-F238E27FC236}">
-                <a16:creationId xmlns:a16="http://schemas.microsoft.com/office/drawing/2014/main" id="{38520EC2-42E2-48FE-95B4-B26B53A5BE41}"/>
+                <a16:creationId xmlns:a16="http://schemas.microsoft.com/office/drawing/2014/main" id="{92A15CEA-2710-4659-8AAC-E2EF775C304F}"/>
               </a:ext>
             </a:extLst>
           </p:cNvPr>
@@ -30628,7 +32438,7 @@
           <p:cNvPr id="13" name="">
             <a:extLst xmlns:a="http://schemas.openxmlformats.org/drawingml/2006/main">
               <a:ext uri="{FF2B5EF4-FFF2-40B4-BE49-F238E27FC236}">
-                <a16:creationId xmlns:a16="http://schemas.microsoft.com/office/drawing/2014/main" id="{018D8935-DA28-428E-859A-DB47245238FC}"/>
+                <a16:creationId xmlns:a16="http://schemas.microsoft.com/office/drawing/2014/main" id="{56E3DF2D-137D-473D-B82F-71C359BCDBE1}"/>
               </a:ext>
             </a:extLst>
           </p:cNvPr>
@@ -30663,7 +32473,7 @@
           <p:cNvPr id="14" name="">
             <a:extLst xmlns:a="http://schemas.openxmlformats.org/drawingml/2006/main">
               <a:ext uri="{FF2B5EF4-FFF2-40B4-BE49-F238E27FC236}">
-                <a16:creationId xmlns:a16="http://schemas.microsoft.com/office/drawing/2014/main" id="{677DF460-C4DD-4284-AD42-B1A068537841}"/>
+                <a16:creationId xmlns:a16="http://schemas.microsoft.com/office/drawing/2014/main" id="{4D5D0C8D-99C1-44AA-B7DA-062BA36141F4}"/>
               </a:ext>
             </a:extLst>
           </p:cNvPr>
@@ -30727,7 +32537,7 @@
           <p:cNvPr id="15" name="">
             <a:extLst xmlns:a="http://schemas.openxmlformats.org/drawingml/2006/main">
               <a:ext uri="{FF2B5EF4-FFF2-40B4-BE49-F238E27FC236}">
-                <a16:creationId xmlns:a16="http://schemas.microsoft.com/office/drawing/2014/main" id="{3E3E3C24-2888-4427-8D50-669A70E9A5FF}"/>
+                <a16:creationId xmlns:a16="http://schemas.microsoft.com/office/drawing/2014/main" id="{09BB577C-B2FE-4F92-9332-C9209E69B72C}"/>
               </a:ext>
             </a:extLst>
           </p:cNvPr>
@@ -30791,7 +32601,7 @@
           <p:cNvPr id="16" name="">
             <a:extLst xmlns:a="http://schemas.openxmlformats.org/drawingml/2006/main">
               <a:ext uri="{FF2B5EF4-FFF2-40B4-BE49-F238E27FC236}">
-                <a16:creationId xmlns:a16="http://schemas.microsoft.com/office/drawing/2014/main" id="{8C7DD7B1-DE84-4B8F-97F4-CF90754E7BBC}"/>
+                <a16:creationId xmlns:a16="http://schemas.microsoft.com/office/drawing/2014/main" id="{7BE323D6-F017-4A46-B954-E312AE15BCED}"/>
               </a:ext>
             </a:extLst>
           </p:cNvPr>
@@ -30824,7 +32634,7 @@
           <p:cNvPr id="17" name="">
             <a:extLst xmlns:a="http://schemas.openxmlformats.org/drawingml/2006/main">
               <a:ext uri="{FF2B5EF4-FFF2-40B4-BE49-F238E27FC236}">
-                <a16:creationId xmlns:a16="http://schemas.microsoft.com/office/drawing/2014/main" id="{404B0432-E4EC-43D2-B3A8-35C25A0C6152}"/>
+                <a16:creationId xmlns:a16="http://schemas.microsoft.com/office/drawing/2014/main" id="{49D0A74E-DF75-4D6A-9676-F31F503A61F7}"/>
               </a:ext>
             </a:extLst>
           </p:cNvPr>
@@ -30859,7 +32669,7 @@
           <p:cNvPr id="18" name="">
             <a:extLst xmlns:a="http://schemas.openxmlformats.org/drawingml/2006/main">
               <a:ext uri="{FF2B5EF4-FFF2-40B4-BE49-F238E27FC236}">
-                <a16:creationId xmlns:a16="http://schemas.microsoft.com/office/drawing/2014/main" id="{D4D977B7-1DE6-4313-AD28-DD056D1B0613}"/>
+                <a16:creationId xmlns:a16="http://schemas.microsoft.com/office/drawing/2014/main" id="{09CFDAB3-261D-48F9-A90F-E55185159245}"/>
               </a:ext>
             </a:extLst>
           </p:cNvPr>
@@ -30923,7 +32733,7 @@
           <p:cNvPr id="19" name="">
             <a:extLst xmlns:a="http://schemas.openxmlformats.org/drawingml/2006/main">
               <a:ext uri="{FF2B5EF4-FFF2-40B4-BE49-F238E27FC236}">
-                <a16:creationId xmlns:a16="http://schemas.microsoft.com/office/drawing/2014/main" id="{470060FE-A188-4D58-B078-42A5AB5C09CE}"/>
+                <a16:creationId xmlns:a16="http://schemas.microsoft.com/office/drawing/2014/main" id="{61CAAAF7-F1AE-4106-BD8B-B0435CE532AF}"/>
               </a:ext>
             </a:extLst>
           </p:cNvPr>
@@ -30985,7 +32795,7 @@
     </p:spTree>
     <p:extLst>
       <p:ext uri="{BB962C8B-B14F-4D97-AF65-F5344CB8AC3E}">
-        <p14:creationId xmlns:p14="http://schemas.microsoft.com/office/powerpoint/2010/main" val="1415752908"/>
+        <p14:creationId xmlns:p14="http://schemas.microsoft.com/office/powerpoint/2010/main" val="1697697738"/>
       </p:ext>
     </p:extLst>
   </p:cSld>
@@ -31009,7 +32819,7 @@
           <p:cNvPr id="1" name="">
             <a:extLst xmlns:a="http://schemas.openxmlformats.org/drawingml/2006/main">
               <a:ext uri="{FF2B5EF4-FFF2-40B4-BE49-F238E27FC236}">
-                <a16:creationId xmlns:a16="http://schemas.microsoft.com/office/drawing/2014/main" id="{43E9DCE7-3C05-4BDA-8F84-58B1D77D9FD7}"/>
+                <a16:creationId xmlns:a16="http://schemas.microsoft.com/office/drawing/2014/main" id="{1E10D291-2AB9-4121-9192-3E9D50E4A8D5}"/>
               </a:ext>
             </a:extLst>
           </p:cNvPr>
@@ -31044,7 +32854,7 @@
           <p:cNvPr id="2" name="">
             <a:extLst xmlns:a="http://schemas.openxmlformats.org/drawingml/2006/main">
               <a:ext uri="{FF2B5EF4-FFF2-40B4-BE49-F238E27FC236}">
-                <a16:creationId xmlns:a16="http://schemas.microsoft.com/office/drawing/2014/main" id="{47C41FE2-E673-422B-8774-B99E39C387B8}"/>
+                <a16:creationId xmlns:a16="http://schemas.microsoft.com/office/drawing/2014/main" id="{853E4A16-7796-4E2C-91AA-2ED97458DB2F}"/>
               </a:ext>
             </a:extLst>
           </p:cNvPr>
@@ -31079,7 +32889,7 @@
           <p:cNvPr id="3" name="">
             <a:extLst xmlns:a="http://schemas.openxmlformats.org/drawingml/2006/main">
               <a:ext uri="{FF2B5EF4-FFF2-40B4-BE49-F238E27FC236}">
-                <a16:creationId xmlns:a16="http://schemas.microsoft.com/office/drawing/2014/main" id="{0618A58B-8FEF-46A6-8A52-1D5EF8C7104D}"/>
+                <a16:creationId xmlns:a16="http://schemas.microsoft.com/office/drawing/2014/main" id="{75AC498F-30FF-4BD5-8EF2-5F92F767E802}"/>
               </a:ext>
             </a:extLst>
           </p:cNvPr>
@@ -31114,7 +32924,7 @@
           <p:cNvPr id="4" name="">
             <a:extLst xmlns:a="http://schemas.openxmlformats.org/drawingml/2006/main">
               <a:ext uri="{FF2B5EF4-FFF2-40B4-BE49-F238E27FC236}">
-                <a16:creationId xmlns:a16="http://schemas.microsoft.com/office/drawing/2014/main" id="{CA7701C4-B383-43BA-84BC-C2A12C6614A4}"/>
+                <a16:creationId xmlns:a16="http://schemas.microsoft.com/office/drawing/2014/main" id="{BB3BEF12-1DB1-453E-85B1-1927005A7443}"/>
               </a:ext>
             </a:extLst>
           </p:cNvPr>
@@ -31178,7 +32988,7 @@
           <p:cNvPr id="5" name="">
             <a:extLst xmlns:a="http://schemas.openxmlformats.org/drawingml/2006/main">
               <a:ext uri="{FF2B5EF4-FFF2-40B4-BE49-F238E27FC236}">
-                <a16:creationId xmlns:a16="http://schemas.microsoft.com/office/drawing/2014/main" id="{955556D3-6F3B-45AC-9DC6-31428E35634D}"/>
+                <a16:creationId xmlns:a16="http://schemas.microsoft.com/office/drawing/2014/main" id="{71A277FA-F584-448B-BAE4-BEF5765685AB}"/>
               </a:ext>
             </a:extLst>
           </p:cNvPr>
@@ -31242,7 +33052,7 @@
           <p:cNvPr id="6" name="">
             <a:extLst xmlns:a="http://schemas.openxmlformats.org/drawingml/2006/main">
               <a:ext uri="{FF2B5EF4-FFF2-40B4-BE49-F238E27FC236}">
-                <a16:creationId xmlns:a16="http://schemas.microsoft.com/office/drawing/2014/main" id="{7706E326-2AAC-4D21-8D59-16B1EFA80667}"/>
+                <a16:creationId xmlns:a16="http://schemas.microsoft.com/office/drawing/2014/main" id="{2447BDCA-937E-4B17-9686-89DCFEBA5EF8}"/>
               </a:ext>
             </a:extLst>
           </p:cNvPr>
@@ -31306,7 +33116,7 @@
           <p:cNvPr id="7" name="">
             <a:extLst xmlns:a="http://schemas.openxmlformats.org/drawingml/2006/main">
               <a:ext uri="{FF2B5EF4-FFF2-40B4-BE49-F238E27FC236}">
-                <a16:creationId xmlns:a16="http://schemas.microsoft.com/office/drawing/2014/main" id="{0C709ED0-7C74-4865-A090-065252051AE9}"/>
+                <a16:creationId xmlns:a16="http://schemas.microsoft.com/office/drawing/2014/main" id="{694279F4-FF36-4BCC-B61D-384D1DFA9851}"/>
               </a:ext>
             </a:extLst>
           </p:cNvPr>
@@ -31370,7 +33180,7 @@
           <p:cNvPr id="8" name="">
             <a:extLst xmlns:a="http://schemas.openxmlformats.org/drawingml/2006/main">
               <a:ext uri="{FF2B5EF4-FFF2-40B4-BE49-F238E27FC236}">
-                <a16:creationId xmlns:a16="http://schemas.microsoft.com/office/drawing/2014/main" id="{5F986E6E-941D-47BF-808E-DD696535FEBC}"/>
+                <a16:creationId xmlns:a16="http://schemas.microsoft.com/office/drawing/2014/main" id="{35E471D3-0F61-4D07-989E-3DB4C5B87BB2}"/>
               </a:ext>
             </a:extLst>
           </p:cNvPr>
@@ -31403,7 +33213,7 @@
           <p:cNvPr id="9" name="">
             <a:extLst xmlns:a="http://schemas.openxmlformats.org/drawingml/2006/main">
               <a:ext uri="{FF2B5EF4-FFF2-40B4-BE49-F238E27FC236}">
-                <a16:creationId xmlns:a16="http://schemas.microsoft.com/office/drawing/2014/main" id="{8865D7DC-23DE-4B7D-943D-36AC24D4280B}"/>
+                <a16:creationId xmlns:a16="http://schemas.microsoft.com/office/drawing/2014/main" id="{191B2DBD-4A05-46BA-95A9-F78816EBBB3B}"/>
               </a:ext>
             </a:extLst>
           </p:cNvPr>
@@ -31438,7 +33248,7 @@
           <p:cNvPr id="10" name="">
             <a:extLst xmlns:a="http://schemas.openxmlformats.org/drawingml/2006/main">
               <a:ext uri="{FF2B5EF4-FFF2-40B4-BE49-F238E27FC236}">
-                <a16:creationId xmlns:a16="http://schemas.microsoft.com/office/drawing/2014/main" id="{C12AC0CE-7471-4E68-8818-9B1E48D678AD}"/>
+                <a16:creationId xmlns:a16="http://schemas.microsoft.com/office/drawing/2014/main" id="{A1DAD032-95F8-460D-8DB7-6CA135CB680C}"/>
               </a:ext>
             </a:extLst>
           </p:cNvPr>
@@ -31502,7 +33312,7 @@
           <p:cNvPr id="11" name="">
             <a:extLst xmlns:a="http://schemas.openxmlformats.org/drawingml/2006/main">
               <a:ext uri="{FF2B5EF4-FFF2-40B4-BE49-F238E27FC236}">
-                <a16:creationId xmlns:a16="http://schemas.microsoft.com/office/drawing/2014/main" id="{E6C5AE01-ECBC-4BD4-A975-7DF622F02CE0}"/>
+                <a16:creationId xmlns:a16="http://schemas.microsoft.com/office/drawing/2014/main" id="{6FE74FF1-128E-4F17-B384-A29669A1921B}"/>
               </a:ext>
             </a:extLst>
           </p:cNvPr>
@@ -31566,7 +33376,7 @@
           <p:cNvPr id="12" name="">
             <a:extLst xmlns:a="http://schemas.openxmlformats.org/drawingml/2006/main">
               <a:ext uri="{FF2B5EF4-FFF2-40B4-BE49-F238E27FC236}">
-                <a16:creationId xmlns:a16="http://schemas.microsoft.com/office/drawing/2014/main" id="{55E0C28B-9AFE-45B0-9E00-81656F1E5D91}"/>
+                <a16:creationId xmlns:a16="http://schemas.microsoft.com/office/drawing/2014/main" id="{01E80FEA-D7B5-4F4D-B623-CBD9AA1911F7}"/>
               </a:ext>
             </a:extLst>
           </p:cNvPr>
@@ -31599,7 +33409,7 @@
           <p:cNvPr id="13" name="">
             <a:extLst xmlns:a="http://schemas.openxmlformats.org/drawingml/2006/main">
               <a:ext uri="{FF2B5EF4-FFF2-40B4-BE49-F238E27FC236}">
-                <a16:creationId xmlns:a16="http://schemas.microsoft.com/office/drawing/2014/main" id="{F2E9B173-F9D1-4E95-9EBE-5D82C987C9C2}"/>
+                <a16:creationId xmlns:a16="http://schemas.microsoft.com/office/drawing/2014/main" id="{92EEF8D5-D838-426A-B421-DB24DE90589A}"/>
               </a:ext>
             </a:extLst>
           </p:cNvPr>
@@ -31634,7 +33444,7 @@
           <p:cNvPr id="14" name="">
             <a:extLst xmlns:a="http://schemas.openxmlformats.org/drawingml/2006/main">
               <a:ext uri="{FF2B5EF4-FFF2-40B4-BE49-F238E27FC236}">
-                <a16:creationId xmlns:a16="http://schemas.microsoft.com/office/drawing/2014/main" id="{E04758C7-14B3-4FEF-93C0-79942ACB4F66}"/>
+                <a16:creationId xmlns:a16="http://schemas.microsoft.com/office/drawing/2014/main" id="{EAC137E8-6093-4981-A5DA-0EA9BDD0887E}"/>
               </a:ext>
             </a:extLst>
           </p:cNvPr>
@@ -31698,7 +33508,7 @@
           <p:cNvPr id="15" name="">
             <a:extLst xmlns:a="http://schemas.openxmlformats.org/drawingml/2006/main">
               <a:ext uri="{FF2B5EF4-FFF2-40B4-BE49-F238E27FC236}">
-                <a16:creationId xmlns:a16="http://schemas.microsoft.com/office/drawing/2014/main" id="{E8337137-1C13-4A5F-9EBA-B8ECFE5DB80C}"/>
+                <a16:creationId xmlns:a16="http://schemas.microsoft.com/office/drawing/2014/main" id="{CD085AFB-09CB-4DA9-A828-382FA4442866}"/>
               </a:ext>
             </a:extLst>
           </p:cNvPr>
@@ -31762,7 +33572,7 @@
           <p:cNvPr id="16" name="">
             <a:extLst xmlns:a="http://schemas.openxmlformats.org/drawingml/2006/main">
               <a:ext uri="{FF2B5EF4-FFF2-40B4-BE49-F238E27FC236}">
-                <a16:creationId xmlns:a16="http://schemas.microsoft.com/office/drawing/2014/main" id="{6BA089EA-E02B-43E8-BD51-FEDB98A37424}"/>
+                <a16:creationId xmlns:a16="http://schemas.microsoft.com/office/drawing/2014/main" id="{6F5CBF18-9F29-4E28-A70B-0C6061399C8C}"/>
               </a:ext>
             </a:extLst>
           </p:cNvPr>
@@ -31795,7 +33605,7 @@
           <p:cNvPr id="17" name="">
             <a:extLst xmlns:a="http://schemas.openxmlformats.org/drawingml/2006/main">
               <a:ext uri="{FF2B5EF4-FFF2-40B4-BE49-F238E27FC236}">
-                <a16:creationId xmlns:a16="http://schemas.microsoft.com/office/drawing/2014/main" id="{F5CD6737-B922-4D2D-BA2B-59F4A3AB06D2}"/>
+                <a16:creationId xmlns:a16="http://schemas.microsoft.com/office/drawing/2014/main" id="{8DDCDFDC-061D-4693-9D5D-04672217B30E}"/>
               </a:ext>
             </a:extLst>
           </p:cNvPr>
@@ -31830,7 +33640,7 @@
           <p:cNvPr id="18" name="">
             <a:extLst xmlns:a="http://schemas.openxmlformats.org/drawingml/2006/main">
               <a:ext uri="{FF2B5EF4-FFF2-40B4-BE49-F238E27FC236}">
-                <a16:creationId xmlns:a16="http://schemas.microsoft.com/office/drawing/2014/main" id="{A0C90DD1-4534-44B6-B758-A768C4AFE008}"/>
+                <a16:creationId xmlns:a16="http://schemas.microsoft.com/office/drawing/2014/main" id="{0D7EF7A2-4E66-4D0E-B03B-24999B637E49}"/>
               </a:ext>
             </a:extLst>
           </p:cNvPr>
@@ -31894,7 +33704,7 @@
           <p:cNvPr id="19" name="">
             <a:extLst xmlns:a="http://schemas.openxmlformats.org/drawingml/2006/main">
               <a:ext uri="{FF2B5EF4-FFF2-40B4-BE49-F238E27FC236}">
-                <a16:creationId xmlns:a16="http://schemas.microsoft.com/office/drawing/2014/main" id="{EF789C5C-6A76-4E52-AD36-022824416548}"/>
+                <a16:creationId xmlns:a16="http://schemas.microsoft.com/office/drawing/2014/main" id="{C3F7723B-654A-4F04-B720-D322C24C8F65}"/>
               </a:ext>
             </a:extLst>
           </p:cNvPr>
@@ -31958,7 +33768,7 @@
           <p:cNvPr id="20" name="">
             <a:extLst xmlns:a="http://schemas.openxmlformats.org/drawingml/2006/main">
               <a:ext uri="{FF2B5EF4-FFF2-40B4-BE49-F238E27FC236}">
-                <a16:creationId xmlns:a16="http://schemas.microsoft.com/office/drawing/2014/main" id="{43FB3A51-2E01-4803-B8BA-779766288537}"/>
+                <a16:creationId xmlns:a16="http://schemas.microsoft.com/office/drawing/2014/main" id="{C9E8BF67-8072-4746-B4D4-702BF5149B5B}"/>
               </a:ext>
             </a:extLst>
           </p:cNvPr>
@@ -31991,7 +33801,7 @@
           <p:cNvPr id="21" name="">
             <a:extLst xmlns:a="http://schemas.openxmlformats.org/drawingml/2006/main">
               <a:ext uri="{FF2B5EF4-FFF2-40B4-BE49-F238E27FC236}">
-                <a16:creationId xmlns:a16="http://schemas.microsoft.com/office/drawing/2014/main" id="{259DE0AC-63C8-4F4A-9D32-DE8B5932A548}"/>
+                <a16:creationId xmlns:a16="http://schemas.microsoft.com/office/drawing/2014/main" id="{39BB9EF7-055E-40CE-9790-F417AC9AB774}"/>
               </a:ext>
             </a:extLst>
           </p:cNvPr>
@@ -32026,7 +33836,7 @@
           <p:cNvPr id="22" name="">
             <a:extLst xmlns:a="http://schemas.openxmlformats.org/drawingml/2006/main">
               <a:ext uri="{FF2B5EF4-FFF2-40B4-BE49-F238E27FC236}">
-                <a16:creationId xmlns:a16="http://schemas.microsoft.com/office/drawing/2014/main" id="{4F5F5EFD-E194-409B-9745-FB336416C9D4}"/>
+                <a16:creationId xmlns:a16="http://schemas.microsoft.com/office/drawing/2014/main" id="{397E105E-99CB-456B-BBA7-CDE94C879C58}"/>
               </a:ext>
             </a:extLst>
           </p:cNvPr>
@@ -32090,7 +33900,7 @@
           <p:cNvPr id="23" name="">
             <a:extLst xmlns:a="http://schemas.openxmlformats.org/drawingml/2006/main">
               <a:ext uri="{FF2B5EF4-FFF2-40B4-BE49-F238E27FC236}">
-                <a16:creationId xmlns:a16="http://schemas.microsoft.com/office/drawing/2014/main" id="{744C82FB-899D-4D55-A682-D14EB6C569E9}"/>
+                <a16:creationId xmlns:a16="http://schemas.microsoft.com/office/drawing/2014/main" id="{0162B22F-6004-4F43-8226-C364CE8EFDC4}"/>
               </a:ext>
             </a:extLst>
           </p:cNvPr>
@@ -32152,7 +33962,7 @@
     </p:spTree>
     <p:extLst>
       <p:ext uri="{BB962C8B-B14F-4D97-AF65-F5344CB8AC3E}">
-        <p14:creationId xmlns:p14="http://schemas.microsoft.com/office/powerpoint/2010/main" val="1217459444"/>
+        <p14:creationId xmlns:p14="http://schemas.microsoft.com/office/powerpoint/2010/main" val="1055304698"/>
       </p:ext>
     </p:extLst>
   </p:cSld>
@@ -32176,7 +33986,7 @@
           <p:cNvPr id="1" name="">
             <a:extLst xmlns:a="http://schemas.openxmlformats.org/drawingml/2006/main">
               <a:ext uri="{FF2B5EF4-FFF2-40B4-BE49-F238E27FC236}">
-                <a16:creationId xmlns:a16="http://schemas.microsoft.com/office/drawing/2014/main" id="{990FC82B-07AE-4F6E-BDD2-F30D0BE7256A}"/>
+                <a16:creationId xmlns:a16="http://schemas.microsoft.com/office/drawing/2014/main" id="{DECB5F10-BA99-4F3E-89C7-CA6BED64CF63}"/>
               </a:ext>
             </a:extLst>
           </p:cNvPr>
@@ -32211,7 +34021,7 @@
           <p:cNvPr id="2" name="">
             <a:extLst xmlns:a="http://schemas.openxmlformats.org/drawingml/2006/main">
               <a:ext uri="{FF2B5EF4-FFF2-40B4-BE49-F238E27FC236}">
-                <a16:creationId xmlns:a16="http://schemas.microsoft.com/office/drawing/2014/main" id="{191746AB-D7DA-4F61-B0F3-5212E17E26BD}"/>
+                <a16:creationId xmlns:a16="http://schemas.microsoft.com/office/drawing/2014/main" id="{04D6C0FD-3641-41D1-B98A-843D63B5F6F5}"/>
               </a:ext>
             </a:extLst>
           </p:cNvPr>
@@ -32246,7 +34056,7 @@
           <p:cNvPr id="3" name="">
             <a:extLst xmlns:a="http://schemas.openxmlformats.org/drawingml/2006/main">
               <a:ext uri="{FF2B5EF4-FFF2-40B4-BE49-F238E27FC236}">
-                <a16:creationId xmlns:a16="http://schemas.microsoft.com/office/drawing/2014/main" id="{1B1A5230-CCA0-4EB4-9E5D-B82B2BD5CD96}"/>
+                <a16:creationId xmlns:a16="http://schemas.microsoft.com/office/drawing/2014/main" id="{4F511B9A-D19A-4A0B-AE1B-FF0887683F30}"/>
               </a:ext>
             </a:extLst>
           </p:cNvPr>
@@ -32281,7 +34091,7 @@
           <p:cNvPr id="4" name="">
             <a:extLst xmlns:a="http://schemas.openxmlformats.org/drawingml/2006/main">
               <a:ext uri="{FF2B5EF4-FFF2-40B4-BE49-F238E27FC236}">
-                <a16:creationId xmlns:a16="http://schemas.microsoft.com/office/drawing/2014/main" id="{436B68C0-683C-413D-9836-6F3292CBCCB0}"/>
+                <a16:creationId xmlns:a16="http://schemas.microsoft.com/office/drawing/2014/main" id="{E8292571-18F2-4BBC-BE5A-F1A31C7E31A0}"/>
               </a:ext>
             </a:extLst>
           </p:cNvPr>
@@ -32345,7 +34155,7 @@
           <p:cNvPr id="5" name="">
             <a:extLst xmlns:a="http://schemas.openxmlformats.org/drawingml/2006/main">
               <a:ext uri="{FF2B5EF4-FFF2-40B4-BE49-F238E27FC236}">
-                <a16:creationId xmlns:a16="http://schemas.microsoft.com/office/drawing/2014/main" id="{0009D439-18AD-4613-90E7-09F61C42B3D9}"/>
+                <a16:creationId xmlns:a16="http://schemas.microsoft.com/office/drawing/2014/main" id="{9BA448A9-60BF-4F61-B691-0E4D393F9DA9}"/>
               </a:ext>
             </a:extLst>
           </p:cNvPr>
@@ -32409,7 +34219,7 @@
           <p:cNvPr id="6" name="">
             <a:extLst xmlns:a="http://schemas.openxmlformats.org/drawingml/2006/main">
               <a:ext uri="{FF2B5EF4-FFF2-40B4-BE49-F238E27FC236}">
-                <a16:creationId xmlns:a16="http://schemas.microsoft.com/office/drawing/2014/main" id="{606FF487-4298-4464-9550-AC4B763579A3}"/>
+                <a16:creationId xmlns:a16="http://schemas.microsoft.com/office/drawing/2014/main" id="{2DFC4AEF-864C-4D12-B0C5-088306E40C04}"/>
               </a:ext>
             </a:extLst>
           </p:cNvPr>
@@ -32473,7 +34283,7 @@
           <p:cNvPr id="7" name="">
             <a:extLst xmlns:a="http://schemas.openxmlformats.org/drawingml/2006/main">
               <a:ext uri="{FF2B5EF4-FFF2-40B4-BE49-F238E27FC236}">
-                <a16:creationId xmlns:a16="http://schemas.microsoft.com/office/drawing/2014/main" id="{7E5AAC75-B712-45F0-86E0-39A52A2C41FD}"/>
+                <a16:creationId xmlns:a16="http://schemas.microsoft.com/office/drawing/2014/main" id="{AA7E334C-F999-40E7-8EFE-065C0EEC69C9}"/>
               </a:ext>
             </a:extLst>
           </p:cNvPr>
@@ -32537,7 +34347,7 @@
           <p:cNvPr id="8" name="">
             <a:extLst xmlns:a="http://schemas.openxmlformats.org/drawingml/2006/main">
               <a:ext uri="{FF2B5EF4-FFF2-40B4-BE49-F238E27FC236}">
-                <a16:creationId xmlns:a16="http://schemas.microsoft.com/office/drawing/2014/main" id="{9059FFEF-3A9B-441D-B1E1-9748E45CCBA5}"/>
+                <a16:creationId xmlns:a16="http://schemas.microsoft.com/office/drawing/2014/main" id="{5FF341BB-F48E-49A5-B3F1-CAA9F26E1082}"/>
               </a:ext>
             </a:extLst>
           </p:cNvPr>
@@ -32570,7 +34380,7 @@
           <p:cNvPr id="9" name="">
             <a:extLst xmlns:a="http://schemas.openxmlformats.org/drawingml/2006/main">
               <a:ext uri="{FF2B5EF4-FFF2-40B4-BE49-F238E27FC236}">
-                <a16:creationId xmlns:a16="http://schemas.microsoft.com/office/drawing/2014/main" id="{FECDECE0-9C72-4E38-907A-4E3733EE9E51}"/>
+                <a16:creationId xmlns:a16="http://schemas.microsoft.com/office/drawing/2014/main" id="{05545687-BE16-45AB-9C9E-3F8BC0BCAF62}"/>
               </a:ext>
             </a:extLst>
           </p:cNvPr>
@@ -32605,7 +34415,7 @@
           <p:cNvPr id="10" name="">
             <a:extLst xmlns:a="http://schemas.openxmlformats.org/drawingml/2006/main">
               <a:ext uri="{FF2B5EF4-FFF2-40B4-BE49-F238E27FC236}">
-                <a16:creationId xmlns:a16="http://schemas.microsoft.com/office/drawing/2014/main" id="{94A939DD-BB5E-43FC-8731-B063030C669C}"/>
+                <a16:creationId xmlns:a16="http://schemas.microsoft.com/office/drawing/2014/main" id="{776E21B2-5663-460D-8621-11DDB08E6B6F}"/>
               </a:ext>
             </a:extLst>
           </p:cNvPr>
@@ -32669,7 +34479,7 @@
           <p:cNvPr id="11" name="">
             <a:extLst xmlns:a="http://schemas.openxmlformats.org/drawingml/2006/main">
               <a:ext uri="{FF2B5EF4-FFF2-40B4-BE49-F238E27FC236}">
-                <a16:creationId xmlns:a16="http://schemas.microsoft.com/office/drawing/2014/main" id="{7A5928F8-E84F-48CB-A24C-63619C2E2781}"/>
+                <a16:creationId xmlns:a16="http://schemas.microsoft.com/office/drawing/2014/main" id="{DCD64255-BB1A-4B2B-9656-5D17965BE1A7}"/>
               </a:ext>
             </a:extLst>
           </p:cNvPr>
@@ -32733,7 +34543,7 @@
           <p:cNvPr id="12" name="">
             <a:extLst xmlns:a="http://schemas.openxmlformats.org/drawingml/2006/main">
               <a:ext uri="{FF2B5EF4-FFF2-40B4-BE49-F238E27FC236}">
-                <a16:creationId xmlns:a16="http://schemas.microsoft.com/office/drawing/2014/main" id="{7D7ABF37-59A1-47DA-8CB1-6F686FF7921D}"/>
+                <a16:creationId xmlns:a16="http://schemas.microsoft.com/office/drawing/2014/main" id="{93B59AD6-C066-47D0-91F6-BF01D52F1BAC}"/>
               </a:ext>
             </a:extLst>
           </p:cNvPr>
@@ -32766,7 +34576,7 @@
           <p:cNvPr id="13" name="">
             <a:extLst xmlns:a="http://schemas.openxmlformats.org/drawingml/2006/main">
               <a:ext uri="{FF2B5EF4-FFF2-40B4-BE49-F238E27FC236}">
-                <a16:creationId xmlns:a16="http://schemas.microsoft.com/office/drawing/2014/main" id="{37F7760B-DC73-4A3A-B0BC-6892B3939B32}"/>
+                <a16:creationId xmlns:a16="http://schemas.microsoft.com/office/drawing/2014/main" id="{F6830423-1E0A-4D53-8CD3-7BC46B0412D0}"/>
               </a:ext>
             </a:extLst>
           </p:cNvPr>
@@ -32801,7 +34611,7 @@
           <p:cNvPr id="14" name="">
             <a:extLst xmlns:a="http://schemas.openxmlformats.org/drawingml/2006/main">
               <a:ext uri="{FF2B5EF4-FFF2-40B4-BE49-F238E27FC236}">
-                <a16:creationId xmlns:a16="http://schemas.microsoft.com/office/drawing/2014/main" id="{EE11CF5C-FD80-4B87-8F14-0602DC1A8972}"/>
+                <a16:creationId xmlns:a16="http://schemas.microsoft.com/office/drawing/2014/main" id="{64A0E7D3-BA5A-4EEB-8D32-34CDE80369FB}"/>
               </a:ext>
             </a:extLst>
           </p:cNvPr>
@@ -32865,7 +34675,7 @@
           <p:cNvPr id="15" name="">
             <a:extLst xmlns:a="http://schemas.openxmlformats.org/drawingml/2006/main">
               <a:ext uri="{FF2B5EF4-FFF2-40B4-BE49-F238E27FC236}">
-                <a16:creationId xmlns:a16="http://schemas.microsoft.com/office/drawing/2014/main" id="{4D941104-BDB5-48D9-AC38-89B1F0815ADA}"/>
+                <a16:creationId xmlns:a16="http://schemas.microsoft.com/office/drawing/2014/main" id="{7C77C11B-E28B-4D59-BCD0-B2052DCA27C1}"/>
               </a:ext>
             </a:extLst>
           </p:cNvPr>
@@ -32929,7 +34739,7 @@
           <p:cNvPr id="16" name="">
             <a:extLst xmlns:a="http://schemas.openxmlformats.org/drawingml/2006/main">
               <a:ext uri="{FF2B5EF4-FFF2-40B4-BE49-F238E27FC236}">
-                <a16:creationId xmlns:a16="http://schemas.microsoft.com/office/drawing/2014/main" id="{058B850D-0215-4AED-A0A6-380FF5FBB420}"/>
+                <a16:creationId xmlns:a16="http://schemas.microsoft.com/office/drawing/2014/main" id="{41C69729-BF1E-4046-8983-66C5B951ABBA}"/>
               </a:ext>
             </a:extLst>
           </p:cNvPr>
@@ -32962,7 +34772,7 @@
           <p:cNvPr id="17" name="">
             <a:extLst xmlns:a="http://schemas.openxmlformats.org/drawingml/2006/main">
               <a:ext uri="{FF2B5EF4-FFF2-40B4-BE49-F238E27FC236}">
-                <a16:creationId xmlns:a16="http://schemas.microsoft.com/office/drawing/2014/main" id="{4FA47A01-6E38-4231-B069-3C921EFE9A80}"/>
+                <a16:creationId xmlns:a16="http://schemas.microsoft.com/office/drawing/2014/main" id="{3078CBAF-62B6-4C05-948E-F4249FBB1DCD}"/>
               </a:ext>
             </a:extLst>
           </p:cNvPr>
@@ -33026,7 +34836,7 @@
           <p:cNvPr id="18" name="">
             <a:extLst xmlns:a="http://schemas.openxmlformats.org/drawingml/2006/main">
               <a:ext uri="{FF2B5EF4-FFF2-40B4-BE49-F238E27FC236}">
-                <a16:creationId xmlns:a16="http://schemas.microsoft.com/office/drawing/2014/main" id="{527A16BD-D2F1-4224-A320-B2F5B338752E}"/>
+                <a16:creationId xmlns:a16="http://schemas.microsoft.com/office/drawing/2014/main" id="{A812C542-996E-4DF6-91A0-1EEAA370B23C}"/>
               </a:ext>
             </a:extLst>
           </p:cNvPr>
@@ -33157,7 +34967,7 @@
     </p:spTree>
     <p:extLst>
       <p:ext uri="{BB962C8B-B14F-4D97-AF65-F5344CB8AC3E}">
-        <p14:creationId xmlns:p14="http://schemas.microsoft.com/office/powerpoint/2010/main" val="417556487"/>
+        <p14:creationId xmlns:p14="http://schemas.microsoft.com/office/powerpoint/2010/main" val="1254267937"/>
       </p:ext>
     </p:extLst>
   </p:cSld>
@@ -33181,7 +34991,7 @@
           <p:cNvPr id="1" name="">
             <a:extLst xmlns:a="http://schemas.openxmlformats.org/drawingml/2006/main">
               <a:ext uri="{FF2B5EF4-FFF2-40B4-BE49-F238E27FC236}">
-                <a16:creationId xmlns:a16="http://schemas.microsoft.com/office/drawing/2014/main" id="{D344D353-F147-493C-AA46-A86E626ECC04}"/>
+                <a16:creationId xmlns:a16="http://schemas.microsoft.com/office/drawing/2014/main" id="{A0C39740-C6D3-40D6-902C-DF50FD66FA22}"/>
               </a:ext>
             </a:extLst>
           </p:cNvPr>
@@ -33216,7 +35026,7 @@
           <p:cNvPr id="2" name="">
             <a:extLst xmlns:a="http://schemas.openxmlformats.org/drawingml/2006/main">
               <a:ext uri="{FF2B5EF4-FFF2-40B4-BE49-F238E27FC236}">
-                <a16:creationId xmlns:a16="http://schemas.microsoft.com/office/drawing/2014/main" id="{FBDA6E4D-DF40-466F-BF36-1E1E8F4E03CE}"/>
+                <a16:creationId xmlns:a16="http://schemas.microsoft.com/office/drawing/2014/main" id="{AE259014-51EC-4869-B58F-79DDDC57A763}"/>
               </a:ext>
             </a:extLst>
           </p:cNvPr>
@@ -33251,7 +35061,7 @@
           <p:cNvPr id="3" name="">
             <a:extLst xmlns:a="http://schemas.openxmlformats.org/drawingml/2006/main">
               <a:ext uri="{FF2B5EF4-FFF2-40B4-BE49-F238E27FC236}">
-                <a16:creationId xmlns:a16="http://schemas.microsoft.com/office/drawing/2014/main" id="{BE8CDB4D-FC05-4327-AE68-B86107B19B96}"/>
+                <a16:creationId xmlns:a16="http://schemas.microsoft.com/office/drawing/2014/main" id="{7CB68405-8735-4480-9395-4E65C74D708F}"/>
               </a:ext>
             </a:extLst>
           </p:cNvPr>
@@ -33286,7 +35096,7 @@
           <p:cNvPr id="4" name="">
             <a:extLst xmlns:a="http://schemas.openxmlformats.org/drawingml/2006/main">
               <a:ext uri="{FF2B5EF4-FFF2-40B4-BE49-F238E27FC236}">
-                <a16:creationId xmlns:a16="http://schemas.microsoft.com/office/drawing/2014/main" id="{CFA44C21-D658-458B-B354-8DF0633DE2C2}"/>
+                <a16:creationId xmlns:a16="http://schemas.microsoft.com/office/drawing/2014/main" id="{B320BEFC-FDC9-477E-BCFA-AD487447DA7B}"/>
               </a:ext>
             </a:extLst>
           </p:cNvPr>
@@ -33350,7 +35160,7 @@
           <p:cNvPr id="5" name="">
             <a:extLst xmlns:a="http://schemas.openxmlformats.org/drawingml/2006/main">
               <a:ext uri="{FF2B5EF4-FFF2-40B4-BE49-F238E27FC236}">
-                <a16:creationId xmlns:a16="http://schemas.microsoft.com/office/drawing/2014/main" id="{7C4CCB92-67E8-43FC-A014-364AE99C7E55}"/>
+                <a16:creationId xmlns:a16="http://schemas.microsoft.com/office/drawing/2014/main" id="{61AED2ED-61D3-416A-99B7-AEB9D3FCBB96}"/>
               </a:ext>
             </a:extLst>
           </p:cNvPr>
@@ -33414,7 +35224,7 @@
           <p:cNvPr id="6" name="">
             <a:extLst xmlns:a="http://schemas.openxmlformats.org/drawingml/2006/main">
               <a:ext uri="{FF2B5EF4-FFF2-40B4-BE49-F238E27FC236}">
-                <a16:creationId xmlns:a16="http://schemas.microsoft.com/office/drawing/2014/main" id="{C82CAB84-83B0-444E-A70C-2B2CB1134692}"/>
+                <a16:creationId xmlns:a16="http://schemas.microsoft.com/office/drawing/2014/main" id="{78ED22F9-703B-43B6-BF12-90ACDB1DC296}"/>
               </a:ext>
             </a:extLst>
           </p:cNvPr>
@@ -33478,7 +35288,7 @@
           <p:cNvPr id="7" name="">
             <a:extLst xmlns:a="http://schemas.openxmlformats.org/drawingml/2006/main">
               <a:ext uri="{FF2B5EF4-FFF2-40B4-BE49-F238E27FC236}">
-                <a16:creationId xmlns:a16="http://schemas.microsoft.com/office/drawing/2014/main" id="{250ED3EB-39F2-4317-B692-60F63B65959E}"/>
+                <a16:creationId xmlns:a16="http://schemas.microsoft.com/office/drawing/2014/main" id="{CFD6AC06-30AF-4779-96B6-ED19BF275936}"/>
               </a:ext>
             </a:extLst>
           </p:cNvPr>
@@ -33542,7 +35352,7 @@
           <p:cNvPr id="8" name="">
             <a:extLst xmlns:a="http://schemas.openxmlformats.org/drawingml/2006/main">
               <a:ext uri="{FF2B5EF4-FFF2-40B4-BE49-F238E27FC236}">
-                <a16:creationId xmlns:a16="http://schemas.microsoft.com/office/drawing/2014/main" id="{2396945E-046C-4D60-A874-DC9CAF48C8FB}"/>
+                <a16:creationId xmlns:a16="http://schemas.microsoft.com/office/drawing/2014/main" id="{B8DE2613-F933-4843-A76A-6C45D4A0AE73}"/>
               </a:ext>
             </a:extLst>
           </p:cNvPr>
@@ -33575,7 +35385,7 @@
           <p:cNvPr id="9" name="">
             <a:extLst xmlns:a="http://schemas.openxmlformats.org/drawingml/2006/main">
               <a:ext uri="{FF2B5EF4-FFF2-40B4-BE49-F238E27FC236}">
-                <a16:creationId xmlns:a16="http://schemas.microsoft.com/office/drawing/2014/main" id="{774FE862-3BFA-40A9-B5B7-D4501F9BAA84}"/>
+                <a16:creationId xmlns:a16="http://schemas.microsoft.com/office/drawing/2014/main" id="{925E749E-095B-4938-B985-11FA0439ADC9}"/>
               </a:ext>
             </a:extLst>
           </p:cNvPr>
@@ -33610,7 +35420,7 @@
           <p:cNvPr id="10" name="">
             <a:extLst xmlns:a="http://schemas.openxmlformats.org/drawingml/2006/main">
               <a:ext uri="{FF2B5EF4-FFF2-40B4-BE49-F238E27FC236}">
-                <a16:creationId xmlns:a16="http://schemas.microsoft.com/office/drawing/2014/main" id="{BA1EA983-4576-4777-ACC7-ADDA5EDCDB01}"/>
+                <a16:creationId xmlns:a16="http://schemas.microsoft.com/office/drawing/2014/main" id="{0ABE9CE3-B09E-46E1-A751-71B5B9397797}"/>
               </a:ext>
             </a:extLst>
           </p:cNvPr>
@@ -33674,7 +35484,7 @@
           <p:cNvPr id="11" name="">
             <a:extLst xmlns:a="http://schemas.openxmlformats.org/drawingml/2006/main">
               <a:ext uri="{FF2B5EF4-FFF2-40B4-BE49-F238E27FC236}">
-                <a16:creationId xmlns:a16="http://schemas.microsoft.com/office/drawing/2014/main" id="{5C5F5556-1999-4A8C-9DE3-DD3F233E6533}"/>
+                <a16:creationId xmlns:a16="http://schemas.microsoft.com/office/drawing/2014/main" id="{05B1ED28-1A2B-4238-A098-CD6FF4D9BB0D}"/>
               </a:ext>
             </a:extLst>
           </p:cNvPr>
@@ -33738,7 +35548,7 @@
           <p:cNvPr id="12" name="">
             <a:extLst xmlns:a="http://schemas.openxmlformats.org/drawingml/2006/main">
               <a:ext uri="{FF2B5EF4-FFF2-40B4-BE49-F238E27FC236}">
-                <a16:creationId xmlns:a16="http://schemas.microsoft.com/office/drawing/2014/main" id="{229E3D15-C903-420A-8C71-C3521453C005}"/>
+                <a16:creationId xmlns:a16="http://schemas.microsoft.com/office/drawing/2014/main" id="{FDE35809-9BC4-42E7-BE79-29719D18ECD0}"/>
               </a:ext>
             </a:extLst>
           </p:cNvPr>
@@ -33771,7 +35581,7 @@
           <p:cNvPr id="13" name="">
             <a:extLst xmlns:a="http://schemas.openxmlformats.org/drawingml/2006/main">
               <a:ext uri="{FF2B5EF4-FFF2-40B4-BE49-F238E27FC236}">
-                <a16:creationId xmlns:a16="http://schemas.microsoft.com/office/drawing/2014/main" id="{6C4CA07F-F699-4B18-948D-5D7C07A2325C}"/>
+                <a16:creationId xmlns:a16="http://schemas.microsoft.com/office/drawing/2014/main" id="{E9AA5351-0A4E-433D-B881-7622E068DEB9}"/>
               </a:ext>
             </a:extLst>
           </p:cNvPr>
@@ -33806,7 +35616,7 @@
           <p:cNvPr id="14" name="">
             <a:extLst xmlns:a="http://schemas.openxmlformats.org/drawingml/2006/main">
               <a:ext uri="{FF2B5EF4-FFF2-40B4-BE49-F238E27FC236}">
-                <a16:creationId xmlns:a16="http://schemas.microsoft.com/office/drawing/2014/main" id="{98F1FBEA-A13C-4F42-A9D5-75CCAD7A8DD3}"/>
+                <a16:creationId xmlns:a16="http://schemas.microsoft.com/office/drawing/2014/main" id="{7C18C65A-C737-450F-A1F6-C5453D118A95}"/>
               </a:ext>
             </a:extLst>
           </p:cNvPr>
@@ -33870,7 +35680,7 @@
           <p:cNvPr id="15" name="">
             <a:extLst xmlns:a="http://schemas.openxmlformats.org/drawingml/2006/main">
               <a:ext uri="{FF2B5EF4-FFF2-40B4-BE49-F238E27FC236}">
-                <a16:creationId xmlns:a16="http://schemas.microsoft.com/office/drawing/2014/main" id="{AA7630EA-D6E2-476B-882F-289988DA893B}"/>
+                <a16:creationId xmlns:a16="http://schemas.microsoft.com/office/drawing/2014/main" id="{D5530BC7-027F-45F3-A596-2FB1261BB6B4}"/>
               </a:ext>
             </a:extLst>
           </p:cNvPr>
@@ -33934,7 +35744,7 @@
           <p:cNvPr id="16" name="">
             <a:extLst xmlns:a="http://schemas.openxmlformats.org/drawingml/2006/main">
               <a:ext uri="{FF2B5EF4-FFF2-40B4-BE49-F238E27FC236}">
-                <a16:creationId xmlns:a16="http://schemas.microsoft.com/office/drawing/2014/main" id="{F5C61573-1BDB-4373-B664-F89EEA8F64D3}"/>
+                <a16:creationId xmlns:a16="http://schemas.microsoft.com/office/drawing/2014/main" id="{EC31E6CB-6A41-4EDA-8757-B58E239125F4}"/>
               </a:ext>
             </a:extLst>
           </p:cNvPr>
@@ -33967,7 +35777,7 @@
           <p:cNvPr id="17" name="">
             <a:extLst xmlns:a="http://schemas.openxmlformats.org/drawingml/2006/main">
               <a:ext uri="{FF2B5EF4-FFF2-40B4-BE49-F238E27FC236}">
-                <a16:creationId xmlns:a16="http://schemas.microsoft.com/office/drawing/2014/main" id="{85202A76-836C-45D1-9E8A-EEF9F6D7332E}"/>
+                <a16:creationId xmlns:a16="http://schemas.microsoft.com/office/drawing/2014/main" id="{48379844-4C84-4804-A1F3-94E895CCFE32}"/>
               </a:ext>
             </a:extLst>
           </p:cNvPr>
@@ -34002,7 +35812,7 @@
           <p:cNvPr id="18" name="">
             <a:extLst xmlns:a="http://schemas.openxmlformats.org/drawingml/2006/main">
               <a:ext uri="{FF2B5EF4-FFF2-40B4-BE49-F238E27FC236}">
-                <a16:creationId xmlns:a16="http://schemas.microsoft.com/office/drawing/2014/main" id="{885B4441-9AFB-417B-ACA6-2EA072E8173F}"/>
+                <a16:creationId xmlns:a16="http://schemas.microsoft.com/office/drawing/2014/main" id="{BD159C6F-4104-4024-9206-7066A8B168A5}"/>
               </a:ext>
             </a:extLst>
           </p:cNvPr>
@@ -34066,7 +35876,7 @@
           <p:cNvPr id="19" name="">
             <a:extLst xmlns:a="http://schemas.openxmlformats.org/drawingml/2006/main">
               <a:ext uri="{FF2B5EF4-FFF2-40B4-BE49-F238E27FC236}">
-                <a16:creationId xmlns:a16="http://schemas.microsoft.com/office/drawing/2014/main" id="{0F6658EE-B2D8-4CAA-8175-39D4ED94FE99}"/>
+                <a16:creationId xmlns:a16="http://schemas.microsoft.com/office/drawing/2014/main" id="{0B91C58B-27CC-442D-A676-01D2DE7F691A}"/>
               </a:ext>
             </a:extLst>
           </p:cNvPr>
@@ -34128,7 +35938,7 @@
     </p:spTree>
     <p:extLst>
       <p:ext uri="{BB962C8B-B14F-4D97-AF65-F5344CB8AC3E}">
-        <p14:creationId xmlns:p14="http://schemas.microsoft.com/office/powerpoint/2010/main" val="1547028503"/>
+        <p14:creationId xmlns:p14="http://schemas.microsoft.com/office/powerpoint/2010/main" val="2110726162"/>
       </p:ext>
     </p:extLst>
   </p:cSld>
@@ -34152,7 +35962,7 @@
           <p:cNvPr id="1" name="">
             <a:extLst xmlns:a="http://schemas.openxmlformats.org/drawingml/2006/main">
               <a:ext uri="{FF2B5EF4-FFF2-40B4-BE49-F238E27FC236}">
-                <a16:creationId xmlns:a16="http://schemas.microsoft.com/office/drawing/2014/main" id="{6146E592-C120-4B15-AB97-9B88E016C3ED}"/>
+                <a16:creationId xmlns:a16="http://schemas.microsoft.com/office/drawing/2014/main" id="{DE8C813E-3DF1-4156-88C8-892075A22BAB}"/>
               </a:ext>
             </a:extLst>
           </p:cNvPr>
@@ -34187,7 +35997,7 @@
           <p:cNvPr id="2" name="">
             <a:extLst xmlns:a="http://schemas.openxmlformats.org/drawingml/2006/main">
               <a:ext uri="{FF2B5EF4-FFF2-40B4-BE49-F238E27FC236}">
-                <a16:creationId xmlns:a16="http://schemas.microsoft.com/office/drawing/2014/main" id="{AED5EC30-AFAE-4BB3-A4C5-A43FD30249A1}"/>
+                <a16:creationId xmlns:a16="http://schemas.microsoft.com/office/drawing/2014/main" id="{DECBF87C-16DA-439C-A206-505EFB7F894C}"/>
               </a:ext>
             </a:extLst>
           </p:cNvPr>
@@ -34222,7 +36032,7 @@
           <p:cNvPr id="3" name="">
             <a:extLst xmlns:a="http://schemas.openxmlformats.org/drawingml/2006/main">
               <a:ext uri="{FF2B5EF4-FFF2-40B4-BE49-F238E27FC236}">
-                <a16:creationId xmlns:a16="http://schemas.microsoft.com/office/drawing/2014/main" id="{D1566A50-A17A-489B-87B7-200A460EF2CC}"/>
+                <a16:creationId xmlns:a16="http://schemas.microsoft.com/office/drawing/2014/main" id="{4824673A-3262-4969-8E99-391E6E949F01}"/>
               </a:ext>
             </a:extLst>
           </p:cNvPr>
@@ -34257,7 +36067,7 @@
           <p:cNvPr id="4" name="">
             <a:extLst xmlns:a="http://schemas.openxmlformats.org/drawingml/2006/main">
               <a:ext uri="{FF2B5EF4-FFF2-40B4-BE49-F238E27FC236}">
-                <a16:creationId xmlns:a16="http://schemas.microsoft.com/office/drawing/2014/main" id="{3F2F8EB9-8160-4495-8713-41FEAB5EA257}"/>
+                <a16:creationId xmlns:a16="http://schemas.microsoft.com/office/drawing/2014/main" id="{334D853C-B85F-40D9-A9C4-F0CC79C1AF4F}"/>
               </a:ext>
             </a:extLst>
           </p:cNvPr>
@@ -34321,7 +36131,7 @@
           <p:cNvPr id="5" name="">
             <a:extLst xmlns:a="http://schemas.openxmlformats.org/drawingml/2006/main">
               <a:ext uri="{FF2B5EF4-FFF2-40B4-BE49-F238E27FC236}">
-                <a16:creationId xmlns:a16="http://schemas.microsoft.com/office/drawing/2014/main" id="{C598DAA2-B711-46CA-8297-D626DCB79042}"/>
+                <a16:creationId xmlns:a16="http://schemas.microsoft.com/office/drawing/2014/main" id="{A3F50CF7-E141-4BD2-ADB6-B4BECECA7D68}"/>
               </a:ext>
             </a:extLst>
           </p:cNvPr>
@@ -34385,7 +36195,7 @@
           <p:cNvPr id="6" name="">
             <a:extLst xmlns:a="http://schemas.openxmlformats.org/drawingml/2006/main">
               <a:ext uri="{FF2B5EF4-FFF2-40B4-BE49-F238E27FC236}">
-                <a16:creationId xmlns:a16="http://schemas.microsoft.com/office/drawing/2014/main" id="{C82A4F64-6EAD-463E-8E78-B3C8D6223B52}"/>
+                <a16:creationId xmlns:a16="http://schemas.microsoft.com/office/drawing/2014/main" id="{56D651EB-AF7A-47ED-82BA-2D96C877FCEE}"/>
               </a:ext>
             </a:extLst>
           </p:cNvPr>
@@ -34449,7 +36259,7 @@
           <p:cNvPr id="7" name="">
             <a:extLst xmlns:a="http://schemas.openxmlformats.org/drawingml/2006/main">
               <a:ext uri="{FF2B5EF4-FFF2-40B4-BE49-F238E27FC236}">
-                <a16:creationId xmlns:a16="http://schemas.microsoft.com/office/drawing/2014/main" id="{739D2851-3935-4DA8-AC39-AEAD592117E6}"/>
+                <a16:creationId xmlns:a16="http://schemas.microsoft.com/office/drawing/2014/main" id="{40EE0DE4-16BE-4646-BDC8-4CC976683879}"/>
               </a:ext>
             </a:extLst>
           </p:cNvPr>
@@ -34513,7 +36323,7 @@
           <p:cNvPr id="8" name="">
             <a:extLst xmlns:a="http://schemas.openxmlformats.org/drawingml/2006/main">
               <a:ext uri="{FF2B5EF4-FFF2-40B4-BE49-F238E27FC236}">
-                <a16:creationId xmlns:a16="http://schemas.microsoft.com/office/drawing/2014/main" id="{7B8F3BE9-110B-4DDC-9101-897968A2D50B}"/>
+                <a16:creationId xmlns:a16="http://schemas.microsoft.com/office/drawing/2014/main" id="{BBA30A3A-3E33-491E-8152-A8BB2519AAEE}"/>
               </a:ext>
             </a:extLst>
           </p:cNvPr>
@@ -34546,7 +36356,7 @@
           <p:cNvPr id="9" name="">
             <a:extLst xmlns:a="http://schemas.openxmlformats.org/drawingml/2006/main">
               <a:ext uri="{FF2B5EF4-FFF2-40B4-BE49-F238E27FC236}">
-                <a16:creationId xmlns:a16="http://schemas.microsoft.com/office/drawing/2014/main" id="{22BC5ECC-6BF1-4192-8DDC-57957DE3408C}"/>
+                <a16:creationId xmlns:a16="http://schemas.microsoft.com/office/drawing/2014/main" id="{14C57114-522F-48B2-8B3D-B95721F0501F}"/>
               </a:ext>
             </a:extLst>
           </p:cNvPr>
@@ -34581,7 +36391,7 @@
           <p:cNvPr id="10" name="">
             <a:extLst xmlns:a="http://schemas.openxmlformats.org/drawingml/2006/main">
               <a:ext uri="{FF2B5EF4-FFF2-40B4-BE49-F238E27FC236}">
-                <a16:creationId xmlns:a16="http://schemas.microsoft.com/office/drawing/2014/main" id="{38834EA9-E7EC-49C8-8576-0C5580CA3D0A}"/>
+                <a16:creationId xmlns:a16="http://schemas.microsoft.com/office/drawing/2014/main" id="{BD711AE0-9885-469B-85B2-4BC14B7C2F1C}"/>
               </a:ext>
             </a:extLst>
           </p:cNvPr>
@@ -34645,7 +36455,7 @@
           <p:cNvPr id="11" name="">
             <a:extLst xmlns:a="http://schemas.openxmlformats.org/drawingml/2006/main">
               <a:ext uri="{FF2B5EF4-FFF2-40B4-BE49-F238E27FC236}">
-                <a16:creationId xmlns:a16="http://schemas.microsoft.com/office/drawing/2014/main" id="{0A5F4F7C-CE67-44DF-AF2B-834E6106AFBB}"/>
+                <a16:creationId xmlns:a16="http://schemas.microsoft.com/office/drawing/2014/main" id="{B9DF4722-F956-4E50-ADE2-C7934261E5DB}"/>
               </a:ext>
             </a:extLst>
           </p:cNvPr>
@@ -34709,7 +36519,7 @@
           <p:cNvPr id="12" name="">
             <a:extLst xmlns:a="http://schemas.openxmlformats.org/drawingml/2006/main">
               <a:ext uri="{FF2B5EF4-FFF2-40B4-BE49-F238E27FC236}">
-                <a16:creationId xmlns:a16="http://schemas.microsoft.com/office/drawing/2014/main" id="{F06D24A9-04AC-499E-A353-B68D2A4DDD7C}"/>
+                <a16:creationId xmlns:a16="http://schemas.microsoft.com/office/drawing/2014/main" id="{E53C9417-D917-48B3-AE72-4911B166FD51}"/>
               </a:ext>
             </a:extLst>
           </p:cNvPr>
@@ -34742,7 +36552,7 @@
           <p:cNvPr id="13" name="">
             <a:extLst xmlns:a="http://schemas.openxmlformats.org/drawingml/2006/main">
               <a:ext uri="{FF2B5EF4-FFF2-40B4-BE49-F238E27FC236}">
-                <a16:creationId xmlns:a16="http://schemas.microsoft.com/office/drawing/2014/main" id="{605073CB-60F4-4C1D-BB30-0DB6F8E5EF55}"/>
+                <a16:creationId xmlns:a16="http://schemas.microsoft.com/office/drawing/2014/main" id="{342C18C4-E008-45C3-8B76-F5C303C21519}"/>
               </a:ext>
             </a:extLst>
           </p:cNvPr>
@@ -34777,7 +36587,7 @@
           <p:cNvPr id="14" name="">
             <a:extLst xmlns:a="http://schemas.openxmlformats.org/drawingml/2006/main">
               <a:ext uri="{FF2B5EF4-FFF2-40B4-BE49-F238E27FC236}">
-                <a16:creationId xmlns:a16="http://schemas.microsoft.com/office/drawing/2014/main" id="{31265DC5-E5A0-4D8E-8BD3-6C2612A54B48}"/>
+                <a16:creationId xmlns:a16="http://schemas.microsoft.com/office/drawing/2014/main" id="{FD3DD69A-9CB0-4BDF-9E14-7DF4AFFB5F35}"/>
               </a:ext>
             </a:extLst>
           </p:cNvPr>
@@ -34841,7 +36651,7 @@
           <p:cNvPr id="15" name="">
             <a:extLst xmlns:a="http://schemas.openxmlformats.org/drawingml/2006/main">
               <a:ext uri="{FF2B5EF4-FFF2-40B4-BE49-F238E27FC236}">
-                <a16:creationId xmlns:a16="http://schemas.microsoft.com/office/drawing/2014/main" id="{7362CB71-DB28-4E73-831D-830799788370}"/>
+                <a16:creationId xmlns:a16="http://schemas.microsoft.com/office/drawing/2014/main" id="{910A4C82-7CBD-4214-83FF-8918F0FC932C}"/>
               </a:ext>
             </a:extLst>
           </p:cNvPr>
@@ -34905,7 +36715,7 @@
           <p:cNvPr id="16" name="">
             <a:extLst xmlns:a="http://schemas.openxmlformats.org/drawingml/2006/main">
               <a:ext uri="{FF2B5EF4-FFF2-40B4-BE49-F238E27FC236}">
-                <a16:creationId xmlns:a16="http://schemas.microsoft.com/office/drawing/2014/main" id="{C6D06F32-5174-47E5-8CB9-77A446497C2E}"/>
+                <a16:creationId xmlns:a16="http://schemas.microsoft.com/office/drawing/2014/main" id="{250D6A4A-D41B-40B6-B8C8-2F08F99240F8}"/>
               </a:ext>
             </a:extLst>
           </p:cNvPr>
@@ -34938,7 +36748,7 @@
           <p:cNvPr id="17" name="">
             <a:extLst xmlns:a="http://schemas.openxmlformats.org/drawingml/2006/main">
               <a:ext uri="{FF2B5EF4-FFF2-40B4-BE49-F238E27FC236}">
-                <a16:creationId xmlns:a16="http://schemas.microsoft.com/office/drawing/2014/main" id="{34BBEBED-7529-44E6-96F2-8A065686CB87}"/>
+                <a16:creationId xmlns:a16="http://schemas.microsoft.com/office/drawing/2014/main" id="{6F97E0B1-6367-4F75-BFB6-5EAAFE91E205}"/>
               </a:ext>
             </a:extLst>
           </p:cNvPr>
@@ -34973,7 +36783,7 @@
           <p:cNvPr id="18" name="">
             <a:extLst xmlns:a="http://schemas.openxmlformats.org/drawingml/2006/main">
               <a:ext uri="{FF2B5EF4-FFF2-40B4-BE49-F238E27FC236}">
-                <a16:creationId xmlns:a16="http://schemas.microsoft.com/office/drawing/2014/main" id="{DB1C3893-03F0-4F3F-A302-AAFA76E9A629}"/>
+                <a16:creationId xmlns:a16="http://schemas.microsoft.com/office/drawing/2014/main" id="{699DA0A2-4941-4866-86F8-52C5B368185E}"/>
               </a:ext>
             </a:extLst>
           </p:cNvPr>
@@ -35037,7 +36847,7 @@
           <p:cNvPr id="19" name="">
             <a:extLst xmlns:a="http://schemas.openxmlformats.org/drawingml/2006/main">
               <a:ext uri="{FF2B5EF4-FFF2-40B4-BE49-F238E27FC236}">
-                <a16:creationId xmlns:a16="http://schemas.microsoft.com/office/drawing/2014/main" id="{794382A2-D466-44BC-A54F-1DC756150CD7}"/>
+                <a16:creationId xmlns:a16="http://schemas.microsoft.com/office/drawing/2014/main" id="{09D6CE67-691F-4071-8902-BA5017E09B56}"/>
               </a:ext>
             </a:extLst>
           </p:cNvPr>
@@ -35099,7 +36909,7 @@
     </p:spTree>
     <p:extLst>
       <p:ext uri="{BB962C8B-B14F-4D97-AF65-F5344CB8AC3E}">
-        <p14:creationId xmlns:p14="http://schemas.microsoft.com/office/powerpoint/2010/main" val="797737686"/>
+        <p14:creationId xmlns:p14="http://schemas.microsoft.com/office/powerpoint/2010/main" val="2009985408"/>
       </p:ext>
     </p:extLst>
   </p:cSld>
